--- a/slides/C24_Regressor_Softmax.pptx
+++ b/slides/C24_Regressor_Softmax.pptx
@@ -5,15 +5,19 @@
     <p:sldMasterId id="2147483648" r:id="rId1"/>
   </p:sldMasterIdLst>
   <p:notesMasterIdLst>
-    <p:notesMasterId r:id="rId5"/>
+    <p:notesMasterId r:id="rId9"/>
   </p:notesMasterIdLst>
   <p:handoutMasterIdLst>
-    <p:handoutMasterId r:id="rId6"/>
+    <p:handoutMasterId r:id="rId10"/>
   </p:handoutMasterIdLst>
   <p:sldIdLst>
     <p:sldId id="256" r:id="rId2"/>
-    <p:sldId id="293" r:id="rId3"/>
-    <p:sldId id="306" r:id="rId4"/>
+    <p:sldId id="308" r:id="rId3"/>
+    <p:sldId id="309" r:id="rId4"/>
+    <p:sldId id="310" r:id="rId5"/>
+    <p:sldId id="307" r:id="rId6"/>
+    <p:sldId id="293" r:id="rId7"/>
+    <p:sldId id="306" r:id="rId8"/>
   </p:sldIdLst>
   <p:sldSz cx="12192000" cy="6858000"/>
   <p:notesSz cx="7315200" cy="9601200"/>
@@ -277,7 +281,7 @@
           <a:p>
             <a:fld id="{144F1436-6906-4D93-B7A2-786C327BFA14}" type="datetimeFigureOut">
               <a:rPr lang="nl-BE" smtClean="0"/>
-              <a:t>22/02/2026</a:t>
+              <a:t>25/02/2026</a:t>
             </a:fld>
             <a:endParaRPr lang="nl-BE"/>
           </a:p>
@@ -343,7 +347,7 @@
           <a:p>
             <a:fld id="{F7E56D9B-79AD-444A-AFED-DEC23408F8B4}" type="slidenum">
               <a:rPr lang="nl-BE" smtClean="0"/>
-              <a:t>‹nº›</a:t>
+              <a:t>‹#›</a:t>
             </a:fld>
             <a:endParaRPr lang="nl-BE"/>
           </a:p>
@@ -442,7 +446,7 @@
           <a:p>
             <a:fld id="{AA8CD09E-2914-4F47-B6C1-51B2C31814C9}" type="datetimeFigureOut">
               <a:rPr lang="pt-BR" smtClean="0"/>
-              <a:t>22/02/2026</a:t>
+              <a:t>25/02/2026</a:t>
             </a:fld>
             <a:endParaRPr lang="pt-BR"/>
           </a:p>
@@ -600,7 +604,7 @@
           <a:p>
             <a:fld id="{6FC8D850-966F-45A6-8DE7-15B891E7D40D}" type="slidenum">
               <a:rPr lang="pt-BR" smtClean="0"/>
-              <a:t>‹nº›</a:t>
+              <a:t>‹#›</a:t>
             </a:fld>
             <a:endParaRPr lang="pt-BR"/>
           </a:p>
@@ -815,7 +819,7 @@
           <p:cNvPr id="2" name="Título 1">
             <a:extLst>
               <a:ext uri="{FF2B5EF4-FFF2-40B4-BE49-F238E27FC236}">
-                <a16:creationId xmlns:a16="http://schemas.microsoft.com/office/drawing/2014/main" xmlns="" id="{1DB9B4FF-B06E-403C-A326-BDC64D8FF94E}"/>
+                <a16:creationId xmlns:a16="http://schemas.microsoft.com/office/drawing/2014/main" id="{1DB9B4FF-B06E-403C-A326-BDC64D8FF94E}"/>
               </a:ext>
             </a:extLst>
           </p:cNvPr>
@@ -852,7 +856,7 @@
           <p:cNvPr id="3" name="Subtítulo 2">
             <a:extLst>
               <a:ext uri="{FF2B5EF4-FFF2-40B4-BE49-F238E27FC236}">
-                <a16:creationId xmlns:a16="http://schemas.microsoft.com/office/drawing/2014/main" xmlns="" id="{247BDFCE-746E-45BF-A319-4733D58D1632}"/>
+                <a16:creationId xmlns:a16="http://schemas.microsoft.com/office/drawing/2014/main" id="{247BDFCE-746E-45BF-A319-4733D58D1632}"/>
               </a:ext>
             </a:extLst>
           </p:cNvPr>
@@ -922,7 +926,7 @@
           <p:cNvPr id="4" name="Espaço Reservado para Data 3">
             <a:extLst>
               <a:ext uri="{FF2B5EF4-FFF2-40B4-BE49-F238E27FC236}">
-                <a16:creationId xmlns:a16="http://schemas.microsoft.com/office/drawing/2014/main" xmlns="" id="{9EDE2778-5372-4104-B96D-968184DA8288}"/>
+                <a16:creationId xmlns:a16="http://schemas.microsoft.com/office/drawing/2014/main" id="{9EDE2778-5372-4104-B96D-968184DA8288}"/>
               </a:ext>
             </a:extLst>
           </p:cNvPr>
@@ -940,7 +944,7 @@
           <a:p>
             <a:fld id="{63289F7E-B80B-496E-81B4-D396C37C9454}" type="datetimeFigureOut">
               <a:rPr lang="pt-BR" smtClean="0"/>
-              <a:t>22/02/2026</a:t>
+              <a:t>25/02/2026</a:t>
             </a:fld>
             <a:endParaRPr lang="pt-BR"/>
           </a:p>
@@ -951,7 +955,7 @@
           <p:cNvPr id="5" name="Espaço Reservado para Rodapé 4">
             <a:extLst>
               <a:ext uri="{FF2B5EF4-FFF2-40B4-BE49-F238E27FC236}">
-                <a16:creationId xmlns:a16="http://schemas.microsoft.com/office/drawing/2014/main" xmlns="" id="{C1DD0F41-C861-4051-988D-3024A37A4B93}"/>
+                <a16:creationId xmlns:a16="http://schemas.microsoft.com/office/drawing/2014/main" id="{C1DD0F41-C861-4051-988D-3024A37A4B93}"/>
               </a:ext>
             </a:extLst>
           </p:cNvPr>
@@ -976,7 +980,7 @@
           <p:cNvPr id="6" name="Espaço Reservado para Número de Slide 5">
             <a:extLst>
               <a:ext uri="{FF2B5EF4-FFF2-40B4-BE49-F238E27FC236}">
-                <a16:creationId xmlns:a16="http://schemas.microsoft.com/office/drawing/2014/main" xmlns="" id="{07E5967E-D980-431A-A5DB-3F0C5030A81E}"/>
+                <a16:creationId xmlns:a16="http://schemas.microsoft.com/office/drawing/2014/main" id="{07E5967E-D980-431A-A5DB-3F0C5030A81E}"/>
               </a:ext>
             </a:extLst>
           </p:cNvPr>
@@ -994,7 +998,7 @@
           <a:p>
             <a:fld id="{1A7E88B7-70CE-4035-AE73-13FA6FB985D4}" type="slidenum">
               <a:rPr lang="pt-BR" smtClean="0"/>
-              <a:t>‹nº›</a:t>
+              <a:t>‹#›</a:t>
             </a:fld>
             <a:endParaRPr lang="pt-BR"/>
           </a:p>
@@ -1035,7 +1039,7 @@
           <p:cNvPr id="2" name="Título 1">
             <a:extLst>
               <a:ext uri="{FF2B5EF4-FFF2-40B4-BE49-F238E27FC236}">
-                <a16:creationId xmlns:a16="http://schemas.microsoft.com/office/drawing/2014/main" xmlns="" id="{9036C49F-3E68-4175-81BA-3C3FEE44308A}"/>
+                <a16:creationId xmlns:a16="http://schemas.microsoft.com/office/drawing/2014/main" id="{9036C49F-3E68-4175-81BA-3C3FEE44308A}"/>
               </a:ext>
             </a:extLst>
           </p:cNvPr>
@@ -1063,7 +1067,7 @@
           <p:cNvPr id="3" name="Espaço Reservado para Texto Vertical 2">
             <a:extLst>
               <a:ext uri="{FF2B5EF4-FFF2-40B4-BE49-F238E27FC236}">
-                <a16:creationId xmlns:a16="http://schemas.microsoft.com/office/drawing/2014/main" xmlns="" id="{426FA736-3DD3-4D4E-B57B-BBE1D8F7D424}"/>
+                <a16:creationId xmlns:a16="http://schemas.microsoft.com/office/drawing/2014/main" id="{426FA736-3DD3-4D4E-B57B-BBE1D8F7D424}"/>
               </a:ext>
             </a:extLst>
           </p:cNvPr>
@@ -1120,7 +1124,7 @@
           <p:cNvPr id="4" name="Espaço Reservado para Data 3">
             <a:extLst>
               <a:ext uri="{FF2B5EF4-FFF2-40B4-BE49-F238E27FC236}">
-                <a16:creationId xmlns:a16="http://schemas.microsoft.com/office/drawing/2014/main" xmlns="" id="{99E8855C-D8FD-48F6-B14E-861E0DE4D915}"/>
+                <a16:creationId xmlns:a16="http://schemas.microsoft.com/office/drawing/2014/main" id="{99E8855C-D8FD-48F6-B14E-861E0DE4D915}"/>
               </a:ext>
             </a:extLst>
           </p:cNvPr>
@@ -1138,7 +1142,7 @@
           <a:p>
             <a:fld id="{63289F7E-B80B-496E-81B4-D396C37C9454}" type="datetimeFigureOut">
               <a:rPr lang="pt-BR" smtClean="0"/>
-              <a:t>22/02/2026</a:t>
+              <a:t>25/02/2026</a:t>
             </a:fld>
             <a:endParaRPr lang="pt-BR"/>
           </a:p>
@@ -1149,7 +1153,7 @@
           <p:cNvPr id="5" name="Espaço Reservado para Rodapé 4">
             <a:extLst>
               <a:ext uri="{FF2B5EF4-FFF2-40B4-BE49-F238E27FC236}">
-                <a16:creationId xmlns:a16="http://schemas.microsoft.com/office/drawing/2014/main" xmlns="" id="{97C0BB88-2F21-42A5-ACFF-83DA47F2D340}"/>
+                <a16:creationId xmlns:a16="http://schemas.microsoft.com/office/drawing/2014/main" id="{97C0BB88-2F21-42A5-ACFF-83DA47F2D340}"/>
               </a:ext>
             </a:extLst>
           </p:cNvPr>
@@ -1174,7 +1178,7 @@
           <p:cNvPr id="6" name="Espaço Reservado para Número de Slide 5">
             <a:extLst>
               <a:ext uri="{FF2B5EF4-FFF2-40B4-BE49-F238E27FC236}">
-                <a16:creationId xmlns:a16="http://schemas.microsoft.com/office/drawing/2014/main" xmlns="" id="{6CB462B3-1F22-4C05-B4B8-7A279FB7D5E9}"/>
+                <a16:creationId xmlns:a16="http://schemas.microsoft.com/office/drawing/2014/main" id="{6CB462B3-1F22-4C05-B4B8-7A279FB7D5E9}"/>
               </a:ext>
             </a:extLst>
           </p:cNvPr>
@@ -1192,7 +1196,7 @@
           <a:p>
             <a:fld id="{1A7E88B7-70CE-4035-AE73-13FA6FB985D4}" type="slidenum">
               <a:rPr lang="pt-BR" smtClean="0"/>
-              <a:t>‹nº›</a:t>
+              <a:t>‹#›</a:t>
             </a:fld>
             <a:endParaRPr lang="pt-BR"/>
           </a:p>
@@ -1233,7 +1237,7 @@
           <p:cNvPr id="2" name="Título Vertical 1">
             <a:extLst>
               <a:ext uri="{FF2B5EF4-FFF2-40B4-BE49-F238E27FC236}">
-                <a16:creationId xmlns:a16="http://schemas.microsoft.com/office/drawing/2014/main" xmlns="" id="{EAEAB728-701C-4207-A9D5-23FF45C60502}"/>
+                <a16:creationId xmlns:a16="http://schemas.microsoft.com/office/drawing/2014/main" id="{EAEAB728-701C-4207-A9D5-23FF45C60502}"/>
               </a:ext>
             </a:extLst>
           </p:cNvPr>
@@ -1266,7 +1270,7 @@
           <p:cNvPr id="3" name="Espaço Reservado para Texto Vertical 2">
             <a:extLst>
               <a:ext uri="{FF2B5EF4-FFF2-40B4-BE49-F238E27FC236}">
-                <a16:creationId xmlns:a16="http://schemas.microsoft.com/office/drawing/2014/main" xmlns="" id="{BA8C8CCF-7823-480A-9A19-0F664DD17E3B}"/>
+                <a16:creationId xmlns:a16="http://schemas.microsoft.com/office/drawing/2014/main" id="{BA8C8CCF-7823-480A-9A19-0F664DD17E3B}"/>
               </a:ext>
             </a:extLst>
           </p:cNvPr>
@@ -1328,7 +1332,7 @@
           <p:cNvPr id="4" name="Espaço Reservado para Data 3">
             <a:extLst>
               <a:ext uri="{FF2B5EF4-FFF2-40B4-BE49-F238E27FC236}">
-                <a16:creationId xmlns:a16="http://schemas.microsoft.com/office/drawing/2014/main" xmlns="" id="{721D5734-7B1F-425D-942F-6EB73344027C}"/>
+                <a16:creationId xmlns:a16="http://schemas.microsoft.com/office/drawing/2014/main" id="{721D5734-7B1F-425D-942F-6EB73344027C}"/>
               </a:ext>
             </a:extLst>
           </p:cNvPr>
@@ -1346,7 +1350,7 @@
           <a:p>
             <a:fld id="{63289F7E-B80B-496E-81B4-D396C37C9454}" type="datetimeFigureOut">
               <a:rPr lang="pt-BR" smtClean="0"/>
-              <a:t>22/02/2026</a:t>
+              <a:t>25/02/2026</a:t>
             </a:fld>
             <a:endParaRPr lang="pt-BR"/>
           </a:p>
@@ -1357,7 +1361,7 @@
           <p:cNvPr id="5" name="Espaço Reservado para Rodapé 4">
             <a:extLst>
               <a:ext uri="{FF2B5EF4-FFF2-40B4-BE49-F238E27FC236}">
-                <a16:creationId xmlns:a16="http://schemas.microsoft.com/office/drawing/2014/main" xmlns="" id="{1E1AAEAC-F08D-45FE-89EC-B1B349A868C9}"/>
+                <a16:creationId xmlns:a16="http://schemas.microsoft.com/office/drawing/2014/main" id="{1E1AAEAC-F08D-45FE-89EC-B1B349A868C9}"/>
               </a:ext>
             </a:extLst>
           </p:cNvPr>
@@ -1382,7 +1386,7 @@
           <p:cNvPr id="6" name="Espaço Reservado para Número de Slide 5">
             <a:extLst>
               <a:ext uri="{FF2B5EF4-FFF2-40B4-BE49-F238E27FC236}">
-                <a16:creationId xmlns:a16="http://schemas.microsoft.com/office/drawing/2014/main" xmlns="" id="{BAA44493-9911-47B2-87A6-C2141A972BC8}"/>
+                <a16:creationId xmlns:a16="http://schemas.microsoft.com/office/drawing/2014/main" id="{BAA44493-9911-47B2-87A6-C2141A972BC8}"/>
               </a:ext>
             </a:extLst>
           </p:cNvPr>
@@ -1400,7 +1404,7 @@
           <a:p>
             <a:fld id="{1A7E88B7-70CE-4035-AE73-13FA6FB985D4}" type="slidenum">
               <a:rPr lang="pt-BR" smtClean="0"/>
-              <a:t>‹nº›</a:t>
+              <a:t>‹#›</a:t>
             </a:fld>
             <a:endParaRPr lang="pt-BR"/>
           </a:p>
@@ -1441,7 +1445,7 @@
           <p:cNvPr id="2" name="Título 1">
             <a:extLst>
               <a:ext uri="{FF2B5EF4-FFF2-40B4-BE49-F238E27FC236}">
-                <a16:creationId xmlns:a16="http://schemas.microsoft.com/office/drawing/2014/main" xmlns="" id="{71BD44A5-8F21-4626-A01D-48A1C874B1D5}"/>
+                <a16:creationId xmlns:a16="http://schemas.microsoft.com/office/drawing/2014/main" id="{71BD44A5-8F21-4626-A01D-48A1C874B1D5}"/>
               </a:ext>
             </a:extLst>
           </p:cNvPr>
@@ -1469,7 +1473,7 @@
           <p:cNvPr id="3" name="Espaço Reservado para Conteúdo 2">
             <a:extLst>
               <a:ext uri="{FF2B5EF4-FFF2-40B4-BE49-F238E27FC236}">
-                <a16:creationId xmlns:a16="http://schemas.microsoft.com/office/drawing/2014/main" xmlns="" id="{B79E8085-65A9-48AA-951D-71D978BFF4ED}"/>
+                <a16:creationId xmlns:a16="http://schemas.microsoft.com/office/drawing/2014/main" id="{B79E8085-65A9-48AA-951D-71D978BFF4ED}"/>
               </a:ext>
             </a:extLst>
           </p:cNvPr>
@@ -1526,7 +1530,7 @@
           <p:cNvPr id="4" name="Espaço Reservado para Data 3">
             <a:extLst>
               <a:ext uri="{FF2B5EF4-FFF2-40B4-BE49-F238E27FC236}">
-                <a16:creationId xmlns:a16="http://schemas.microsoft.com/office/drawing/2014/main" xmlns="" id="{F05BE1AF-51EA-425D-B188-DE7BD675009F}"/>
+                <a16:creationId xmlns:a16="http://schemas.microsoft.com/office/drawing/2014/main" id="{F05BE1AF-51EA-425D-B188-DE7BD675009F}"/>
               </a:ext>
             </a:extLst>
           </p:cNvPr>
@@ -1544,7 +1548,7 @@
           <a:p>
             <a:fld id="{63289F7E-B80B-496E-81B4-D396C37C9454}" type="datetimeFigureOut">
               <a:rPr lang="pt-BR" smtClean="0"/>
-              <a:t>22/02/2026</a:t>
+              <a:t>25/02/2026</a:t>
             </a:fld>
             <a:endParaRPr lang="pt-BR"/>
           </a:p>
@@ -1555,7 +1559,7 @@
           <p:cNvPr id="5" name="Espaço Reservado para Rodapé 4">
             <a:extLst>
               <a:ext uri="{FF2B5EF4-FFF2-40B4-BE49-F238E27FC236}">
-                <a16:creationId xmlns:a16="http://schemas.microsoft.com/office/drawing/2014/main" xmlns="" id="{121BE632-29CF-4CB9-B365-C9EF38F89BE6}"/>
+                <a16:creationId xmlns:a16="http://schemas.microsoft.com/office/drawing/2014/main" id="{121BE632-29CF-4CB9-B365-C9EF38F89BE6}"/>
               </a:ext>
             </a:extLst>
           </p:cNvPr>
@@ -1580,7 +1584,7 @@
           <p:cNvPr id="6" name="Espaço Reservado para Número de Slide 5">
             <a:extLst>
               <a:ext uri="{FF2B5EF4-FFF2-40B4-BE49-F238E27FC236}">
-                <a16:creationId xmlns:a16="http://schemas.microsoft.com/office/drawing/2014/main" xmlns="" id="{60CF3DD1-9AEC-4A57-B461-4E4DD86FAC18}"/>
+                <a16:creationId xmlns:a16="http://schemas.microsoft.com/office/drawing/2014/main" id="{60CF3DD1-9AEC-4A57-B461-4E4DD86FAC18}"/>
               </a:ext>
             </a:extLst>
           </p:cNvPr>
@@ -1598,7 +1602,7 @@
           <a:p>
             <a:fld id="{1A7E88B7-70CE-4035-AE73-13FA6FB985D4}" type="slidenum">
               <a:rPr lang="pt-BR" smtClean="0"/>
-              <a:t>‹nº›</a:t>
+              <a:t>‹#›</a:t>
             </a:fld>
             <a:endParaRPr lang="pt-BR"/>
           </a:p>
@@ -1639,7 +1643,7 @@
           <p:cNvPr id="2" name="Título 1">
             <a:extLst>
               <a:ext uri="{FF2B5EF4-FFF2-40B4-BE49-F238E27FC236}">
-                <a16:creationId xmlns:a16="http://schemas.microsoft.com/office/drawing/2014/main" xmlns="" id="{34AB2FF0-A4D7-4E28-991D-FF26140D5988}"/>
+                <a16:creationId xmlns:a16="http://schemas.microsoft.com/office/drawing/2014/main" id="{34AB2FF0-A4D7-4E28-991D-FF26140D5988}"/>
               </a:ext>
             </a:extLst>
           </p:cNvPr>
@@ -1676,7 +1680,7 @@
           <p:cNvPr id="3" name="Espaço Reservado para Texto 2">
             <a:extLst>
               <a:ext uri="{FF2B5EF4-FFF2-40B4-BE49-F238E27FC236}">
-                <a16:creationId xmlns:a16="http://schemas.microsoft.com/office/drawing/2014/main" xmlns="" id="{E2AC45B0-4145-40DB-8E61-105461170604}"/>
+                <a16:creationId xmlns:a16="http://schemas.microsoft.com/office/drawing/2014/main" id="{E2AC45B0-4145-40DB-8E61-105461170604}"/>
               </a:ext>
             </a:extLst>
           </p:cNvPr>
@@ -1801,7 +1805,7 @@
           <p:cNvPr id="4" name="Espaço Reservado para Data 3">
             <a:extLst>
               <a:ext uri="{FF2B5EF4-FFF2-40B4-BE49-F238E27FC236}">
-                <a16:creationId xmlns:a16="http://schemas.microsoft.com/office/drawing/2014/main" xmlns="" id="{50F1D3FB-740A-4EBA-A309-2CE71D12ECFB}"/>
+                <a16:creationId xmlns:a16="http://schemas.microsoft.com/office/drawing/2014/main" id="{50F1D3FB-740A-4EBA-A309-2CE71D12ECFB}"/>
               </a:ext>
             </a:extLst>
           </p:cNvPr>
@@ -1819,7 +1823,7 @@
           <a:p>
             <a:fld id="{63289F7E-B80B-496E-81B4-D396C37C9454}" type="datetimeFigureOut">
               <a:rPr lang="pt-BR" smtClean="0"/>
-              <a:t>22/02/2026</a:t>
+              <a:t>25/02/2026</a:t>
             </a:fld>
             <a:endParaRPr lang="pt-BR"/>
           </a:p>
@@ -1830,7 +1834,7 @@
           <p:cNvPr id="5" name="Espaço Reservado para Rodapé 4">
             <a:extLst>
               <a:ext uri="{FF2B5EF4-FFF2-40B4-BE49-F238E27FC236}">
-                <a16:creationId xmlns:a16="http://schemas.microsoft.com/office/drawing/2014/main" xmlns="" id="{BDCAB18F-8715-4465-A940-F9C193A2ACE9}"/>
+                <a16:creationId xmlns:a16="http://schemas.microsoft.com/office/drawing/2014/main" id="{BDCAB18F-8715-4465-A940-F9C193A2ACE9}"/>
               </a:ext>
             </a:extLst>
           </p:cNvPr>
@@ -1855,7 +1859,7 @@
           <p:cNvPr id="6" name="Espaço Reservado para Número de Slide 5">
             <a:extLst>
               <a:ext uri="{FF2B5EF4-FFF2-40B4-BE49-F238E27FC236}">
-                <a16:creationId xmlns:a16="http://schemas.microsoft.com/office/drawing/2014/main" xmlns="" id="{353466C6-8248-429F-8056-FF040BF509EB}"/>
+                <a16:creationId xmlns:a16="http://schemas.microsoft.com/office/drawing/2014/main" id="{353466C6-8248-429F-8056-FF040BF509EB}"/>
               </a:ext>
             </a:extLst>
           </p:cNvPr>
@@ -1873,7 +1877,7 @@
           <a:p>
             <a:fld id="{1A7E88B7-70CE-4035-AE73-13FA6FB985D4}" type="slidenum">
               <a:rPr lang="pt-BR" smtClean="0"/>
-              <a:t>‹nº›</a:t>
+              <a:t>‹#›</a:t>
             </a:fld>
             <a:endParaRPr lang="pt-BR"/>
           </a:p>
@@ -1914,7 +1918,7 @@
           <p:cNvPr id="2" name="Título 1">
             <a:extLst>
               <a:ext uri="{FF2B5EF4-FFF2-40B4-BE49-F238E27FC236}">
-                <a16:creationId xmlns:a16="http://schemas.microsoft.com/office/drawing/2014/main" xmlns="" id="{BC7BB9F0-F14B-4A91-B2B7-35BC47FE4DE7}"/>
+                <a16:creationId xmlns:a16="http://schemas.microsoft.com/office/drawing/2014/main" id="{BC7BB9F0-F14B-4A91-B2B7-35BC47FE4DE7}"/>
               </a:ext>
             </a:extLst>
           </p:cNvPr>
@@ -1942,7 +1946,7 @@
           <p:cNvPr id="3" name="Espaço Reservado para Conteúdo 2">
             <a:extLst>
               <a:ext uri="{FF2B5EF4-FFF2-40B4-BE49-F238E27FC236}">
-                <a16:creationId xmlns:a16="http://schemas.microsoft.com/office/drawing/2014/main" xmlns="" id="{EC1FC1C4-73DA-47A6-8496-B0B457F7D39A}"/>
+                <a16:creationId xmlns:a16="http://schemas.microsoft.com/office/drawing/2014/main" id="{EC1FC1C4-73DA-47A6-8496-B0B457F7D39A}"/>
               </a:ext>
             </a:extLst>
           </p:cNvPr>
@@ -2004,7 +2008,7 @@
           <p:cNvPr id="4" name="Espaço Reservado para Conteúdo 3">
             <a:extLst>
               <a:ext uri="{FF2B5EF4-FFF2-40B4-BE49-F238E27FC236}">
-                <a16:creationId xmlns:a16="http://schemas.microsoft.com/office/drawing/2014/main" xmlns="" id="{E92F06A8-A449-4D92-9912-76873E529B38}"/>
+                <a16:creationId xmlns:a16="http://schemas.microsoft.com/office/drawing/2014/main" id="{E92F06A8-A449-4D92-9912-76873E529B38}"/>
               </a:ext>
             </a:extLst>
           </p:cNvPr>
@@ -2066,7 +2070,7 @@
           <p:cNvPr id="5" name="Espaço Reservado para Data 4">
             <a:extLst>
               <a:ext uri="{FF2B5EF4-FFF2-40B4-BE49-F238E27FC236}">
-                <a16:creationId xmlns:a16="http://schemas.microsoft.com/office/drawing/2014/main" xmlns="" id="{938070A4-BC2F-4D55-BD8D-DEAF11BB9EE9}"/>
+                <a16:creationId xmlns:a16="http://schemas.microsoft.com/office/drawing/2014/main" id="{938070A4-BC2F-4D55-BD8D-DEAF11BB9EE9}"/>
               </a:ext>
             </a:extLst>
           </p:cNvPr>
@@ -2084,7 +2088,7 @@
           <a:p>
             <a:fld id="{63289F7E-B80B-496E-81B4-D396C37C9454}" type="datetimeFigureOut">
               <a:rPr lang="pt-BR" smtClean="0"/>
-              <a:t>22/02/2026</a:t>
+              <a:t>25/02/2026</a:t>
             </a:fld>
             <a:endParaRPr lang="pt-BR"/>
           </a:p>
@@ -2095,7 +2099,7 @@
           <p:cNvPr id="6" name="Espaço Reservado para Rodapé 5">
             <a:extLst>
               <a:ext uri="{FF2B5EF4-FFF2-40B4-BE49-F238E27FC236}">
-                <a16:creationId xmlns:a16="http://schemas.microsoft.com/office/drawing/2014/main" xmlns="" id="{45CC2DB8-844A-465F-BA9A-7734C80C7F43}"/>
+                <a16:creationId xmlns:a16="http://schemas.microsoft.com/office/drawing/2014/main" id="{45CC2DB8-844A-465F-BA9A-7734C80C7F43}"/>
               </a:ext>
             </a:extLst>
           </p:cNvPr>
@@ -2120,7 +2124,7 @@
           <p:cNvPr id="7" name="Espaço Reservado para Número de Slide 6">
             <a:extLst>
               <a:ext uri="{FF2B5EF4-FFF2-40B4-BE49-F238E27FC236}">
-                <a16:creationId xmlns:a16="http://schemas.microsoft.com/office/drawing/2014/main" xmlns="" id="{4CC606A8-097B-4040-94E0-CD8C88280D8F}"/>
+                <a16:creationId xmlns:a16="http://schemas.microsoft.com/office/drawing/2014/main" id="{4CC606A8-097B-4040-94E0-CD8C88280D8F}"/>
               </a:ext>
             </a:extLst>
           </p:cNvPr>
@@ -2138,7 +2142,7 @@
           <a:p>
             <a:fld id="{1A7E88B7-70CE-4035-AE73-13FA6FB985D4}" type="slidenum">
               <a:rPr lang="pt-BR" smtClean="0"/>
-              <a:t>‹nº›</a:t>
+              <a:t>‹#›</a:t>
             </a:fld>
             <a:endParaRPr lang="pt-BR"/>
           </a:p>
@@ -2179,7 +2183,7 @@
           <p:cNvPr id="2" name="Título 1">
             <a:extLst>
               <a:ext uri="{FF2B5EF4-FFF2-40B4-BE49-F238E27FC236}">
-                <a16:creationId xmlns:a16="http://schemas.microsoft.com/office/drawing/2014/main" xmlns="" id="{76D66686-0143-4CB6-8C09-BA326F1E7ACA}"/>
+                <a16:creationId xmlns:a16="http://schemas.microsoft.com/office/drawing/2014/main" id="{76D66686-0143-4CB6-8C09-BA326F1E7ACA}"/>
               </a:ext>
             </a:extLst>
           </p:cNvPr>
@@ -2212,7 +2216,7 @@
           <p:cNvPr id="3" name="Espaço Reservado para Texto 2">
             <a:extLst>
               <a:ext uri="{FF2B5EF4-FFF2-40B4-BE49-F238E27FC236}">
-                <a16:creationId xmlns:a16="http://schemas.microsoft.com/office/drawing/2014/main" xmlns="" id="{0227AB85-F59E-4BCE-B846-4FA0992C2F23}"/>
+                <a16:creationId xmlns:a16="http://schemas.microsoft.com/office/drawing/2014/main" id="{0227AB85-F59E-4BCE-B846-4FA0992C2F23}"/>
               </a:ext>
             </a:extLst>
           </p:cNvPr>
@@ -2283,7 +2287,7 @@
           <p:cNvPr id="4" name="Espaço Reservado para Conteúdo 3">
             <a:extLst>
               <a:ext uri="{FF2B5EF4-FFF2-40B4-BE49-F238E27FC236}">
-                <a16:creationId xmlns:a16="http://schemas.microsoft.com/office/drawing/2014/main" xmlns="" id="{3373456C-7319-4D0A-827D-D29F6B083F5D}"/>
+                <a16:creationId xmlns:a16="http://schemas.microsoft.com/office/drawing/2014/main" id="{3373456C-7319-4D0A-827D-D29F6B083F5D}"/>
               </a:ext>
             </a:extLst>
           </p:cNvPr>
@@ -2345,7 +2349,7 @@
           <p:cNvPr id="5" name="Espaço Reservado para Texto 4">
             <a:extLst>
               <a:ext uri="{FF2B5EF4-FFF2-40B4-BE49-F238E27FC236}">
-                <a16:creationId xmlns:a16="http://schemas.microsoft.com/office/drawing/2014/main" xmlns="" id="{4CD109D0-2E83-4262-8029-A871CEC47406}"/>
+                <a16:creationId xmlns:a16="http://schemas.microsoft.com/office/drawing/2014/main" id="{4CD109D0-2E83-4262-8029-A871CEC47406}"/>
               </a:ext>
             </a:extLst>
           </p:cNvPr>
@@ -2416,7 +2420,7 @@
           <p:cNvPr id="6" name="Espaço Reservado para Conteúdo 5">
             <a:extLst>
               <a:ext uri="{FF2B5EF4-FFF2-40B4-BE49-F238E27FC236}">
-                <a16:creationId xmlns:a16="http://schemas.microsoft.com/office/drawing/2014/main" xmlns="" id="{AD706E3A-CFBB-4A6C-A65F-D0360A9E74FE}"/>
+                <a16:creationId xmlns:a16="http://schemas.microsoft.com/office/drawing/2014/main" id="{AD706E3A-CFBB-4A6C-A65F-D0360A9E74FE}"/>
               </a:ext>
             </a:extLst>
           </p:cNvPr>
@@ -2478,7 +2482,7 @@
           <p:cNvPr id="7" name="Espaço Reservado para Data 6">
             <a:extLst>
               <a:ext uri="{FF2B5EF4-FFF2-40B4-BE49-F238E27FC236}">
-                <a16:creationId xmlns:a16="http://schemas.microsoft.com/office/drawing/2014/main" xmlns="" id="{4172C0E5-5AF0-4805-BB51-443733CD2BD5}"/>
+                <a16:creationId xmlns:a16="http://schemas.microsoft.com/office/drawing/2014/main" id="{4172C0E5-5AF0-4805-BB51-443733CD2BD5}"/>
               </a:ext>
             </a:extLst>
           </p:cNvPr>
@@ -2496,7 +2500,7 @@
           <a:p>
             <a:fld id="{63289F7E-B80B-496E-81B4-D396C37C9454}" type="datetimeFigureOut">
               <a:rPr lang="pt-BR" smtClean="0"/>
-              <a:t>22/02/2026</a:t>
+              <a:t>25/02/2026</a:t>
             </a:fld>
             <a:endParaRPr lang="pt-BR"/>
           </a:p>
@@ -2507,7 +2511,7 @@
           <p:cNvPr id="8" name="Espaço Reservado para Rodapé 7">
             <a:extLst>
               <a:ext uri="{FF2B5EF4-FFF2-40B4-BE49-F238E27FC236}">
-                <a16:creationId xmlns:a16="http://schemas.microsoft.com/office/drawing/2014/main" xmlns="" id="{0E801648-156F-497E-99CF-797DF48051E1}"/>
+                <a16:creationId xmlns:a16="http://schemas.microsoft.com/office/drawing/2014/main" id="{0E801648-156F-497E-99CF-797DF48051E1}"/>
               </a:ext>
             </a:extLst>
           </p:cNvPr>
@@ -2532,7 +2536,7 @@
           <p:cNvPr id="9" name="Espaço Reservado para Número de Slide 8">
             <a:extLst>
               <a:ext uri="{FF2B5EF4-FFF2-40B4-BE49-F238E27FC236}">
-                <a16:creationId xmlns:a16="http://schemas.microsoft.com/office/drawing/2014/main" xmlns="" id="{EEE23D32-80E7-4796-A137-66BF842E4B53}"/>
+                <a16:creationId xmlns:a16="http://schemas.microsoft.com/office/drawing/2014/main" id="{EEE23D32-80E7-4796-A137-66BF842E4B53}"/>
               </a:ext>
             </a:extLst>
           </p:cNvPr>
@@ -2550,7 +2554,7 @@
           <a:p>
             <a:fld id="{1A7E88B7-70CE-4035-AE73-13FA6FB985D4}" type="slidenum">
               <a:rPr lang="pt-BR" smtClean="0"/>
-              <a:t>‹nº›</a:t>
+              <a:t>‹#›</a:t>
             </a:fld>
             <a:endParaRPr lang="pt-BR"/>
           </a:p>
@@ -2591,7 +2595,7 @@
           <p:cNvPr id="2" name="Título 1">
             <a:extLst>
               <a:ext uri="{FF2B5EF4-FFF2-40B4-BE49-F238E27FC236}">
-                <a16:creationId xmlns:a16="http://schemas.microsoft.com/office/drawing/2014/main" xmlns="" id="{2BCE2379-C78F-47E1-8CFC-B846E7AF148D}"/>
+                <a16:creationId xmlns:a16="http://schemas.microsoft.com/office/drawing/2014/main" id="{2BCE2379-C78F-47E1-8CFC-B846E7AF148D}"/>
               </a:ext>
             </a:extLst>
           </p:cNvPr>
@@ -2619,7 +2623,7 @@
           <p:cNvPr id="3" name="Espaço Reservado para Data 2">
             <a:extLst>
               <a:ext uri="{FF2B5EF4-FFF2-40B4-BE49-F238E27FC236}">
-                <a16:creationId xmlns:a16="http://schemas.microsoft.com/office/drawing/2014/main" xmlns="" id="{342600A9-7F92-4E22-9D94-E4717252A817}"/>
+                <a16:creationId xmlns:a16="http://schemas.microsoft.com/office/drawing/2014/main" id="{342600A9-7F92-4E22-9D94-E4717252A817}"/>
               </a:ext>
             </a:extLst>
           </p:cNvPr>
@@ -2637,7 +2641,7 @@
           <a:p>
             <a:fld id="{63289F7E-B80B-496E-81B4-D396C37C9454}" type="datetimeFigureOut">
               <a:rPr lang="pt-BR" smtClean="0"/>
-              <a:t>22/02/2026</a:t>
+              <a:t>25/02/2026</a:t>
             </a:fld>
             <a:endParaRPr lang="pt-BR"/>
           </a:p>
@@ -2648,7 +2652,7 @@
           <p:cNvPr id="4" name="Espaço Reservado para Rodapé 3">
             <a:extLst>
               <a:ext uri="{FF2B5EF4-FFF2-40B4-BE49-F238E27FC236}">
-                <a16:creationId xmlns:a16="http://schemas.microsoft.com/office/drawing/2014/main" xmlns="" id="{192E6BED-F546-40CC-A2DF-99CBA853654E}"/>
+                <a16:creationId xmlns:a16="http://schemas.microsoft.com/office/drawing/2014/main" id="{192E6BED-F546-40CC-A2DF-99CBA853654E}"/>
               </a:ext>
             </a:extLst>
           </p:cNvPr>
@@ -2673,7 +2677,7 @@
           <p:cNvPr id="5" name="Espaço Reservado para Número de Slide 4">
             <a:extLst>
               <a:ext uri="{FF2B5EF4-FFF2-40B4-BE49-F238E27FC236}">
-                <a16:creationId xmlns:a16="http://schemas.microsoft.com/office/drawing/2014/main" xmlns="" id="{6091CC40-A8C4-4063-80EB-CC5099621678}"/>
+                <a16:creationId xmlns:a16="http://schemas.microsoft.com/office/drawing/2014/main" id="{6091CC40-A8C4-4063-80EB-CC5099621678}"/>
               </a:ext>
             </a:extLst>
           </p:cNvPr>
@@ -2691,7 +2695,7 @@
           <a:p>
             <a:fld id="{1A7E88B7-70CE-4035-AE73-13FA6FB985D4}" type="slidenum">
               <a:rPr lang="pt-BR" smtClean="0"/>
-              <a:t>‹nº›</a:t>
+              <a:t>‹#›</a:t>
             </a:fld>
             <a:endParaRPr lang="pt-BR"/>
           </a:p>
@@ -2732,7 +2736,7 @@
           <p:cNvPr id="2" name="Espaço Reservado para Data 1">
             <a:extLst>
               <a:ext uri="{FF2B5EF4-FFF2-40B4-BE49-F238E27FC236}">
-                <a16:creationId xmlns:a16="http://schemas.microsoft.com/office/drawing/2014/main" xmlns="" id="{DD19515C-212C-4EAE-84A3-8FF4BC844F1B}"/>
+                <a16:creationId xmlns:a16="http://schemas.microsoft.com/office/drawing/2014/main" id="{DD19515C-212C-4EAE-84A3-8FF4BC844F1B}"/>
               </a:ext>
             </a:extLst>
           </p:cNvPr>
@@ -2750,7 +2754,7 @@
           <a:p>
             <a:fld id="{63289F7E-B80B-496E-81B4-D396C37C9454}" type="datetimeFigureOut">
               <a:rPr lang="pt-BR" smtClean="0"/>
-              <a:t>22/02/2026</a:t>
+              <a:t>25/02/2026</a:t>
             </a:fld>
             <a:endParaRPr lang="pt-BR"/>
           </a:p>
@@ -2761,7 +2765,7 @@
           <p:cNvPr id="3" name="Espaço Reservado para Rodapé 2">
             <a:extLst>
               <a:ext uri="{FF2B5EF4-FFF2-40B4-BE49-F238E27FC236}">
-                <a16:creationId xmlns:a16="http://schemas.microsoft.com/office/drawing/2014/main" xmlns="" id="{94D3D120-B3E8-4C96-861D-7A4F12F49B3A}"/>
+                <a16:creationId xmlns:a16="http://schemas.microsoft.com/office/drawing/2014/main" id="{94D3D120-B3E8-4C96-861D-7A4F12F49B3A}"/>
               </a:ext>
             </a:extLst>
           </p:cNvPr>
@@ -2786,7 +2790,7 @@
           <p:cNvPr id="4" name="Espaço Reservado para Número de Slide 3">
             <a:extLst>
               <a:ext uri="{FF2B5EF4-FFF2-40B4-BE49-F238E27FC236}">
-                <a16:creationId xmlns:a16="http://schemas.microsoft.com/office/drawing/2014/main" xmlns="" id="{42E49B68-FA1B-468B-9F17-D5C09243D454}"/>
+                <a16:creationId xmlns:a16="http://schemas.microsoft.com/office/drawing/2014/main" id="{42E49B68-FA1B-468B-9F17-D5C09243D454}"/>
               </a:ext>
             </a:extLst>
           </p:cNvPr>
@@ -2804,7 +2808,7 @@
           <a:p>
             <a:fld id="{1A7E88B7-70CE-4035-AE73-13FA6FB985D4}" type="slidenum">
               <a:rPr lang="pt-BR" smtClean="0"/>
-              <a:t>‹nº›</a:t>
+              <a:t>‹#›</a:t>
             </a:fld>
             <a:endParaRPr lang="pt-BR"/>
           </a:p>
@@ -2845,7 +2849,7 @@
           <p:cNvPr id="2" name="Título 1">
             <a:extLst>
               <a:ext uri="{FF2B5EF4-FFF2-40B4-BE49-F238E27FC236}">
-                <a16:creationId xmlns:a16="http://schemas.microsoft.com/office/drawing/2014/main" xmlns="" id="{1C17BCBE-A897-4319-85EC-D87909C24980}"/>
+                <a16:creationId xmlns:a16="http://schemas.microsoft.com/office/drawing/2014/main" id="{1C17BCBE-A897-4319-85EC-D87909C24980}"/>
               </a:ext>
             </a:extLst>
           </p:cNvPr>
@@ -2882,7 +2886,7 @@
           <p:cNvPr id="3" name="Espaço Reservado para Conteúdo 2">
             <a:extLst>
               <a:ext uri="{FF2B5EF4-FFF2-40B4-BE49-F238E27FC236}">
-                <a16:creationId xmlns:a16="http://schemas.microsoft.com/office/drawing/2014/main" xmlns="" id="{4226F885-0204-4913-868B-4B8B82576F17}"/>
+                <a16:creationId xmlns:a16="http://schemas.microsoft.com/office/drawing/2014/main" id="{4226F885-0204-4913-868B-4B8B82576F17}"/>
               </a:ext>
             </a:extLst>
           </p:cNvPr>
@@ -2972,7 +2976,7 @@
           <p:cNvPr id="4" name="Espaço Reservado para Texto 3">
             <a:extLst>
               <a:ext uri="{FF2B5EF4-FFF2-40B4-BE49-F238E27FC236}">
-                <a16:creationId xmlns:a16="http://schemas.microsoft.com/office/drawing/2014/main" xmlns="" id="{00F9F784-A858-441B-8AB5-697098141751}"/>
+                <a16:creationId xmlns:a16="http://schemas.microsoft.com/office/drawing/2014/main" id="{00F9F784-A858-441B-8AB5-697098141751}"/>
               </a:ext>
             </a:extLst>
           </p:cNvPr>
@@ -3043,7 +3047,7 @@
           <p:cNvPr id="5" name="Espaço Reservado para Data 4">
             <a:extLst>
               <a:ext uri="{FF2B5EF4-FFF2-40B4-BE49-F238E27FC236}">
-                <a16:creationId xmlns:a16="http://schemas.microsoft.com/office/drawing/2014/main" xmlns="" id="{A4DC363A-5000-472E-8B17-02E7DCB8840A}"/>
+                <a16:creationId xmlns:a16="http://schemas.microsoft.com/office/drawing/2014/main" id="{A4DC363A-5000-472E-8B17-02E7DCB8840A}"/>
               </a:ext>
             </a:extLst>
           </p:cNvPr>
@@ -3061,7 +3065,7 @@
           <a:p>
             <a:fld id="{63289F7E-B80B-496E-81B4-D396C37C9454}" type="datetimeFigureOut">
               <a:rPr lang="pt-BR" smtClean="0"/>
-              <a:t>22/02/2026</a:t>
+              <a:t>25/02/2026</a:t>
             </a:fld>
             <a:endParaRPr lang="pt-BR"/>
           </a:p>
@@ -3072,7 +3076,7 @@
           <p:cNvPr id="6" name="Espaço Reservado para Rodapé 5">
             <a:extLst>
               <a:ext uri="{FF2B5EF4-FFF2-40B4-BE49-F238E27FC236}">
-                <a16:creationId xmlns:a16="http://schemas.microsoft.com/office/drawing/2014/main" xmlns="" id="{5548425D-2C21-4C56-BAD4-662978775C28}"/>
+                <a16:creationId xmlns:a16="http://schemas.microsoft.com/office/drawing/2014/main" id="{5548425D-2C21-4C56-BAD4-662978775C28}"/>
               </a:ext>
             </a:extLst>
           </p:cNvPr>
@@ -3097,7 +3101,7 @@
           <p:cNvPr id="7" name="Espaço Reservado para Número de Slide 6">
             <a:extLst>
               <a:ext uri="{FF2B5EF4-FFF2-40B4-BE49-F238E27FC236}">
-                <a16:creationId xmlns:a16="http://schemas.microsoft.com/office/drawing/2014/main" xmlns="" id="{C63E9726-E64C-42B2-AE8A-8C235A956B48}"/>
+                <a16:creationId xmlns:a16="http://schemas.microsoft.com/office/drawing/2014/main" id="{C63E9726-E64C-42B2-AE8A-8C235A956B48}"/>
               </a:ext>
             </a:extLst>
           </p:cNvPr>
@@ -3115,7 +3119,7 @@
           <a:p>
             <a:fld id="{1A7E88B7-70CE-4035-AE73-13FA6FB985D4}" type="slidenum">
               <a:rPr lang="pt-BR" smtClean="0"/>
-              <a:t>‹nº›</a:t>
+              <a:t>‹#›</a:t>
             </a:fld>
             <a:endParaRPr lang="pt-BR"/>
           </a:p>
@@ -3156,7 +3160,7 @@
           <p:cNvPr id="2" name="Título 1">
             <a:extLst>
               <a:ext uri="{FF2B5EF4-FFF2-40B4-BE49-F238E27FC236}">
-                <a16:creationId xmlns:a16="http://schemas.microsoft.com/office/drawing/2014/main" xmlns="" id="{11086A78-3E74-450C-96A6-CA8AC37AF772}"/>
+                <a16:creationId xmlns:a16="http://schemas.microsoft.com/office/drawing/2014/main" id="{11086A78-3E74-450C-96A6-CA8AC37AF772}"/>
               </a:ext>
             </a:extLst>
           </p:cNvPr>
@@ -3193,7 +3197,7 @@
           <p:cNvPr id="3" name="Espaço Reservado para Imagem 2">
             <a:extLst>
               <a:ext uri="{FF2B5EF4-FFF2-40B4-BE49-F238E27FC236}">
-                <a16:creationId xmlns:a16="http://schemas.microsoft.com/office/drawing/2014/main" xmlns="" id="{5F5B7312-975A-4DBC-9B2F-3652ADA006FD}"/>
+                <a16:creationId xmlns:a16="http://schemas.microsoft.com/office/drawing/2014/main" id="{5F5B7312-975A-4DBC-9B2F-3652ADA006FD}"/>
               </a:ext>
             </a:extLst>
           </p:cNvPr>
@@ -3260,7 +3264,7 @@
           <p:cNvPr id="4" name="Espaço Reservado para Texto 3">
             <a:extLst>
               <a:ext uri="{FF2B5EF4-FFF2-40B4-BE49-F238E27FC236}">
-                <a16:creationId xmlns:a16="http://schemas.microsoft.com/office/drawing/2014/main" xmlns="" id="{AAF805F5-1DFF-41C6-944C-7D79FE0D0963}"/>
+                <a16:creationId xmlns:a16="http://schemas.microsoft.com/office/drawing/2014/main" id="{AAF805F5-1DFF-41C6-944C-7D79FE0D0963}"/>
               </a:ext>
             </a:extLst>
           </p:cNvPr>
@@ -3331,7 +3335,7 @@
           <p:cNvPr id="5" name="Espaço Reservado para Data 4">
             <a:extLst>
               <a:ext uri="{FF2B5EF4-FFF2-40B4-BE49-F238E27FC236}">
-                <a16:creationId xmlns:a16="http://schemas.microsoft.com/office/drawing/2014/main" xmlns="" id="{02113D81-8665-4516-BD81-C6A1F254EECD}"/>
+                <a16:creationId xmlns:a16="http://schemas.microsoft.com/office/drawing/2014/main" id="{02113D81-8665-4516-BD81-C6A1F254EECD}"/>
               </a:ext>
             </a:extLst>
           </p:cNvPr>
@@ -3349,7 +3353,7 @@
           <a:p>
             <a:fld id="{63289F7E-B80B-496E-81B4-D396C37C9454}" type="datetimeFigureOut">
               <a:rPr lang="pt-BR" smtClean="0"/>
-              <a:t>22/02/2026</a:t>
+              <a:t>25/02/2026</a:t>
             </a:fld>
             <a:endParaRPr lang="pt-BR"/>
           </a:p>
@@ -3360,7 +3364,7 @@
           <p:cNvPr id="6" name="Espaço Reservado para Rodapé 5">
             <a:extLst>
               <a:ext uri="{FF2B5EF4-FFF2-40B4-BE49-F238E27FC236}">
-                <a16:creationId xmlns:a16="http://schemas.microsoft.com/office/drawing/2014/main" xmlns="" id="{2B00C88B-FF32-40AA-A187-727D96FD7862}"/>
+                <a16:creationId xmlns:a16="http://schemas.microsoft.com/office/drawing/2014/main" id="{2B00C88B-FF32-40AA-A187-727D96FD7862}"/>
               </a:ext>
             </a:extLst>
           </p:cNvPr>
@@ -3385,7 +3389,7 @@
           <p:cNvPr id="7" name="Espaço Reservado para Número de Slide 6">
             <a:extLst>
               <a:ext uri="{FF2B5EF4-FFF2-40B4-BE49-F238E27FC236}">
-                <a16:creationId xmlns:a16="http://schemas.microsoft.com/office/drawing/2014/main" xmlns="" id="{A04D1A2D-69F7-4B8F-A730-BC26DC340BA6}"/>
+                <a16:creationId xmlns:a16="http://schemas.microsoft.com/office/drawing/2014/main" id="{A04D1A2D-69F7-4B8F-A730-BC26DC340BA6}"/>
               </a:ext>
             </a:extLst>
           </p:cNvPr>
@@ -3403,7 +3407,7 @@
           <a:p>
             <a:fld id="{1A7E88B7-70CE-4035-AE73-13FA6FB985D4}" type="slidenum">
               <a:rPr lang="pt-BR" smtClean="0"/>
-              <a:t>‹nº›</a:t>
+              <a:t>‹#›</a:t>
             </a:fld>
             <a:endParaRPr lang="pt-BR"/>
           </a:p>
@@ -3449,7 +3453,7 @@
           <p:cNvPr id="2" name="Espaço Reservado para Título 1">
             <a:extLst>
               <a:ext uri="{FF2B5EF4-FFF2-40B4-BE49-F238E27FC236}">
-                <a16:creationId xmlns:a16="http://schemas.microsoft.com/office/drawing/2014/main" xmlns="" id="{E69A0273-1966-4A1B-9370-4C1CE5036371}"/>
+                <a16:creationId xmlns:a16="http://schemas.microsoft.com/office/drawing/2014/main" id="{E69A0273-1966-4A1B-9370-4C1CE5036371}"/>
               </a:ext>
             </a:extLst>
           </p:cNvPr>
@@ -3487,7 +3491,7 @@
           <p:cNvPr id="3" name="Espaço Reservado para Texto 2">
             <a:extLst>
               <a:ext uri="{FF2B5EF4-FFF2-40B4-BE49-F238E27FC236}">
-                <a16:creationId xmlns:a16="http://schemas.microsoft.com/office/drawing/2014/main" xmlns="" id="{3B9CF87A-0448-49A7-AB25-EBC1D56A40EF}"/>
+                <a16:creationId xmlns:a16="http://schemas.microsoft.com/office/drawing/2014/main" id="{3B9CF87A-0448-49A7-AB25-EBC1D56A40EF}"/>
               </a:ext>
             </a:extLst>
           </p:cNvPr>
@@ -3554,7 +3558,7 @@
           <p:cNvPr id="4" name="Espaço Reservado para Data 3">
             <a:extLst>
               <a:ext uri="{FF2B5EF4-FFF2-40B4-BE49-F238E27FC236}">
-                <a16:creationId xmlns:a16="http://schemas.microsoft.com/office/drawing/2014/main" xmlns="" id="{2EF7B1F2-BB5A-44D0-816D-16AD2C71430E}"/>
+                <a16:creationId xmlns:a16="http://schemas.microsoft.com/office/drawing/2014/main" id="{2EF7B1F2-BB5A-44D0-816D-16AD2C71430E}"/>
               </a:ext>
             </a:extLst>
           </p:cNvPr>
@@ -3590,7 +3594,7 @@
           <a:p>
             <a:fld id="{63289F7E-B80B-496E-81B4-D396C37C9454}" type="datetimeFigureOut">
               <a:rPr lang="pt-BR" smtClean="0"/>
-              <a:t>22/02/2026</a:t>
+              <a:t>25/02/2026</a:t>
             </a:fld>
             <a:endParaRPr lang="pt-BR"/>
           </a:p>
@@ -3601,7 +3605,7 @@
           <p:cNvPr id="5" name="Espaço Reservado para Rodapé 4">
             <a:extLst>
               <a:ext uri="{FF2B5EF4-FFF2-40B4-BE49-F238E27FC236}">
-                <a16:creationId xmlns:a16="http://schemas.microsoft.com/office/drawing/2014/main" xmlns="" id="{C703F94C-2CC8-4DAA-BC35-14FC3E841DCD}"/>
+                <a16:creationId xmlns:a16="http://schemas.microsoft.com/office/drawing/2014/main" id="{C703F94C-2CC8-4DAA-BC35-14FC3E841DCD}"/>
               </a:ext>
             </a:extLst>
           </p:cNvPr>
@@ -3644,7 +3648,7 @@
           <p:cNvPr id="6" name="Espaço Reservado para Número de Slide 5">
             <a:extLst>
               <a:ext uri="{FF2B5EF4-FFF2-40B4-BE49-F238E27FC236}">
-                <a16:creationId xmlns:a16="http://schemas.microsoft.com/office/drawing/2014/main" xmlns="" id="{64051336-7048-457A-8B61-D94291D71648}"/>
+                <a16:creationId xmlns:a16="http://schemas.microsoft.com/office/drawing/2014/main" id="{64051336-7048-457A-8B61-D94291D71648}"/>
               </a:ext>
             </a:extLst>
           </p:cNvPr>
@@ -3680,7 +3684,7 @@
           <a:p>
             <a:fld id="{1A7E88B7-70CE-4035-AE73-13FA6FB985D4}" type="slidenum">
               <a:rPr lang="pt-BR" smtClean="0"/>
-              <a:t>‹nº›</a:t>
+              <a:t>‹#›</a:t>
             </a:fld>
             <a:endParaRPr lang="pt-BR"/>
           </a:p>
@@ -4012,7 +4016,7 @@
           <p:cNvPr id="4" name="CaixaDeTexto 3">
             <a:extLst>
               <a:ext uri="{FF2B5EF4-FFF2-40B4-BE49-F238E27FC236}">
-                <a16:creationId xmlns:a16="http://schemas.microsoft.com/office/drawing/2014/main" xmlns="" id="{430EB894-B7D4-434C-9D1A-A14094D9BEEC}"/>
+                <a16:creationId xmlns:a16="http://schemas.microsoft.com/office/drawing/2014/main" id="{430EB894-B7D4-434C-9D1A-A14094D9BEEC}"/>
               </a:ext>
             </a:extLst>
           </p:cNvPr>
@@ -4036,23 +4040,16 @@
           <a:lstStyle/>
           <a:p>
             <a:r>
-              <a:rPr lang="pt-BR" sz="2000" dirty="0" smtClean="0"/>
+              <a:rPr lang="pt-BR" sz="2000" dirty="0"/>
               <a:t>Felipe A. P. de Figueiredo</a:t>
             </a:r>
-            <a:endParaRPr lang="pt-BR" sz="2000" dirty="0"/>
           </a:p>
           <a:p>
             <a:r>
               <a:rPr lang="pt-BR" dirty="0">
                 <a:hlinkClick r:id="rId3"/>
               </a:rPr>
-              <a:t>f</a:t>
-            </a:r>
-            <a:r>
-              <a:rPr lang="pt-BR" dirty="0" smtClean="0">
-                <a:hlinkClick r:id="rId3"/>
-              </a:rPr>
-              <a:t>elipe.figueiredo@Inatel.br</a:t>
+              <a:t>felipe.figueiredo@Inatel.br</a:t>
             </a:r>
             <a:endParaRPr lang="pt-BR" dirty="0"/>
           </a:p>
@@ -4063,7 +4060,7 @@
           <p:cNvPr id="1026" name="Picture 2" descr="Logo">
             <a:extLst>
               <a:ext uri="{FF2B5EF4-FFF2-40B4-BE49-F238E27FC236}">
-                <a16:creationId xmlns:a16="http://schemas.microsoft.com/office/drawing/2014/main" xmlns="" id="{3F2642E0-4F6A-4196-8F58-E77D36E9A33F}"/>
+                <a16:creationId xmlns:a16="http://schemas.microsoft.com/office/drawing/2014/main" id="{3F2642E0-4F6A-4196-8F58-E77D36E9A33F}"/>
               </a:ext>
             </a:extLst>
           </p:cNvPr>
@@ -4108,7 +4105,7 @@
           <p:cNvPr id="5122" name="Picture 2" descr="Image result for machine learning">
             <a:extLst>
               <a:ext uri="{FF2B5EF4-FFF2-40B4-BE49-F238E27FC236}">
-                <a16:creationId xmlns:a16="http://schemas.microsoft.com/office/drawing/2014/main" xmlns="" id="{810CE0A2-4102-44A6-A370-175E7896CDCB}"/>
+                <a16:creationId xmlns:a16="http://schemas.microsoft.com/office/drawing/2014/main" id="{810CE0A2-4102-44A6-A370-175E7896CDCB}"/>
               </a:ext>
             </a:extLst>
           </p:cNvPr>
@@ -4153,7 +4150,7 @@
           <p:cNvPr id="7" name="Título 1">
             <a:extLst>
               <a:ext uri="{FF2B5EF4-FFF2-40B4-BE49-F238E27FC236}">
-                <a16:creationId xmlns="" xmlns:a16="http://schemas.microsoft.com/office/drawing/2014/main" id="{32666AC8-2E17-4DB4-B0F5-60C640CCFD2E}"/>
+                <a16:creationId xmlns:a16="http://schemas.microsoft.com/office/drawing/2014/main" id="{32666AC8-2E17-4DB4-B0F5-60C640CCFD2E}"/>
               </a:ext>
             </a:extLst>
           </p:cNvPr>
@@ -4177,26 +4174,22 @@
           <a:lstStyle/>
           <a:p>
             <a:r>
-              <a:rPr lang="pt-BR" sz="6600" dirty="0" smtClean="0"/>
+              <a:rPr lang="pt-BR" sz="6600" dirty="0"/>
               <a:t>C24 – Inteligência Artificial:</a:t>
-            </a:r>
-            <a:r>
-              <a:rPr lang="pt-BR" sz="7200" dirty="0"/>
-              <a:t/>
             </a:r>
             <a:br>
               <a:rPr lang="pt-BR" sz="7200" dirty="0"/>
             </a:br>
             <a:r>
-              <a:rPr lang="pt-BR" sz="7200" b="1" i="1" dirty="0" err="1" smtClean="0"/>
+              <a:rPr lang="pt-BR" sz="7200" b="1" i="1" dirty="0" err="1"/>
               <a:t>Regressor</a:t>
             </a:r>
             <a:r>
-              <a:rPr lang="pt-BR" sz="7200" b="1" i="1" dirty="0" smtClean="0"/>
+              <a:rPr lang="pt-BR" sz="7200" b="1" i="1" dirty="0"/>
               <a:t> </a:t>
             </a:r>
             <a:r>
-              <a:rPr lang="pt-BR" sz="7200" b="1" i="1" dirty="0" err="1" smtClean="0"/>
+              <a:rPr lang="pt-BR" sz="7200" b="1" i="1" dirty="0" err="1"/>
               <a:t>Softmax</a:t>
             </a:r>
             <a:endParaRPr lang="pt-BR" sz="7200" b="1" i="1" dirty="0"/>
@@ -4235,64 +4228,47 @@
       </p:grpSpPr>
       <p:sp>
         <p:nvSpPr>
-          <p:cNvPr id="4" name="Título 1">
-            <a:extLst>
-              <a:ext uri="{FF2B5EF4-FFF2-40B4-BE49-F238E27FC236}">
-                <a16:creationId xmlns:a16="http://schemas.microsoft.com/office/drawing/2014/main" xmlns="" id="{32666AC8-2E17-4DB4-B0F5-60C640CCFD2E}"/>
-              </a:ext>
-            </a:extLst>
-          </p:cNvPr>
-          <p:cNvSpPr txBox="1">
-            <a:spLocks/>
-          </p:cNvSpPr>
-          <p:nvPr/>
+          <p:cNvPr id="3" name="Content Placeholder 2">
+            <a:extLst>
+              <a:ext uri="{FF2B5EF4-FFF2-40B4-BE49-F238E27FC236}">
+                <a16:creationId xmlns:a16="http://schemas.microsoft.com/office/drawing/2014/main" id="{DC57CAF7-CD11-B625-100A-D1E70D202B7F}"/>
+              </a:ext>
+            </a:extLst>
+          </p:cNvPr>
+          <p:cNvSpPr>
+            <a:spLocks noGrp="1"/>
+          </p:cNvSpPr>
+          <p:nvPr>
+            <p:ph idx="1"/>
+          </p:nvPr>
         </p:nvSpPr>
         <p:spPr>
           <a:xfrm>
-            <a:off x="1431533" y="2720526"/>
-            <a:ext cx="9144000" cy="1029541"/>
+            <a:off x="838200" y="2570956"/>
+            <a:ext cx="10515600" cy="1716088"/>
           </a:xfrm>
-          <a:prstGeom prst="rect">
-            <a:avLst/>
-          </a:prstGeom>
         </p:spPr>
         <p:txBody>
-          <a:bodyPr vert="horz" lIns="91440" tIns="45720" rIns="91440" bIns="45720" rtlCol="0" anchor="ctr">
-            <a:normAutofit/>
+          <a:bodyPr>
+            <a:normAutofit fontScale="92500"/>
           </a:bodyPr>
-          <a:lstStyle>
-            <a:lvl1pPr algn="l" defTabSz="914400" rtl="0" eaLnBrk="1" latinLnBrk="0" hangingPunct="1">
-              <a:lnSpc>
-                <a:spcPct val="90000"/>
-              </a:lnSpc>
-              <a:spcBef>
-                <a:spcPct val="0"/>
-              </a:spcBef>
-              <a:buNone/>
-              <a:defRPr sz="4400" kern="1200">
-                <a:solidFill>
-                  <a:schemeClr val="tx1"/>
-                </a:solidFill>
-                <a:latin typeface="+mj-lt"/>
-                <a:ea typeface="+mj-ea"/>
-                <a:cs typeface="+mj-cs"/>
-              </a:defRPr>
-            </a:lvl1pPr>
-          </a:lstStyle>
-          <a:p>
-            <a:pPr algn="ctr"/>
-            <a:r>
-              <a:rPr lang="pt-BR" sz="6600" dirty="0"/>
-              <a:t>Perguntas?</a:t>
-            </a:r>
-            <a:endParaRPr lang="pt-BR" sz="6600" b="1" i="1" dirty="0"/>
+          <a:lstStyle/>
+          <a:p>
+            <a:pPr marL="0" indent="0" algn="ctr">
+              <a:buNone/>
+            </a:pPr>
+            <a:r>
+              <a:rPr lang="pt-BR" sz="5400" i="1" dirty="0"/>
+              <a:t>Como resolvemos problemas de classificação com mais de duas classes?</a:t>
+            </a:r>
+            <a:endParaRPr lang="en-US" sz="5400" i="1" dirty="0"/>
           </a:p>
         </p:txBody>
       </p:sp>
     </p:spTree>
     <p:extLst>
       <p:ext uri="{BB962C8B-B14F-4D97-AF65-F5344CB8AC3E}">
-        <p14:creationId xmlns:p14="http://schemas.microsoft.com/office/powerpoint/2010/main" val="3773005660"/>
+        <p14:creationId xmlns:p14="http://schemas.microsoft.com/office/powerpoint/2010/main" val="2002263224"/>
       </p:ext>
     </p:extLst>
   </p:cSld>
@@ -4321,10 +4297,345 @@
       </p:grpSpPr>
       <p:sp>
         <p:nvSpPr>
+          <p:cNvPr id="3" name="Content Placeholder 2">
+            <a:extLst>
+              <a:ext uri="{FF2B5EF4-FFF2-40B4-BE49-F238E27FC236}">
+                <a16:creationId xmlns:a16="http://schemas.microsoft.com/office/drawing/2014/main" id="{745F1E72-E152-FACB-6D03-BFF5E68C50E5}"/>
+              </a:ext>
+            </a:extLst>
+          </p:cNvPr>
+          <p:cNvSpPr>
+            <a:spLocks noGrp="1"/>
+          </p:cNvSpPr>
+          <p:nvPr>
+            <p:ph idx="1"/>
+          </p:nvPr>
+        </p:nvSpPr>
+        <p:spPr>
+          <a:xfrm>
+            <a:off x="838200" y="2627312"/>
+            <a:ext cx="10515600" cy="1603375"/>
+          </a:xfrm>
+        </p:spPr>
+        <p:txBody>
+          <a:bodyPr/>
+          <a:lstStyle/>
+          <a:p>
+            <a:pPr marL="0" indent="0" algn="ctr">
+              <a:buNone/>
+            </a:pPr>
+            <a:r>
+              <a:rPr lang="pt-BR" sz="5000" i="1" dirty="0"/>
+              <a:t>O regressor logístico é limitado a apenas duas classes.</a:t>
+            </a:r>
+            <a:endParaRPr lang="en-US" sz="5000" i="1" dirty="0"/>
+          </a:p>
+        </p:txBody>
+      </p:sp>
+    </p:spTree>
+    <p:extLst>
+      <p:ext uri="{BB962C8B-B14F-4D97-AF65-F5344CB8AC3E}">
+        <p14:creationId xmlns:p14="http://schemas.microsoft.com/office/powerpoint/2010/main" val="3010776835"/>
+      </p:ext>
+    </p:extLst>
+  </p:cSld>
+  <p:clrMapOvr>
+    <a:masterClrMapping/>
+  </p:clrMapOvr>
+</p:sld>
+</file>
+
+<file path=ppt/slides/slide4.xml><?xml version="1.0" encoding="utf-8"?>
+<p:sld xmlns:a="http://schemas.openxmlformats.org/drawingml/2006/main" xmlns:r="http://schemas.openxmlformats.org/officeDocument/2006/relationships" xmlns:p="http://schemas.openxmlformats.org/presentationml/2006/main">
+  <p:cSld>
+    <p:spTree>
+      <p:nvGrpSpPr>
+        <p:cNvPr id="1" name=""/>
+        <p:cNvGrpSpPr/>
+        <p:nvPr/>
+      </p:nvGrpSpPr>
+      <p:grpSpPr>
+        <a:xfrm>
+          <a:off x="0" y="0"/>
+          <a:ext cx="0" cy="0"/>
+          <a:chOff x="0" y="0"/>
+          <a:chExt cx="0" cy="0"/>
+        </a:xfrm>
+      </p:grpSpPr>
+      <p:sp>
+        <p:nvSpPr>
+          <p:cNvPr id="2" name="Title 1">
+            <a:extLst>
+              <a:ext uri="{FF2B5EF4-FFF2-40B4-BE49-F238E27FC236}">
+                <a16:creationId xmlns:a16="http://schemas.microsoft.com/office/drawing/2014/main" id="{152D24C2-D54D-FEB5-FDA7-95B90D639CA3}"/>
+              </a:ext>
+            </a:extLst>
+          </p:cNvPr>
+          <p:cNvSpPr>
+            <a:spLocks noGrp="1"/>
+          </p:cNvSpPr>
+          <p:nvPr>
+            <p:ph type="title"/>
+          </p:nvPr>
+        </p:nvSpPr>
+        <p:spPr/>
+        <p:txBody>
+          <a:bodyPr/>
+          <a:lstStyle/>
+          <a:p>
+            <a:endParaRPr lang="en-US"/>
+          </a:p>
+        </p:txBody>
+      </p:sp>
+      <p:sp>
+        <p:nvSpPr>
+          <p:cNvPr id="3" name="Content Placeholder 2">
+            <a:extLst>
+              <a:ext uri="{FF2B5EF4-FFF2-40B4-BE49-F238E27FC236}">
+                <a16:creationId xmlns:a16="http://schemas.microsoft.com/office/drawing/2014/main" id="{4DC8D060-FBEE-2672-1856-348481B4896E}"/>
+              </a:ext>
+            </a:extLst>
+          </p:cNvPr>
+          <p:cNvSpPr>
+            <a:spLocks noGrp="1"/>
+          </p:cNvSpPr>
+          <p:nvPr>
+            <p:ph idx="1"/>
+          </p:nvPr>
+        </p:nvSpPr>
+        <p:spPr/>
+        <p:txBody>
+          <a:bodyPr/>
+          <a:lstStyle/>
+          <a:p>
+            <a:endParaRPr lang="en-US"/>
+          </a:p>
+        </p:txBody>
+      </p:sp>
+    </p:spTree>
+    <p:extLst>
+      <p:ext uri="{BB962C8B-B14F-4D97-AF65-F5344CB8AC3E}">
+        <p14:creationId xmlns:p14="http://schemas.microsoft.com/office/powerpoint/2010/main" val="1793874360"/>
+      </p:ext>
+    </p:extLst>
+  </p:cSld>
+  <p:clrMapOvr>
+    <a:masterClrMapping/>
+  </p:clrMapOvr>
+</p:sld>
+</file>
+
+<file path=ppt/slides/slide5.xml><?xml version="1.0" encoding="utf-8"?>
+<p:sld xmlns:a="http://schemas.openxmlformats.org/drawingml/2006/main" xmlns:r="http://schemas.openxmlformats.org/officeDocument/2006/relationships" xmlns:p="http://schemas.openxmlformats.org/presentationml/2006/main">
+  <p:cSld>
+    <p:spTree>
+      <p:nvGrpSpPr>
+        <p:cNvPr id="1" name=""/>
+        <p:cNvGrpSpPr/>
+        <p:nvPr/>
+      </p:nvGrpSpPr>
+      <p:grpSpPr>
+        <a:xfrm>
+          <a:off x="0" y="0"/>
+          <a:ext cx="0" cy="0"/>
+          <a:chOff x="0" y="0"/>
+          <a:chExt cx="0" cy="0"/>
+        </a:xfrm>
+      </p:grpSpPr>
+      <p:sp>
+        <p:nvSpPr>
+          <p:cNvPr id="2" name="Title 1">
+            <a:extLst>
+              <a:ext uri="{FF2B5EF4-FFF2-40B4-BE49-F238E27FC236}">
+                <a16:creationId xmlns:a16="http://schemas.microsoft.com/office/drawing/2014/main" id="{5E3129CB-DD74-6458-C483-13C1F6CC8AC0}"/>
+              </a:ext>
+            </a:extLst>
+          </p:cNvPr>
+          <p:cNvSpPr>
+            <a:spLocks noGrp="1"/>
+          </p:cNvSpPr>
+          <p:nvPr>
+            <p:ph type="title"/>
+          </p:nvPr>
+        </p:nvSpPr>
+        <p:spPr/>
+        <p:txBody>
+          <a:bodyPr/>
+          <a:lstStyle/>
+          <a:p>
+            <a:endParaRPr lang="en-US"/>
+          </a:p>
+        </p:txBody>
+      </p:sp>
+      <p:pic>
+        <p:nvPicPr>
+          <p:cNvPr id="1026" name="Picture 2" descr="SoftmaxRegression: Multiclass version of logistic regression - mlxtend">
+            <a:extLst>
+              <a:ext uri="{FF2B5EF4-FFF2-40B4-BE49-F238E27FC236}">
+                <a16:creationId xmlns:a16="http://schemas.microsoft.com/office/drawing/2014/main" id="{65016EAD-25DD-EBF2-4113-C9BFF5E85431}"/>
+              </a:ext>
+            </a:extLst>
+          </p:cNvPr>
+          <p:cNvPicPr>
+            <a:picLocks noChangeAspect="1" noChangeArrowheads="1"/>
+          </p:cNvPicPr>
+          <p:nvPr/>
+        </p:nvPicPr>
+        <p:blipFill>
+          <a:blip r:embed="rId2">
+            <a:extLst>
+              <a:ext uri="{28A0092B-C50C-407E-A947-70E740481C1C}">
+                <a14:useLocalDpi xmlns:a14="http://schemas.microsoft.com/office/drawing/2010/main" val="0"/>
+              </a:ext>
+            </a:extLst>
+          </a:blip>
+          <a:srcRect/>
+          <a:stretch>
+            <a:fillRect/>
+          </a:stretch>
+        </p:blipFill>
+        <p:spPr bwMode="auto">
+          <a:xfrm>
+            <a:off x="2586038" y="2343150"/>
+            <a:ext cx="5219019" cy="3980264"/>
+          </a:xfrm>
+          <a:prstGeom prst="rect">
+            <a:avLst/>
+          </a:prstGeom>
+          <a:noFill/>
+          <a:extLst>
+            <a:ext uri="{909E8E84-426E-40DD-AFC4-6F175D3DCCD1}">
+              <a14:hiddenFill xmlns:a14="http://schemas.microsoft.com/office/drawing/2010/main">
+                <a:solidFill>
+                  <a:srgbClr val="FFFFFF"/>
+                </a:solidFill>
+              </a14:hiddenFill>
+            </a:ext>
+          </a:extLst>
+        </p:spPr>
+      </p:pic>
+    </p:spTree>
+    <p:extLst>
+      <p:ext uri="{BB962C8B-B14F-4D97-AF65-F5344CB8AC3E}">
+        <p14:creationId xmlns:p14="http://schemas.microsoft.com/office/powerpoint/2010/main" val="3303392499"/>
+      </p:ext>
+    </p:extLst>
+  </p:cSld>
+  <p:clrMapOvr>
+    <a:masterClrMapping/>
+  </p:clrMapOvr>
+</p:sld>
+</file>
+
+<file path=ppt/slides/slide6.xml><?xml version="1.0" encoding="utf-8"?>
+<p:sld xmlns:a="http://schemas.openxmlformats.org/drawingml/2006/main" xmlns:r="http://schemas.openxmlformats.org/officeDocument/2006/relationships" xmlns:p="http://schemas.openxmlformats.org/presentationml/2006/main">
+  <p:cSld>
+    <p:spTree>
+      <p:nvGrpSpPr>
+        <p:cNvPr id="1" name=""/>
+        <p:cNvGrpSpPr/>
+        <p:nvPr/>
+      </p:nvGrpSpPr>
+      <p:grpSpPr>
+        <a:xfrm>
+          <a:off x="0" y="0"/>
+          <a:ext cx="0" cy="0"/>
+          <a:chOff x="0" y="0"/>
+          <a:chExt cx="0" cy="0"/>
+        </a:xfrm>
+      </p:grpSpPr>
+      <p:sp>
+        <p:nvSpPr>
           <p:cNvPr id="4" name="Título 1">
             <a:extLst>
               <a:ext uri="{FF2B5EF4-FFF2-40B4-BE49-F238E27FC236}">
-                <a16:creationId xmlns:a16="http://schemas.microsoft.com/office/drawing/2014/main" xmlns="" id="{32666AC8-2E17-4DB4-B0F5-60C640CCFD2E}"/>
+                <a16:creationId xmlns:a16="http://schemas.microsoft.com/office/drawing/2014/main" id="{32666AC8-2E17-4DB4-B0F5-60C640CCFD2E}"/>
+              </a:ext>
+            </a:extLst>
+          </p:cNvPr>
+          <p:cNvSpPr txBox="1">
+            <a:spLocks/>
+          </p:cNvSpPr>
+          <p:nvPr/>
+        </p:nvSpPr>
+        <p:spPr>
+          <a:xfrm>
+            <a:off x="1431533" y="2720526"/>
+            <a:ext cx="9144000" cy="1029541"/>
+          </a:xfrm>
+          <a:prstGeom prst="rect">
+            <a:avLst/>
+          </a:prstGeom>
+        </p:spPr>
+        <p:txBody>
+          <a:bodyPr vert="horz" lIns="91440" tIns="45720" rIns="91440" bIns="45720" rtlCol="0" anchor="ctr">
+            <a:normAutofit/>
+          </a:bodyPr>
+          <a:lstStyle>
+            <a:lvl1pPr algn="l" defTabSz="914400" rtl="0" eaLnBrk="1" latinLnBrk="0" hangingPunct="1">
+              <a:lnSpc>
+                <a:spcPct val="90000"/>
+              </a:lnSpc>
+              <a:spcBef>
+                <a:spcPct val="0"/>
+              </a:spcBef>
+              <a:buNone/>
+              <a:defRPr sz="4400" kern="1200">
+                <a:solidFill>
+                  <a:schemeClr val="tx1"/>
+                </a:solidFill>
+                <a:latin typeface="+mj-lt"/>
+                <a:ea typeface="+mj-ea"/>
+                <a:cs typeface="+mj-cs"/>
+              </a:defRPr>
+            </a:lvl1pPr>
+          </a:lstStyle>
+          <a:p>
+            <a:pPr algn="ctr"/>
+            <a:r>
+              <a:rPr lang="pt-BR" sz="6600" dirty="0"/>
+              <a:t>Perguntas?</a:t>
+            </a:r>
+            <a:endParaRPr lang="pt-BR" sz="6600" b="1" i="1" dirty="0"/>
+          </a:p>
+        </p:txBody>
+      </p:sp>
+    </p:spTree>
+    <p:extLst>
+      <p:ext uri="{BB962C8B-B14F-4D97-AF65-F5344CB8AC3E}">
+        <p14:creationId xmlns:p14="http://schemas.microsoft.com/office/powerpoint/2010/main" val="3773005660"/>
+      </p:ext>
+    </p:extLst>
+  </p:cSld>
+  <p:clrMapOvr>
+    <a:masterClrMapping/>
+  </p:clrMapOvr>
+</p:sld>
+</file>
+
+<file path=ppt/slides/slide7.xml><?xml version="1.0" encoding="utf-8"?>
+<p:sld xmlns:a="http://schemas.openxmlformats.org/drawingml/2006/main" xmlns:r="http://schemas.openxmlformats.org/officeDocument/2006/relationships" xmlns:p="http://schemas.openxmlformats.org/presentationml/2006/main">
+  <p:cSld>
+    <p:spTree>
+      <p:nvGrpSpPr>
+        <p:cNvPr id="1" name=""/>
+        <p:cNvGrpSpPr/>
+        <p:nvPr/>
+      </p:nvGrpSpPr>
+      <p:grpSpPr>
+        <a:xfrm>
+          <a:off x="0" y="0"/>
+          <a:ext cx="0" cy="0"/>
+          <a:chOff x="0" y="0"/>
+          <a:chExt cx="0" cy="0"/>
+        </a:xfrm>
+      </p:grpSpPr>
+      <p:sp>
+        <p:nvSpPr>
+          <p:cNvPr id="4" name="Título 1">
+            <a:extLst>
+              <a:ext uri="{FF2B5EF4-FFF2-40B4-BE49-F238E27FC236}">
+                <a16:creationId xmlns:a16="http://schemas.microsoft.com/office/drawing/2014/main" id="{32666AC8-2E17-4DB4-B0F5-60C640CCFD2E}"/>
               </a:ext>
             </a:extLst>
           </p:cNvPr>

--- a/slides/C24_Regressor_Softmax.pptx
+++ b/slides/C24_Regressor_Softmax.pptx
@@ -2470,18 +2470,9 @@
                 <a:latin typeface="+mn-lt"/>
                 <a:ea typeface="+mn-ea"/>
                 <a:cs typeface="+mn-cs"/>
-                <a:hlinkClick r:id="rId3">
-                  <a:extLst>
-                    <a:ext uri="{A12FA001-AC4F-418D-AE19-62706E023703}">
-                      <ahyp:hlinkClr xmlns:ahyp="http://schemas.microsoft.com/office/drawing/2018/hyperlinkcolor" val="tx"/>
-                    </a:ext>
-                  </a:extLst>
-                </a:hlinkClick>
               </a:rPr>
-              <a:t>Referencias</a:t>
-            </a:r>
-          </a:p>
-          <a:p>
+              <a:t>https://colab.research.google.com/github/zz4fap/c24_inteligencia_artificial/blob/master/notebooks/regressor_softmax.ipynb</a:t>
+            </a:r>
             <a:endParaRPr lang="en-US" dirty="0"/>
           </a:p>
         </p:txBody>
@@ -8850,8 +8841,8 @@
           </a:p>
         </p:txBody>
       </p:sp>
-      <mc:AlternateContent xmlns:mc="http://schemas.openxmlformats.org/markup-compatibility/2006">
-        <mc:Choice xmlns:a14="http://schemas.microsoft.com/office/drawing/2010/main" Requires="a14">
+      <mc:AlternateContent xmlns:mc="http://schemas.openxmlformats.org/markup-compatibility/2006" xmlns:a14="http://schemas.microsoft.com/office/drawing/2010/main">
+        <mc:Choice Requires="a14">
           <p:sp>
             <p:nvSpPr>
               <p:cNvPr id="3" name="Content Placeholder 2">
@@ -9626,7 +9617,7 @@
             </p:txBody>
           </p:sp>
         </mc:Choice>
-        <mc:Fallback>
+        <mc:Fallback xmlns="">
           <p:sp>
             <p:nvSpPr>
               <p:cNvPr id="3" name="Content Placeholder 2">
@@ -11274,8 +11265,8 @@
           </a:p>
         </p:txBody>
       </p:sp>
-      <mc:AlternateContent xmlns:mc="http://schemas.openxmlformats.org/markup-compatibility/2006">
-        <mc:Choice xmlns:a14="http://schemas.microsoft.com/office/drawing/2010/main" Requires="a14">
+      <mc:AlternateContent xmlns:mc="http://schemas.openxmlformats.org/markup-compatibility/2006" xmlns:a14="http://schemas.microsoft.com/office/drawing/2010/main">
+        <mc:Choice Requires="a14">
           <p:sp>
             <p:nvSpPr>
               <p:cNvPr id="3" name="Espaço Reservado para Conteúdo 2">
@@ -11406,13 +11397,7 @@
                             <a:rPr lang="pt-BR" i="1">
                               <a:latin typeface="Cambria Math" panose="02040503050406030204" pitchFamily="18" charset="0"/>
                             </a:rPr>
-                            <m:t>=</m:t>
-                          </m:r>
-                          <m:r>
-                            <a:rPr lang="pt-BR" i="1">
-                              <a:latin typeface="Cambria Math" panose="02040503050406030204" pitchFamily="18" charset="0"/>
-                            </a:rPr>
-                            <m:t>0</m:t>
+                            <m:t>=0</m:t>
                           </m:r>
                         </m:sub>
                         <m:sup>
@@ -11426,13 +11411,7 @@
                             <a:rPr lang="pt-BR" i="1">
                               <a:latin typeface="Cambria Math" panose="02040503050406030204" pitchFamily="18" charset="0"/>
                             </a:rPr>
-                            <m:t>−</m:t>
-                          </m:r>
-                          <m:r>
-                            <a:rPr lang="pt-BR" i="1">
-                              <a:latin typeface="Cambria Math" panose="02040503050406030204" pitchFamily="18" charset="0"/>
-                            </a:rPr>
-                            <m:t>1</m:t>
+                            <m:t>−1</m:t>
                           </m:r>
                         </m:sup>
                         <m:e>
@@ -11582,13 +11561,7 @@
                       <a:rPr lang="pt-BR" i="1">
                         <a:latin typeface="Cambria Math" panose="02040503050406030204" pitchFamily="18" charset="0"/>
                       </a:rPr>
-                      <m:t>=</m:t>
-                    </m:r>
-                    <m:r>
-                      <a:rPr lang="pt-BR" i="1">
-                        <a:latin typeface="Cambria Math" panose="02040503050406030204" pitchFamily="18" charset="0"/>
-                      </a:rPr>
-                      <m:t>2</m:t>
+                      <m:t>=2</m:t>
                     </m:r>
                   </m:oMath>
                 </a14:m>
@@ -11672,13 +11645,7 @@
                       <a:rPr lang="pt-BR" i="1">
                         <a:latin typeface="Cambria Math" panose="02040503050406030204" pitchFamily="18" charset="0"/>
                       </a:rPr>
-                      <m:t>=</m:t>
-                    </m:r>
-                    <m:r>
-                      <a:rPr lang="pt-BR" i="1">
-                        <a:latin typeface="Cambria Math" panose="02040503050406030204" pitchFamily="18" charset="0"/>
-                      </a:rPr>
-                      <m:t>2</m:t>
+                      <m:t>=2</m:t>
                     </m:r>
                   </m:oMath>
                 </a14:m>
@@ -11696,7 +11663,7 @@
             </p:txBody>
           </p:sp>
         </mc:Choice>
-        <mc:Fallback>
+        <mc:Fallback xmlns="">
           <p:sp>
             <p:nvSpPr>
               <p:cNvPr id="3" name="Espaço Reservado para Conteúdo 2">
@@ -12072,8 +12039,8 @@
           </a:p>
         </p:txBody>
       </p:sp>
-      <mc:AlternateContent xmlns:mc="http://schemas.openxmlformats.org/markup-compatibility/2006">
-        <mc:Choice xmlns:a14="http://schemas.microsoft.com/office/drawing/2010/main" Requires="a14">
+      <mc:AlternateContent xmlns:mc="http://schemas.openxmlformats.org/markup-compatibility/2006" xmlns:a14="http://schemas.microsoft.com/office/drawing/2010/main">
+        <mc:Choice Requires="a14">
           <p:sp>
             <p:nvSpPr>
               <p:cNvPr id="3" name="Espaço Reservado para Conteúdo 2">
@@ -13152,14 +13119,7 @@
                             <a:latin typeface="Cambria Math" panose="02040503050406030204" pitchFamily="18" charset="0"/>
                             <a:ea typeface="Cambria Math" panose="02040503050406030204" pitchFamily="18" charset="0"/>
                           </a:rPr>
-                          <m:t>×</m:t>
-                        </m:r>
-                        <m:r>
-                          <a:rPr lang="pt-BR" i="1" dirty="0">
-                            <a:latin typeface="Cambria Math" panose="02040503050406030204" pitchFamily="18" charset="0"/>
-                            <a:ea typeface="Cambria Math" panose="02040503050406030204" pitchFamily="18" charset="0"/>
-                          </a:rPr>
-                          <m:t>1</m:t>
+                          <m:t>×1</m:t>
                         </m:r>
                       </m:sup>
                     </m:sSup>
@@ -13239,7 +13199,7 @@
             </p:txBody>
           </p:sp>
         </mc:Choice>
-        <mc:Fallback>
+        <mc:Fallback xmlns="">
           <p:sp>
             <p:nvSpPr>
               <p:cNvPr id="3" name="Espaço Reservado para Conteúdo 2">
@@ -13345,8 +13305,8 @@
           </a:p>
         </p:txBody>
       </p:sp>
-      <mc:AlternateContent xmlns:mc="http://schemas.openxmlformats.org/markup-compatibility/2006">
-        <mc:Choice xmlns:a14="http://schemas.microsoft.com/office/drawing/2010/main" Requires="a14">
+      <mc:AlternateContent xmlns:mc="http://schemas.openxmlformats.org/markup-compatibility/2006" xmlns:a14="http://schemas.microsoft.com/office/drawing/2010/main">
+        <mc:Choice Requires="a14">
           <p:sp>
             <p:nvSpPr>
               <p:cNvPr id="3" name="Espaço Reservado para Conteúdo 2">
@@ -14117,7 +14077,7 @@
             </p:txBody>
           </p:sp>
         </mc:Choice>
-        <mc:Fallback>
+        <mc:Fallback xmlns="">
           <p:sp>
             <p:nvSpPr>
               <p:cNvPr id="3" name="Espaço Reservado para Conteúdo 2">
@@ -14223,8 +14183,8 @@
           </a:p>
         </p:txBody>
       </p:sp>
-      <mc:AlternateContent xmlns:mc="http://schemas.openxmlformats.org/markup-compatibility/2006">
-        <mc:Choice xmlns:a14="http://schemas.microsoft.com/office/drawing/2010/main" Requires="a14">
+      <mc:AlternateContent xmlns:mc="http://schemas.openxmlformats.org/markup-compatibility/2006" xmlns:a14="http://schemas.microsoft.com/office/drawing/2010/main">
+        <mc:Choice Requires="a14">
           <p:sp>
             <p:nvSpPr>
               <p:cNvPr id="3" name="Espaço Reservado para Conteúdo 2">
@@ -14651,13 +14611,7 @@
                       <a:rPr lang="pt-BR" i="1">
                         <a:latin typeface="Cambria Math" panose="02040503050406030204" pitchFamily="18" charset="0"/>
                       </a:rPr>
-                      <m:t>=</m:t>
-                    </m:r>
-                    <m:r>
-                      <a:rPr lang="pt-BR" i="1">
-                        <a:latin typeface="Cambria Math" panose="02040503050406030204" pitchFamily="18" charset="0"/>
-                      </a:rPr>
-                      <m:t>3</m:t>
+                      <m:t>=3</m:t>
                     </m:r>
                   </m:oMath>
                 </a14:m>
@@ -14735,7 +14689,7 @@
             </p:txBody>
           </p:sp>
         </mc:Choice>
-        <mc:Fallback>
+        <mc:Fallback xmlns="">
           <p:sp>
             <p:nvSpPr>
               <p:cNvPr id="3" name="Espaço Reservado para Conteúdo 2">
@@ -14877,8 +14831,8 @@
           </a:p>
         </p:txBody>
       </p:sp>
-      <mc:AlternateContent xmlns:mc="http://schemas.openxmlformats.org/markup-compatibility/2006">
-        <mc:Choice xmlns:a14="http://schemas.microsoft.com/office/drawing/2010/main" Requires="a14">
+      <mc:AlternateContent xmlns:mc="http://schemas.openxmlformats.org/markup-compatibility/2006" xmlns:a14="http://schemas.microsoft.com/office/drawing/2010/main">
+        <mc:Choice Requires="a14">
           <p:sp>
             <p:nvSpPr>
               <p:cNvPr id="3" name="Espaço Reservado para Conteúdo 2">
@@ -15143,7 +15097,7 @@
             </p:txBody>
           </p:sp>
         </mc:Choice>
-        <mc:Fallback>
+        <mc:Fallback xmlns="">
           <p:sp>
             <p:nvSpPr>
               <p:cNvPr id="3" name="Espaço Reservado para Conteúdo 2">
@@ -15650,11 +15604,15 @@
           <a:lstStyle/>
           <a:p>
             <a:r>
-              <a:rPr lang="pt-BR" dirty="0"/>
+              <a:rPr lang="pt-BR" dirty="0">
+                <a:hlinkClick r:id="rId3"/>
+              </a:rPr>
               <a:t>Exemplo: </a:t>
             </a:r>
             <a:r>
-              <a:rPr lang="pt-BR" dirty="0" err="1"/>
+              <a:rPr lang="pt-BR" dirty="0" err="1">
+                <a:hlinkClick r:id="rId3"/>
+              </a:rPr>
               <a:t>regressão_softmax.ipynb</a:t>
             </a:r>
             <a:endParaRPr lang="en-US" dirty="0"/>
@@ -15696,7 +15654,7 @@
             <p:nvPr/>
           </p:nvPicPr>
           <p:blipFill>
-            <a:blip r:embed="rId3" cstate="print">
+            <a:blip r:embed="rId4" cstate="print">
               <a:extLst>
                 <a:ext uri="{28A0092B-C50C-407E-A947-70E740481C1C}">
                   <a14:useLocalDpi xmlns:a14="http://schemas.microsoft.com/office/drawing/2010/main" val="0"/>
@@ -15743,7 +15701,7 @@
             <p:nvPr/>
           </p:nvPicPr>
           <p:blipFill rotWithShape="1">
-            <a:blip r:embed="rId4" cstate="print">
+            <a:blip r:embed="rId5" cstate="print">
               <a:extLst>
                 <a:ext uri="{28A0092B-C50C-407E-A947-70E740481C1C}">
                   <a14:useLocalDpi xmlns:a14="http://schemas.microsoft.com/office/drawing/2010/main" val="0"/>
@@ -15788,7 +15746,7 @@
             <p:nvPr/>
           </p:nvPicPr>
           <p:blipFill rotWithShape="1">
-            <a:blip r:embed="rId5">
+            <a:blip r:embed="rId6">
               <a:extLst>
                 <a:ext uri="{28A0092B-C50C-407E-A947-70E740481C1C}">
                   <a14:useLocalDpi xmlns:a14="http://schemas.microsoft.com/office/drawing/2010/main" val="0"/>
@@ -16857,8 +16815,8 @@
           </a:p>
         </p:txBody>
       </p:sp>
-      <mc:AlternateContent xmlns:mc="http://schemas.openxmlformats.org/markup-compatibility/2006">
-        <mc:Choice xmlns:a14="http://schemas.microsoft.com/office/drawing/2010/main" Requires="a14">
+      <mc:AlternateContent xmlns:mc="http://schemas.openxmlformats.org/markup-compatibility/2006" xmlns:a14="http://schemas.microsoft.com/office/drawing/2010/main">
+        <mc:Choice Requires="a14">
           <p:sp>
             <p:nvSpPr>
               <p:cNvPr id="3" name="Espaço Reservado para Conteúdo 2">
@@ -17246,7 +17204,7 @@
             </p:txBody>
           </p:sp>
         </mc:Choice>
-        <mc:Fallback>
+        <mc:Fallback xmlns="">
           <p:sp>
             <p:nvSpPr>
               <p:cNvPr id="3" name="Espaço Reservado para Conteúdo 2">
@@ -17352,8 +17310,8 @@
           </a:p>
         </p:txBody>
       </p:sp>
-      <mc:AlternateContent xmlns:mc="http://schemas.openxmlformats.org/markup-compatibility/2006">
-        <mc:Choice xmlns:a14="http://schemas.microsoft.com/office/drawing/2010/main" Requires="a14">
+      <mc:AlternateContent xmlns:mc="http://schemas.openxmlformats.org/markup-compatibility/2006" xmlns:a14="http://schemas.microsoft.com/office/drawing/2010/main">
+        <mc:Choice Requires="a14">
           <p:sp>
             <p:nvSpPr>
               <p:cNvPr id="3" name="Espaço Reservado para Conteúdo 2">
@@ -18619,7 +18577,7 @@
             </p:txBody>
           </p:sp>
         </mc:Choice>
-        <mc:Fallback>
+        <mc:Fallback xmlns="">
           <p:sp>
             <p:nvSpPr>
               <p:cNvPr id="3" name="Espaço Reservado para Conteúdo 2">
@@ -18725,8 +18683,8 @@
           </a:p>
         </p:txBody>
       </p:sp>
-      <mc:AlternateContent xmlns:mc="http://schemas.openxmlformats.org/markup-compatibility/2006">
-        <mc:Choice xmlns:a14="http://schemas.microsoft.com/office/drawing/2010/main" Requires="a14">
+      <mc:AlternateContent xmlns:mc="http://schemas.openxmlformats.org/markup-compatibility/2006" xmlns:a14="http://schemas.microsoft.com/office/drawing/2010/main">
+        <mc:Choice Requires="a14">
           <p:sp>
             <p:nvSpPr>
               <p:cNvPr id="3" name="Espaço Reservado para Conteúdo 2">
@@ -19389,7 +19347,7 @@
             </p:txBody>
           </p:sp>
         </mc:Choice>
-        <mc:Fallback>
+        <mc:Fallback xmlns="">
           <p:sp>
             <p:nvSpPr>
               <p:cNvPr id="3" name="Espaço Reservado para Conteúdo 2">
@@ -19548,8 +19506,8 @@
           </a:p>
         </p:txBody>
       </p:sp>
-      <mc:AlternateContent xmlns:mc="http://schemas.openxmlformats.org/markup-compatibility/2006">
-        <mc:Choice xmlns:a14="http://schemas.microsoft.com/office/drawing/2010/main" Requires="a14">
+      <mc:AlternateContent xmlns:mc="http://schemas.openxmlformats.org/markup-compatibility/2006" xmlns:a14="http://schemas.microsoft.com/office/drawing/2010/main">
+        <mc:Choice Requires="a14">
           <p:sp>
             <p:nvSpPr>
               <p:cNvPr id="3" name="Espaço Reservado para Conteúdo 2">
@@ -19814,7 +19772,7 @@
             </p:txBody>
           </p:sp>
         </mc:Choice>
-        <mc:Fallback>
+        <mc:Fallback xmlns="">
           <p:sp>
             <p:nvSpPr>
               <p:cNvPr id="3" name="Espaço Reservado para Conteúdo 2">
@@ -20106,8 +20064,8 @@
           </a:p>
         </p:txBody>
       </p:sp>
-      <mc:AlternateContent xmlns:mc="http://schemas.openxmlformats.org/markup-compatibility/2006">
-        <mc:Choice xmlns:a14="http://schemas.microsoft.com/office/drawing/2010/main" Requires="a14">
+      <mc:AlternateContent xmlns:mc="http://schemas.openxmlformats.org/markup-compatibility/2006" xmlns:a14="http://schemas.microsoft.com/office/drawing/2010/main">
+        <mc:Choice Requires="a14">
           <p:sp>
             <p:nvSpPr>
               <p:cNvPr id="3" name="Espaço Reservado para Conteúdo 2">
@@ -20767,7 +20725,7 @@
             </p:txBody>
           </p:sp>
         </mc:Choice>
-        <mc:Fallback>
+        <mc:Fallback xmlns="">
           <p:sp>
             <p:nvSpPr>
               <p:cNvPr id="3" name="Espaço Reservado para Conteúdo 2">

--- a/slides/C24_Regressor_Softmax.pptx
+++ b/slides/C24_Regressor_Softmax.pptx
@@ -14,22 +14,22 @@
     <p:sldId id="256" r:id="rId2"/>
     <p:sldId id="325" r:id="rId3"/>
     <p:sldId id="474" r:id="rId4"/>
-    <p:sldId id="480" r:id="rId5"/>
-    <p:sldId id="481" r:id="rId6"/>
-    <p:sldId id="482" r:id="rId7"/>
-    <p:sldId id="494" r:id="rId8"/>
-    <p:sldId id="497" r:id="rId9"/>
-    <p:sldId id="499" r:id="rId10"/>
-    <p:sldId id="483" r:id="rId11"/>
-    <p:sldId id="527" r:id="rId12"/>
-    <p:sldId id="526" r:id="rId13"/>
-    <p:sldId id="504" r:id="rId14"/>
-    <p:sldId id="485" r:id="rId15"/>
-    <p:sldId id="487" r:id="rId16"/>
-    <p:sldId id="489" r:id="rId17"/>
-    <p:sldId id="488" r:id="rId18"/>
-    <p:sldId id="492" r:id="rId19"/>
-    <p:sldId id="525" r:id="rId20"/>
+    <p:sldId id="498" r:id="rId5"/>
+    <p:sldId id="499" r:id="rId6"/>
+    <p:sldId id="500" r:id="rId7"/>
+    <p:sldId id="501" r:id="rId8"/>
+    <p:sldId id="502" r:id="rId9"/>
+    <p:sldId id="503" r:id="rId10"/>
+    <p:sldId id="504" r:id="rId11"/>
+    <p:sldId id="505" r:id="rId12"/>
+    <p:sldId id="506" r:id="rId13"/>
+    <p:sldId id="507" r:id="rId14"/>
+    <p:sldId id="508" r:id="rId15"/>
+    <p:sldId id="509" r:id="rId16"/>
+    <p:sldId id="510" r:id="rId17"/>
+    <p:sldId id="511" r:id="rId18"/>
+    <p:sldId id="512" r:id="rId19"/>
+    <p:sldId id="513" r:id="rId20"/>
     <p:sldId id="456" r:id="rId21"/>
     <p:sldId id="457" r:id="rId22"/>
     <p:sldId id="293" r:id="rId23"/>
@@ -297,7 +297,7 @@
           <a:p>
             <a:fld id="{144F1436-6906-4D93-B7A2-786C327BFA14}" type="datetimeFigureOut">
               <a:rPr lang="nl-BE" smtClean="0"/>
-              <a:t>26/02/2026</a:t>
+              <a:t>6/04/2026</a:t>
             </a:fld>
             <a:endParaRPr lang="nl-BE"/>
           </a:p>
@@ -462,7 +462,7 @@
           <a:p>
             <a:fld id="{AA8CD09E-2914-4F47-B6C1-51B2C31814C9}" type="datetimeFigureOut">
               <a:rPr lang="pt-BR" smtClean="0"/>
-              <a:t>26/02/2026</a:t>
+              <a:t>06/04/2026</a:t>
             </a:fld>
             <a:endParaRPr lang="pt-BR"/>
           </a:p>
@@ -1545,7 +1545,7 @@
     </p:spTree>
     <p:extLst>
       <p:ext uri="{BB962C8B-B14F-4D97-AF65-F5344CB8AC3E}">
-        <p14:creationId xmlns:p14="http://schemas.microsoft.com/office/powerpoint/2010/main" val="1461773893"/>
+        <p14:creationId xmlns:p14="http://schemas.microsoft.com/office/powerpoint/2010/main" val="267966110"/>
       </p:ext>
     </p:extLst>
   </p:cSld>
@@ -1750,7 +1750,7 @@
     </p:spTree>
     <p:extLst>
       <p:ext uri="{BB962C8B-B14F-4D97-AF65-F5344CB8AC3E}">
-        <p14:creationId xmlns:p14="http://schemas.microsoft.com/office/powerpoint/2010/main" val="425427254"/>
+        <p14:creationId xmlns:p14="http://schemas.microsoft.com/office/powerpoint/2010/main" val="3975457805"/>
       </p:ext>
     </p:extLst>
   </p:cSld>
@@ -2046,7 +2046,7 @@
     </p:spTree>
     <p:extLst>
       <p:ext uri="{BB962C8B-B14F-4D97-AF65-F5344CB8AC3E}">
-        <p14:creationId xmlns:p14="http://schemas.microsoft.com/office/powerpoint/2010/main" val="1280925921"/>
+        <p14:creationId xmlns:p14="http://schemas.microsoft.com/office/powerpoint/2010/main" val="2096046992"/>
       </p:ext>
     </p:extLst>
   </p:cSld>
@@ -2401,7 +2401,7 @@
     </p:spTree>
     <p:extLst>
       <p:ext uri="{BB962C8B-B14F-4D97-AF65-F5344CB8AC3E}">
-        <p14:creationId xmlns:p14="http://schemas.microsoft.com/office/powerpoint/2010/main" val="2150643947"/>
+        <p14:creationId xmlns:p14="http://schemas.microsoft.com/office/powerpoint/2010/main" val="3667694707"/>
       </p:ext>
     </p:extLst>
   </p:cSld>
@@ -2814,7 +2814,7 @@
     </p:spTree>
     <p:extLst>
       <p:ext uri="{BB962C8B-B14F-4D97-AF65-F5344CB8AC3E}">
-        <p14:creationId xmlns:p14="http://schemas.microsoft.com/office/powerpoint/2010/main" val="3193659334"/>
+        <p14:creationId xmlns:p14="http://schemas.microsoft.com/office/powerpoint/2010/main" val="1697816916"/>
       </p:ext>
     </p:extLst>
   </p:cSld>
@@ -3440,7 +3440,7 @@
     </p:spTree>
     <p:extLst>
       <p:ext uri="{BB962C8B-B14F-4D97-AF65-F5344CB8AC3E}">
-        <p14:creationId xmlns:p14="http://schemas.microsoft.com/office/powerpoint/2010/main" val="3324342221"/>
+        <p14:creationId xmlns:p14="http://schemas.microsoft.com/office/powerpoint/2010/main" val="3595997734"/>
       </p:ext>
     </p:extLst>
   </p:cSld>
@@ -3623,7 +3623,7 @@
     </p:spTree>
     <p:extLst>
       <p:ext uri="{BB962C8B-B14F-4D97-AF65-F5344CB8AC3E}">
-        <p14:creationId xmlns:p14="http://schemas.microsoft.com/office/powerpoint/2010/main" val="4089069216"/>
+        <p14:creationId xmlns:p14="http://schemas.microsoft.com/office/powerpoint/2010/main" val="1477457371"/>
       </p:ext>
     </p:extLst>
   </p:cSld>
@@ -3662,536 +3662,183 @@
         </p:nvSpPr>
         <p:spPr/>
       </p:sp>
-      <p:sp>
-        <p:nvSpPr>
-          <p:cNvPr id="3" name="Espaço Reservado para Anotações 2"/>
-          <p:cNvSpPr>
-            <a:spLocks noGrp="1"/>
-          </p:cNvSpPr>
-          <p:nvPr>
-            <p:ph type="body" idx="1"/>
-          </p:nvPr>
-        </p:nvSpPr>
-        <p:spPr/>
-        <p:txBody>
-          <a:bodyPr/>
-          <a:lstStyle/>
-          <a:p>
-            <a:pPr algn="l"/>
-            <a:br>
-              <a:rPr lang="pt-BR" b="0" i="0" dirty="0">
-                <a:solidFill>
-                  <a:srgbClr val="374151"/>
-                </a:solidFill>
-                <a:effectLst/>
-                <a:latin typeface="Söhne"/>
-              </a:rPr>
-            </a:br>
-            <a:r>
-              <a:rPr lang="pt-BR" b="0" i="0" dirty="0">
-                <a:solidFill>
-                  <a:srgbClr val="374151"/>
-                </a:solidFill>
-                <a:effectLst/>
-                <a:latin typeface="Söhne"/>
-              </a:rPr>
-              <a:t>O problema da "</a:t>
-            </a:r>
-            <a:r>
-              <a:rPr lang="pt-BR" b="0" i="0" dirty="0" err="1">
-                <a:solidFill>
-                  <a:srgbClr val="374151"/>
-                </a:solidFill>
-                <a:effectLst/>
-                <a:latin typeface="Söhne"/>
-              </a:rPr>
-              <a:t>ReLU</a:t>
-            </a:r>
-            <a:r>
-              <a:rPr lang="pt-BR" b="0" i="0" dirty="0">
-                <a:solidFill>
-                  <a:srgbClr val="374151"/>
-                </a:solidFill>
-                <a:effectLst/>
-                <a:latin typeface="Söhne"/>
-              </a:rPr>
-              <a:t> agonizante", conhecido como "</a:t>
-            </a:r>
-            <a:r>
-              <a:rPr lang="pt-BR" b="0" i="0" dirty="0" err="1">
-                <a:solidFill>
-                  <a:srgbClr val="374151"/>
-                </a:solidFill>
-                <a:effectLst/>
-                <a:latin typeface="Söhne"/>
-              </a:rPr>
-              <a:t>dying</a:t>
-            </a:r>
-            <a:r>
-              <a:rPr lang="pt-BR" b="0" i="0" dirty="0">
-                <a:solidFill>
-                  <a:srgbClr val="374151"/>
-                </a:solidFill>
-                <a:effectLst/>
-                <a:latin typeface="Söhne"/>
-              </a:rPr>
-              <a:t> </a:t>
-            </a:r>
-            <a:r>
-              <a:rPr lang="pt-BR" b="0" i="0" dirty="0" err="1">
-                <a:solidFill>
-                  <a:srgbClr val="374151"/>
-                </a:solidFill>
-                <a:effectLst/>
-                <a:latin typeface="Söhne"/>
-              </a:rPr>
-              <a:t>ReLU</a:t>
-            </a:r>
-            <a:r>
-              <a:rPr lang="pt-BR" b="0" i="0" dirty="0">
-                <a:solidFill>
-                  <a:srgbClr val="374151"/>
-                </a:solidFill>
-                <a:effectLst/>
-                <a:latin typeface="Söhne"/>
-              </a:rPr>
-              <a:t> </a:t>
-            </a:r>
-            <a:r>
-              <a:rPr lang="pt-BR" b="0" i="0" dirty="0" err="1">
-                <a:solidFill>
-                  <a:srgbClr val="374151"/>
-                </a:solidFill>
-                <a:effectLst/>
-                <a:latin typeface="Söhne"/>
-              </a:rPr>
-              <a:t>problem</a:t>
-            </a:r>
-            <a:r>
-              <a:rPr lang="pt-BR" b="0" i="0" dirty="0">
-                <a:solidFill>
-                  <a:srgbClr val="374151"/>
-                </a:solidFill>
-                <a:effectLst/>
-                <a:latin typeface="Söhne"/>
-              </a:rPr>
-              <a:t>" em inglês, é uma desvantagem associada à função de ativação </a:t>
-            </a:r>
-            <a:r>
-              <a:rPr lang="pt-BR" b="0" i="0" dirty="0" err="1">
-                <a:solidFill>
-                  <a:srgbClr val="374151"/>
-                </a:solidFill>
-                <a:effectLst/>
-                <a:latin typeface="Söhne"/>
-              </a:rPr>
-              <a:t>ReLU</a:t>
-            </a:r>
-            <a:r>
-              <a:rPr lang="pt-BR" b="0" i="0" dirty="0">
-                <a:solidFill>
-                  <a:srgbClr val="374151"/>
-                </a:solidFill>
-                <a:effectLst/>
-                <a:latin typeface="Söhne"/>
-              </a:rPr>
-              <a:t> (</a:t>
-            </a:r>
-            <a:r>
-              <a:rPr lang="pt-BR" b="0" i="0" dirty="0" err="1">
-                <a:solidFill>
-                  <a:srgbClr val="374151"/>
-                </a:solidFill>
-                <a:effectLst/>
-                <a:latin typeface="Söhne"/>
-              </a:rPr>
-              <a:t>Rectified</a:t>
-            </a:r>
-            <a:r>
-              <a:rPr lang="pt-BR" b="0" i="0" dirty="0">
-                <a:solidFill>
-                  <a:srgbClr val="374151"/>
-                </a:solidFill>
-                <a:effectLst/>
-                <a:latin typeface="Söhne"/>
-              </a:rPr>
-              <a:t> Linear </a:t>
-            </a:r>
-            <a:r>
-              <a:rPr lang="pt-BR" b="0" i="0" dirty="0" err="1">
-                <a:solidFill>
-                  <a:srgbClr val="374151"/>
-                </a:solidFill>
-                <a:effectLst/>
-                <a:latin typeface="Söhne"/>
-              </a:rPr>
-              <a:t>Activation</a:t>
-            </a:r>
-            <a:r>
-              <a:rPr lang="pt-BR" b="0" i="0" dirty="0">
-                <a:solidFill>
-                  <a:srgbClr val="374151"/>
-                </a:solidFill>
-                <a:effectLst/>
-                <a:latin typeface="Söhne"/>
-              </a:rPr>
-              <a:t>) em redes neurais. Esse problema ocorre quando um grande número de neurônios em uma rede neural ativam para zero durante o treinamento e não conseguem atualizar seus pesos durante a retropropagação.</a:t>
-            </a:r>
-          </a:p>
-          <a:p>
-            <a:pPr algn="l"/>
-            <a:endParaRPr lang="pt-BR" b="0" i="0" dirty="0">
-              <a:solidFill>
-                <a:srgbClr val="374151"/>
-              </a:solidFill>
-              <a:effectLst/>
-              <a:latin typeface="Söhne"/>
-            </a:endParaRPr>
-          </a:p>
-          <a:p>
-            <a:pPr algn="l"/>
-            <a:r>
-              <a:rPr lang="pt-BR" b="0" i="0" dirty="0">
-                <a:solidFill>
-                  <a:srgbClr val="374151"/>
-                </a:solidFill>
-                <a:effectLst/>
-                <a:latin typeface="Söhne"/>
-              </a:rPr>
-              <a:t>Quando a saída de um neurônio </a:t>
-            </a:r>
-            <a:r>
-              <a:rPr lang="pt-BR" b="0" i="0" dirty="0" err="1">
-                <a:solidFill>
-                  <a:srgbClr val="374151"/>
-                </a:solidFill>
-                <a:effectLst/>
-                <a:latin typeface="Söhne"/>
-              </a:rPr>
-              <a:t>ReLU</a:t>
-            </a:r>
-            <a:r>
-              <a:rPr lang="pt-BR" b="0" i="0" dirty="0">
-                <a:solidFill>
-                  <a:srgbClr val="374151"/>
-                </a:solidFill>
-                <a:effectLst/>
-                <a:latin typeface="Söhne"/>
-              </a:rPr>
-              <a:t> é sempre zero (ou quase zero) para todos os exemplos do conjunto de dados, isso resulta em uma falta de atualização dos pesos desse neurônio durante o processo de otimização. Como resultado, o neurônio permanece inativo e não contribui para o aprendizado da rede.</a:t>
-            </a:r>
-          </a:p>
-          <a:p>
-            <a:pPr algn="l"/>
-            <a:endParaRPr lang="pt-BR" b="0" i="0" dirty="0">
-              <a:solidFill>
-                <a:srgbClr val="374151"/>
-              </a:solidFill>
-              <a:effectLst/>
-              <a:latin typeface="Söhne"/>
-            </a:endParaRPr>
-          </a:p>
-          <a:p>
-            <a:pPr algn="l"/>
-            <a:r>
-              <a:rPr lang="pt-BR" b="0" i="0" dirty="0">
-                <a:solidFill>
-                  <a:srgbClr val="374151"/>
-                </a:solidFill>
-                <a:effectLst/>
-                <a:latin typeface="Söhne"/>
-              </a:rPr>
-              <a:t>Isso pode levar a uma redução na capacidade da rede de aprender padrões complexos e representações úteis dos dados. A rede pode não ser capaz de modelar relações importantes nos dados e pode levar a um desempenho </a:t>
-            </a:r>
-            <a:r>
-              <a:rPr lang="pt-BR" b="0" i="0" dirty="0" err="1">
-                <a:solidFill>
-                  <a:srgbClr val="374151"/>
-                </a:solidFill>
-                <a:effectLst/>
-                <a:latin typeface="Söhne"/>
-              </a:rPr>
-              <a:t>subótimo</a:t>
-            </a:r>
-            <a:r>
-              <a:rPr lang="pt-BR" b="0" i="0" dirty="0">
-                <a:solidFill>
-                  <a:srgbClr val="374151"/>
-                </a:solidFill>
-                <a:effectLst/>
-                <a:latin typeface="Söhne"/>
-              </a:rPr>
-              <a:t>.</a:t>
-            </a:r>
-          </a:p>
-          <a:p>
-            <a:pPr algn="l"/>
-            <a:endParaRPr lang="pt-BR" b="0" i="0" dirty="0">
-              <a:solidFill>
-                <a:srgbClr val="374151"/>
-              </a:solidFill>
-              <a:effectLst/>
-              <a:latin typeface="Söhne"/>
-            </a:endParaRPr>
-          </a:p>
-          <a:p>
-            <a:pPr algn="l"/>
-            <a:r>
-              <a:rPr lang="pt-BR" b="0" i="0" dirty="0">
-                <a:solidFill>
-                  <a:srgbClr val="374151"/>
-                </a:solidFill>
-                <a:effectLst/>
-                <a:latin typeface="Söhne"/>
-              </a:rPr>
-              <a:t>Para mitigar o problema da </a:t>
-            </a:r>
-            <a:r>
-              <a:rPr lang="pt-BR" b="0" i="0" dirty="0" err="1">
-                <a:solidFill>
-                  <a:srgbClr val="374151"/>
-                </a:solidFill>
-                <a:effectLst/>
-                <a:latin typeface="Söhne"/>
-              </a:rPr>
-              <a:t>ReLU</a:t>
-            </a:r>
-            <a:r>
-              <a:rPr lang="pt-BR" b="0" i="0" dirty="0">
-                <a:solidFill>
-                  <a:srgbClr val="374151"/>
-                </a:solidFill>
-                <a:effectLst/>
-                <a:latin typeface="Söhne"/>
-              </a:rPr>
-              <a:t> agonizante, variantes da </a:t>
-            </a:r>
-            <a:r>
-              <a:rPr lang="pt-BR" b="0" i="0" dirty="0" err="1">
-                <a:solidFill>
-                  <a:srgbClr val="374151"/>
-                </a:solidFill>
-                <a:effectLst/>
-                <a:latin typeface="Söhne"/>
-              </a:rPr>
-              <a:t>ReLU</a:t>
-            </a:r>
-            <a:r>
-              <a:rPr lang="pt-BR" b="0" i="0" dirty="0">
-                <a:solidFill>
-                  <a:srgbClr val="374151"/>
-                </a:solidFill>
-                <a:effectLst/>
-                <a:latin typeface="Söhne"/>
-              </a:rPr>
-              <a:t>, como a </a:t>
-            </a:r>
-            <a:r>
-              <a:rPr lang="pt-BR" b="0" i="0" dirty="0" err="1">
-                <a:solidFill>
-                  <a:srgbClr val="374151"/>
-                </a:solidFill>
-                <a:effectLst/>
-                <a:latin typeface="Söhne"/>
-              </a:rPr>
-              <a:t>Leaky</a:t>
-            </a:r>
-            <a:r>
-              <a:rPr lang="pt-BR" b="0" i="0" dirty="0">
-                <a:solidFill>
-                  <a:srgbClr val="374151"/>
-                </a:solidFill>
-                <a:effectLst/>
-                <a:latin typeface="Söhne"/>
-              </a:rPr>
-              <a:t> </a:t>
-            </a:r>
-            <a:r>
-              <a:rPr lang="pt-BR" b="0" i="0" dirty="0" err="1">
-                <a:solidFill>
-                  <a:srgbClr val="374151"/>
-                </a:solidFill>
-                <a:effectLst/>
-                <a:latin typeface="Söhne"/>
-              </a:rPr>
-              <a:t>ReLU</a:t>
-            </a:r>
-            <a:r>
-              <a:rPr lang="pt-BR" b="0" i="0" dirty="0">
-                <a:solidFill>
-                  <a:srgbClr val="374151"/>
-                </a:solidFill>
-                <a:effectLst/>
-                <a:latin typeface="Söhne"/>
-              </a:rPr>
-              <a:t>, </a:t>
-            </a:r>
-            <a:r>
-              <a:rPr lang="pt-BR" b="0" i="0" dirty="0" err="1">
-                <a:solidFill>
-                  <a:srgbClr val="374151"/>
-                </a:solidFill>
-                <a:effectLst/>
-                <a:latin typeface="Söhne"/>
-              </a:rPr>
-              <a:t>Parametric</a:t>
-            </a:r>
-            <a:r>
-              <a:rPr lang="pt-BR" b="0" i="0" dirty="0">
-                <a:solidFill>
-                  <a:srgbClr val="374151"/>
-                </a:solidFill>
-                <a:effectLst/>
-                <a:latin typeface="Söhne"/>
-              </a:rPr>
-              <a:t> </a:t>
-            </a:r>
-            <a:r>
-              <a:rPr lang="pt-BR" b="0" i="0" dirty="0" err="1">
-                <a:solidFill>
-                  <a:srgbClr val="374151"/>
-                </a:solidFill>
-                <a:effectLst/>
-                <a:latin typeface="Söhne"/>
-              </a:rPr>
-              <a:t>ReLU</a:t>
-            </a:r>
-            <a:r>
-              <a:rPr lang="pt-BR" b="0" i="0" dirty="0">
-                <a:solidFill>
-                  <a:srgbClr val="374151"/>
-                </a:solidFill>
-                <a:effectLst/>
-                <a:latin typeface="Söhne"/>
-              </a:rPr>
-              <a:t> e </a:t>
-            </a:r>
-            <a:r>
-              <a:rPr lang="pt-BR" b="0" i="0" dirty="0" err="1">
-                <a:solidFill>
-                  <a:srgbClr val="374151"/>
-                </a:solidFill>
-                <a:effectLst/>
-                <a:latin typeface="Söhne"/>
-              </a:rPr>
-              <a:t>Exponential</a:t>
-            </a:r>
-            <a:r>
-              <a:rPr lang="pt-BR" b="0" i="0" dirty="0">
-                <a:solidFill>
-                  <a:srgbClr val="374151"/>
-                </a:solidFill>
-                <a:effectLst/>
-                <a:latin typeface="Söhne"/>
-              </a:rPr>
-              <a:t> Linear </a:t>
-            </a:r>
-            <a:r>
-              <a:rPr lang="pt-BR" b="0" i="0" dirty="0" err="1">
-                <a:solidFill>
-                  <a:srgbClr val="374151"/>
-                </a:solidFill>
-                <a:effectLst/>
-                <a:latin typeface="Söhne"/>
-              </a:rPr>
-              <a:t>Units</a:t>
-            </a:r>
-            <a:r>
-              <a:rPr lang="pt-BR" b="0" i="0" dirty="0">
-                <a:solidFill>
-                  <a:srgbClr val="374151"/>
-                </a:solidFill>
-                <a:effectLst/>
-                <a:latin typeface="Söhne"/>
-              </a:rPr>
-              <a:t> (ELU), foram propostas. Essas variantes buscam resolver o problema de ativação constante igual a zero, permitindo que os neurônios continuem aprendendo mesmo quando estão desativados para algumas entradas.</a:t>
-            </a:r>
-          </a:p>
-          <a:p>
-            <a:pPr algn="l"/>
-            <a:endParaRPr lang="pt-BR" b="0" i="0" dirty="0">
-              <a:solidFill>
-                <a:srgbClr val="374151"/>
-              </a:solidFill>
-              <a:effectLst/>
-              <a:latin typeface="Söhne"/>
-            </a:endParaRPr>
-          </a:p>
-          <a:p>
-            <a:pPr algn="l"/>
-            <a:r>
-              <a:rPr lang="pt-BR" b="0" i="0" dirty="0">
-                <a:solidFill>
-                  <a:srgbClr val="374151"/>
-                </a:solidFill>
-                <a:effectLst/>
-                <a:latin typeface="Söhne"/>
-              </a:rPr>
-              <a:t>Em resumo, o problema da </a:t>
-            </a:r>
-            <a:r>
-              <a:rPr lang="pt-BR" b="0" i="0" dirty="0" err="1">
-                <a:solidFill>
-                  <a:srgbClr val="374151"/>
-                </a:solidFill>
-                <a:effectLst/>
-                <a:latin typeface="Söhne"/>
-              </a:rPr>
-              <a:t>ReLU</a:t>
-            </a:r>
-            <a:r>
-              <a:rPr lang="pt-BR" b="0" i="0" dirty="0">
-                <a:solidFill>
-                  <a:srgbClr val="374151"/>
-                </a:solidFill>
-                <a:effectLst/>
-                <a:latin typeface="Söhne"/>
-              </a:rPr>
-              <a:t> agonizante refere-se à inatividade permanente de neurônios </a:t>
-            </a:r>
-            <a:r>
-              <a:rPr lang="pt-BR" b="0" i="0" dirty="0" err="1">
-                <a:solidFill>
-                  <a:srgbClr val="374151"/>
-                </a:solidFill>
-                <a:effectLst/>
-                <a:latin typeface="Söhne"/>
-              </a:rPr>
-              <a:t>ReLU</a:t>
-            </a:r>
-            <a:r>
-              <a:rPr lang="pt-BR" b="0" i="0" dirty="0">
-                <a:solidFill>
-                  <a:srgbClr val="374151"/>
-                </a:solidFill>
-                <a:effectLst/>
-                <a:latin typeface="Söhne"/>
-              </a:rPr>
-              <a:t> durante o treinamento, o que pode prejudicar o desempenho da rede neural. Variantes da </a:t>
-            </a:r>
-            <a:r>
-              <a:rPr lang="pt-BR" b="0" i="0" dirty="0" err="1">
-                <a:solidFill>
-                  <a:srgbClr val="374151"/>
-                </a:solidFill>
-                <a:effectLst/>
-                <a:latin typeface="Söhne"/>
-              </a:rPr>
-              <a:t>ReLU</a:t>
-            </a:r>
-            <a:r>
-              <a:rPr lang="pt-BR" b="0" i="0" dirty="0">
-                <a:solidFill>
-                  <a:srgbClr val="374151"/>
-                </a:solidFill>
-                <a:effectLst/>
-                <a:latin typeface="Söhne"/>
-              </a:rPr>
-              <a:t> foram desenvolvidas para contornar esse problema e permitir uma aprendizagem mais eficaz.</a:t>
-            </a:r>
-          </a:p>
-        </p:txBody>
-      </p:sp>
+      <mc:AlternateContent xmlns:mc="http://schemas.openxmlformats.org/markup-compatibility/2006" xmlns:a14="http://schemas.microsoft.com/office/drawing/2010/main">
+        <mc:Choice Requires="a14">
+          <p:sp>
+            <p:nvSpPr>
+              <p:cNvPr id="3" name="Espaço Reservado para Anotações 2"/>
+              <p:cNvSpPr>
+                <a:spLocks noGrp="1"/>
+              </p:cNvSpPr>
+              <p:nvPr>
+                <p:ph type="body" idx="1"/>
+              </p:nvPr>
+            </p:nvSpPr>
+            <p:spPr/>
+            <p:txBody>
+              <a:bodyPr/>
+              <a:lstStyle/>
+              <a:p>
+                <a:pPr marL="0" marR="0" lvl="0" indent="0" algn="l" defTabSz="914400" rtl="0" eaLnBrk="1" fontAlgn="auto" latinLnBrk="0" hangingPunct="1">
+                  <a:lnSpc>
+                    <a:spcPct val="100000"/>
+                  </a:lnSpc>
+                  <a:spcBef>
+                    <a:spcPts val="0"/>
+                  </a:spcBef>
+                  <a:spcAft>
+                    <a:spcPts val="0"/>
+                  </a:spcAft>
+                  <a:buClrTx/>
+                  <a:buSzTx/>
+                  <a:buFontTx/>
+                  <a:buNone/>
+                  <a:tabLst/>
+                  <a:defRPr/>
+                </a:pPr>
+                <a:r>
+                  <a:rPr lang="pt-BR" dirty="0"/>
+                  <a:t>O somatório de termos exponenciais no denominador </a:t>
+                </a:r>
+                <a:r>
+                  <a:rPr lang="pt-BR" b="1" dirty="0">
+                    <a:solidFill>
+                      <a:srgbClr val="00B050"/>
+                    </a:solidFill>
+                  </a:rPr>
+                  <a:t>normaliza</a:t>
+                </a:r>
+                <a:r>
+                  <a:rPr lang="pt-BR" dirty="0"/>
+                  <a:t> o valor da </a:t>
+                </a:r>
+                <a:r>
+                  <a:rPr lang="pt-BR" i="1" dirty="0"/>
+                  <a:t>q</a:t>
+                </a:r>
+                <a:r>
+                  <a:rPr lang="pt-BR" dirty="0"/>
+                  <a:t>-ésima saída de tal forma que o somatório das </a:t>
+                </a:r>
+                <a14:m>
+                  <m:oMath xmlns:m="http://schemas.openxmlformats.org/officeDocument/2006/math">
+                    <m:r>
+                      <a:rPr lang="pt-BR" i="1">
+                        <a:latin typeface="Cambria Math" panose="02040503050406030204" pitchFamily="18" charset="0"/>
+                      </a:rPr>
+                      <m:t>𝑄</m:t>
+                    </m:r>
+                  </m:oMath>
+                </a14:m>
+                <a:r>
+                  <a:rPr lang="pt-BR" dirty="0"/>
+                  <a:t> saídas seja igual a 1.</a:t>
+                </a:r>
+              </a:p>
+              <a:p>
+                <a:pPr algn="l"/>
+                <a:endParaRPr lang="pt-BR" b="0" i="0" dirty="0">
+                  <a:solidFill>
+                    <a:srgbClr val="374151"/>
+                  </a:solidFill>
+                  <a:effectLst/>
+                  <a:latin typeface="Söhne"/>
+                </a:endParaRPr>
+              </a:p>
+            </p:txBody>
+          </p:sp>
+        </mc:Choice>
+        <mc:Fallback xmlns="">
+          <p:sp>
+            <p:nvSpPr>
+              <p:cNvPr id="3" name="Espaço Reservado para Anotações 2"/>
+              <p:cNvSpPr>
+                <a:spLocks noGrp="1"/>
+              </p:cNvSpPr>
+              <p:nvPr>
+                <p:ph type="body" idx="1"/>
+              </p:nvPr>
+            </p:nvSpPr>
+            <p:spPr/>
+            <p:txBody>
+              <a:bodyPr/>
+              <a:lstStyle/>
+              <a:p>
+                <a:pPr marL="0" marR="0" lvl="0" indent="0" algn="l" defTabSz="914400" rtl="0" eaLnBrk="1" fontAlgn="auto" latinLnBrk="0" hangingPunct="1">
+                  <a:lnSpc>
+                    <a:spcPct val="100000"/>
+                  </a:lnSpc>
+                  <a:spcBef>
+                    <a:spcPts val="0"/>
+                  </a:spcBef>
+                  <a:spcAft>
+                    <a:spcPts val="0"/>
+                  </a:spcAft>
+                  <a:buClrTx/>
+                  <a:buSzTx/>
+                  <a:buFontTx/>
+                  <a:buNone/>
+                  <a:tabLst/>
+                  <a:defRPr/>
+                </a:pPr>
+                <a:r>
+                  <a:rPr lang="pt-BR" dirty="0" smtClean="0"/>
+                  <a:t>O </a:t>
+                </a:r>
+                <a:r>
+                  <a:rPr lang="pt-BR" dirty="0"/>
+                  <a:t>somatório de termos exponenciais no denominador </a:t>
+                </a:r>
+                <a:r>
+                  <a:rPr lang="pt-BR" b="1" dirty="0">
+                    <a:solidFill>
+                      <a:srgbClr val="00B050"/>
+                    </a:solidFill>
+                  </a:rPr>
+                  <a:t>normaliza</a:t>
+                </a:r>
+                <a:r>
+                  <a:rPr lang="pt-BR" dirty="0"/>
+                  <a:t> o valor da </a:t>
+                </a:r>
+                <a:r>
+                  <a:rPr lang="pt-BR" i="1" dirty="0"/>
+                  <a:t>q</a:t>
+                </a:r>
+                <a:r>
+                  <a:rPr lang="pt-BR" dirty="0"/>
+                  <a:t>-ésima saída de tal forma que o somatório das </a:t>
+                </a:r>
+                <a:r>
+                  <a:rPr lang="pt-BR" i="0">
+                    <a:latin typeface="Cambria Math" panose="02040503050406030204" pitchFamily="18" charset="0"/>
+                  </a:rPr>
+                  <a:t>𝑄</a:t>
+                </a:r>
+                <a:r>
+                  <a:rPr lang="pt-BR" dirty="0"/>
+                  <a:t> saídas seja igual a </a:t>
+                </a:r>
+                <a:r>
+                  <a:rPr lang="pt-BR" dirty="0" smtClean="0"/>
+                  <a:t>1.</a:t>
+                </a:r>
+                <a:endParaRPr lang="pt-BR" dirty="0"/>
+              </a:p>
+              <a:p>
+                <a:pPr algn="l"/>
+                <a:endParaRPr lang="pt-BR" b="0" i="0" dirty="0">
+                  <a:solidFill>
+                    <a:srgbClr val="374151"/>
+                  </a:solidFill>
+                  <a:effectLst/>
+                  <a:latin typeface="Söhne"/>
+                </a:endParaRPr>
+              </a:p>
+            </p:txBody>
+          </p:sp>
+        </mc:Fallback>
+      </mc:AlternateContent>
       <p:sp>
         <p:nvSpPr>
           <p:cNvPr id="4" name="Espaço Reservado para Número de Slide 3"/>
@@ -4218,7 +3865,7 @@
     </p:spTree>
     <p:extLst>
       <p:ext uri="{BB962C8B-B14F-4D97-AF65-F5344CB8AC3E}">
-        <p14:creationId xmlns:p14="http://schemas.microsoft.com/office/powerpoint/2010/main" val="1048332111"/>
+        <p14:creationId xmlns:p14="http://schemas.microsoft.com/office/powerpoint/2010/main" val="3334510121"/>
       </p:ext>
     </p:extLst>
   </p:cSld>
@@ -4567,7 +4214,7 @@
     </p:spTree>
     <p:extLst>
       <p:ext uri="{BB962C8B-B14F-4D97-AF65-F5344CB8AC3E}">
-        <p14:creationId xmlns:p14="http://schemas.microsoft.com/office/powerpoint/2010/main" val="1647675221"/>
+        <p14:creationId xmlns:p14="http://schemas.microsoft.com/office/powerpoint/2010/main" val="1369131613"/>
       </p:ext>
     </p:extLst>
   </p:cSld>
@@ -4750,7 +4397,7 @@
     </p:spTree>
     <p:extLst>
       <p:ext uri="{BB962C8B-B14F-4D97-AF65-F5344CB8AC3E}">
-        <p14:creationId xmlns:p14="http://schemas.microsoft.com/office/powerpoint/2010/main" val="1589566291"/>
+        <p14:creationId xmlns:p14="http://schemas.microsoft.com/office/powerpoint/2010/main" val="2468952241"/>
       </p:ext>
     </p:extLst>
   </p:cSld>
@@ -4884,7 +4531,7 @@
     </p:spTree>
     <p:extLst>
       <p:ext uri="{BB962C8B-B14F-4D97-AF65-F5344CB8AC3E}">
-        <p14:creationId xmlns:p14="http://schemas.microsoft.com/office/powerpoint/2010/main" val="383689250"/>
+        <p14:creationId xmlns:p14="http://schemas.microsoft.com/office/powerpoint/2010/main" val="1571646222"/>
       </p:ext>
     </p:extLst>
   </p:cSld>
@@ -5095,7 +4742,7 @@
     </p:spTree>
     <p:extLst>
       <p:ext uri="{BB962C8B-B14F-4D97-AF65-F5344CB8AC3E}">
-        <p14:creationId xmlns:p14="http://schemas.microsoft.com/office/powerpoint/2010/main" val="3900594606"/>
+        <p14:creationId xmlns:p14="http://schemas.microsoft.com/office/powerpoint/2010/main" val="1294099924"/>
       </p:ext>
     </p:extLst>
   </p:cSld>
@@ -5252,7 +4899,7 @@
           <a:p>
             <a:fld id="{63289F7E-B80B-496E-81B4-D396C37C9454}" type="datetimeFigureOut">
               <a:rPr lang="pt-BR" smtClean="0"/>
-              <a:t>26/02/2026</a:t>
+              <a:t>06/04/2026</a:t>
             </a:fld>
             <a:endParaRPr lang="pt-BR"/>
           </a:p>
@@ -5450,7 +5097,7 @@
           <a:p>
             <a:fld id="{63289F7E-B80B-496E-81B4-D396C37C9454}" type="datetimeFigureOut">
               <a:rPr lang="pt-BR" smtClean="0"/>
-              <a:t>26/02/2026</a:t>
+              <a:t>06/04/2026</a:t>
             </a:fld>
             <a:endParaRPr lang="pt-BR"/>
           </a:p>
@@ -5658,7 +5305,7 @@
           <a:p>
             <a:fld id="{63289F7E-B80B-496E-81B4-D396C37C9454}" type="datetimeFigureOut">
               <a:rPr lang="pt-BR" smtClean="0"/>
-              <a:t>26/02/2026</a:t>
+              <a:t>06/04/2026</a:t>
             </a:fld>
             <a:endParaRPr lang="pt-BR"/>
           </a:p>
@@ -5856,7 +5503,7 @@
           <a:p>
             <a:fld id="{63289F7E-B80B-496E-81B4-D396C37C9454}" type="datetimeFigureOut">
               <a:rPr lang="pt-BR" smtClean="0"/>
-              <a:t>26/02/2026</a:t>
+              <a:t>06/04/2026</a:t>
             </a:fld>
             <a:endParaRPr lang="pt-BR"/>
           </a:p>
@@ -6131,7 +5778,7 @@
           <a:p>
             <a:fld id="{63289F7E-B80B-496E-81B4-D396C37C9454}" type="datetimeFigureOut">
               <a:rPr lang="pt-BR" smtClean="0"/>
-              <a:t>26/02/2026</a:t>
+              <a:t>06/04/2026</a:t>
             </a:fld>
             <a:endParaRPr lang="pt-BR"/>
           </a:p>
@@ -6396,7 +6043,7 @@
           <a:p>
             <a:fld id="{63289F7E-B80B-496E-81B4-D396C37C9454}" type="datetimeFigureOut">
               <a:rPr lang="pt-BR" smtClean="0"/>
-              <a:t>26/02/2026</a:t>
+              <a:t>06/04/2026</a:t>
             </a:fld>
             <a:endParaRPr lang="pt-BR"/>
           </a:p>
@@ -6808,7 +6455,7 @@
           <a:p>
             <a:fld id="{63289F7E-B80B-496E-81B4-D396C37C9454}" type="datetimeFigureOut">
               <a:rPr lang="pt-BR" smtClean="0"/>
-              <a:t>26/02/2026</a:t>
+              <a:t>06/04/2026</a:t>
             </a:fld>
             <a:endParaRPr lang="pt-BR"/>
           </a:p>
@@ -6949,7 +6596,7 @@
           <a:p>
             <a:fld id="{63289F7E-B80B-496E-81B4-D396C37C9454}" type="datetimeFigureOut">
               <a:rPr lang="pt-BR" smtClean="0"/>
-              <a:t>26/02/2026</a:t>
+              <a:t>06/04/2026</a:t>
             </a:fld>
             <a:endParaRPr lang="pt-BR"/>
           </a:p>
@@ -7062,7 +6709,7 @@
           <a:p>
             <a:fld id="{63289F7E-B80B-496E-81B4-D396C37C9454}" type="datetimeFigureOut">
               <a:rPr lang="pt-BR" smtClean="0"/>
-              <a:t>26/02/2026</a:t>
+              <a:t>06/04/2026</a:t>
             </a:fld>
             <a:endParaRPr lang="pt-BR"/>
           </a:p>
@@ -7373,7 +7020,7 @@
           <a:p>
             <a:fld id="{63289F7E-B80B-496E-81B4-D396C37C9454}" type="datetimeFigureOut">
               <a:rPr lang="pt-BR" smtClean="0"/>
-              <a:t>26/02/2026</a:t>
+              <a:t>06/04/2026</a:t>
             </a:fld>
             <a:endParaRPr lang="pt-BR"/>
           </a:p>
@@ -7661,7 +7308,7 @@
           <a:p>
             <a:fld id="{63289F7E-B80B-496E-81B4-D396C37C9454}" type="datetimeFigureOut">
               <a:rPr lang="pt-BR" smtClean="0"/>
-              <a:t>26/02/2026</a:t>
+              <a:t>06/04/2026</a:t>
             </a:fld>
             <a:endParaRPr lang="pt-BR"/>
           </a:p>
@@ -7902,7 +7549,7 @@
           <a:p>
             <a:fld id="{63289F7E-B80B-496E-81B4-D396C37C9454}" type="datetimeFigureOut">
               <a:rPr lang="pt-BR" smtClean="0"/>
-              <a:t>26/02/2026</a:t>
+              <a:t>06/04/2026</a:t>
             </a:fld>
             <a:endParaRPr lang="pt-BR"/>
           </a:p>
@@ -8636,7 +8283,7 @@
                 </a:r>
                 <a:r>
                   <a:rPr lang="pt-BR" dirty="0"/>
-                  <a:t> (i.e., </a:t>
+                  <a:t> (i.e., a </a:t>
                 </a:r>
                 <a:r>
                   <a:rPr lang="pt-BR" b="1" dirty="0"/>
@@ -8708,7 +8355,7 @@
               <p:cNvPr id="3" name="Espaço Reservado para Conteúdo 2">
                 <a:extLst>
                   <a:ext uri="{FF2B5EF4-FFF2-40B4-BE49-F238E27FC236}">
-                    <a16:creationId xmlns:a16="http://schemas.microsoft.com/office/drawing/2014/main" id="{B3535727-BB24-BB15-5C03-3DA9A3F9A09A}"/>
+                    <a16:creationId xmlns="" xmlns:a16="http://schemas.microsoft.com/office/drawing/2014/main" xmlns:a14="http://schemas.microsoft.com/office/drawing/2010/main" id="{B3535727-BB24-BB15-5C03-3DA9A3F9A09A}"/>
                   </a:ext>
                 </a:extLst>
               </p:cNvPr>
@@ -8724,10 +8371,10 @@
                 <a:off x="6096001" y="1825624"/>
                 <a:ext cx="5998028" cy="5032375"/>
               </a:xfrm>
-              <a:blipFill>
+              <a:blipFill rotWithShape="0">
                 <a:blip r:embed="rId3"/>
                 <a:stretch>
-                  <a:fillRect l="-1829" t="-1937" r="-2846"/>
+                  <a:fillRect l="-1829" t="-1937" r="-1728"/>
                 </a:stretch>
               </a:blipFill>
             </p:spPr>
@@ -8736,7 +8383,7 @@
               <a:lstStyle/>
               <a:p>
                 <a:r>
-                  <a:rPr lang="en-US">
+                  <a:rPr lang="pt-BR">
                     <a:noFill/>
                   </a:rPr>
                   <a:t> </a:t>
@@ -8785,7 +8432,7 @@
     </p:spTree>
     <p:extLst>
       <p:ext uri="{BB962C8B-B14F-4D97-AF65-F5344CB8AC3E}">
-        <p14:creationId xmlns:p14="http://schemas.microsoft.com/office/powerpoint/2010/main" val="4086717671"/>
+        <p14:creationId xmlns:p14="http://schemas.microsoft.com/office/powerpoint/2010/main" val="765198942"/>
       </p:ext>
     </p:extLst>
   </p:cSld>
@@ -8899,7 +8546,19 @@
               <a:p>
                 <a:r>
                   <a:rPr lang="pt-BR" dirty="0"/>
-                  <a:t>Usamos a generalização da função da entropia cruzada, chamada de </a:t>
+                  <a:t>Usamos a </a:t>
+                </a:r>
+                <a:r>
+                  <a:rPr lang="pt-BR" b="1" dirty="0">
+                    <a:solidFill>
+                      <a:schemeClr val="accent2"/>
+                    </a:solidFill>
+                  </a:rPr>
+                  <a:t>generalização da função da entropia cruzada</a:t>
+                </a:r>
+                <a:r>
+                  <a:rPr lang="pt-BR" dirty="0"/>
+                  <a:t>, chamada de </a:t>
                 </a:r>
                 <a:r>
                   <a:rPr lang="pt-BR" b="1" dirty="0"/>
@@ -9155,30 +8814,43 @@
                                       </m:ctrlPr>
                                     </m:dPr>
                                     <m:e>
-                                      <m:acc>
-                                        <m:accPr>
-                                          <m:chr m:val="̂"/>
+                                      <m:sSub>
+                                        <m:sSubPr>
                                           <m:ctrlPr>
-                                            <a:rPr lang="pt-BR" i="1">
+                                            <a:rPr lang="pt-BR" i="1" smtClean="0">
                                               <a:latin typeface="Cambria Math" panose="02040503050406030204" pitchFamily="18" charset="0"/>
                                             </a:rPr>
                                           </m:ctrlPr>
-                                        </m:accPr>
+                                        </m:sSubPr>
                                         <m:e>
+                                          <m:acc>
+                                            <m:accPr>
+                                              <m:chr m:val="̂"/>
+                                              <m:ctrlPr>
+                                                <a:rPr lang="pt-BR" i="1">
+                                                  <a:latin typeface="Cambria Math" panose="02040503050406030204" pitchFamily="18" charset="0"/>
+                                                </a:rPr>
+                                              </m:ctrlPr>
+                                            </m:accPr>
+                                            <m:e>
+                                              <m:r>
+                                                <a:rPr lang="pt-BR" i="1">
+                                                  <a:latin typeface="Cambria Math" panose="02040503050406030204" pitchFamily="18" charset="0"/>
+                                                </a:rPr>
+                                                <m:t>𝑦</m:t>
+                                              </m:r>
+                                            </m:e>
+                                          </m:acc>
+                                        </m:e>
+                                        <m:sub>
                                           <m:r>
-                                            <a:rPr lang="pt-BR" i="1">
+                                            <a:rPr lang="pt-BR" b="0" i="1" smtClean="0">
                                               <a:latin typeface="Cambria Math" panose="02040503050406030204" pitchFamily="18" charset="0"/>
                                             </a:rPr>
-                                            <m:t>𝑦</m:t>
+                                            <m:t>𝑞</m:t>
                                           </m:r>
-                                        </m:e>
-                                      </m:acc>
-                                      <m:r>
-                                        <a:rPr lang="pt-BR" i="1">
-                                          <a:latin typeface="Cambria Math" panose="02040503050406030204" pitchFamily="18" charset="0"/>
-                                        </a:rPr>
-                                        <m:t> </m:t>
-                                      </m:r>
+                                        </m:sub>
+                                      </m:sSub>
                                       <m:d>
                                         <m:dPr>
                                           <m:ctrlPr>
@@ -9380,30 +9052,43 @@
                         </m:ctrlPr>
                       </m:sSubSupPr>
                       <m:e>
-                        <m:acc>
-                          <m:accPr>
-                            <m:chr m:val="̂"/>
+                        <m:sSub>
+                          <m:sSubPr>
                             <m:ctrlPr>
                               <a:rPr lang="pt-BR" i="1">
                                 <a:latin typeface="Cambria Math" panose="02040503050406030204" pitchFamily="18" charset="0"/>
                               </a:rPr>
                             </m:ctrlPr>
-                          </m:accPr>
+                          </m:sSubPr>
                           <m:e>
+                            <m:acc>
+                              <m:accPr>
+                                <m:chr m:val="̂"/>
+                                <m:ctrlPr>
+                                  <a:rPr lang="pt-BR" i="1">
+                                    <a:latin typeface="Cambria Math" panose="02040503050406030204" pitchFamily="18" charset="0"/>
+                                  </a:rPr>
+                                </m:ctrlPr>
+                              </m:accPr>
+                              <m:e>
+                                <m:r>
+                                  <a:rPr lang="pt-BR" i="1">
+                                    <a:latin typeface="Cambria Math" panose="02040503050406030204" pitchFamily="18" charset="0"/>
+                                  </a:rPr>
+                                  <m:t>𝑦</m:t>
+                                </m:r>
+                              </m:e>
+                            </m:acc>
+                          </m:e>
+                          <m:sub>
                             <m:r>
-                              <a:rPr lang="pt-BR" b="0" i="1">
+                              <a:rPr lang="pt-BR" i="1">
                                 <a:latin typeface="Cambria Math" panose="02040503050406030204" pitchFamily="18" charset="0"/>
                               </a:rPr>
-                              <m:t>𝑦</m:t>
+                              <m:t>𝑞</m:t>
                             </m:r>
-                          </m:e>
-                        </m:acc>
-                        <m:r>
-                          <a:rPr lang="pt-BR" b="0" i="1">
-                            <a:latin typeface="Cambria Math" panose="02040503050406030204" pitchFamily="18" charset="0"/>
-                          </a:rPr>
-                          <m:t> </m:t>
-                        </m:r>
+                          </m:sub>
+                        </m:sSub>
                         <m:d>
                           <m:dPr>
                             <m:ctrlPr>
@@ -9534,8 +9219,12 @@
                   <a:buChar char="§"/>
                 </a:pPr>
                 <a:r>
-                  <a:rPr lang="pt-BR" dirty="0"/>
-                  <a:t>O erro tende a 0 quando </a:t>
+                  <a:rPr lang="pt-BR" b="1" dirty="0"/>
+                  <a:t>OBS</a:t>
+                </a:r>
+                <a:r>
+                  <a:rPr lang="pt-BR" dirty="0"/>
+                  <a:t>.: O erro tende a 0 quando </a:t>
                 </a:r>
                 <a14:m>
                   <m:oMath xmlns:m="http://schemas.openxmlformats.org/officeDocument/2006/math">
@@ -9611,7 +9300,7 @@
                 </a14:m>
                 <a:r>
                   <a:rPr lang="pt-BR" dirty="0"/>
-                  <a:t> tende a 1, caso contrário, o erro aumenta.</a:t>
+                  <a:t> tende a 1, caso contrário, ele aumenta.</a:t>
                 </a:r>
               </a:p>
             </p:txBody>
@@ -9623,7 +9312,7 @@
               <p:cNvPr id="3" name="Content Placeholder 2">
                 <a:extLst>
                   <a:ext uri="{FF2B5EF4-FFF2-40B4-BE49-F238E27FC236}">
-                    <a16:creationId xmlns:a16="http://schemas.microsoft.com/office/drawing/2014/main" id="{34B1DEA3-BAAD-D90C-CD9D-99A5A24F4544}"/>
+                    <a16:creationId xmlns="" xmlns:a16="http://schemas.microsoft.com/office/drawing/2014/main" xmlns:a14="http://schemas.microsoft.com/office/drawing/2010/main" id="{34B1DEA3-BAAD-D90C-CD9D-99A5A24F4544}"/>
                   </a:ext>
                 </a:extLst>
               </p:cNvPr>
@@ -9639,10 +9328,10 @@
                 <a:off x="838199" y="1825624"/>
                 <a:ext cx="11353801" cy="5032375"/>
               </a:xfrm>
-              <a:blipFill>
+              <a:blipFill rotWithShape="0">
                 <a:blip r:embed="rId2"/>
                 <a:stretch>
-                  <a:fillRect l="-1074" t="-1937" r="-590" b="-2179"/>
+                  <a:fillRect l="-1074" t="-1937" r="-913" b="-2300"/>
                 </a:stretch>
               </a:blipFill>
             </p:spPr>
@@ -9651,7 +9340,7 @@
               <a:lstStyle/>
               <a:p>
                 <a:r>
-                  <a:rPr lang="en-US">
+                  <a:rPr lang="pt-BR">
                     <a:noFill/>
                   </a:rPr>
                   <a:t> </a:t>
@@ -9664,7 +9353,7 @@
     </p:spTree>
     <p:extLst>
       <p:ext uri="{BB962C8B-B14F-4D97-AF65-F5344CB8AC3E}">
-        <p14:creationId xmlns:p14="http://schemas.microsoft.com/office/powerpoint/2010/main" val="1158751912"/>
+        <p14:creationId xmlns:p14="http://schemas.microsoft.com/office/powerpoint/2010/main" val="2973274311"/>
       </p:ext>
     </p:extLst>
   </p:cSld>
@@ -9738,7 +9427,12 @@
                 <p:ph idx="1"/>
               </p:nvPr>
             </p:nvSpPr>
-            <p:spPr/>
+            <p:spPr>
+              <a:xfrm>
+                <a:off x="838199" y="1840373"/>
+                <a:ext cx="11152239" cy="4351338"/>
+              </a:xfrm>
+            </p:spPr>
             <p:txBody>
               <a:bodyPr/>
               <a:lstStyle/>
@@ -9987,30 +9681,43 @@
                                       </m:ctrlPr>
                                     </m:dPr>
                                     <m:e>
-                                      <m:acc>
-                                        <m:accPr>
-                                          <m:chr m:val="̂"/>
+                                      <m:sSub>
+                                        <m:sSubPr>
                                           <m:ctrlPr>
                                             <a:rPr lang="pt-BR" i="1">
                                               <a:latin typeface="Cambria Math" panose="02040503050406030204" pitchFamily="18" charset="0"/>
                                             </a:rPr>
                                           </m:ctrlPr>
-                                        </m:accPr>
+                                        </m:sSubPr>
                                         <m:e>
+                                          <m:acc>
+                                            <m:accPr>
+                                              <m:chr m:val="̂"/>
+                                              <m:ctrlPr>
+                                                <a:rPr lang="pt-BR" i="1">
+                                                  <a:latin typeface="Cambria Math" panose="02040503050406030204" pitchFamily="18" charset="0"/>
+                                                </a:rPr>
+                                              </m:ctrlPr>
+                                            </m:accPr>
+                                            <m:e>
+                                              <m:r>
+                                                <a:rPr lang="pt-BR" i="1">
+                                                  <a:latin typeface="Cambria Math" panose="02040503050406030204" pitchFamily="18" charset="0"/>
+                                                </a:rPr>
+                                                <m:t>𝑦</m:t>
+                                              </m:r>
+                                            </m:e>
+                                          </m:acc>
+                                        </m:e>
+                                        <m:sub>
                                           <m:r>
                                             <a:rPr lang="pt-BR" i="1">
                                               <a:latin typeface="Cambria Math" panose="02040503050406030204" pitchFamily="18" charset="0"/>
                                             </a:rPr>
-                                            <m:t>𝑦</m:t>
+                                            <m:t>𝑞</m:t>
                                           </m:r>
-                                        </m:e>
-                                      </m:acc>
-                                      <m:r>
-                                        <a:rPr lang="pt-BR" i="1">
-                                          <a:latin typeface="Cambria Math" panose="02040503050406030204" pitchFamily="18" charset="0"/>
-                                        </a:rPr>
-                                        <m:t> </m:t>
-                                      </m:r>
+                                        </m:sub>
+                                      </m:sSub>
                                       <m:d>
                                         <m:dPr>
                                           <m:ctrlPr>
@@ -10119,7 +9826,7 @@
               <a:p>
                 <a:r>
                   <a:rPr lang="pt-BR" dirty="0"/>
-                  <a:t>A função mede a </a:t>
+                  <a:t>Essa função mede a </a:t>
                 </a:r>
                 <a:r>
                   <a:rPr lang="pt-BR" b="1" dirty="0">
@@ -10135,18 +9842,12 @@
                       <a:srgbClr val="7030A0"/>
                     </a:solidFill>
                   </a:rPr>
-                  <a:t>entre as distribuições de probabilidade preditas pelo modelo e as distribuições dos rótulos </a:t>
+                  <a:t>entre as distribuições de probabilidade da saída do modelo e a dos rótulos </a:t>
                 </a:r>
                 <a:r>
                   <a:rPr lang="pt-BR" dirty="0"/>
                   <a:t>das classes.</a:t>
                 </a:r>
-              </a:p>
-              <a:p>
-                <a:endParaRPr lang="pt-BR" dirty="0"/>
-              </a:p>
-              <a:p>
-                <a:endParaRPr lang="en-US" dirty="0"/>
               </a:p>
             </p:txBody>
           </p:sp>
@@ -10157,7 +9858,7 @@
               <p:cNvPr id="3" name="Content Placeholder 2">
                 <a:extLst>
                   <a:ext uri="{FF2B5EF4-FFF2-40B4-BE49-F238E27FC236}">
-                    <a16:creationId xmlns:a16="http://schemas.microsoft.com/office/drawing/2014/main" id="{17D7928D-3A32-7330-5FDC-756155EF2F3D}"/>
+                    <a16:creationId xmlns="" xmlns:a16="http://schemas.microsoft.com/office/drawing/2014/main" xmlns:a14="http://schemas.microsoft.com/office/drawing/2010/main" id="{17D7928D-3A32-7330-5FDC-756155EF2F3D}"/>
                   </a:ext>
                 </a:extLst>
               </p:cNvPr>
@@ -10169,10 +9870,14 @@
               </p:nvPr>
             </p:nvSpPr>
             <p:spPr>
-              <a:blipFill>
+              <a:xfrm>
+                <a:off x="838199" y="1840373"/>
+                <a:ext cx="11152239" cy="4351338"/>
+              </a:xfrm>
+              <a:blipFill rotWithShape="0">
                 <a:blip r:embed="rId2"/>
                 <a:stretch>
-                  <a:fillRect l="-1043" r="-58"/>
+                  <a:fillRect l="-929" r="-874"/>
                 </a:stretch>
               </a:blipFill>
             </p:spPr>
@@ -10181,7 +9886,7 @@
               <a:lstStyle/>
               <a:p>
                 <a:r>
-                  <a:rPr lang="en-US">
+                  <a:rPr lang="pt-BR">
                     <a:noFill/>
                   </a:rPr>
                   <a:t> </a:t>
@@ -10194,7 +9899,7 @@
     </p:spTree>
     <p:extLst>
       <p:ext uri="{BB962C8B-B14F-4D97-AF65-F5344CB8AC3E}">
-        <p14:creationId xmlns:p14="http://schemas.microsoft.com/office/powerpoint/2010/main" val="2353656835"/>
+        <p14:creationId xmlns:p14="http://schemas.microsoft.com/office/powerpoint/2010/main" val="1740913274"/>
       </p:ext>
     </p:extLst>
   </p:cSld>
@@ -10269,8 +9974,8 @@
             </p:nvSpPr>
             <p:spPr>
               <a:xfrm>
-                <a:off x="838199" y="1825624"/>
-                <a:ext cx="11144693" cy="5032375"/>
+                <a:off x="838200" y="1825624"/>
+                <a:ext cx="11240730" cy="5032375"/>
               </a:xfrm>
             </p:spPr>
             <p:txBody>
@@ -10502,12 +10207,6 @@
                                       </m:r>
                                     </m:e>
                                   </m:acc>
-                                  <m:r>
-                                    <a:rPr lang="pt-BR" b="0" i="1" smtClean="0">
-                                      <a:latin typeface="Cambria Math" panose="02040503050406030204" pitchFamily="18" charset="0"/>
-                                    </a:rPr>
-                                    <m:t> </m:t>
-                                  </m:r>
                                   <m:d>
                                     <m:dPr>
                                       <m:ctrlPr>
@@ -10796,7 +10495,29 @@
                 </a14:m>
                 <a:r>
                   <a:rPr lang="pt-BR" dirty="0"/>
-                  <a:t> é um vetor com os rótulos usando a codificação </a:t>
+                  <a:t> é o vetor do </a:t>
+                </a:r>
+                <a14:m>
+                  <m:oMath xmlns:m="http://schemas.openxmlformats.org/officeDocument/2006/math">
+                    <m:r>
+                      <a:rPr lang="pt-BR" i="1">
+                        <a:latin typeface="Cambria Math" panose="02040503050406030204" pitchFamily="18" charset="0"/>
+                      </a:rPr>
+                      <m:t>𝑛</m:t>
+                    </m:r>
+                  </m:oMath>
+                </a14:m>
+                <a:r>
+                  <a:rPr lang="pt-BR" dirty="0"/>
+                  <a:t>-</a:t>
+                </a:r>
+                <a:r>
+                  <a:rPr lang="pt-BR" dirty="0" err="1"/>
+                  <a:t>ésimo</a:t>
+                </a:r>
+                <a:r>
+                  <a:rPr lang="pt-BR" dirty="0"/>
+                  <a:t> rótulo usando a codificação </a:t>
                 </a:r>
                 <a:r>
                   <a:rPr lang="pt-BR" b="1" i="1" dirty="0"/>
@@ -10826,12 +10547,6 @@
                         </m:r>
                       </m:e>
                     </m:acc>
-                    <m:r>
-                      <a:rPr lang="pt-BR" i="1">
-                        <a:latin typeface="Cambria Math" panose="02040503050406030204" pitchFamily="18" charset="0"/>
-                      </a:rPr>
-                      <m:t> </m:t>
-                    </m:r>
                     <m:d>
                       <m:dPr>
                         <m:ctrlPr>
@@ -11073,7 +10788,7 @@
                 </a14:m>
                 <a:r>
                   <a:rPr lang="pt-BR" dirty="0"/>
-                  <a:t>é um vetor com as </a:t>
+                  <a:t>é o vetor com as </a:t>
                 </a:r>
                 <a14:m>
                   <m:oMath xmlns:m="http://schemas.openxmlformats.org/officeDocument/2006/math">
@@ -11168,7 +10883,7 @@
               <p:cNvPr id="3" name="Espaço Reservado para Conteúdo 2">
                 <a:extLst>
                   <a:ext uri="{FF2B5EF4-FFF2-40B4-BE49-F238E27FC236}">
-                    <a16:creationId xmlns:a16="http://schemas.microsoft.com/office/drawing/2014/main" id="{21A86630-5D79-AD4B-79FC-6C8373E8DB39}"/>
+                    <a16:creationId xmlns="" xmlns:a16="http://schemas.microsoft.com/office/drawing/2014/main" xmlns:a14="http://schemas.microsoft.com/office/drawing/2010/main" id="{21A86630-5D79-AD4B-79FC-6C8373E8DB39}"/>
                   </a:ext>
                 </a:extLst>
               </p:cNvPr>
@@ -11181,13 +10896,13 @@
             </p:nvSpPr>
             <p:spPr>
               <a:xfrm>
-                <a:off x="838199" y="1825624"/>
-                <a:ext cx="11144693" cy="5032375"/>
+                <a:off x="838200" y="1825624"/>
+                <a:ext cx="11240730" cy="5032375"/>
               </a:xfrm>
-              <a:blipFill>
+              <a:blipFill rotWithShape="0">
                 <a:blip r:embed="rId2"/>
                 <a:stretch>
-                  <a:fillRect l="-1093" t="-1937" r="-547"/>
+                  <a:fillRect l="-1139" t="-1937" r="-1248"/>
                 </a:stretch>
               </a:blipFill>
             </p:spPr>
@@ -11196,7 +10911,7 @@
               <a:lstStyle/>
               <a:p>
                 <a:r>
-                  <a:rPr lang="en-US">
+                  <a:rPr lang="pt-BR">
                     <a:noFill/>
                   </a:rPr>
                   <a:t> </a:t>
@@ -11209,7 +10924,7 @@
     </p:spTree>
     <p:extLst>
       <p:ext uri="{BB962C8B-B14F-4D97-AF65-F5344CB8AC3E}">
-        <p14:creationId xmlns:p14="http://schemas.microsoft.com/office/powerpoint/2010/main" val="1824635076"/>
+        <p14:creationId xmlns:p14="http://schemas.microsoft.com/office/powerpoint/2010/main" val="2438080927"/>
       </p:ext>
     </p:extLst>
   </p:cSld>
@@ -11571,7 +11286,7 @@
                 </a:r>
                 <a:r>
                   <a:rPr lang="pt-BR" b="1" dirty="0"/>
-                  <a:t>função de erro médio </a:t>
+                  <a:t>função da entropia cruzada categórica </a:t>
                 </a:r>
                 <a:r>
                   <a:rPr lang="pt-BR" dirty="0"/>
@@ -11579,7 +11294,7 @@
                 </a:r>
                 <a:r>
                   <a:rPr lang="pt-BR" b="1" dirty="0"/>
-                  <a:t>função de erro médio </a:t>
+                  <a:t>função da entropia cruzada </a:t>
                 </a:r>
                 <a:r>
                   <a:rPr lang="pt-BR" dirty="0"/>
@@ -11669,7 +11384,7 @@
               <p:cNvPr id="3" name="Espaço Reservado para Conteúdo 2">
                 <a:extLst>
                   <a:ext uri="{FF2B5EF4-FFF2-40B4-BE49-F238E27FC236}">
-                    <a16:creationId xmlns:a16="http://schemas.microsoft.com/office/drawing/2014/main" id="{FEF4E6DC-E916-D97A-4D18-D469285C4F2C}"/>
+                    <a16:creationId xmlns="" xmlns:a16="http://schemas.microsoft.com/office/drawing/2014/main" xmlns:a14="http://schemas.microsoft.com/office/drawing/2010/main" id="{FEF4E6DC-E916-D97A-4D18-D469285C4F2C}"/>
                   </a:ext>
                 </a:extLst>
               </p:cNvPr>
@@ -11685,10 +11400,10 @@
                 <a:off x="838200" y="1825624"/>
                 <a:ext cx="11201400" cy="5032375"/>
               </a:xfrm>
-              <a:blipFill>
+              <a:blipFill rotWithShape="0">
                 <a:blip r:embed="rId3"/>
                 <a:stretch>
-                  <a:fillRect l="-980" r="-1524"/>
+                  <a:fillRect l="-980"/>
                 </a:stretch>
               </a:blipFill>
             </p:spPr>
@@ -11697,7 +11412,7 @@
               <a:lstStyle/>
               <a:p>
                 <a:r>
-                  <a:rPr lang="en-US">
+                  <a:rPr lang="pt-BR">
                     <a:noFill/>
                   </a:rPr>
                   <a:t> </a:t>
@@ -11710,7 +11425,7 @@
     </p:spTree>
     <p:extLst>
       <p:ext uri="{BB962C8B-B14F-4D97-AF65-F5344CB8AC3E}">
-        <p14:creationId xmlns:p14="http://schemas.microsoft.com/office/powerpoint/2010/main" val="1239912103"/>
+        <p14:creationId xmlns:p14="http://schemas.microsoft.com/office/powerpoint/2010/main" val="2229400737"/>
       </p:ext>
     </p:extLst>
   </p:cSld>
@@ -11818,7 +11533,15 @@
                   <a:srgbClr val="7030A0"/>
                 </a:solidFill>
               </a:rPr>
-              <a:t>não existe uma forma fechada</a:t>
+              <a:t>não existe uma </a:t>
+            </a:r>
+            <a:r>
+              <a:rPr lang="pt-BR" b="1" dirty="0">
+                <a:solidFill>
+                  <a:schemeClr val="accent2"/>
+                </a:solidFill>
+              </a:rPr>
+              <a:t>forma fechada</a:t>
             </a:r>
             <a:r>
               <a:rPr lang="pt-BR" b="1" dirty="0"/>
@@ -11983,7 +11706,7 @@
     </p:spTree>
     <p:extLst>
       <p:ext uri="{BB962C8B-B14F-4D97-AF65-F5344CB8AC3E}">
-        <p14:creationId xmlns:p14="http://schemas.microsoft.com/office/powerpoint/2010/main" val="2487914666"/>
+        <p14:creationId xmlns:p14="http://schemas.microsoft.com/office/powerpoint/2010/main" val="3206113485"/>
       </p:ext>
     </p:extLst>
   </p:cSld>
@@ -12059,8 +11782,8 @@
             </p:nvSpPr>
             <p:spPr>
               <a:xfrm>
-                <a:off x="838200" y="1825625"/>
-                <a:ext cx="11163300" cy="5032375"/>
+                <a:off x="838199" y="1825625"/>
+                <a:ext cx="11353801" cy="5032375"/>
               </a:xfrm>
             </p:spPr>
             <p:txBody>
@@ -12967,6 +12690,48 @@
                         </m:e>
                       </m:d>
                       <m:r>
+                        <a:rPr lang="pt-BR" dirty="0">
+                          <a:latin typeface="Cambria Math" panose="02040503050406030204" pitchFamily="18" charset="0"/>
+                          <a:ea typeface="Cambria Math" panose="02040503050406030204" pitchFamily="18" charset="0"/>
+                        </a:rPr>
+                        <m:t>∈</m:t>
+                      </m:r>
+                      <m:sSup>
+                        <m:sSupPr>
+                          <m:ctrlPr>
+                            <a:rPr lang="pt-BR" i="1" dirty="0">
+                              <a:latin typeface="Cambria Math" panose="02040503050406030204" pitchFamily="18" charset="0"/>
+                              <a:ea typeface="Cambria Math" panose="02040503050406030204" pitchFamily="18" charset="0"/>
+                            </a:rPr>
+                          </m:ctrlPr>
+                        </m:sSupPr>
+                        <m:e>
+                          <m:r>
+                            <a:rPr lang="pt-BR" i="1" dirty="0">
+                              <a:latin typeface="Cambria Math" panose="02040503050406030204" pitchFamily="18" charset="0"/>
+                              <a:ea typeface="Cambria Math" panose="02040503050406030204" pitchFamily="18" charset="0"/>
+                            </a:rPr>
+                            <m:t>ℝ</m:t>
+                          </m:r>
+                        </m:e>
+                        <m:sup>
+                          <m:r>
+                            <a:rPr lang="pt-BR" i="1" dirty="0">
+                              <a:latin typeface="Cambria Math" panose="02040503050406030204" pitchFamily="18" charset="0"/>
+                              <a:ea typeface="Cambria Math" panose="02040503050406030204" pitchFamily="18" charset="0"/>
+                            </a:rPr>
+                            <m:t>𝐾</m:t>
+                          </m:r>
+                          <m:r>
+                            <a:rPr lang="pt-BR" i="1" dirty="0">
+                              <a:latin typeface="Cambria Math" panose="02040503050406030204" pitchFamily="18" charset="0"/>
+                              <a:ea typeface="Cambria Math" panose="02040503050406030204" pitchFamily="18" charset="0"/>
+                            </a:rPr>
+                            <m:t>+1×1</m:t>
+                          </m:r>
+                        </m:sup>
+                      </m:sSup>
+                      <m:r>
                         <a:rPr lang="pt-BR" sz="2400" b="0" i="1" smtClean="0">
                           <a:latin typeface="Cambria Math" panose="02040503050406030204" pitchFamily="18" charset="0"/>
                         </a:rPr>
@@ -12975,7 +12740,7 @@
                     </m:oMath>
                   </m:oMathPara>
                 </a14:m>
-                <a:endParaRPr lang="pt-BR" sz="2400" b="0" i="0" dirty="0">
+                <a:endParaRPr lang="pt-BR" b="0" i="0" dirty="0">
                   <a:latin typeface="Calibri" panose="020F0502020204030204" pitchFamily="34" charset="0"/>
                 </a:endParaRPr>
               </a:p>
@@ -13205,7 +12970,7 @@
               <p:cNvPr id="3" name="Espaço Reservado para Conteúdo 2">
                 <a:extLst>
                   <a:ext uri="{FF2B5EF4-FFF2-40B4-BE49-F238E27FC236}">
-                    <a16:creationId xmlns:a16="http://schemas.microsoft.com/office/drawing/2014/main" id="{1D38055D-E355-F780-9CA0-0337EA0BE4FD}"/>
+                    <a16:creationId xmlns:a16="http://schemas.microsoft.com/office/drawing/2014/main" xmlns="" xmlns:a14="http://schemas.microsoft.com/office/drawing/2010/main" id="{1D38055D-E355-F780-9CA0-0337EA0BE4FD}"/>
                   </a:ext>
                 </a:extLst>
               </p:cNvPr>
@@ -13218,13 +12983,13 @@
             </p:nvSpPr>
             <p:spPr>
               <a:xfrm>
-                <a:off x="838200" y="1825625"/>
-                <a:ext cx="11163300" cy="5032375"/>
+                <a:off x="838199" y="1825625"/>
+                <a:ext cx="11353801" cy="5032375"/>
               </a:xfrm>
-              <a:blipFill>
+              <a:blipFill rotWithShape="0">
                 <a:blip r:embed="rId3"/>
                 <a:stretch>
-                  <a:fillRect l="-1147" t="-1695"/>
+                  <a:fillRect l="-1074" t="-1695" r="-1396"/>
                 </a:stretch>
               </a:blipFill>
             </p:spPr>
@@ -13233,7 +12998,7 @@
               <a:lstStyle/>
               <a:p>
                 <a:r>
-                  <a:rPr lang="en-US">
+                  <a:rPr lang="pt-BR">
                     <a:noFill/>
                   </a:rPr>
                   <a:t> </a:t>
@@ -13246,7 +13011,7 @@
     </p:spTree>
     <p:extLst>
       <p:ext uri="{BB962C8B-B14F-4D97-AF65-F5344CB8AC3E}">
-        <p14:creationId xmlns:p14="http://schemas.microsoft.com/office/powerpoint/2010/main" val="2645875516"/>
+        <p14:creationId xmlns:p14="http://schemas.microsoft.com/office/powerpoint/2010/main" val="3379786589"/>
       </p:ext>
     </p:extLst>
   </p:cSld>
@@ -13325,8 +13090,8 @@
             </p:nvSpPr>
             <p:spPr>
               <a:xfrm>
-                <a:off x="838200" y="1825624"/>
-                <a:ext cx="11119338" cy="5032375"/>
+                <a:off x="838200" y="1840864"/>
+                <a:ext cx="11240729" cy="5032375"/>
               </a:xfrm>
             </p:spPr>
             <p:txBody>
@@ -13621,18 +13386,32 @@
               <a:p>
                 <a:r>
                   <a:rPr lang="pt-BR" dirty="0"/>
-                  <a:t>O vetor gradiente pode ser reescrito levando-se em consideração todos os </a:t>
+                  <a:t>O vetor gradiente pode ser reescrito </a:t>
+                </a:r>
+                <a:r>
+                  <a:rPr lang="pt-BR" b="1" dirty="0">
+                    <a:solidFill>
+                      <a:schemeClr val="accent2"/>
+                    </a:solidFill>
+                  </a:rPr>
+                  <a:t>levando-se em consideração todos os </a:t>
                 </a:r>
                 <a14:m>
                   <m:oMath xmlns:m="http://schemas.openxmlformats.org/officeDocument/2006/math">
                     <m:r>
-                      <a:rPr lang="pt-BR" i="1" smtClean="0">
+                      <a:rPr lang="pt-BR" b="1" i="1" smtClean="0">
+                        <a:solidFill>
+                          <a:schemeClr val="accent2"/>
+                        </a:solidFill>
                         <a:latin typeface="Cambria Math" panose="02040503050406030204" pitchFamily="18" charset="0"/>
                       </a:rPr>
-                      <m:t>𝑄</m:t>
+                      <m:t>𝑸</m:t>
                     </m:r>
                     <m:r>
-                      <a:rPr lang="pt-BR" i="1" smtClean="0">
+                      <a:rPr lang="pt-BR" b="1" i="1" smtClean="0">
+                        <a:solidFill>
+                          <a:schemeClr val="accent2"/>
+                        </a:solidFill>
                         <a:latin typeface="Cambria Math" panose="02040503050406030204" pitchFamily="18" charset="0"/>
                       </a:rPr>
                       <m:t> </m:t>
@@ -13640,7 +13419,11 @@
                   </m:oMath>
                 </a14:m>
                 <a:r>
-                  <a:rPr lang="pt-BR" dirty="0"/>
+                  <a:rPr lang="pt-BR" b="1" dirty="0">
+                    <a:solidFill>
+                      <a:schemeClr val="accent2"/>
+                    </a:solidFill>
+                  </a:rPr>
                   <a:t>vetores de peso</a:t>
                 </a:r>
               </a:p>
@@ -13831,6 +13614,55 @@
                         </m:e>
                       </m:d>
                       <m:r>
+                        <a:rPr lang="pt-BR" dirty="0">
+                          <a:latin typeface="Cambria Math" panose="02040503050406030204" pitchFamily="18" charset="0"/>
+                          <a:ea typeface="Cambria Math" panose="02040503050406030204" pitchFamily="18" charset="0"/>
+                        </a:rPr>
+                        <m:t>∈</m:t>
+                      </m:r>
+                      <m:sSup>
+                        <m:sSupPr>
+                          <m:ctrlPr>
+                            <a:rPr lang="pt-BR" i="1" dirty="0">
+                              <a:latin typeface="Cambria Math" panose="02040503050406030204" pitchFamily="18" charset="0"/>
+                              <a:ea typeface="Cambria Math" panose="02040503050406030204" pitchFamily="18" charset="0"/>
+                            </a:rPr>
+                          </m:ctrlPr>
+                        </m:sSupPr>
+                        <m:e>
+                          <m:r>
+                            <a:rPr lang="pt-BR" i="1" dirty="0">
+                              <a:latin typeface="Cambria Math" panose="02040503050406030204" pitchFamily="18" charset="0"/>
+                              <a:ea typeface="Cambria Math" panose="02040503050406030204" pitchFamily="18" charset="0"/>
+                            </a:rPr>
+                            <m:t>ℝ</m:t>
+                          </m:r>
+                        </m:e>
+                        <m:sup>
+                          <m:r>
+                            <a:rPr lang="pt-BR" i="1" dirty="0">
+                              <a:latin typeface="Cambria Math" panose="02040503050406030204" pitchFamily="18" charset="0"/>
+                              <a:ea typeface="Cambria Math" panose="02040503050406030204" pitchFamily="18" charset="0"/>
+                            </a:rPr>
+                            <m:t>𝐾</m:t>
+                          </m:r>
+                          <m:r>
+                            <a:rPr lang="pt-BR" i="1" dirty="0">
+                              <a:latin typeface="Cambria Math" panose="02040503050406030204" pitchFamily="18" charset="0"/>
+                              <a:ea typeface="Cambria Math" panose="02040503050406030204" pitchFamily="18" charset="0"/>
+                            </a:rPr>
+                            <m:t>+1×</m:t>
+                          </m:r>
+                          <m:r>
+                            <a:rPr lang="pt-BR" i="1" dirty="0">
+                              <a:latin typeface="Cambria Math" panose="02040503050406030204" pitchFamily="18" charset="0"/>
+                              <a:ea typeface="Cambria Math" panose="02040503050406030204" pitchFamily="18" charset="0"/>
+                            </a:rPr>
+                            <m:t>𝑄</m:t>
+                          </m:r>
+                        </m:sup>
+                      </m:sSup>
+                      <m:r>
                         <a:rPr lang="pt-BR" sz="2800" b="0" i="1" smtClean="0">
                           <a:latin typeface="Cambria Math" panose="02040503050406030204" pitchFamily="18" charset="0"/>
                         </a:rPr>
@@ -13936,7 +13768,7 @@
                 </a14:m>
                 <a:r>
                   <a:rPr lang="pt-BR" dirty="0"/>
-                  <a:t> são matrizes contendendo em cada linha os vetores </a:t>
+                  <a:t> são matrizes contendo em cada linha os vetores </a:t>
                 </a:r>
                 <a14:m>
                   <m:oMath xmlns:m="http://schemas.openxmlformats.org/officeDocument/2006/math">
@@ -14083,7 +13915,7 @@
               <p:cNvPr id="3" name="Espaço Reservado para Conteúdo 2">
                 <a:extLst>
                   <a:ext uri="{FF2B5EF4-FFF2-40B4-BE49-F238E27FC236}">
-                    <a16:creationId xmlns:a16="http://schemas.microsoft.com/office/drawing/2014/main" id="{DDBA288E-BBB8-E157-840C-AA685AD7D65C}"/>
+                    <a16:creationId xmlns:a16="http://schemas.microsoft.com/office/drawing/2014/main" xmlns="" xmlns:a14="http://schemas.microsoft.com/office/drawing/2010/main" id="{DDBA288E-BBB8-E157-840C-AA685AD7D65C}"/>
                   </a:ext>
                 </a:extLst>
               </p:cNvPr>
@@ -14096,13 +13928,13 @@
             </p:nvSpPr>
             <p:spPr>
               <a:xfrm>
-                <a:off x="838200" y="1825624"/>
-                <a:ext cx="11119338" cy="5032375"/>
+                <a:off x="838200" y="1840864"/>
+                <a:ext cx="11240729" cy="5032375"/>
               </a:xfrm>
-              <a:blipFill>
+              <a:blipFill rotWithShape="0">
                 <a:blip r:embed="rId3"/>
                 <a:stretch>
-                  <a:fillRect l="-1151" r="-1754" b="-726"/>
+                  <a:fillRect l="-1139" r="-1628" b="-848"/>
                 </a:stretch>
               </a:blipFill>
             </p:spPr>
@@ -14111,7 +13943,7 @@
               <a:lstStyle/>
               <a:p>
                 <a:r>
-                  <a:rPr lang="en-US">
+                  <a:rPr lang="pt-BR">
                     <a:noFill/>
                   </a:rPr>
                   <a:t> </a:t>
@@ -14124,7 +13956,7 @@
     </p:spTree>
     <p:extLst>
       <p:ext uri="{BB962C8B-B14F-4D97-AF65-F5344CB8AC3E}">
-        <p14:creationId xmlns:p14="http://schemas.microsoft.com/office/powerpoint/2010/main" val="2914302897"/>
+        <p14:creationId xmlns:p14="http://schemas.microsoft.com/office/powerpoint/2010/main" val="2819159928"/>
       </p:ext>
     </p:extLst>
   </p:cSld>
@@ -14235,7 +14067,23 @@
                       <a:schemeClr val="tx1"/>
                     </a:solidFill>
                   </a:rPr>
-                  <a:t>, o classificador atribui ao exemplo de entrada, </a:t>
+                  <a:t>, o </a:t>
+                </a:r>
+                <a:r>
+                  <a:rPr lang="pt-BR" dirty="0" err="1">
+                    <a:solidFill>
+                      <a:schemeClr val="tx1"/>
+                    </a:solidFill>
+                  </a:rPr>
+                  <a:t>regressor</a:t>
+                </a:r>
+                <a:r>
+                  <a:rPr lang="pt-BR" dirty="0">
+                    <a:solidFill>
+                      <a:schemeClr val="tx1"/>
+                    </a:solidFill>
+                  </a:rPr>
+                  <a:t> atribui ao exemplo de entrada, </a:t>
                 </a:r>
                 <a14:m>
                   <m:oMath xmlns:m="http://schemas.openxmlformats.org/officeDocument/2006/math">
@@ -14337,7 +14185,7 @@
                       <a:schemeClr val="tx1"/>
                     </a:solidFill>
                   </a:rPr>
-                  <a:t>, da função hipótese com maior valor:</a:t>
+                  <a:t>, da função hipótese com maior valor</a:t>
                 </a:r>
                 <a:endParaRPr lang="pt-BR" sz="1600" dirty="0">
                   <a:solidFill>
@@ -14695,7 +14543,7 @@
               <p:cNvPr id="3" name="Espaço Reservado para Conteúdo 2">
                 <a:extLst>
                   <a:ext uri="{FF2B5EF4-FFF2-40B4-BE49-F238E27FC236}">
-                    <a16:creationId xmlns:a16="http://schemas.microsoft.com/office/drawing/2014/main" id="{BB734B24-DA50-860B-5D55-C33F6F451B6F}"/>
+                    <a16:creationId xmlns="" xmlns:a16="http://schemas.microsoft.com/office/drawing/2014/main" xmlns:a14="http://schemas.microsoft.com/office/drawing/2010/main" id="{BB734B24-DA50-860B-5D55-C33F6F451B6F}"/>
                   </a:ext>
                 </a:extLst>
               </p:cNvPr>
@@ -14711,10 +14559,10 @@
                 <a:off x="6096000" y="1825624"/>
                 <a:ext cx="5930899" cy="5032375"/>
               </a:xfrm>
-              <a:blipFill>
+              <a:blipFill rotWithShape="0">
                 <a:blip r:embed="rId3"/>
                 <a:stretch>
-                  <a:fillRect l="-1850" t="-1937" r="-719"/>
+                  <a:fillRect l="-1850" t="-1937" r="-3186"/>
                 </a:stretch>
               </a:blipFill>
             </p:spPr>
@@ -14723,7 +14571,7 @@
               <a:lstStyle/>
               <a:p>
                 <a:r>
-                  <a:rPr lang="en-US">
+                  <a:rPr lang="pt-BR">
                     <a:noFill/>
                   </a:rPr>
                   <a:t> </a:t>
@@ -14772,7 +14620,7 @@
     </p:spTree>
     <p:extLst>
       <p:ext uri="{BB962C8B-B14F-4D97-AF65-F5344CB8AC3E}">
-        <p14:creationId xmlns:p14="http://schemas.microsoft.com/office/powerpoint/2010/main" val="2096909574"/>
+        <p14:creationId xmlns:p14="http://schemas.microsoft.com/office/powerpoint/2010/main" val="3687397475"/>
       </p:ext>
     </p:extLst>
   </p:cSld>
@@ -15180,7 +15028,7 @@
     </p:spTree>
     <p:extLst>
       <p:ext uri="{BB962C8B-B14F-4D97-AF65-F5344CB8AC3E}">
-        <p14:creationId xmlns:p14="http://schemas.microsoft.com/office/powerpoint/2010/main" val="3382940500"/>
+        <p14:creationId xmlns:p14="http://schemas.microsoft.com/office/powerpoint/2010/main" val="669840969"/>
       </p:ext>
     </p:extLst>
   </p:cSld>
@@ -16547,7 +16395,7 @@
             <p:spPr>
               <a:xfrm>
                 <a:off x="838199" y="1825624"/>
-                <a:ext cx="11059391" cy="5032375"/>
+                <a:ext cx="11353801" cy="5032375"/>
               </a:xfrm>
             </p:spPr>
             <p:txBody>
@@ -16596,7 +16444,7 @@
                       <a:srgbClr val="00B050"/>
                     </a:solidFill>
                   </a:rPr>
-                  <a:t>dado os atributos e pesos.</a:t>
+                  <a:t>dado os atributos e os pesos.</a:t>
                 </a:r>
               </a:p>
               <a:p>
@@ -16653,7 +16501,23 @@
               <a:p>
                 <a:r>
                   <a:rPr lang="pt-BR" dirty="0"/>
-                  <a:t>O regressor tem </a:t>
+                  <a:t>O </a:t>
+                </a:r>
+                <a:r>
+                  <a:rPr lang="pt-BR" dirty="0" err="1"/>
+                  <a:t>regressor</a:t>
+                </a:r>
+                <a:r>
+                  <a:rPr lang="pt-BR" dirty="0"/>
+                  <a:t> </a:t>
+                </a:r>
+                <a:r>
+                  <a:rPr lang="pt-BR" i="1" dirty="0" err="1"/>
+                  <a:t>softmax</a:t>
+                </a:r>
+                <a:r>
+                  <a:rPr lang="pt-BR" dirty="0"/>
+                  <a:t> tem </a:t>
                 </a:r>
                 <a14:m>
                   <m:oMath xmlns:m="http://schemas.openxmlformats.org/officeDocument/2006/math">
@@ -16715,7 +16579,7 @@
               <p:cNvPr id="3" name="Espaço Reservado para Conteúdo 2">
                 <a:extLst>
                   <a:ext uri="{FF2B5EF4-FFF2-40B4-BE49-F238E27FC236}">
-                    <a16:creationId xmlns:a16="http://schemas.microsoft.com/office/drawing/2014/main" id="{B68F0D74-8673-A432-A1D7-BDEF7725851A}"/>
+                    <a16:creationId xmlns:a16="http://schemas.microsoft.com/office/drawing/2014/main" xmlns:a14="http://schemas.microsoft.com/office/drawing/2010/main" xmlns="" id="{B68F0D74-8673-A432-A1D7-BDEF7725851A}"/>
                   </a:ext>
                 </a:extLst>
               </p:cNvPr>
@@ -16729,12 +16593,12 @@
             <p:spPr>
               <a:xfrm>
                 <a:off x="838199" y="1825624"/>
-                <a:ext cx="11059391" cy="5032375"/>
+                <a:ext cx="11353801" cy="5032375"/>
               </a:xfrm>
-              <a:blipFill>
+              <a:blipFill rotWithShape="0">
                 <a:blip r:embed="rId3"/>
                 <a:stretch>
-                  <a:fillRect l="-937" t="-1937" r="-1433"/>
+                  <a:fillRect l="-913" t="-1937"/>
                 </a:stretch>
               </a:blipFill>
             </p:spPr>
@@ -16743,7 +16607,7 @@
               <a:lstStyle/>
               <a:p>
                 <a:r>
-                  <a:rPr lang="en-US">
+                  <a:rPr lang="pt-BR">
                     <a:noFill/>
                   </a:rPr>
                   <a:t> </a:t>
@@ -16756,7 +16620,7 @@
     </p:spTree>
     <p:extLst>
       <p:ext uri="{BB962C8B-B14F-4D97-AF65-F5344CB8AC3E}">
-        <p14:creationId xmlns:p14="http://schemas.microsoft.com/office/powerpoint/2010/main" val="3107673530"/>
+        <p14:creationId xmlns:p14="http://schemas.microsoft.com/office/powerpoint/2010/main" val="271098851"/>
       </p:ext>
     </p:extLst>
   </p:cSld>
@@ -16836,7 +16700,7 @@
             <p:spPr>
               <a:xfrm>
                 <a:off x="838199" y="1825624"/>
-                <a:ext cx="11132127" cy="5032375"/>
+                <a:ext cx="11353801" cy="5032375"/>
               </a:xfrm>
             </p:spPr>
             <p:txBody>
@@ -16911,7 +16775,7 @@
                 </a:pPr>
                 <a:r>
                   <a:rPr lang="pt-BR" dirty="0"/>
-                  <a:t>Já notícias, músicas e imagens, por exemplo, podem pertencer a várias ou conter várias classes ao mesmo tempo.</a:t>
+                  <a:t>Por exemplo, notícias, músicas e imagens, por exemplo, podem pertencer a várias classes ao mesmo tempo.</a:t>
                 </a:r>
               </a:p>
               <a:p>
@@ -17129,7 +16993,7 @@
                 </a:pPr>
                 <a:r>
                   <a:rPr lang="pt-BR" dirty="0"/>
-                  <a:t>Se temos 3 classes, teremos 3 funções discriminantes, </a:t>
+                  <a:t>Por exemplo, se temos 3 classes, teremos 3 funções discriminantes, </a:t>
                 </a:r>
                 <a14:m>
                   <m:oMath xmlns:m="http://schemas.openxmlformats.org/officeDocument/2006/math">
@@ -17210,7 +17074,7 @@
               <p:cNvPr id="3" name="Espaço Reservado para Conteúdo 2">
                 <a:extLst>
                   <a:ext uri="{FF2B5EF4-FFF2-40B4-BE49-F238E27FC236}">
-                    <a16:creationId xmlns:a16="http://schemas.microsoft.com/office/drawing/2014/main" id="{21416F72-28FB-E27C-D129-16A944A87C67}"/>
+                    <a16:creationId xmlns="" xmlns:a16="http://schemas.microsoft.com/office/drawing/2014/main" xmlns:a14="http://schemas.microsoft.com/office/drawing/2010/main" id="{21416F72-28FB-E27C-D129-16A944A87C67}"/>
                   </a:ext>
                 </a:extLst>
               </p:cNvPr>
@@ -17224,12 +17088,12 @@
             <p:spPr>
               <a:xfrm>
                 <a:off x="838199" y="1825624"/>
-                <a:ext cx="11132127" cy="5032375"/>
+                <a:ext cx="11353801" cy="5032375"/>
               </a:xfrm>
-              <a:blipFill>
+              <a:blipFill rotWithShape="0">
                 <a:blip r:embed="rId3"/>
                 <a:stretch>
-                  <a:fillRect l="-930" t="-1937" r="-876"/>
+                  <a:fillRect l="-913" t="-1937"/>
                 </a:stretch>
               </a:blipFill>
             </p:spPr>
@@ -17238,7 +17102,7 @@
               <a:lstStyle/>
               <a:p>
                 <a:r>
-                  <a:rPr lang="en-US">
+                  <a:rPr lang="pt-BR">
                     <a:noFill/>
                   </a:rPr>
                   <a:t> </a:t>
@@ -17251,7 +17115,7 @@
     </p:spTree>
     <p:extLst>
       <p:ext uri="{BB962C8B-B14F-4D97-AF65-F5344CB8AC3E}">
-        <p14:creationId xmlns:p14="http://schemas.microsoft.com/office/powerpoint/2010/main" val="3643978432"/>
+        <p14:creationId xmlns:p14="http://schemas.microsoft.com/office/powerpoint/2010/main" val="3485503960"/>
       </p:ext>
     </p:extLst>
   </p:cSld>
@@ -17594,7 +17458,7 @@
                     </m:oMathParaPr>
                     <m:oMath xmlns:m="http://schemas.openxmlformats.org/officeDocument/2006/math">
                       <m:r>
-                        <a:rPr lang="pt-BR" sz="2400" i="1">
+                        <a:rPr lang="pt-BR" i="1">
                           <a:latin typeface="Cambria Math" panose="02040503050406030204" pitchFamily="18" charset="0"/>
                         </a:rPr>
                         <m:t>𝑃</m:t>
@@ -17602,7 +17466,7 @@
                       <m:d>
                         <m:dPr>
                           <m:ctrlPr>
-                            <a:rPr lang="pt-BR" sz="2400" i="1">
+                            <a:rPr lang="pt-BR" i="1">
                               <a:latin typeface="Cambria Math" panose="02040503050406030204" pitchFamily="18" charset="0"/>
                             </a:rPr>
                           </m:ctrlPr>
@@ -17611,14 +17475,14 @@
                           <m:sSub>
                             <m:sSubPr>
                               <m:ctrlPr>
-                                <a:rPr lang="pt-BR" sz="2400" i="1">
+                                <a:rPr lang="pt-BR" i="1">
                                   <a:latin typeface="Cambria Math" panose="02040503050406030204" pitchFamily="18" charset="0"/>
                                 </a:rPr>
                               </m:ctrlPr>
                             </m:sSubPr>
                             <m:e>
                               <m:r>
-                                <a:rPr lang="pt-BR" sz="2400" i="1">
+                                <a:rPr lang="pt-BR" i="1">
                                   <a:latin typeface="Cambria Math" panose="02040503050406030204" pitchFamily="18" charset="0"/>
                                 </a:rPr>
                                 <m:t>𝐶</m:t>
@@ -17626,7 +17490,7 @@
                             </m:e>
                             <m:sub>
                               <m:r>
-                                <a:rPr lang="pt-BR" sz="2400" i="1">
+                                <a:rPr lang="pt-BR" i="1">
                                   <a:latin typeface="Cambria Math" panose="02040503050406030204" pitchFamily="18" charset="0"/>
                                 </a:rPr>
                                 <m:t>𝑞</m:t>
@@ -17634,25 +17498,25 @@
                             </m:sub>
                           </m:sSub>
                           <m:r>
-                            <a:rPr lang="pt-BR" sz="2400" b="0" i="1" smtClean="0">
+                            <a:rPr lang="pt-BR" b="0" i="1" smtClean="0">
                               <a:latin typeface="Cambria Math" panose="02040503050406030204" pitchFamily="18" charset="0"/>
                             </a:rPr>
                             <m:t> </m:t>
                           </m:r>
                           <m:r>
-                            <a:rPr lang="pt-BR" sz="2400" i="1">
+                            <a:rPr lang="pt-BR" i="1">
                               <a:latin typeface="Cambria Math" panose="02040503050406030204" pitchFamily="18" charset="0"/>
                             </a:rPr>
                             <m:t>|</m:t>
                           </m:r>
                           <m:r>
-                            <a:rPr lang="pt-BR" sz="2400" b="0" i="1" smtClean="0">
+                            <a:rPr lang="pt-BR" b="0" i="1" smtClean="0">
                               <a:latin typeface="Cambria Math" panose="02040503050406030204" pitchFamily="18" charset="0"/>
                             </a:rPr>
                             <m:t> </m:t>
                           </m:r>
                           <m:r>
-                            <a:rPr lang="pt-BR" sz="2400" b="1" i="1">
+                            <a:rPr lang="pt-BR" b="1" i="1">
                               <a:latin typeface="Cambria Math" panose="02040503050406030204" pitchFamily="18" charset="0"/>
                             </a:rPr>
                             <m:t>𝒙</m:t>
@@ -17660,14 +17524,14 @@
                           <m:d>
                             <m:dPr>
                               <m:ctrlPr>
-                                <a:rPr lang="pt-BR" sz="2400" b="1" i="1">
+                                <a:rPr lang="pt-BR" b="1" i="1">
                                   <a:latin typeface="Cambria Math" panose="02040503050406030204" pitchFamily="18" charset="0"/>
                                 </a:rPr>
                               </m:ctrlPr>
                             </m:dPr>
                             <m:e>
                               <m:r>
-                                <a:rPr lang="pt-BR" sz="2400" b="0" i="1" smtClean="0">
+                                <a:rPr lang="pt-BR" b="0" i="1" smtClean="0">
                                   <a:latin typeface="Cambria Math" panose="02040503050406030204" pitchFamily="18" charset="0"/>
                                 </a:rPr>
                                 <m:t>𝑛</m:t>
@@ -17675,7 +17539,7 @@
                             </m:e>
                           </m:d>
                           <m:r>
-                            <a:rPr lang="pt-BR" sz="2400" b="0" i="1" smtClean="0">
+                            <a:rPr lang="pt-BR" b="0" i="1" smtClean="0">
                               <a:latin typeface="Cambria Math" panose="02040503050406030204" pitchFamily="18" charset="0"/>
                             </a:rPr>
                             <m:t>,</m:t>
@@ -17683,14 +17547,14 @@
                           <m:sSub>
                             <m:sSubPr>
                               <m:ctrlPr>
-                                <a:rPr lang="pt-BR" sz="2400" i="1">
+                                <a:rPr lang="pt-BR" i="1">
                                   <a:latin typeface="Cambria Math" panose="02040503050406030204" pitchFamily="18" charset="0"/>
                                 </a:rPr>
                               </m:ctrlPr>
                             </m:sSubPr>
                             <m:e>
                               <m:r>
-                                <a:rPr lang="pt-BR" sz="2400" b="1" i="1">
+                                <a:rPr lang="pt-BR" b="1" i="1">
                                   <a:latin typeface="Cambria Math" panose="02040503050406030204" pitchFamily="18" charset="0"/>
                                 </a:rPr>
                                 <m:t>𝒂</m:t>
@@ -17698,7 +17562,7 @@
                             </m:e>
                             <m:sub>
                               <m:r>
-                                <a:rPr lang="pt-BR" sz="2400" b="0" i="1" smtClean="0">
+                                <a:rPr lang="pt-BR" b="0" i="1" smtClean="0">
                                   <a:latin typeface="Cambria Math" panose="02040503050406030204" pitchFamily="18" charset="0"/>
                                 </a:rPr>
                                 <m:t>𝑞</m:t>
@@ -17708,7 +17572,7 @@
                         </m:e>
                       </m:d>
                       <m:r>
-                        <a:rPr lang="pt-BR" sz="2400" i="1">
+                        <a:rPr lang="pt-BR" i="1">
                           <a:latin typeface="Cambria Math" panose="02040503050406030204" pitchFamily="18" charset="0"/>
                         </a:rPr>
                         <m:t>=</m:t>
@@ -17716,14 +17580,14 @@
                       <m:sSubSup>
                         <m:sSubSupPr>
                           <m:ctrlPr>
-                            <a:rPr lang="pt-BR" sz="2400" b="1" i="1">
+                            <a:rPr lang="pt-BR" b="1" i="1">
                               <a:latin typeface="Cambria Math" panose="02040503050406030204" pitchFamily="18" charset="0"/>
                             </a:rPr>
                           </m:ctrlPr>
                         </m:sSubSupPr>
                         <m:e>
                           <m:r>
-                            <a:rPr lang="pt-BR" sz="2400" i="1">
+                            <a:rPr lang="pt-BR" i="1">
                               <a:latin typeface="Cambria Math" panose="02040503050406030204" pitchFamily="18" charset="0"/>
                             </a:rPr>
                             <m:t>h</m:t>
@@ -17731,7 +17595,7 @@
                         </m:e>
                         <m:sub>
                           <m:r>
-                            <a:rPr lang="pt-BR" sz="2400" b="1" i="1">
+                            <a:rPr lang="pt-BR" b="1" i="1">
                               <a:latin typeface="Cambria Math" panose="02040503050406030204" pitchFamily="18" charset="0"/>
                             </a:rPr>
                             <m:t>𝒂</m:t>
@@ -17739,7 +17603,7 @@
                         </m:sub>
                         <m:sup>
                           <m:r>
-                            <a:rPr lang="pt-BR" sz="2400" i="1">
+                            <a:rPr lang="pt-BR" i="1">
                               <a:latin typeface="Cambria Math" panose="02040503050406030204" pitchFamily="18" charset="0"/>
                             </a:rPr>
                             <m:t>𝑞</m:t>
@@ -17749,14 +17613,14 @@
                       <m:d>
                         <m:dPr>
                           <m:ctrlPr>
-                            <a:rPr lang="pt-BR" sz="2400" i="1">
+                            <a:rPr lang="pt-BR" i="1">
                               <a:latin typeface="Cambria Math" panose="02040503050406030204" pitchFamily="18" charset="0"/>
                             </a:rPr>
                           </m:ctrlPr>
                         </m:dPr>
                         <m:e>
                           <m:r>
-                            <a:rPr lang="pt-BR" sz="2400" b="1" i="1">
+                            <a:rPr lang="pt-BR" b="1" i="1">
                               <a:latin typeface="Cambria Math" panose="02040503050406030204" pitchFamily="18" charset="0"/>
                             </a:rPr>
                             <m:t>𝒙</m:t>
@@ -17764,14 +17628,14 @@
                           <m:d>
                             <m:dPr>
                               <m:ctrlPr>
-                                <a:rPr lang="pt-BR" sz="2400" b="1" i="1">
+                                <a:rPr lang="pt-BR" b="1" i="1">
                                   <a:latin typeface="Cambria Math" panose="02040503050406030204" pitchFamily="18" charset="0"/>
                                 </a:rPr>
                               </m:ctrlPr>
                             </m:dPr>
                             <m:e>
                               <m:r>
-                                <a:rPr lang="pt-BR" sz="2400" b="0" i="1" smtClean="0">
+                                <a:rPr lang="pt-BR" b="0" i="1" smtClean="0">
                                   <a:latin typeface="Cambria Math" panose="02040503050406030204" pitchFamily="18" charset="0"/>
                                 </a:rPr>
                                 <m:t>𝑛</m:t>
@@ -17781,7 +17645,7 @@
                         </m:e>
                       </m:d>
                       <m:r>
-                        <a:rPr lang="pt-BR" sz="2400" b="1" i="1">
+                        <a:rPr lang="pt-BR" b="1" i="1">
                           <a:latin typeface="Cambria Math" panose="02040503050406030204" pitchFamily="18" charset="0"/>
                         </a:rPr>
                         <m:t>=</m:t>
@@ -17789,7 +17653,7 @@
                       <m:f>
                         <m:fPr>
                           <m:ctrlPr>
-                            <a:rPr lang="pt-BR" sz="2400" b="1" i="1">
+                            <a:rPr lang="pt-BR" b="1" i="1">
                               <a:latin typeface="Cambria Math" panose="02040503050406030204" pitchFamily="18" charset="0"/>
                             </a:rPr>
                           </m:ctrlPr>
@@ -17798,14 +17662,14 @@
                           <m:sSup>
                             <m:sSupPr>
                               <m:ctrlPr>
-                                <a:rPr lang="pt-BR" sz="2400" b="1" i="1">
+                                <a:rPr lang="pt-BR" b="1" i="1">
                                   <a:latin typeface="Cambria Math" panose="02040503050406030204" pitchFamily="18" charset="0"/>
                                 </a:rPr>
                               </m:ctrlPr>
                             </m:sSupPr>
                             <m:e>
                               <m:r>
-                                <a:rPr lang="pt-BR" sz="2400" i="1">
+                                <a:rPr lang="pt-BR" i="1">
                                   <a:latin typeface="Cambria Math" panose="02040503050406030204" pitchFamily="18" charset="0"/>
                                 </a:rPr>
                                 <m:t>𝑒</m:t>
@@ -17815,14 +17679,14 @@
                               <m:sSub>
                                 <m:sSubPr>
                                   <m:ctrlPr>
-                                    <a:rPr lang="pt-BR" sz="2400" i="1">
+                                    <a:rPr lang="pt-BR" i="1">
                                       <a:latin typeface="Cambria Math" panose="02040503050406030204" pitchFamily="18" charset="0"/>
                                     </a:rPr>
                                   </m:ctrlPr>
                                 </m:sSubPr>
                                 <m:e>
                                   <m:r>
-                                    <a:rPr lang="pt-BR" sz="2400" i="1">
+                                    <a:rPr lang="pt-BR" i="1">
                                       <a:latin typeface="Cambria Math" panose="02040503050406030204" pitchFamily="18" charset="0"/>
                                     </a:rPr>
                                     <m:t>𝑔</m:t>
@@ -17830,7 +17694,7 @@
                                 </m:e>
                                 <m:sub>
                                   <m:r>
-                                    <a:rPr lang="pt-BR" sz="2400" i="1">
+                                    <a:rPr lang="pt-BR" i="1">
                                       <a:latin typeface="Cambria Math" panose="02040503050406030204" pitchFamily="18" charset="0"/>
                                     </a:rPr>
                                     <m:t>𝑞</m:t>
@@ -17838,37 +17702,37 @@
                                 </m:sub>
                               </m:sSub>
                               <m:r>
-                                <a:rPr lang="pt-BR" sz="2400" b="1" i="1">
+                                <a:rPr lang="pt-BR" b="1" i="1">
                                   <a:latin typeface="Cambria Math" panose="02040503050406030204" pitchFamily="18" charset="0"/>
                                 </a:rPr>
                                 <m:t>(</m:t>
                               </m:r>
                               <m:r>
-                                <a:rPr lang="pt-BR" sz="2400" b="1" i="1">
+                                <a:rPr lang="pt-BR" b="1" i="1">
                                   <a:latin typeface="Cambria Math" panose="02040503050406030204" pitchFamily="18" charset="0"/>
                                 </a:rPr>
                                 <m:t>𝒙</m:t>
                               </m:r>
                               <m:r>
-                                <a:rPr lang="pt-BR" sz="2400" i="1">
+                                <a:rPr lang="pt-BR" i="1">
                                   <a:latin typeface="Cambria Math" panose="02040503050406030204" pitchFamily="18" charset="0"/>
                                 </a:rPr>
                                 <m:t>(</m:t>
                               </m:r>
                               <m:r>
-                                <a:rPr lang="pt-BR" sz="2400" b="0" i="1" smtClean="0">
+                                <a:rPr lang="pt-BR" b="0" i="1" smtClean="0">
                                   <a:latin typeface="Cambria Math" panose="02040503050406030204" pitchFamily="18" charset="0"/>
                                 </a:rPr>
                                 <m:t>𝑛</m:t>
                               </m:r>
                               <m:r>
-                                <a:rPr lang="pt-BR" sz="2400" i="1">
+                                <a:rPr lang="pt-BR" i="1">
                                   <a:latin typeface="Cambria Math" panose="02040503050406030204" pitchFamily="18" charset="0"/>
                                 </a:rPr>
                                 <m:t>)</m:t>
                               </m:r>
                               <m:r>
-                                <a:rPr lang="pt-BR" sz="2400" b="1" i="1">
+                                <a:rPr lang="pt-BR" b="1" i="1">
                                   <a:latin typeface="Cambria Math" panose="02040503050406030204" pitchFamily="18" charset="0"/>
                                 </a:rPr>
                                 <m:t>)</m:t>
@@ -17881,20 +17745,20 @@
                             <m:naryPr>
                               <m:chr m:val="∑"/>
                               <m:ctrlPr>
-                                <a:rPr lang="pt-BR" sz="2400" b="1" i="1">
+                                <a:rPr lang="pt-BR" b="1" i="1">
                                   <a:latin typeface="Cambria Math" panose="02040503050406030204" pitchFamily="18" charset="0"/>
                                 </a:rPr>
                               </m:ctrlPr>
                             </m:naryPr>
                             <m:sub>
                               <m:r>
-                                <a:rPr lang="pt-BR" sz="2400" i="1">
+                                <a:rPr lang="pt-BR" i="1">
                                   <a:latin typeface="Cambria Math" panose="02040503050406030204" pitchFamily="18" charset="0"/>
                                 </a:rPr>
                                 <m:t>𝑗</m:t>
                               </m:r>
                               <m:r>
-                                <a:rPr lang="pt-BR" sz="2400" i="1">
+                                <a:rPr lang="pt-BR" i="1">
                                   <a:latin typeface="Cambria Math" panose="02040503050406030204" pitchFamily="18" charset="0"/>
                                 </a:rPr>
                                 <m:t>=0</m:t>
@@ -17902,13 +17766,13 @@
                             </m:sub>
                             <m:sup>
                               <m:r>
-                                <a:rPr lang="pt-BR" sz="2400" i="1">
+                                <a:rPr lang="pt-BR" i="1">
                                   <a:latin typeface="Cambria Math" panose="02040503050406030204" pitchFamily="18" charset="0"/>
                                 </a:rPr>
                                 <m:t>𝑄</m:t>
                               </m:r>
                               <m:r>
-                                <a:rPr lang="pt-BR" sz="2400" b="0" i="1" smtClean="0">
+                                <a:rPr lang="pt-BR" b="0" i="1" smtClean="0">
                                   <a:latin typeface="Cambria Math" panose="02040503050406030204" pitchFamily="18" charset="0"/>
                                 </a:rPr>
                                 <m:t>−1</m:t>
@@ -17918,14 +17782,14 @@
                               <m:sSup>
                                 <m:sSupPr>
                                   <m:ctrlPr>
-                                    <a:rPr lang="pt-BR" sz="2400" b="1" i="1">
+                                    <a:rPr lang="pt-BR" b="1" i="1">
                                       <a:latin typeface="Cambria Math" panose="02040503050406030204" pitchFamily="18" charset="0"/>
                                     </a:rPr>
                                   </m:ctrlPr>
                                 </m:sSupPr>
                                 <m:e>
                                   <m:r>
-                                    <a:rPr lang="pt-BR" sz="2400" i="1">
+                                    <a:rPr lang="pt-BR" i="1">
                                       <a:latin typeface="Cambria Math" panose="02040503050406030204" pitchFamily="18" charset="0"/>
                                     </a:rPr>
                                     <m:t>𝑒</m:t>
@@ -17935,14 +17799,14 @@
                                   <m:sSub>
                                     <m:sSubPr>
                                       <m:ctrlPr>
-                                        <a:rPr lang="pt-BR" sz="2400" i="1">
+                                        <a:rPr lang="pt-BR" i="1">
                                           <a:latin typeface="Cambria Math" panose="02040503050406030204" pitchFamily="18" charset="0"/>
                                         </a:rPr>
                                       </m:ctrlPr>
                                     </m:sSubPr>
                                     <m:e>
                                       <m:r>
-                                        <a:rPr lang="pt-BR" sz="2400" i="1">
+                                        <a:rPr lang="pt-BR" i="1">
                                           <a:latin typeface="Cambria Math" panose="02040503050406030204" pitchFamily="18" charset="0"/>
                                         </a:rPr>
                                         <m:t>𝑔</m:t>
@@ -17950,7 +17814,7 @@
                                     </m:e>
                                     <m:sub>
                                       <m:r>
-                                        <a:rPr lang="pt-BR" sz="2400" i="1">
+                                        <a:rPr lang="pt-BR" i="1">
                                           <a:latin typeface="Cambria Math" panose="02040503050406030204" pitchFamily="18" charset="0"/>
                                         </a:rPr>
                                         <m:t>𝑗</m:t>
@@ -17958,37 +17822,37 @@
                                     </m:sub>
                                   </m:sSub>
                                   <m:r>
-                                    <a:rPr lang="pt-BR" sz="2400" b="1" i="1">
+                                    <a:rPr lang="pt-BR" b="1" i="1">
                                       <a:latin typeface="Cambria Math" panose="02040503050406030204" pitchFamily="18" charset="0"/>
                                     </a:rPr>
                                     <m:t>(</m:t>
                                   </m:r>
                                   <m:r>
-                                    <a:rPr lang="pt-BR" sz="2400" b="1" i="1">
+                                    <a:rPr lang="pt-BR" b="1" i="1">
                                       <a:latin typeface="Cambria Math" panose="02040503050406030204" pitchFamily="18" charset="0"/>
                                     </a:rPr>
                                     <m:t>𝒙</m:t>
                                   </m:r>
                                   <m:r>
-                                    <a:rPr lang="pt-BR" sz="2400" i="1">
+                                    <a:rPr lang="pt-BR" i="1">
                                       <a:latin typeface="Cambria Math" panose="02040503050406030204" pitchFamily="18" charset="0"/>
                                     </a:rPr>
                                     <m:t>(</m:t>
                                   </m:r>
                                   <m:r>
-                                    <a:rPr lang="pt-BR" sz="2400" b="0" i="1" smtClean="0">
+                                    <a:rPr lang="pt-BR" b="0" i="1" smtClean="0">
                                       <a:latin typeface="Cambria Math" panose="02040503050406030204" pitchFamily="18" charset="0"/>
                                     </a:rPr>
                                     <m:t>𝑛</m:t>
                                   </m:r>
                                   <m:r>
-                                    <a:rPr lang="pt-BR" sz="2400" i="1">
+                                    <a:rPr lang="pt-BR" i="1">
                                       <a:latin typeface="Cambria Math" panose="02040503050406030204" pitchFamily="18" charset="0"/>
                                     </a:rPr>
                                     <m:t>)</m:t>
                                   </m:r>
                                   <m:r>
-                                    <a:rPr lang="pt-BR" sz="2400" b="1" i="1">
+                                    <a:rPr lang="pt-BR" b="1" i="1">
                                       <a:latin typeface="Cambria Math" panose="02040503050406030204" pitchFamily="18" charset="0"/>
                                     </a:rPr>
                                     <m:t>)</m:t>
@@ -18000,60 +17864,21 @@
                         </m:den>
                       </m:f>
                       <m:r>
-                        <a:rPr lang="pt-BR" sz="2400" b="1" i="1">
+                        <a:rPr lang="pt-BR" b="0" i="1" smtClean="0">
                           <a:latin typeface="Cambria Math" panose="02040503050406030204" pitchFamily="18" charset="0"/>
                           <a:ea typeface="Cambria Math" panose="02040503050406030204" pitchFamily="18" charset="0"/>
                         </a:rPr>
-                        <m:t>∈</m:t>
+                        <m:t>∀</m:t>
                       </m:r>
                       <m:r>
-                        <a:rPr lang="pt-BR" sz="2400" b="1" i="1">
+                        <a:rPr lang="pt-BR" b="0" i="1" smtClean="0">
                           <a:latin typeface="Cambria Math" panose="02040503050406030204" pitchFamily="18" charset="0"/>
                           <a:ea typeface="Cambria Math" panose="02040503050406030204" pitchFamily="18" charset="0"/>
                         </a:rPr>
-                        <m:t>ℝ</m:t>
+                        <m:t>𝑞</m:t>
                       </m:r>
                       <m:r>
-                        <a:rPr lang="pt-BR" sz="2400" b="1" i="1">
-                          <a:latin typeface="Cambria Math" panose="02040503050406030204" pitchFamily="18" charset="0"/>
-                          <a:ea typeface="Cambria Math" panose="02040503050406030204" pitchFamily="18" charset="0"/>
-                        </a:rPr>
-                        <m:t> </m:t>
-                      </m:r>
-                      <m:d>
-                        <m:dPr>
-                          <m:begChr m:val="["/>
-                          <m:endChr m:val="]"/>
-                          <m:ctrlPr>
-                            <a:rPr lang="pt-BR" sz="2400" b="1" i="1">
-                              <a:latin typeface="Cambria Math" panose="02040503050406030204" pitchFamily="18" charset="0"/>
-                              <a:ea typeface="Cambria Math" panose="02040503050406030204" pitchFamily="18" charset="0"/>
-                            </a:rPr>
-                          </m:ctrlPr>
-                        </m:dPr>
-                        <m:e>
-                          <m:r>
-                            <a:rPr lang="pt-BR" sz="2400">
-                              <a:latin typeface="Cambria Math" panose="02040503050406030204" pitchFamily="18" charset="0"/>
-                            </a:rPr>
-                            <m:t>0,</m:t>
-                          </m:r>
-                          <m:r>
-                            <a:rPr lang="pt-BR" sz="2400" b="0" i="0" smtClean="0">
-                              <a:latin typeface="Cambria Math" panose="02040503050406030204" pitchFamily="18" charset="0"/>
-                            </a:rPr>
-                            <m:t> </m:t>
-                          </m:r>
-                          <m:r>
-                            <a:rPr lang="pt-BR" sz="2400">
-                              <a:latin typeface="Cambria Math" panose="02040503050406030204" pitchFamily="18" charset="0"/>
-                            </a:rPr>
-                            <m:t>1</m:t>
-                          </m:r>
-                        </m:e>
-                      </m:d>
-                      <m:r>
-                        <a:rPr lang="pt-BR" sz="2400" b="1" i="1" smtClean="0">
+                        <a:rPr lang="pt-BR" b="1" i="1" smtClean="0">
                           <a:latin typeface="Cambria Math" panose="02040503050406030204" pitchFamily="18" charset="0"/>
                         </a:rPr>
                         <m:t>,</m:t>
@@ -18061,7 +17886,7 @@
                     </m:oMath>
                   </m:oMathPara>
                 </a14:m>
-                <a:endParaRPr lang="pt-BR" sz="2400" i="1" dirty="0"/>
+                <a:endParaRPr lang="pt-BR" i="1" dirty="0"/>
               </a:p>
               <a:p>
                 <a:pPr marL="0" indent="0">
@@ -18583,7 +18408,7 @@
               <p:cNvPr id="3" name="Espaço Reservado para Conteúdo 2">
                 <a:extLst>
                   <a:ext uri="{FF2B5EF4-FFF2-40B4-BE49-F238E27FC236}">
-                    <a16:creationId xmlns:a16="http://schemas.microsoft.com/office/drawing/2014/main" id="{D79BB7DC-99E7-8958-EC77-566B7E3C2BBB}"/>
+                    <a16:creationId xmlns="" xmlns:a16="http://schemas.microsoft.com/office/drawing/2014/main" xmlns:a14="http://schemas.microsoft.com/office/drawing/2010/main" id="{D79BB7DC-99E7-8958-EC77-566B7E3C2BBB}"/>
                   </a:ext>
                 </a:extLst>
               </p:cNvPr>
@@ -18599,7 +18424,7 @@
                 <a:off x="838200" y="1825624"/>
                 <a:ext cx="11080174" cy="5032375"/>
               </a:xfrm>
-              <a:blipFill>
+              <a:blipFill rotWithShape="0">
                 <a:blip r:embed="rId3"/>
                 <a:stretch>
                   <a:fillRect l="-1156" t="-1332"/>
@@ -18611,7 +18436,7 @@
               <a:lstStyle/>
               <a:p>
                 <a:r>
-                  <a:rPr lang="en-US">
+                  <a:rPr lang="pt-BR">
                     <a:noFill/>
                   </a:rPr>
                   <a:t> </a:t>
@@ -18624,7 +18449,7 @@
     </p:spTree>
     <p:extLst>
       <p:ext uri="{BB962C8B-B14F-4D97-AF65-F5344CB8AC3E}">
-        <p14:creationId xmlns:p14="http://schemas.microsoft.com/office/powerpoint/2010/main" val="891545203"/>
+        <p14:creationId xmlns:p14="http://schemas.microsoft.com/office/powerpoint/2010/main" val="3471453192"/>
       </p:ext>
     </p:extLst>
   </p:cSld>
@@ -18704,7 +18529,7 @@
             <p:spPr>
               <a:xfrm>
                 <a:off x="838200" y="1825624"/>
-                <a:ext cx="11232473" cy="5032375"/>
+                <a:ext cx="11353800" cy="5032375"/>
               </a:xfrm>
             </p:spPr>
             <p:txBody>
@@ -18714,66 +18539,11 @@
               <a:lstStyle/>
               <a:p>
                 <a:r>
-                  <a:rPr lang="pt-BR" b="0" dirty="0">
-                    <a:effectLst/>
-                  </a:rPr>
-                  <a:t>Ela transforma um </a:t>
-                </a:r>
-                <a:r>
-                  <a:rPr lang="pt-BR" b="1" dirty="0">
-                    <a:solidFill>
-                      <a:srgbClr val="00B050"/>
-                    </a:solidFill>
-                    <a:effectLst/>
-                  </a:rPr>
-                  <a:t>vetor </a:t>
-                </a:r>
-                <a:r>
-                  <a:rPr lang="pt-BR" b="1" dirty="0">
-                    <a:solidFill>
-                      <a:srgbClr val="00B050"/>
-                    </a:solidFill>
-                  </a:rPr>
-                  <a:t>com</a:t>
-                </a:r>
-                <a:r>
-                  <a:rPr lang="pt-BR" b="1" dirty="0">
-                    <a:solidFill>
-                      <a:srgbClr val="00B050"/>
-                    </a:solidFill>
-                    <a:effectLst/>
-                  </a:rPr>
-                  <a:t> valores</a:t>
-                </a:r>
-                <a:r>
-                  <a:rPr lang="pt-BR" b="1" dirty="0">
-                    <a:solidFill>
-                      <a:srgbClr val="00B050"/>
-                    </a:solidFill>
-                  </a:rPr>
-                  <a:t> de </a:t>
-                </a:r>
-                <a:r>
-                  <a:rPr lang="pt-BR" b="1" dirty="0">
-                    <a:solidFill>
-                      <a:srgbClr val="00B050"/>
-                    </a:solidFill>
-                    <a:effectLst/>
-                  </a:rPr>
-                  <a:t>funções discriminantes em uma distribuição de probabilidades</a:t>
-                </a:r>
-                <a:r>
-                  <a:rPr lang="pt-BR" b="0" dirty="0">
-                    <a:effectLst/>
-                  </a:rPr>
-                  <a:t>.</a:t>
+                  <a:rPr lang="pt-BR" dirty="0"/>
+                  <a:t>É uma generalização da função sigmoide.</a:t>
                 </a:r>
               </a:p>
               <a:p>
-                <a:pPr lvl="1">
-                  <a:buFont typeface="Wingdings" panose="05000000000000000000" pitchFamily="2" charset="2"/>
-                  <a:buChar char="§"/>
-                </a:pPr>
                 <a:r>
                   <a:rPr lang="pt-BR" dirty="0"/>
                   <a:t>O somatório de termos exponenciais no denominador </a:t>
@@ -18788,20 +18558,12 @@
                 </a:r>
                 <a:r>
                   <a:rPr lang="pt-BR" dirty="0"/>
-                  <a:t> o valor da </a:t>
-                </a:r>
-                <a:r>
-                  <a:rPr lang="pt-BR" i="1" dirty="0"/>
-                  <a:t>q</a:t>
-                </a:r>
-                <a:r>
-                  <a:rPr lang="pt-BR" dirty="0"/>
-                  <a:t>-ésima saída de tal forma que o somatório das </a:t>
+                  <a:t> o valor de cada uma das </a:t>
                 </a:r>
                 <a14:m>
                   <m:oMath xmlns:m="http://schemas.openxmlformats.org/officeDocument/2006/math">
                     <m:r>
-                      <a:rPr lang="pt-BR" i="1">
+                      <a:rPr lang="pt-BR" b="0" i="1" smtClean="0">
                         <a:latin typeface="Cambria Math" panose="02040503050406030204" pitchFamily="18" charset="0"/>
                       </a:rPr>
                       <m:t>𝑄</m:t>
@@ -18810,7 +18572,7 @@
                 </a14:m>
                 <a:r>
                   <a:rPr lang="pt-BR" dirty="0"/>
-                  <a:t> saídas seja igual a 1</a:t>
+                  <a:t> saídas, fazendo com que elas fiquem no intervalo [0, 1].</a:t>
                 </a:r>
               </a:p>
               <a:p>
@@ -19295,7 +19057,46 @@
               <a:p>
                 <a:r>
                   <a:rPr lang="pt-BR" dirty="0"/>
-                  <a:t>Dado um exemplo de entrada, ela </a:t>
+                  <a:t>Ela transforma os </a:t>
+                </a:r>
+                <a:r>
+                  <a:rPr lang="pt-BR" b="1" dirty="0">
+                    <a:solidFill>
+                      <a:srgbClr val="00B050"/>
+                    </a:solidFill>
+                  </a:rPr>
+                  <a:t>valores das </a:t>
+                </a:r>
+                <a14:m>
+                  <m:oMath xmlns:m="http://schemas.openxmlformats.org/officeDocument/2006/math">
+                    <m:r>
+                      <a:rPr lang="pt-BR" b="1" i="1">
+                        <a:solidFill>
+                          <a:srgbClr val="00B050"/>
+                        </a:solidFill>
+                        <a:latin typeface="Cambria Math" panose="02040503050406030204" pitchFamily="18" charset="0"/>
+                      </a:rPr>
+                      <m:t>𝑸</m:t>
+                    </m:r>
+                  </m:oMath>
+                </a14:m>
+                <a:r>
+                  <a:rPr lang="pt-BR" b="1" dirty="0">
+                    <a:solidFill>
+                      <a:srgbClr val="00B050"/>
+                    </a:solidFill>
+                  </a:rPr>
+                  <a:t> funções discriminantes em uma distribuição de probabilidades</a:t>
+                </a:r>
+                <a:r>
+                  <a:rPr lang="pt-BR" dirty="0"/>
+                  <a:t>.</a:t>
+                </a:r>
+              </a:p>
+              <a:p>
+                <a:r>
+                  <a:rPr lang="pt-BR" dirty="0"/>
+                  <a:t>Assim, dado um exemplo de entrada, ela </a:t>
                 </a:r>
                 <a:r>
                   <a:rPr lang="pt-BR" b="1" dirty="0">
@@ -19331,838 +19132,14 @@
                       <a:srgbClr val="00B050"/>
                     </a:solidFill>
                   </a:rPr>
-                  <a:t>para cada classe </a:t>
-                </a:r>
-                <a:r>
-                  <a:rPr lang="pt-BR" dirty="0"/>
-                  <a:t>possível.</a:t>
-                </a:r>
-              </a:p>
-              <a:p>
-                <a:r>
-                  <a:rPr lang="pt-BR" dirty="0"/>
-                  <a:t>É uma generalização da função sigmoide.</a:t>
-                </a:r>
-              </a:p>
-            </p:txBody>
-          </p:sp>
-        </mc:Choice>
-        <mc:Fallback xmlns="">
-          <p:sp>
-            <p:nvSpPr>
-              <p:cNvPr id="3" name="Espaço Reservado para Conteúdo 2">
-                <a:extLst>
-                  <a:ext uri="{FF2B5EF4-FFF2-40B4-BE49-F238E27FC236}">
-                    <a16:creationId xmlns:a16="http://schemas.microsoft.com/office/drawing/2014/main" id="{BCAAD57B-65A0-9DAD-79FC-2AE2692EB84B}"/>
-                  </a:ext>
-                </a:extLst>
-              </p:cNvPr>
-              <p:cNvSpPr>
-                <a:spLocks noGrp="1" noRot="1" noChangeAspect="1" noMove="1" noResize="1" noEditPoints="1" noAdjustHandles="1" noChangeArrowheads="1" noChangeShapeType="1" noTextEdit="1"/>
-              </p:cNvSpPr>
-              <p:nvPr>
-                <p:ph idx="1"/>
-              </p:nvPr>
-            </p:nvSpPr>
-            <p:spPr>
-              <a:xfrm>
-                <a:off x="838200" y="1825624"/>
-                <a:ext cx="11232473" cy="5032375"/>
-              </a:xfrm>
-              <a:blipFill>
-                <a:blip r:embed="rId3"/>
-                <a:stretch>
-                  <a:fillRect l="-977" t="-1937" r="-1140"/>
-                </a:stretch>
-              </a:blipFill>
-            </p:spPr>
-            <p:txBody>
-              <a:bodyPr/>
-              <a:lstStyle/>
-              <a:p>
-                <a:r>
-                  <a:rPr lang="en-US">
-                    <a:noFill/>
-                  </a:rPr>
-                  <a:t> </a:t>
-                </a:r>
-              </a:p>
-            </p:txBody>
-          </p:sp>
-        </mc:Fallback>
-      </mc:AlternateContent>
-      <p:sp>
-        <p:nvSpPr>
-          <p:cNvPr id="5" name="Rectangle 11">
-            <a:extLst>
-              <a:ext uri="{FF2B5EF4-FFF2-40B4-BE49-F238E27FC236}">
-                <a16:creationId xmlns:a16="http://schemas.microsoft.com/office/drawing/2014/main" id="{D1D7E603-A964-1188-9D09-B0C1E18592FA}"/>
-              </a:ext>
-            </a:extLst>
-          </p:cNvPr>
-          <p:cNvSpPr/>
-          <p:nvPr/>
-        </p:nvSpPr>
-        <p:spPr>
-          <a:xfrm>
-            <a:off x="6677025" y="3843791"/>
-            <a:ext cx="2143124" cy="575809"/>
-          </a:xfrm>
-          <a:prstGeom prst="rect">
-            <a:avLst/>
-          </a:prstGeom>
-          <a:noFill/>
-          <a:ln w="28575">
-            <a:solidFill>
-              <a:srgbClr val="FF0000"/>
-            </a:solidFill>
-          </a:ln>
-        </p:spPr>
-        <p:style>
-          <a:lnRef idx="2">
-            <a:schemeClr val="accent1">
-              <a:shade val="50000"/>
-            </a:schemeClr>
-          </a:lnRef>
-          <a:fillRef idx="1">
-            <a:schemeClr val="accent1"/>
-          </a:fillRef>
-          <a:effectRef idx="0">
-            <a:schemeClr val="accent1"/>
-          </a:effectRef>
-          <a:fontRef idx="minor">
-            <a:schemeClr val="lt1"/>
-          </a:fontRef>
-        </p:style>
-        <p:txBody>
-          <a:bodyPr rtlCol="0" anchor="ctr"/>
-          <a:lstStyle/>
-          <a:p>
-            <a:pPr algn="ctr"/>
-            <a:endParaRPr lang="pt-BR"/>
-          </a:p>
-        </p:txBody>
-      </p:sp>
-    </p:spTree>
-    <p:extLst>
-      <p:ext uri="{BB962C8B-B14F-4D97-AF65-F5344CB8AC3E}">
-        <p14:creationId xmlns:p14="http://schemas.microsoft.com/office/powerpoint/2010/main" val="3157208382"/>
-      </p:ext>
-    </p:extLst>
-  </p:cSld>
-  <p:clrMapOvr>
-    <a:masterClrMapping/>
-  </p:clrMapOvr>
-</p:sld>
-</file>
-
-<file path=ppt/slides/slide8.xml><?xml version="1.0" encoding="utf-8"?>
-<p:sld xmlns:a="http://schemas.openxmlformats.org/drawingml/2006/main" xmlns:r="http://schemas.openxmlformats.org/officeDocument/2006/relationships" xmlns:p="http://schemas.openxmlformats.org/presentationml/2006/main">
-  <p:cSld>
-    <p:spTree>
-      <p:nvGrpSpPr>
-        <p:cNvPr id="1" name=""/>
-        <p:cNvGrpSpPr/>
-        <p:nvPr/>
-      </p:nvGrpSpPr>
-      <p:grpSpPr>
-        <a:xfrm>
-          <a:off x="0" y="0"/>
-          <a:ext cx="0" cy="0"/>
-          <a:chOff x="0" y="0"/>
-          <a:chExt cx="0" cy="0"/>
-        </a:xfrm>
-      </p:grpSpPr>
-      <p:sp>
-        <p:nvSpPr>
-          <p:cNvPr id="2" name="Título 1">
-            <a:extLst>
-              <a:ext uri="{FF2B5EF4-FFF2-40B4-BE49-F238E27FC236}">
-                <a16:creationId xmlns:a16="http://schemas.microsoft.com/office/drawing/2014/main" id="{99DAA83A-B143-94BB-B48B-41A7423070CE}"/>
-              </a:ext>
-            </a:extLst>
-          </p:cNvPr>
-          <p:cNvSpPr>
-            <a:spLocks noGrp="1"/>
-          </p:cNvSpPr>
-          <p:nvPr>
-            <p:ph type="title"/>
-          </p:nvPr>
-        </p:nvSpPr>
-        <p:spPr/>
-        <p:txBody>
-          <a:bodyPr/>
-          <a:lstStyle/>
-          <a:p>
-            <a:r>
-              <a:rPr lang="pt-BR" dirty="0"/>
-              <a:t>Função de ativação </a:t>
-            </a:r>
-            <a:r>
-              <a:rPr lang="pt-BR" i="1" dirty="0"/>
-              <a:t>softmax</a:t>
-            </a:r>
-            <a:endParaRPr lang="pt-BR" dirty="0"/>
-          </a:p>
-        </p:txBody>
-      </p:sp>
-      <mc:AlternateContent xmlns:mc="http://schemas.openxmlformats.org/markup-compatibility/2006" xmlns:a14="http://schemas.microsoft.com/office/drawing/2010/main">
-        <mc:Choice Requires="a14">
-          <p:sp>
-            <p:nvSpPr>
-              <p:cNvPr id="3" name="Espaço Reservado para Conteúdo 2">
-                <a:extLst>
-                  <a:ext uri="{FF2B5EF4-FFF2-40B4-BE49-F238E27FC236}">
-                    <a16:creationId xmlns:a16="http://schemas.microsoft.com/office/drawing/2014/main" id="{32DF54A1-52F5-C48C-7CD4-D6E451DF19D8}"/>
-                  </a:ext>
-                </a:extLst>
-              </p:cNvPr>
-              <p:cNvSpPr>
-                <a:spLocks noGrp="1"/>
-              </p:cNvSpPr>
-              <p:nvPr>
-                <p:ph idx="1"/>
-              </p:nvPr>
-            </p:nvSpPr>
-            <p:spPr>
-              <a:xfrm>
-                <a:off x="6646606" y="1825624"/>
-                <a:ext cx="5417575" cy="5032375"/>
-              </a:xfrm>
-            </p:spPr>
-            <p:txBody>
-              <a:bodyPr>
-                <a:normAutofit/>
-              </a:bodyPr>
-              <a:lstStyle/>
-              <a:p>
-                <a:r>
-                  <a:rPr lang="pt-BR" dirty="0"/>
-                  <a:t>A função </a:t>
-                </a:r>
-                <a:r>
-                  <a:rPr lang="pt-BR" i="1" dirty="0"/>
-                  <a:t>softmax</a:t>
-                </a:r>
-                <a:r>
-                  <a:rPr lang="pt-BR" dirty="0"/>
-                  <a:t> </a:t>
+                  <a:t>condicional</a:t>
                 </a:r>
                 <a:r>
                   <a:rPr lang="pt-BR" dirty="0">
-                    <a:solidFill>
-                      <a:schemeClr val="tx1"/>
-                    </a:solidFill>
-                  </a:rPr>
-                  <a:t>o</a:t>
-                </a:r>
-                <a:r>
-                  <a:rPr lang="pt-BR" b="0" i="0" dirty="0">
-                    <a:solidFill>
-                      <a:schemeClr val="tx1"/>
-                    </a:solidFill>
-                    <a:effectLst/>
-                  </a:rPr>
-                  <a:t>pera da seguinte maneira.</a:t>
-                </a:r>
-              </a:p>
-              <a:p>
-                <a:r>
-                  <a:rPr lang="pt-BR" b="0" i="0" dirty="0">
-                    <a:solidFill>
-                      <a:schemeClr val="tx1"/>
-                    </a:solidFill>
-                    <a:effectLst/>
-                  </a:rPr>
-                  <a:t>Dado um </a:t>
-                </a:r>
-                <a:r>
-                  <a:rPr lang="pt-BR" b="1" dirty="0">
-                    <a:solidFill>
-                      <a:srgbClr val="00B050"/>
-                    </a:solidFill>
-                    <a:effectLst/>
-                  </a:rPr>
-                  <a:t>vetor </a:t>
-                </a:r>
-                <a:r>
-                  <a:rPr lang="pt-BR" b="1" dirty="0">
                     <a:solidFill>
                       <a:srgbClr val="00B050"/>
                     </a:solidFill>
                   </a:rPr>
-                  <a:t>com</a:t>
-                </a:r>
-                <a:r>
-                  <a:rPr lang="pt-BR" b="1" dirty="0">
-                    <a:solidFill>
-                      <a:srgbClr val="00B050"/>
-                    </a:solidFill>
-                    <a:effectLst/>
-                  </a:rPr>
-                  <a:t> valores de funções discriminantes</a:t>
-                </a:r>
-                <a:r>
-                  <a:rPr lang="pt-BR" b="0" i="0" dirty="0">
-                    <a:solidFill>
-                      <a:schemeClr val="tx1"/>
-                    </a:solidFill>
-                    <a:effectLst/>
-                  </a:rPr>
-                  <a:t>, </a:t>
-                </a:r>
-                <a14:m>
-                  <m:oMath xmlns:m="http://schemas.openxmlformats.org/officeDocument/2006/math">
-                    <m:sSub>
-                      <m:sSubPr>
-                        <m:ctrlPr>
-                          <a:rPr lang="pt-BR" sz="2800" i="1" smtClean="0">
-                            <a:solidFill>
-                              <a:schemeClr val="tx1"/>
-                            </a:solidFill>
-                            <a:latin typeface="Cambria Math" panose="02040503050406030204" pitchFamily="18" charset="0"/>
-                          </a:rPr>
-                        </m:ctrlPr>
-                      </m:sSubPr>
-                      <m:e>
-                        <m:r>
-                          <a:rPr lang="pt-BR" sz="2800" i="1">
-                            <a:solidFill>
-                              <a:schemeClr val="tx1"/>
-                            </a:solidFill>
-                            <a:latin typeface="Cambria Math" panose="02040503050406030204" pitchFamily="18" charset="0"/>
-                          </a:rPr>
-                          <m:t>𝑔</m:t>
-                        </m:r>
-                      </m:e>
-                      <m:sub>
-                        <m:r>
-                          <a:rPr lang="pt-BR" sz="2800" b="0" i="1" smtClean="0">
-                            <a:solidFill>
-                              <a:schemeClr val="tx1"/>
-                            </a:solidFill>
-                            <a:latin typeface="Cambria Math" panose="02040503050406030204" pitchFamily="18" charset="0"/>
-                          </a:rPr>
-                          <m:t>𝑞</m:t>
-                        </m:r>
-                      </m:sub>
-                    </m:sSub>
-                    <m:d>
-                      <m:dPr>
-                        <m:ctrlPr>
-                          <a:rPr lang="pt-BR" sz="2800" i="1">
-                            <a:solidFill>
-                              <a:schemeClr val="tx1"/>
-                            </a:solidFill>
-                            <a:latin typeface="Cambria Math" panose="02040503050406030204" pitchFamily="18" charset="0"/>
-                          </a:rPr>
-                        </m:ctrlPr>
-                      </m:dPr>
-                      <m:e>
-                        <m:r>
-                          <a:rPr lang="pt-BR" sz="2800" b="1" i="1">
-                            <a:solidFill>
-                              <a:schemeClr val="tx1"/>
-                            </a:solidFill>
-                            <a:latin typeface="Cambria Math" panose="02040503050406030204" pitchFamily="18" charset="0"/>
-                          </a:rPr>
-                          <m:t>𝒙</m:t>
-                        </m:r>
-                        <m:r>
-                          <a:rPr lang="pt-BR" sz="2800" b="0" i="1" smtClean="0">
-                            <a:solidFill>
-                              <a:schemeClr val="tx1"/>
-                            </a:solidFill>
-                            <a:latin typeface="Cambria Math" panose="02040503050406030204" pitchFamily="18" charset="0"/>
-                          </a:rPr>
-                          <m:t>(</m:t>
-                        </m:r>
-                        <m:r>
-                          <a:rPr lang="pt-BR" sz="2800" b="0" i="1" smtClean="0">
-                            <a:solidFill>
-                              <a:schemeClr val="tx1"/>
-                            </a:solidFill>
-                            <a:latin typeface="Cambria Math" panose="02040503050406030204" pitchFamily="18" charset="0"/>
-                          </a:rPr>
-                          <m:t>𝑛</m:t>
-                        </m:r>
-                        <m:r>
-                          <a:rPr lang="pt-BR" sz="2800" b="0" i="1" smtClean="0">
-                            <a:solidFill>
-                              <a:schemeClr val="tx1"/>
-                            </a:solidFill>
-                            <a:latin typeface="Cambria Math" panose="02040503050406030204" pitchFamily="18" charset="0"/>
-                          </a:rPr>
-                          <m:t>)</m:t>
-                        </m:r>
-                      </m:e>
-                    </m:d>
-                    <m:r>
-                      <a:rPr lang="pt-BR" sz="2800" b="0" i="1" smtClean="0">
-                        <a:solidFill>
-                          <a:schemeClr val="tx1"/>
-                        </a:solidFill>
-                        <a:latin typeface="Cambria Math" panose="02040503050406030204" pitchFamily="18" charset="0"/>
-                      </a:rPr>
-                      <m:t>,</m:t>
-                    </m:r>
-                    <m:r>
-                      <a:rPr lang="pt-BR" sz="2800" i="1" smtClean="0">
-                        <a:solidFill>
-                          <a:schemeClr val="tx1"/>
-                        </a:solidFill>
-                        <a:latin typeface="Cambria Math" panose="02040503050406030204" pitchFamily="18" charset="0"/>
-                        <a:ea typeface="Cambria Math" panose="02040503050406030204" pitchFamily="18" charset="0"/>
-                      </a:rPr>
-                      <m:t>∀</m:t>
-                    </m:r>
-                    <m:r>
-                      <a:rPr lang="pt-BR" sz="2800" b="0" i="1" smtClean="0">
-                        <a:solidFill>
-                          <a:schemeClr val="tx1"/>
-                        </a:solidFill>
-                        <a:latin typeface="Cambria Math" panose="02040503050406030204" pitchFamily="18" charset="0"/>
-                        <a:ea typeface="Cambria Math" panose="02040503050406030204" pitchFamily="18" charset="0"/>
-                      </a:rPr>
-                      <m:t>𝑞</m:t>
-                    </m:r>
-                  </m:oMath>
-                </a14:m>
-                <a:r>
-                  <a:rPr lang="pt-BR" b="0" i="0" dirty="0">
-                    <a:solidFill>
-                      <a:schemeClr val="tx1"/>
-                    </a:solidFill>
-                    <a:effectLst/>
-                  </a:rPr>
-                  <a:t>, ela</a:t>
-                </a:r>
-                <a:endParaRPr lang="pt-BR" dirty="0"/>
-              </a:p>
-              <a:p>
-                <a:pPr lvl="1">
-                  <a:buFont typeface="Wingdings" panose="05000000000000000000" pitchFamily="2" charset="2"/>
-                  <a:buChar char="§"/>
-                </a:pPr>
-                <a:r>
-                  <a:rPr lang="pt-BR" b="0" i="0" dirty="0">
-                    <a:solidFill>
-                      <a:schemeClr val="tx1"/>
-                    </a:solidFill>
-                    <a:effectLst/>
-                  </a:rPr>
-                  <a:t>calcula a exponencial de cada função discriminante, </a:t>
-                </a:r>
-              </a:p>
-              <a:p>
-                <a:pPr lvl="1">
-                  <a:buFont typeface="Wingdings" panose="05000000000000000000" pitchFamily="2" charset="2"/>
-                  <a:buChar char="§"/>
-                </a:pPr>
-                <a:r>
-                  <a:rPr lang="pt-BR" b="0" i="0" dirty="0">
-                    <a:solidFill>
-                      <a:schemeClr val="tx1"/>
-                    </a:solidFill>
-                    <a:effectLst/>
-                  </a:rPr>
-                  <a:t>normaliza essas exponenciais dividindo-as pela soma de todas as exponenciais, gerando uma distribuição de probabilidades das classes.</a:t>
-                </a:r>
-              </a:p>
-            </p:txBody>
-          </p:sp>
-        </mc:Choice>
-        <mc:Fallback xmlns="">
-          <p:sp>
-            <p:nvSpPr>
-              <p:cNvPr id="3" name="Espaço Reservado para Conteúdo 2">
-                <a:extLst>
-                  <a:ext uri="{FF2B5EF4-FFF2-40B4-BE49-F238E27FC236}">
-                    <a16:creationId xmlns:a16="http://schemas.microsoft.com/office/drawing/2014/main" id="{32DF54A1-52F5-C48C-7CD4-D6E451DF19D8}"/>
-                  </a:ext>
-                </a:extLst>
-              </p:cNvPr>
-              <p:cNvSpPr>
-                <a:spLocks noGrp="1" noRot="1" noChangeAspect="1" noMove="1" noResize="1" noEditPoints="1" noAdjustHandles="1" noChangeArrowheads="1" noChangeShapeType="1" noTextEdit="1"/>
-              </p:cNvSpPr>
-              <p:nvPr>
-                <p:ph idx="1"/>
-              </p:nvPr>
-            </p:nvSpPr>
-            <p:spPr>
-              <a:xfrm>
-                <a:off x="6646606" y="1825624"/>
-                <a:ext cx="5417575" cy="5032375"/>
-              </a:xfrm>
-              <a:blipFill>
-                <a:blip r:embed="rId2"/>
-                <a:stretch>
-                  <a:fillRect l="-2025" t="-1937"/>
-                </a:stretch>
-              </a:blipFill>
-            </p:spPr>
-            <p:txBody>
-              <a:bodyPr/>
-              <a:lstStyle/>
-              <a:p>
-                <a:r>
-                  <a:rPr lang="en-US">
-                    <a:noFill/>
-                  </a:rPr>
-                  <a:t> </a:t>
-                </a:r>
-              </a:p>
-            </p:txBody>
-          </p:sp>
-        </mc:Fallback>
-      </mc:AlternateContent>
-      <p:pic>
-        <p:nvPicPr>
-          <p:cNvPr id="6" name="Imagem 5">
-            <a:extLst>
-              <a:ext uri="{FF2B5EF4-FFF2-40B4-BE49-F238E27FC236}">
-                <a16:creationId xmlns:a16="http://schemas.microsoft.com/office/drawing/2014/main" id="{ED5D1F5D-F195-0452-50D4-07E9F2B1C49D}"/>
-              </a:ext>
-            </a:extLst>
-          </p:cNvPr>
-          <p:cNvPicPr>
-            <a:picLocks noChangeAspect="1"/>
-          </p:cNvPicPr>
-          <p:nvPr/>
-        </p:nvPicPr>
-        <p:blipFill>
-          <a:blip r:embed="rId3" cstate="print">
-            <a:extLst>
-              <a:ext uri="{28A0092B-C50C-407E-A947-70E740481C1C}">
-                <a14:useLocalDpi xmlns:a14="http://schemas.microsoft.com/office/drawing/2010/main" val="0"/>
-              </a:ext>
-            </a:extLst>
-          </a:blip>
-          <a:stretch>
-            <a:fillRect/>
-          </a:stretch>
-        </p:blipFill>
-        <p:spPr>
-          <a:xfrm>
-            <a:off x="275559" y="2536723"/>
-            <a:ext cx="6066351" cy="2487561"/>
-          </a:xfrm>
-          <a:prstGeom prst="rect">
-            <a:avLst/>
-          </a:prstGeom>
-        </p:spPr>
-      </p:pic>
-      <p:sp>
-        <p:nvSpPr>
-          <p:cNvPr id="8" name="CaixaDeTexto 7">
-            <a:extLst>
-              <a:ext uri="{FF2B5EF4-FFF2-40B4-BE49-F238E27FC236}">
-                <a16:creationId xmlns:a16="http://schemas.microsoft.com/office/drawing/2014/main" id="{0DC5673F-9B77-2E9E-8317-E71CA8896FE0}"/>
-              </a:ext>
-            </a:extLst>
-          </p:cNvPr>
-          <p:cNvSpPr txBox="1"/>
-          <p:nvPr/>
-        </p:nvSpPr>
-        <p:spPr>
-          <a:xfrm>
-            <a:off x="127819" y="6492875"/>
-            <a:ext cx="2792362" cy="276999"/>
-          </a:xfrm>
-          <a:prstGeom prst="rect">
-            <a:avLst/>
-          </a:prstGeom>
-          <a:noFill/>
-        </p:spPr>
-        <p:txBody>
-          <a:bodyPr wrap="square">
-            <a:spAutoFit/>
-          </a:bodyPr>
-          <a:lstStyle/>
-          <a:p>
-            <a:r>
-              <a:rPr lang="pt-BR" sz="1200" b="0" dirty="0">
-                <a:effectLst/>
-              </a:rPr>
-              <a:t>OBS.:</a:t>
-            </a:r>
-            <a:r>
-              <a:rPr lang="pt-BR" sz="1200" b="0" i="1" dirty="0">
-                <a:effectLst/>
-              </a:rPr>
-              <a:t> e</a:t>
-            </a:r>
-            <a:r>
-              <a:rPr lang="pt-BR" sz="1200" b="0" i="0" dirty="0">
-                <a:effectLst/>
-              </a:rPr>
-              <a:t> é a base do logaritmo natural. </a:t>
-            </a:r>
-            <a:endParaRPr lang="pt-BR" sz="1200" dirty="0"/>
-          </a:p>
-        </p:txBody>
-      </p:sp>
-      <mc:AlternateContent xmlns:mc="http://schemas.openxmlformats.org/markup-compatibility/2006" xmlns:a14="http://schemas.microsoft.com/office/drawing/2010/main">
-        <mc:Choice Requires="a14">
-          <p:sp>
-            <p:nvSpPr>
-              <p:cNvPr id="4" name="CaixaDeTexto 3">
-                <a:extLst>
-                  <a:ext uri="{FF2B5EF4-FFF2-40B4-BE49-F238E27FC236}">
-                    <a16:creationId xmlns:a16="http://schemas.microsoft.com/office/drawing/2014/main" id="{CBD55F82-56D5-32C8-C5AB-AF99477FBAAC}"/>
-                  </a:ext>
-                </a:extLst>
-              </p:cNvPr>
-              <p:cNvSpPr txBox="1"/>
-              <p:nvPr/>
-            </p:nvSpPr>
-            <p:spPr>
-              <a:xfrm>
-                <a:off x="1543507" y="5639486"/>
-                <a:ext cx="3530454" cy="461665"/>
-              </a:xfrm>
-              <a:prstGeom prst="rect">
-                <a:avLst/>
-              </a:prstGeom>
-              <a:noFill/>
-            </p:spPr>
-            <p:txBody>
-              <a:bodyPr wrap="none" rtlCol="0">
-                <a:spAutoFit/>
-              </a:bodyPr>
-              <a:lstStyle/>
-              <a:p>
-                <a14:m>
-                  <m:oMath xmlns:m="http://schemas.openxmlformats.org/officeDocument/2006/math">
-                    <m:r>
-                      <a:rPr lang="pt-BR" sz="2400" b="0" i="1" smtClean="0">
-                        <a:latin typeface="Cambria Math" panose="02040503050406030204" pitchFamily="18" charset="0"/>
-                      </a:rPr>
-                      <m:t>𝑄</m:t>
-                    </m:r>
-                    <m:r>
-                      <a:rPr lang="pt-BR" sz="2400" b="0" i="1" smtClean="0">
-                        <a:latin typeface="Cambria Math" panose="02040503050406030204" pitchFamily="18" charset="0"/>
-                      </a:rPr>
-                      <m:t>=5</m:t>
-                    </m:r>
-                  </m:oMath>
-                </a14:m>
-                <a:r>
-                  <a:rPr lang="pt-BR" sz="2400" dirty="0"/>
-                  <a:t> (número de classes)</a:t>
-                </a:r>
-              </a:p>
-            </p:txBody>
-          </p:sp>
-        </mc:Choice>
-        <mc:Fallback xmlns="">
-          <p:sp>
-            <p:nvSpPr>
-              <p:cNvPr id="4" name="CaixaDeTexto 3">
-                <a:extLst>
-                  <a:ext uri="{FF2B5EF4-FFF2-40B4-BE49-F238E27FC236}">
-                    <a16:creationId xmlns:a16="http://schemas.microsoft.com/office/drawing/2014/main" id="{CBD55F82-56D5-32C8-C5AB-AF99477FBAAC}"/>
-                  </a:ext>
-                </a:extLst>
-              </p:cNvPr>
-              <p:cNvSpPr txBox="1">
-                <a:spLocks noRot="1" noChangeAspect="1" noMove="1" noResize="1" noEditPoints="1" noAdjustHandles="1" noChangeArrowheads="1" noChangeShapeType="1" noTextEdit="1"/>
-              </p:cNvSpPr>
-              <p:nvPr/>
-            </p:nvSpPr>
-            <p:spPr>
-              <a:xfrm>
-                <a:off x="1543507" y="5639486"/>
-                <a:ext cx="3530454" cy="461665"/>
-              </a:xfrm>
-              <a:prstGeom prst="rect">
-                <a:avLst/>
-              </a:prstGeom>
-              <a:blipFill>
-                <a:blip r:embed="rId4"/>
-                <a:stretch>
-                  <a:fillRect l="-1209" t="-10526" r="-1900" b="-28947"/>
-                </a:stretch>
-              </a:blipFill>
-            </p:spPr>
-            <p:txBody>
-              <a:bodyPr/>
-              <a:lstStyle/>
-              <a:p>
-                <a:r>
-                  <a:rPr lang="en-US">
-                    <a:noFill/>
-                  </a:rPr>
-                  <a:t> </a:t>
-                </a:r>
-              </a:p>
-            </p:txBody>
-          </p:sp>
-        </mc:Fallback>
-      </mc:AlternateContent>
-    </p:spTree>
-    <p:extLst>
-      <p:ext uri="{BB962C8B-B14F-4D97-AF65-F5344CB8AC3E}">
-        <p14:creationId xmlns:p14="http://schemas.microsoft.com/office/powerpoint/2010/main" val="3241947797"/>
-      </p:ext>
-    </p:extLst>
-  </p:cSld>
-  <p:clrMapOvr>
-    <a:masterClrMapping/>
-  </p:clrMapOvr>
-</p:sld>
-</file>
-
-<file path=ppt/slides/slide9.xml><?xml version="1.0" encoding="utf-8"?>
-<p:sld xmlns:a="http://schemas.openxmlformats.org/drawingml/2006/main" xmlns:r="http://schemas.openxmlformats.org/officeDocument/2006/relationships" xmlns:p="http://schemas.openxmlformats.org/presentationml/2006/main">
-  <p:cSld>
-    <p:spTree>
-      <p:nvGrpSpPr>
-        <p:cNvPr id="1" name=""/>
-        <p:cNvGrpSpPr/>
-        <p:nvPr/>
-      </p:nvGrpSpPr>
-      <p:grpSpPr>
-        <a:xfrm>
-          <a:off x="0" y="0"/>
-          <a:ext cx="0" cy="0"/>
-          <a:chOff x="0" y="0"/>
-          <a:chExt cx="0" cy="0"/>
-        </a:xfrm>
-      </p:grpSpPr>
-      <p:sp>
-        <p:nvSpPr>
-          <p:cNvPr id="2" name="Título 1">
-            <a:extLst>
-              <a:ext uri="{FF2B5EF4-FFF2-40B4-BE49-F238E27FC236}">
-                <a16:creationId xmlns:a16="http://schemas.microsoft.com/office/drawing/2014/main" id="{99DAA83A-B143-94BB-B48B-41A7423070CE}"/>
-              </a:ext>
-            </a:extLst>
-          </p:cNvPr>
-          <p:cNvSpPr>
-            <a:spLocks noGrp="1"/>
-          </p:cNvSpPr>
-          <p:nvPr>
-            <p:ph type="title"/>
-          </p:nvPr>
-        </p:nvSpPr>
-        <p:spPr/>
-        <p:txBody>
-          <a:bodyPr/>
-          <a:lstStyle/>
-          <a:p>
-            <a:r>
-              <a:rPr lang="pt-BR" dirty="0"/>
-              <a:t>Função de ativação </a:t>
-            </a:r>
-            <a:r>
-              <a:rPr lang="pt-BR" i="1" dirty="0"/>
-              <a:t>softmax</a:t>
-            </a:r>
-            <a:endParaRPr lang="pt-BR" dirty="0"/>
-          </a:p>
-        </p:txBody>
-      </p:sp>
-      <mc:AlternateContent xmlns:mc="http://schemas.openxmlformats.org/markup-compatibility/2006" xmlns:a14="http://schemas.microsoft.com/office/drawing/2010/main">
-        <mc:Choice Requires="a14">
-          <p:sp>
-            <p:nvSpPr>
-              <p:cNvPr id="3" name="Espaço Reservado para Conteúdo 2">
-                <a:extLst>
-                  <a:ext uri="{FF2B5EF4-FFF2-40B4-BE49-F238E27FC236}">
-                    <a16:creationId xmlns:a16="http://schemas.microsoft.com/office/drawing/2014/main" id="{32DF54A1-52F5-C48C-7CD4-D6E451DF19D8}"/>
-                  </a:ext>
-                </a:extLst>
-              </p:cNvPr>
-              <p:cNvSpPr>
-                <a:spLocks noGrp="1"/>
-              </p:cNvSpPr>
-              <p:nvPr>
-                <p:ph idx="1"/>
-              </p:nvPr>
-            </p:nvSpPr>
-            <p:spPr>
-              <a:xfrm>
-                <a:off x="838200" y="1825624"/>
-                <a:ext cx="11225981" cy="5032375"/>
-              </a:xfrm>
-            </p:spPr>
-            <p:txBody>
-              <a:bodyPr>
-                <a:normAutofit/>
-              </a:bodyPr>
-              <a:lstStyle/>
-              <a:p>
-                <a:r>
-                  <a:rPr lang="pt-BR" b="0" dirty="0">
-                    <a:effectLst/>
-                  </a:rPr>
-                  <a:t>Ela </a:t>
-                </a:r>
-                <a:r>
-                  <a:rPr lang="pt-BR" b="1" dirty="0">
-                    <a:solidFill>
-                      <a:srgbClr val="00B050"/>
-                    </a:solidFill>
-                    <a:effectLst/>
-                  </a:rPr>
-                  <a:t>garante que as saídas estejam no intervalo entre 0 e 1, e a soma de todas as saídas seja igual a 1</a:t>
-                </a:r>
-                <a:r>
-                  <a:rPr lang="pt-BR" b="0" dirty="0">
-                    <a:effectLst/>
-                  </a:rPr>
-                  <a:t>, tornando-as interpretáveis como uma </a:t>
-                </a:r>
-                <a:r>
-                  <a:rPr lang="pt-BR" b="1" dirty="0">
-                    <a:solidFill>
-                      <a:srgbClr val="00B050"/>
-                    </a:solidFill>
-                    <a:effectLst/>
-                  </a:rPr>
-                  <a:t>função massa de probabilidade </a:t>
-                </a:r>
-                <a:r>
-                  <a:rPr lang="pt-BR" b="1" dirty="0" err="1">
-                    <a:solidFill>
-                      <a:srgbClr val="00B050"/>
-                    </a:solidFill>
-                    <a:effectLst/>
-                  </a:rPr>
-                  <a:t>multinomial</a:t>
-                </a:r>
-                <a:r>
-                  <a:rPr lang="pt-BR" b="0" dirty="0">
-                    <a:effectLst/>
-                  </a:rPr>
-                  <a:t>.</a:t>
-                </a:r>
-              </a:p>
-              <a:p>
-                <a:r>
-                  <a:rPr lang="pt-BR" dirty="0"/>
-                  <a:t>Ela</a:t>
-                </a:r>
-                <a:r>
-                  <a:rPr lang="pt-BR" b="1" i="1" dirty="0"/>
-                  <a:t> </a:t>
-                </a:r>
-                <a:r>
-                  <a:rPr lang="pt-BR" dirty="0"/>
-                  <a:t>atribui uma </a:t>
-                </a:r>
-                <a:r>
-                  <a:rPr lang="pt-BR" b="1" dirty="0"/>
-                  <a:t>probabilidade condicional</a:t>
-                </a:r>
-                <a:r>
-                  <a:rPr lang="pt-BR" dirty="0"/>
-                  <a:t>,</a:t>
-                </a:r>
-                <a:r>
-                  <a:rPr lang="pt-BR" b="1" i="1" dirty="0"/>
                   <a:t> </a:t>
                 </a:r>
                 <a14:m>
@@ -20235,7 +19212,7 @@
                           </m:dPr>
                           <m:e>
                             <m:r>
-                              <a:rPr lang="pt-BR" b="0" i="1" smtClean="0">
+                              <a:rPr lang="pt-BR" i="1">
                                 <a:latin typeface="Cambria Math" panose="02040503050406030204" pitchFamily="18" charset="0"/>
                               </a:rPr>
                               <m:t>𝑛</m:t>
@@ -20276,7 +19253,7 @@
                       </m:e>
                     </m:d>
                     <m:r>
-                      <a:rPr lang="pt-BR" i="1" smtClean="0">
+                      <a:rPr lang="pt-BR" i="1">
                         <a:latin typeface="Cambria Math" panose="02040503050406030204" pitchFamily="18" charset="0"/>
                         <a:ea typeface="Cambria Math" panose="02040503050406030204" pitchFamily="18" charset="0"/>
                       </a:rPr>
@@ -20287,7 +19264,7 @@
                         <m:begChr m:val="["/>
                         <m:endChr m:val="]"/>
                         <m:ctrlPr>
-                          <a:rPr lang="pt-BR" i="1" smtClean="0">
+                          <a:rPr lang="pt-BR" i="1">
                             <a:latin typeface="Cambria Math" panose="02040503050406030204" pitchFamily="18" charset="0"/>
                             <a:ea typeface="Cambria Math" panose="02040503050406030204" pitchFamily="18" charset="0"/>
                           </a:rPr>
@@ -20295,7 +19272,7 @@
                       </m:dPr>
                       <m:e>
                         <m:r>
-                          <a:rPr lang="pt-BR" b="0" i="1" smtClean="0">
+                          <a:rPr lang="pt-BR" i="1">
                             <a:latin typeface="Cambria Math" panose="02040503050406030204" pitchFamily="18" charset="0"/>
                             <a:ea typeface="Cambria Math" panose="02040503050406030204" pitchFamily="18" charset="0"/>
                           </a:rPr>
@@ -20307,7 +19284,19 @@
                 </a14:m>
                 <a:r>
                   <a:rPr lang="pt-BR" dirty="0"/>
-                  <a:t>, a cada classe, </a:t>
+                  <a:t> </a:t>
+                </a:r>
+                <a:r>
+                  <a:rPr lang="pt-BR" b="1" dirty="0">
+                    <a:solidFill>
+                      <a:srgbClr val="00B050"/>
+                    </a:solidFill>
+                  </a:rPr>
+                  <a:t>a cada uma </a:t>
+                </a:r>
+                <a:r>
+                  <a:rPr lang="pt-BR" dirty="0"/>
+                  <a:t>das </a:t>
                 </a:r>
                 <a14:m>
                   <m:oMath xmlns:m="http://schemas.openxmlformats.org/officeDocument/2006/math">
@@ -20315,13 +19304,266 @@
                       <a:rPr lang="pt-BR" i="1">
                         <a:latin typeface="Cambria Math" panose="02040503050406030204" pitchFamily="18" charset="0"/>
                       </a:rPr>
-                      <m:t>𝑞</m:t>
+                      <m:t>𝑄</m:t>
+                    </m:r>
+                    <m:r>
+                      <a:rPr lang="pt-BR" i="1">
+                        <a:latin typeface="Cambria Math" panose="02040503050406030204" pitchFamily="18" charset="0"/>
+                      </a:rPr>
+                      <m:t> </m:t>
                     </m:r>
                   </m:oMath>
                 </a14:m>
                 <a:r>
                   <a:rPr lang="pt-BR" dirty="0"/>
-                  <a:t>, onde </a:t>
+                  <a:t>classes.</a:t>
+                </a:r>
+                <a:endParaRPr lang="pt-BR" b="1" dirty="0">
+                  <a:solidFill>
+                    <a:srgbClr val="00B050"/>
+                  </a:solidFill>
+                </a:endParaRPr>
+              </a:p>
+            </p:txBody>
+          </p:sp>
+        </mc:Choice>
+        <mc:Fallback xmlns="">
+          <p:sp>
+            <p:nvSpPr>
+              <p:cNvPr id="3" name="Espaço Reservado para Conteúdo 2">
+                <a:extLst>
+                  <a:ext uri="{FF2B5EF4-FFF2-40B4-BE49-F238E27FC236}">
+                    <a16:creationId xmlns="" xmlns:a16="http://schemas.microsoft.com/office/drawing/2014/main" xmlns:a14="http://schemas.microsoft.com/office/drawing/2010/main" id="{BCAAD57B-65A0-9DAD-79FC-2AE2692EB84B}"/>
+                  </a:ext>
+                </a:extLst>
+              </p:cNvPr>
+              <p:cNvSpPr>
+                <a:spLocks noGrp="1" noRot="1" noChangeAspect="1" noMove="1" noResize="1" noEditPoints="1" noAdjustHandles="1" noChangeArrowheads="1" noChangeShapeType="1" noTextEdit="1"/>
+              </p:cNvSpPr>
+              <p:nvPr>
+                <p:ph idx="1"/>
+              </p:nvPr>
+            </p:nvSpPr>
+            <p:spPr>
+              <a:xfrm>
+                <a:off x="838200" y="1825624"/>
+                <a:ext cx="11353800" cy="5032375"/>
+              </a:xfrm>
+              <a:blipFill rotWithShape="0">
+                <a:blip r:embed="rId3"/>
+                <a:stretch>
+                  <a:fillRect l="-967" t="-1937" r="-967"/>
+                </a:stretch>
+              </a:blipFill>
+            </p:spPr>
+            <p:txBody>
+              <a:bodyPr/>
+              <a:lstStyle/>
+              <a:p>
+                <a:r>
+                  <a:rPr lang="pt-BR">
+                    <a:noFill/>
+                  </a:rPr>
+                  <a:t> </a:t>
+                </a:r>
+              </a:p>
+            </p:txBody>
+          </p:sp>
+        </mc:Fallback>
+      </mc:AlternateContent>
+      <p:sp>
+        <p:nvSpPr>
+          <p:cNvPr id="5" name="Rectangle 11">
+            <a:extLst>
+              <a:ext uri="{FF2B5EF4-FFF2-40B4-BE49-F238E27FC236}">
+                <a16:creationId xmlns:a16="http://schemas.microsoft.com/office/drawing/2014/main" id="{D1D7E603-A964-1188-9D09-B0C1E18592FA}"/>
+              </a:ext>
+            </a:extLst>
+          </p:cNvPr>
+          <p:cNvSpPr/>
+          <p:nvPr/>
+        </p:nvSpPr>
+        <p:spPr>
+          <a:xfrm>
+            <a:off x="6765514" y="3622566"/>
+            <a:ext cx="2143124" cy="610221"/>
+          </a:xfrm>
+          <a:prstGeom prst="rect">
+            <a:avLst/>
+          </a:prstGeom>
+          <a:noFill/>
+          <a:ln w="28575">
+            <a:solidFill>
+              <a:srgbClr val="FF0000"/>
+            </a:solidFill>
+          </a:ln>
+        </p:spPr>
+        <p:style>
+          <a:lnRef idx="2">
+            <a:schemeClr val="accent1">
+              <a:shade val="50000"/>
+            </a:schemeClr>
+          </a:lnRef>
+          <a:fillRef idx="1">
+            <a:schemeClr val="accent1"/>
+          </a:fillRef>
+          <a:effectRef idx="0">
+            <a:schemeClr val="accent1"/>
+          </a:effectRef>
+          <a:fontRef idx="minor">
+            <a:schemeClr val="lt1"/>
+          </a:fontRef>
+        </p:style>
+        <p:txBody>
+          <a:bodyPr rtlCol="0" anchor="ctr"/>
+          <a:lstStyle/>
+          <a:p>
+            <a:pPr algn="ctr"/>
+            <a:endParaRPr lang="pt-BR"/>
+          </a:p>
+        </p:txBody>
+      </p:sp>
+    </p:spTree>
+    <p:extLst>
+      <p:ext uri="{BB962C8B-B14F-4D97-AF65-F5344CB8AC3E}">
+        <p14:creationId xmlns:p14="http://schemas.microsoft.com/office/powerpoint/2010/main" val="2375032691"/>
+      </p:ext>
+    </p:extLst>
+  </p:cSld>
+  <p:clrMapOvr>
+    <a:masterClrMapping/>
+  </p:clrMapOvr>
+</p:sld>
+</file>
+
+<file path=ppt/slides/slide8.xml><?xml version="1.0" encoding="utf-8"?>
+<p:sld xmlns:a="http://schemas.openxmlformats.org/drawingml/2006/main" xmlns:r="http://schemas.openxmlformats.org/officeDocument/2006/relationships" xmlns:p="http://schemas.openxmlformats.org/presentationml/2006/main">
+  <p:cSld>
+    <p:spTree>
+      <p:nvGrpSpPr>
+        <p:cNvPr id="1" name=""/>
+        <p:cNvGrpSpPr/>
+        <p:nvPr/>
+      </p:nvGrpSpPr>
+      <p:grpSpPr>
+        <a:xfrm>
+          <a:off x="0" y="0"/>
+          <a:ext cx="0" cy="0"/>
+          <a:chOff x="0" y="0"/>
+          <a:chExt cx="0" cy="0"/>
+        </a:xfrm>
+      </p:grpSpPr>
+      <p:sp>
+        <p:nvSpPr>
+          <p:cNvPr id="2" name="Título 1">
+            <a:extLst>
+              <a:ext uri="{FF2B5EF4-FFF2-40B4-BE49-F238E27FC236}">
+                <a16:creationId xmlns:a16="http://schemas.microsoft.com/office/drawing/2014/main" id="{99DAA83A-B143-94BB-B48B-41A7423070CE}"/>
+              </a:ext>
+            </a:extLst>
+          </p:cNvPr>
+          <p:cNvSpPr>
+            <a:spLocks noGrp="1"/>
+          </p:cNvSpPr>
+          <p:nvPr>
+            <p:ph type="title"/>
+          </p:nvPr>
+        </p:nvSpPr>
+        <p:spPr/>
+        <p:txBody>
+          <a:bodyPr/>
+          <a:lstStyle/>
+          <a:p>
+            <a:r>
+              <a:rPr lang="pt-BR" dirty="0"/>
+              <a:t>Função de ativação </a:t>
+            </a:r>
+            <a:r>
+              <a:rPr lang="pt-BR" i="1" dirty="0"/>
+              <a:t>softmax</a:t>
+            </a:r>
+            <a:endParaRPr lang="pt-BR" dirty="0"/>
+          </a:p>
+        </p:txBody>
+      </p:sp>
+      <mc:AlternateContent xmlns:mc="http://schemas.openxmlformats.org/markup-compatibility/2006" xmlns:a14="http://schemas.microsoft.com/office/drawing/2010/main">
+        <mc:Choice Requires="a14">
+          <p:sp>
+            <p:nvSpPr>
+              <p:cNvPr id="3" name="Espaço Reservado para Conteúdo 2">
+                <a:extLst>
+                  <a:ext uri="{FF2B5EF4-FFF2-40B4-BE49-F238E27FC236}">
+                    <a16:creationId xmlns:a16="http://schemas.microsoft.com/office/drawing/2014/main" id="{32DF54A1-52F5-C48C-7CD4-D6E451DF19D8}"/>
+                  </a:ext>
+                </a:extLst>
+              </p:cNvPr>
+              <p:cNvSpPr>
+                <a:spLocks noGrp="1"/>
+              </p:cNvSpPr>
+              <p:nvPr>
+                <p:ph idx="1"/>
+              </p:nvPr>
+            </p:nvSpPr>
+            <p:spPr>
+              <a:xfrm>
+                <a:off x="6646606" y="1825624"/>
+                <a:ext cx="5545394" cy="5032375"/>
+              </a:xfrm>
+            </p:spPr>
+            <p:txBody>
+              <a:bodyPr>
+                <a:normAutofit/>
+              </a:bodyPr>
+              <a:lstStyle/>
+              <a:p>
+                <a:r>
+                  <a:rPr lang="pt-BR" dirty="0"/>
+                  <a:t>A função </a:t>
+                </a:r>
+                <a:r>
+                  <a:rPr lang="pt-BR" i="1" dirty="0"/>
+                  <a:t>softmax</a:t>
+                </a:r>
+                <a:r>
+                  <a:rPr lang="pt-BR" dirty="0"/>
+                  <a:t> </a:t>
+                </a:r>
+                <a:r>
+                  <a:rPr lang="pt-BR" dirty="0">
+                    <a:solidFill>
+                      <a:schemeClr val="tx1"/>
+                    </a:solidFill>
+                  </a:rPr>
+                  <a:t>o</a:t>
+                </a:r>
+                <a:r>
+                  <a:rPr lang="pt-BR" b="0" i="0" dirty="0">
+                    <a:solidFill>
+                      <a:schemeClr val="tx1"/>
+                    </a:solidFill>
+                    <a:effectLst/>
+                  </a:rPr>
+                  <a:t>pera da seguinte maneira.</a:t>
+                </a:r>
+              </a:p>
+              <a:p>
+                <a:r>
+                  <a:rPr lang="pt-BR" b="0" i="0" dirty="0">
+                    <a:solidFill>
+                      <a:schemeClr val="tx1"/>
+                    </a:solidFill>
+                    <a:effectLst/>
+                  </a:rPr>
+                  <a:t>Dado um </a:t>
+                </a:r>
+                <a:r>
+                  <a:rPr lang="pt-BR" b="1" dirty="0">
+                    <a:solidFill>
+                      <a:srgbClr val="00B050"/>
+                    </a:solidFill>
+                    <a:effectLst/>
+                  </a:rPr>
+                  <a:t>vetor </a:t>
                 </a:r>
                 <a:r>
                   <a:rPr lang="pt-BR" b="1" dirty="0">
@@ -20329,18 +19571,31 @@
                       <a:srgbClr val="00B050"/>
                     </a:solidFill>
                   </a:rPr>
-                  <a:t>a soma das </a:t>
+                  <a:t>com</a:t>
+                </a:r>
+                <a:r>
+                  <a:rPr lang="pt-BR" b="1" dirty="0">
+                    <a:solidFill>
+                      <a:srgbClr val="00B050"/>
+                    </a:solidFill>
+                    <a:effectLst/>
+                  </a:rPr>
+                  <a:t> os valores das </a:t>
+                </a:r>
+                <a:r>
+                  <a:rPr lang="pt-BR" dirty="0"/>
+                  <a:t> </a:t>
                 </a:r>
                 <a14:m>
                   <m:oMath xmlns:m="http://schemas.openxmlformats.org/officeDocument/2006/math">
                     <m:r>
-                      <a:rPr lang="pt-BR" b="1" i="0">
+                      <a:rPr lang="pt-BR" b="1" i="1" smtClean="0">
                         <a:solidFill>
                           <a:srgbClr val="00B050"/>
                         </a:solidFill>
                         <a:latin typeface="Cambria Math" panose="02040503050406030204" pitchFamily="18" charset="0"/>
                       </a:rPr>
-                      <m:t>𝐐</m:t>
+                      <m:t>𝑸</m:t>
                     </m:r>
                   </m:oMath>
                 </a14:m>
@@ -20350,7 +19605,454 @@
                       <a:srgbClr val="00B050"/>
                     </a:solidFill>
                   </a:rPr>
-                  <a:t> probabilidades deve ser igual a 1</a:t>
+                  <a:t> </a:t>
+                </a:r>
+                <a:r>
+                  <a:rPr lang="pt-BR" b="1" dirty="0">
+                    <a:solidFill>
+                      <a:srgbClr val="00B050"/>
+                    </a:solidFill>
+                    <a:effectLst/>
+                  </a:rPr>
+                  <a:t>funções discriminantes</a:t>
+                </a:r>
+                <a:r>
+                  <a:rPr lang="pt-BR" b="0" i="0" dirty="0">
+                    <a:solidFill>
+                      <a:schemeClr val="tx1"/>
+                    </a:solidFill>
+                    <a:effectLst/>
+                  </a:rPr>
+                  <a:t>, ela</a:t>
+                </a:r>
+                <a:endParaRPr lang="pt-BR" dirty="0"/>
+              </a:p>
+              <a:p>
+                <a:pPr lvl="1">
+                  <a:buFont typeface="Wingdings" panose="05000000000000000000" pitchFamily="2" charset="2"/>
+                  <a:buChar char="§"/>
+                </a:pPr>
+                <a:r>
+                  <a:rPr lang="pt-BR" b="0" i="0" dirty="0">
+                    <a:solidFill>
+                      <a:schemeClr val="tx1"/>
+                    </a:solidFill>
+                    <a:effectLst/>
+                  </a:rPr>
+                  <a:t>calcula a exponencial de cada função discriminante, </a:t>
+                </a:r>
+              </a:p>
+              <a:p>
+                <a:pPr lvl="1">
+                  <a:buFont typeface="Wingdings" panose="05000000000000000000" pitchFamily="2" charset="2"/>
+                  <a:buChar char="§"/>
+                </a:pPr>
+                <a:r>
+                  <a:rPr lang="pt-BR" b="0" i="0" dirty="0">
+                    <a:solidFill>
+                      <a:schemeClr val="tx1"/>
+                    </a:solidFill>
+                    <a:effectLst/>
+                  </a:rPr>
+                  <a:t>normaliza essas exponenciais dividindo-as pela soma de todas as exponenciais, gerando uma distribuição de probabilidades das classes.</a:t>
+                </a:r>
+              </a:p>
+            </p:txBody>
+          </p:sp>
+        </mc:Choice>
+        <mc:Fallback xmlns="">
+          <p:sp>
+            <p:nvSpPr>
+              <p:cNvPr id="3" name="Espaço Reservado para Conteúdo 2">
+                <a:extLst>
+                  <a:ext uri="{FF2B5EF4-FFF2-40B4-BE49-F238E27FC236}">
+                    <a16:creationId xmlns="" xmlns:a16="http://schemas.microsoft.com/office/drawing/2014/main" xmlns:a14="http://schemas.microsoft.com/office/drawing/2010/main" id="{32DF54A1-52F5-C48C-7CD4-D6E451DF19D8}"/>
+                  </a:ext>
+                </a:extLst>
+              </p:cNvPr>
+              <p:cNvSpPr>
+                <a:spLocks noGrp="1" noRot="1" noChangeAspect="1" noMove="1" noResize="1" noEditPoints="1" noAdjustHandles="1" noChangeArrowheads="1" noChangeShapeType="1" noTextEdit="1"/>
+              </p:cNvSpPr>
+              <p:nvPr>
+                <p:ph idx="1"/>
+              </p:nvPr>
+            </p:nvSpPr>
+            <p:spPr>
+              <a:xfrm>
+                <a:off x="6646606" y="1825624"/>
+                <a:ext cx="5545394" cy="5032375"/>
+              </a:xfrm>
+              <a:blipFill rotWithShape="0">
+                <a:blip r:embed="rId2"/>
+                <a:stretch>
+                  <a:fillRect l="-1978" t="-1937" r="-1868"/>
+                </a:stretch>
+              </a:blipFill>
+            </p:spPr>
+            <p:txBody>
+              <a:bodyPr/>
+              <a:lstStyle/>
+              <a:p>
+                <a:r>
+                  <a:rPr lang="pt-BR">
+                    <a:noFill/>
+                  </a:rPr>
+                  <a:t> </a:t>
+                </a:r>
+              </a:p>
+            </p:txBody>
+          </p:sp>
+        </mc:Fallback>
+      </mc:AlternateContent>
+      <p:pic>
+        <p:nvPicPr>
+          <p:cNvPr id="6" name="Imagem 5">
+            <a:extLst>
+              <a:ext uri="{FF2B5EF4-FFF2-40B4-BE49-F238E27FC236}">
+                <a16:creationId xmlns:a16="http://schemas.microsoft.com/office/drawing/2014/main" id="{ED5D1F5D-F195-0452-50D4-07E9F2B1C49D}"/>
+              </a:ext>
+            </a:extLst>
+          </p:cNvPr>
+          <p:cNvPicPr>
+            <a:picLocks noChangeAspect="1"/>
+          </p:cNvPicPr>
+          <p:nvPr/>
+        </p:nvPicPr>
+        <p:blipFill>
+          <a:blip r:embed="rId3" cstate="print">
+            <a:extLst>
+              <a:ext uri="{28A0092B-C50C-407E-A947-70E740481C1C}">
+                <a14:useLocalDpi xmlns:a14="http://schemas.microsoft.com/office/drawing/2010/main" val="0"/>
+              </a:ext>
+            </a:extLst>
+          </a:blip>
+          <a:stretch>
+            <a:fillRect/>
+          </a:stretch>
+        </p:blipFill>
+        <p:spPr>
+          <a:xfrm>
+            <a:off x="275559" y="2536723"/>
+            <a:ext cx="6066351" cy="2487561"/>
+          </a:xfrm>
+          <a:prstGeom prst="rect">
+            <a:avLst/>
+          </a:prstGeom>
+        </p:spPr>
+      </p:pic>
+      <p:sp>
+        <p:nvSpPr>
+          <p:cNvPr id="8" name="CaixaDeTexto 7">
+            <a:extLst>
+              <a:ext uri="{FF2B5EF4-FFF2-40B4-BE49-F238E27FC236}">
+                <a16:creationId xmlns:a16="http://schemas.microsoft.com/office/drawing/2014/main" id="{0DC5673F-9B77-2E9E-8317-E71CA8896FE0}"/>
+              </a:ext>
+            </a:extLst>
+          </p:cNvPr>
+          <p:cNvSpPr txBox="1"/>
+          <p:nvPr/>
+        </p:nvSpPr>
+        <p:spPr>
+          <a:xfrm>
+            <a:off x="127819" y="6492875"/>
+            <a:ext cx="2792362" cy="276999"/>
+          </a:xfrm>
+          <a:prstGeom prst="rect">
+            <a:avLst/>
+          </a:prstGeom>
+          <a:noFill/>
+        </p:spPr>
+        <p:txBody>
+          <a:bodyPr wrap="square">
+            <a:spAutoFit/>
+          </a:bodyPr>
+          <a:lstStyle/>
+          <a:p>
+            <a:r>
+              <a:rPr lang="pt-BR" sz="1200" b="0" dirty="0">
+                <a:effectLst/>
+              </a:rPr>
+              <a:t>OBS.:</a:t>
+            </a:r>
+            <a:r>
+              <a:rPr lang="pt-BR" sz="1200" b="0" i="1" dirty="0">
+                <a:effectLst/>
+              </a:rPr>
+              <a:t> e</a:t>
+            </a:r>
+            <a:r>
+              <a:rPr lang="pt-BR" sz="1200" b="0" i="0" dirty="0">
+                <a:effectLst/>
+              </a:rPr>
+              <a:t> é a base do logaritmo natural. </a:t>
+            </a:r>
+            <a:endParaRPr lang="pt-BR" sz="1200" dirty="0"/>
+          </a:p>
+        </p:txBody>
+      </p:sp>
+      <mc:AlternateContent xmlns:mc="http://schemas.openxmlformats.org/markup-compatibility/2006" xmlns:a14="http://schemas.microsoft.com/office/drawing/2010/main">
+        <mc:Choice Requires="a14">
+          <p:sp>
+            <p:nvSpPr>
+              <p:cNvPr id="4" name="CaixaDeTexto 3">
+                <a:extLst>
+                  <a:ext uri="{FF2B5EF4-FFF2-40B4-BE49-F238E27FC236}">
+                    <a16:creationId xmlns:a16="http://schemas.microsoft.com/office/drawing/2014/main" id="{CBD55F82-56D5-32C8-C5AB-AF99477FBAAC}"/>
+                  </a:ext>
+                </a:extLst>
+              </p:cNvPr>
+              <p:cNvSpPr txBox="1"/>
+              <p:nvPr/>
+            </p:nvSpPr>
+            <p:spPr>
+              <a:xfrm>
+                <a:off x="1543507" y="5639486"/>
+                <a:ext cx="3530454" cy="461665"/>
+              </a:xfrm>
+              <a:prstGeom prst="rect">
+                <a:avLst/>
+              </a:prstGeom>
+              <a:noFill/>
+            </p:spPr>
+            <p:txBody>
+              <a:bodyPr wrap="none" rtlCol="0">
+                <a:spAutoFit/>
+              </a:bodyPr>
+              <a:lstStyle/>
+              <a:p>
+                <a14:m>
+                  <m:oMath xmlns:m="http://schemas.openxmlformats.org/officeDocument/2006/math">
+                    <m:r>
+                      <a:rPr lang="pt-BR" sz="2400" b="0" i="1" smtClean="0">
+                        <a:latin typeface="Cambria Math" panose="02040503050406030204" pitchFamily="18" charset="0"/>
+                      </a:rPr>
+                      <m:t>𝑄</m:t>
+                    </m:r>
+                    <m:r>
+                      <a:rPr lang="pt-BR" sz="2400" b="0" i="1" smtClean="0">
+                        <a:latin typeface="Cambria Math" panose="02040503050406030204" pitchFamily="18" charset="0"/>
+                      </a:rPr>
+                      <m:t>=5</m:t>
+                    </m:r>
+                  </m:oMath>
+                </a14:m>
+                <a:r>
+                  <a:rPr lang="pt-BR" sz="2400" dirty="0"/>
+                  <a:t> (número de classes)</a:t>
+                </a:r>
+              </a:p>
+            </p:txBody>
+          </p:sp>
+        </mc:Choice>
+        <mc:Fallback xmlns="">
+          <p:sp>
+            <p:nvSpPr>
+              <p:cNvPr id="4" name="CaixaDeTexto 3">
+                <a:extLst>
+                  <a:ext uri="{FF2B5EF4-FFF2-40B4-BE49-F238E27FC236}">
+                    <a16:creationId xmlns:a16="http://schemas.microsoft.com/office/drawing/2014/main" id="{CBD55F82-56D5-32C8-C5AB-AF99477FBAAC}"/>
+                  </a:ext>
+                </a:extLst>
+              </p:cNvPr>
+              <p:cNvSpPr txBox="1">
+                <a:spLocks noRot="1" noChangeAspect="1" noMove="1" noResize="1" noEditPoints="1" noAdjustHandles="1" noChangeArrowheads="1" noChangeShapeType="1" noTextEdit="1"/>
+              </p:cNvSpPr>
+              <p:nvPr/>
+            </p:nvSpPr>
+            <p:spPr>
+              <a:xfrm>
+                <a:off x="1543507" y="5639486"/>
+                <a:ext cx="3530454" cy="461665"/>
+              </a:xfrm>
+              <a:prstGeom prst="rect">
+                <a:avLst/>
+              </a:prstGeom>
+              <a:blipFill>
+                <a:blip r:embed="rId4"/>
+                <a:stretch>
+                  <a:fillRect l="-1209" t="-10526" r="-1900" b="-28947"/>
+                </a:stretch>
+              </a:blipFill>
+            </p:spPr>
+            <p:txBody>
+              <a:bodyPr/>
+              <a:lstStyle/>
+              <a:p>
+                <a:r>
+                  <a:rPr lang="en-US">
+                    <a:noFill/>
+                  </a:rPr>
+                  <a:t> </a:t>
+                </a:r>
+              </a:p>
+            </p:txBody>
+          </p:sp>
+        </mc:Fallback>
+      </mc:AlternateContent>
+    </p:spTree>
+    <p:extLst>
+      <p:ext uri="{BB962C8B-B14F-4D97-AF65-F5344CB8AC3E}">
+        <p14:creationId xmlns:p14="http://schemas.microsoft.com/office/powerpoint/2010/main" val="2357809270"/>
+      </p:ext>
+    </p:extLst>
+  </p:cSld>
+  <p:clrMapOvr>
+    <a:masterClrMapping/>
+  </p:clrMapOvr>
+</p:sld>
+</file>
+
+<file path=ppt/slides/slide9.xml><?xml version="1.0" encoding="utf-8"?>
+<p:sld xmlns:a="http://schemas.openxmlformats.org/drawingml/2006/main" xmlns:r="http://schemas.openxmlformats.org/officeDocument/2006/relationships" xmlns:p="http://schemas.openxmlformats.org/presentationml/2006/main">
+  <p:cSld>
+    <p:spTree>
+      <p:nvGrpSpPr>
+        <p:cNvPr id="1" name=""/>
+        <p:cNvGrpSpPr/>
+        <p:nvPr/>
+      </p:nvGrpSpPr>
+      <p:grpSpPr>
+        <a:xfrm>
+          <a:off x="0" y="0"/>
+          <a:ext cx="0" cy="0"/>
+          <a:chOff x="0" y="0"/>
+          <a:chExt cx="0" cy="0"/>
+        </a:xfrm>
+      </p:grpSpPr>
+      <p:sp>
+        <p:nvSpPr>
+          <p:cNvPr id="2" name="Título 1">
+            <a:extLst>
+              <a:ext uri="{FF2B5EF4-FFF2-40B4-BE49-F238E27FC236}">
+                <a16:creationId xmlns:a16="http://schemas.microsoft.com/office/drawing/2014/main" id="{99DAA83A-B143-94BB-B48B-41A7423070CE}"/>
+              </a:ext>
+            </a:extLst>
+          </p:cNvPr>
+          <p:cNvSpPr>
+            <a:spLocks noGrp="1"/>
+          </p:cNvSpPr>
+          <p:nvPr>
+            <p:ph type="title"/>
+          </p:nvPr>
+        </p:nvSpPr>
+        <p:spPr/>
+        <p:txBody>
+          <a:bodyPr/>
+          <a:lstStyle/>
+          <a:p>
+            <a:r>
+              <a:rPr lang="pt-BR" dirty="0"/>
+              <a:t>Função de ativação </a:t>
+            </a:r>
+            <a:r>
+              <a:rPr lang="pt-BR" i="1" dirty="0"/>
+              <a:t>softmax</a:t>
+            </a:r>
+            <a:endParaRPr lang="pt-BR" dirty="0"/>
+          </a:p>
+        </p:txBody>
+      </p:sp>
+      <mc:AlternateContent xmlns:mc="http://schemas.openxmlformats.org/markup-compatibility/2006" xmlns:a14="http://schemas.microsoft.com/office/drawing/2010/main">
+        <mc:Choice Requires="a14">
+          <p:sp>
+            <p:nvSpPr>
+              <p:cNvPr id="3" name="Espaço Reservado para Conteúdo 2">
+                <a:extLst>
+                  <a:ext uri="{FF2B5EF4-FFF2-40B4-BE49-F238E27FC236}">
+                    <a16:creationId xmlns:a16="http://schemas.microsoft.com/office/drawing/2014/main" id="{32DF54A1-52F5-C48C-7CD4-D6E451DF19D8}"/>
+                  </a:ext>
+                </a:extLst>
+              </p:cNvPr>
+              <p:cNvSpPr>
+                <a:spLocks noGrp="1"/>
+              </p:cNvSpPr>
+              <p:nvPr>
+                <p:ph idx="1"/>
+              </p:nvPr>
+            </p:nvSpPr>
+            <p:spPr>
+              <a:xfrm>
+                <a:off x="838200" y="1825624"/>
+                <a:ext cx="11353800" cy="5032375"/>
+              </a:xfrm>
+            </p:spPr>
+            <p:txBody>
+              <a:bodyPr>
+                <a:normAutofit/>
+              </a:bodyPr>
+              <a:lstStyle/>
+              <a:p>
+                <a:r>
+                  <a:rPr lang="pt-BR" b="0" dirty="0">
+                    <a:effectLst/>
+                  </a:rPr>
+                  <a:t>Além de fazer c</a:t>
+                </a:r>
+                <a:r>
+                  <a:rPr lang="pt-BR" dirty="0"/>
+                  <a:t>om </a:t>
+                </a:r>
+                <a:r>
+                  <a:rPr lang="pt-BR" dirty="0">
+                    <a:effectLst/>
+                  </a:rPr>
+                  <a:t>que as </a:t>
+                </a:r>
+                <a:r>
+                  <a:rPr lang="pt-BR" b="1" dirty="0">
+                    <a:solidFill>
+                      <a:srgbClr val="00B050"/>
+                    </a:solidFill>
+                    <a:effectLst/>
+                  </a:rPr>
+                  <a:t>saídas estejam no intervalo entre 0 e 1, </a:t>
+                </a:r>
+                <a:r>
+                  <a:rPr lang="pt-BR" b="1" dirty="0">
+                    <a:solidFill>
+                      <a:srgbClr val="00B050"/>
+                    </a:solidFill>
+                  </a:rPr>
+                  <a:t>ela garante que </a:t>
+                </a:r>
+                <a:r>
+                  <a:rPr lang="pt-BR" b="1" dirty="0">
+                    <a:solidFill>
+                      <a:srgbClr val="00B050"/>
+                    </a:solidFill>
+                    <a:effectLst/>
+                  </a:rPr>
+                  <a:t>soma de todas as saídas sempre seja igual a 1</a:t>
+                </a:r>
+                <a:r>
+                  <a:rPr lang="pt-BR" b="0" dirty="0">
+                    <a:effectLst/>
+                  </a:rPr>
+                  <a:t>, tornando-as interpretáveis como uma </a:t>
+                </a:r>
+                <a:r>
+                  <a:rPr lang="pt-BR" b="1" dirty="0">
+                    <a:solidFill>
+                      <a:schemeClr val="accent2"/>
+                    </a:solidFill>
+                    <a:effectLst/>
+                  </a:rPr>
+                  <a:t>função massa de probabilidade </a:t>
+                </a:r>
+                <a:r>
+                  <a:rPr lang="pt-BR" b="1" dirty="0" err="1">
+                    <a:solidFill>
+                      <a:schemeClr val="accent2"/>
+                    </a:solidFill>
+                    <a:effectLst/>
+                  </a:rPr>
+                  <a:t>multinomial</a:t>
+                </a:r>
+                <a:r>
+                  <a:rPr lang="pt-BR" b="0" dirty="0">
+                    <a:effectLst/>
+                  </a:rPr>
+                  <a:t>.</a:t>
                 </a:r>
               </a:p>
               <a:p>
@@ -20427,7 +20129,7 @@
                           </m:dPr>
                           <m:e>
                             <m:r>
-                              <a:rPr lang="pt-BR" b="0" i="1" smtClean="0">
+                              <a:rPr lang="pt-BR" i="1">
                                 <a:latin typeface="Cambria Math" panose="02040503050406030204" pitchFamily="18" charset="0"/>
                               </a:rPr>
                               <m:t>𝑛</m:t>
@@ -20538,7 +20240,7 @@
                           <m:t>(</m:t>
                         </m:r>
                         <m:r>
-                          <a:rPr lang="pt-BR" b="0" i="1" smtClean="0">
+                          <a:rPr lang="pt-BR" i="1">
                             <a:latin typeface="Cambria Math" panose="02040503050406030204" pitchFamily="18" charset="0"/>
                           </a:rPr>
                           <m:t>𝑛</m:t>
@@ -20663,7 +20365,7 @@
                           </m:dPr>
                           <m:e>
                             <m:r>
-                              <a:rPr lang="pt-BR" b="0" i="1" smtClean="0">
+                              <a:rPr lang="pt-BR" i="1">
                                 <a:latin typeface="Cambria Math" panose="02040503050406030204" pitchFamily="18" charset="0"/>
                               </a:rPr>
                               <m:t>𝑛</m:t>
@@ -20721,6 +20423,9 @@
                   <a:rPr lang="pt-BR" dirty="0"/>
                   <a:t>.</a:t>
                 </a:r>
+                <a:endParaRPr lang="pt-BR" b="0" dirty="0">
+                  <a:effectLst/>
+                </a:endParaRPr>
               </a:p>
             </p:txBody>
           </p:sp>
@@ -20731,7 +20436,7 @@
               <p:cNvPr id="3" name="Espaço Reservado para Conteúdo 2">
                 <a:extLst>
                   <a:ext uri="{FF2B5EF4-FFF2-40B4-BE49-F238E27FC236}">
-                    <a16:creationId xmlns:a16="http://schemas.microsoft.com/office/drawing/2014/main" id="{32DF54A1-52F5-C48C-7CD4-D6E451DF19D8}"/>
+                    <a16:creationId xmlns="" xmlns:a16="http://schemas.microsoft.com/office/drawing/2014/main" xmlns:a14="http://schemas.microsoft.com/office/drawing/2010/main" id="{32DF54A1-52F5-C48C-7CD4-D6E451DF19D8}"/>
                   </a:ext>
                 </a:extLst>
               </p:cNvPr>
@@ -20745,12 +20450,12 @@
             <p:spPr>
               <a:xfrm>
                 <a:off x="838200" y="1825624"/>
-                <a:ext cx="11225981" cy="5032375"/>
+                <a:ext cx="11353800" cy="5032375"/>
               </a:xfrm>
-              <a:blipFill>
+              <a:blipFill rotWithShape="0">
                 <a:blip r:embed="rId3"/>
                 <a:stretch>
-                  <a:fillRect l="-978" t="-1937"/>
+                  <a:fillRect l="-967" t="-1937"/>
                 </a:stretch>
               </a:blipFill>
             </p:spPr>
@@ -20759,7 +20464,7 @@
               <a:lstStyle/>
               <a:p>
                 <a:r>
-                  <a:rPr lang="en-US">
+                  <a:rPr lang="pt-BR">
                     <a:noFill/>
                   </a:rPr>
                   <a:t> </a:t>
@@ -20797,8 +20502,8 @@
         </p:blipFill>
         <p:spPr>
           <a:xfrm>
-            <a:off x="3590832" y="4709525"/>
-            <a:ext cx="5010336" cy="2054533"/>
+            <a:off x="2778470" y="3952568"/>
+            <a:ext cx="6635059" cy="2720765"/>
           </a:xfrm>
           <a:prstGeom prst="rect">
             <a:avLst/>
@@ -20821,7 +20526,7 @@
             </p:nvSpPr>
             <p:spPr>
               <a:xfrm>
-                <a:off x="8601168" y="6488667"/>
+                <a:off x="9468912" y="6488667"/>
                 <a:ext cx="2701189" cy="369332"/>
               </a:xfrm>
               <a:prstGeom prst="rect">
@@ -20865,7 +20570,7 @@
               <p:cNvPr id="4" name="CaixaDeTexto 3">
                 <a:extLst>
                   <a:ext uri="{FF2B5EF4-FFF2-40B4-BE49-F238E27FC236}">
-                    <a16:creationId xmlns:a16="http://schemas.microsoft.com/office/drawing/2014/main" id="{2B7728A0-505D-9DAE-23EC-8172E2EEEFA9}"/>
+                    <a16:creationId xmlns="" xmlns:a16="http://schemas.microsoft.com/office/drawing/2014/main" xmlns:a14="http://schemas.microsoft.com/office/drawing/2010/main" id="{2B7728A0-505D-9DAE-23EC-8172E2EEEFA9}"/>
                   </a:ext>
                 </a:extLst>
               </p:cNvPr>
@@ -20876,16 +20581,16 @@
             </p:nvSpPr>
             <p:spPr>
               <a:xfrm>
-                <a:off x="8601168" y="6488667"/>
+                <a:off x="9468912" y="6488667"/>
                 <a:ext cx="2701189" cy="369332"/>
               </a:xfrm>
               <a:prstGeom prst="rect">
                 <a:avLst/>
               </a:prstGeom>
-              <a:blipFill>
+              <a:blipFill rotWithShape="0">
                 <a:blip r:embed="rId5"/>
                 <a:stretch>
-                  <a:fillRect l="-451" t="-8197" r="-1354" b="-24590"/>
+                  <a:fillRect l="-451" t="-8197" r="-1580" b="-24590"/>
                 </a:stretch>
               </a:blipFill>
             </p:spPr>
@@ -20894,7 +20599,7 @@
               <a:lstStyle/>
               <a:p>
                 <a:r>
-                  <a:rPr lang="en-US">
+                  <a:rPr lang="pt-BR">
                     <a:noFill/>
                   </a:rPr>
                   <a:t> </a:t>
@@ -20907,7 +20612,7 @@
     </p:spTree>
     <p:extLst>
       <p:ext uri="{BB962C8B-B14F-4D97-AF65-F5344CB8AC3E}">
-        <p14:creationId xmlns:p14="http://schemas.microsoft.com/office/powerpoint/2010/main" val="3710191576"/>
+        <p14:creationId xmlns:p14="http://schemas.microsoft.com/office/powerpoint/2010/main" val="799422632"/>
       </p:ext>
     </p:extLst>
   </p:cSld>

--- a/slides/C24_Regressor_Softmax.pptx
+++ b/slides/C24_Regressor_Softmax.pptx
@@ -5,10 +5,10 @@
     <p:sldMasterId id="2147483648" r:id="rId1"/>
   </p:sldMasterIdLst>
   <p:notesMasterIdLst>
-    <p:notesMasterId r:id="rId25"/>
+    <p:notesMasterId r:id="rId28"/>
   </p:notesMasterIdLst>
   <p:handoutMasterIdLst>
-    <p:handoutMasterId r:id="rId26"/>
+    <p:handoutMasterId r:id="rId29"/>
   </p:handoutMasterIdLst>
   <p:sldIdLst>
     <p:sldId id="256" r:id="rId2"/>
@@ -34,6 +34,9 @@
     <p:sldId id="457" r:id="rId22"/>
     <p:sldId id="293" r:id="rId23"/>
     <p:sldId id="306" r:id="rId24"/>
+    <p:sldId id="515" r:id="rId25"/>
+    <p:sldId id="514" r:id="rId26"/>
+    <p:sldId id="516" r:id="rId27"/>
   </p:sldIdLst>
   <p:sldSz cx="12192000" cy="6858000"/>
   <p:notesSz cx="7315200" cy="9601200"/>
@@ -8213,8 +8216,8 @@
           </a:p>
         </p:txBody>
       </p:sp>
-      <mc:AlternateContent xmlns:mc="http://schemas.openxmlformats.org/markup-compatibility/2006" xmlns:a14="http://schemas.microsoft.com/office/drawing/2010/main">
-        <mc:Choice Requires="a14">
+      <mc:AlternateContent xmlns:mc="http://schemas.openxmlformats.org/markup-compatibility/2006">
+        <mc:Choice xmlns:a14="http://schemas.microsoft.com/office/drawing/2010/main" Requires="a14">
           <p:sp>
             <p:nvSpPr>
               <p:cNvPr id="3" name="Espaço Reservado para Conteúdo 2">
@@ -8233,8 +8236,8 @@
             </p:nvSpPr>
             <p:spPr>
               <a:xfrm>
-                <a:off x="6096001" y="1825624"/>
-                <a:ext cx="5998028" cy="5032375"/>
+                <a:off x="5286376" y="1825624"/>
+                <a:ext cx="6905624" cy="5032375"/>
               </a:xfrm>
             </p:spPr>
             <p:txBody>
@@ -8248,7 +8251,11 @@
                   <a:t>Assim como com o regressor logístico, podemos usar </a:t>
                 </a:r>
                 <a:r>
-                  <a:rPr lang="pt-BR" b="1" dirty="0"/>
+                  <a:rPr lang="pt-BR" b="1" dirty="0">
+                    <a:solidFill>
+                      <a:schemeClr val="accent2"/>
+                    </a:solidFill>
+                  </a:rPr>
                   <a:t>hiperplanos</a:t>
                 </a:r>
                 <a:r>
@@ -8256,7 +8263,11 @@
                   <a:t> ou </a:t>
                 </a:r>
                 <a:r>
-                  <a:rPr lang="pt-BR" b="1" dirty="0"/>
+                  <a:rPr lang="pt-BR" b="1" dirty="0">
+                    <a:solidFill>
+                      <a:schemeClr val="accent2"/>
+                    </a:solidFill>
+                  </a:rPr>
                   <a:t>polinômios</a:t>
                 </a:r>
                 <a:r>
@@ -8315,6 +8326,12 @@
                   <a:rPr lang="pt-BR" dirty="0"/>
                   <a:t> funções hipótese) que </a:t>
                 </a:r>
+              </a:p>
+              <a:p>
+                <a:pPr lvl="1">
+                  <a:buFont typeface="Wingdings" panose="05000000000000000000" pitchFamily="2" charset="2"/>
+                  <a:buChar char="§"/>
+                </a:pPr>
                 <a:r>
                   <a:rPr lang="pt-BR" b="1" dirty="0">
                     <a:solidFill>
@@ -8323,6 +8340,12 @@
                   </a:rPr>
                   <a:t>atribua uma alta probabilidade para a classe alvo </a:t>
                 </a:r>
+              </a:p>
+              <a:p>
+                <a:pPr lvl="1">
+                  <a:buFont typeface="Wingdings" panose="05000000000000000000" pitchFamily="2" charset="2"/>
+                  <a:buChar char="§"/>
+                </a:pPr>
                 <a:r>
                   <a:rPr lang="pt-BR" dirty="0"/>
                   <a:t>e, consequentemente, </a:t>
@@ -8341,21 +8364,49 @@
                 </a:r>
               </a:p>
               <a:p>
-                <a:pPr marL="0" indent="0" algn="ctr">
-                  <a:buNone/>
-                </a:pPr>
-                <a:endParaRPr lang="pt-BR" dirty="0"/>
+                <a:r>
+                  <a:rPr lang="pt-BR" dirty="0"/>
+                  <a:t>Por isso usamos vetores </a:t>
+                </a:r>
+                <a:r>
+                  <a:rPr lang="pt-BR" b="1" i="1" dirty="0" err="1">
+                    <a:solidFill>
+                      <a:srgbClr val="7030A0"/>
+                    </a:solidFill>
+                  </a:rPr>
+                  <a:t>one</a:t>
+                </a:r>
+                <a:r>
+                  <a:rPr lang="pt-BR" b="1" i="1" dirty="0">
+                    <a:solidFill>
+                      <a:srgbClr val="7030A0"/>
+                    </a:solidFill>
+                  </a:rPr>
+                  <a:t>-hot</a:t>
+                </a:r>
+                <a:r>
+                  <a:rPr lang="pt-BR" b="1" dirty="0">
+                    <a:solidFill>
+                      <a:srgbClr val="7030A0"/>
+                    </a:solidFill>
+                  </a:rPr>
+                  <a:t> como rótulos</a:t>
+                </a:r>
+                <a:r>
+                  <a:rPr lang="pt-BR" dirty="0"/>
+                  <a:t>.</a:t>
+                </a:r>
               </a:p>
             </p:txBody>
           </p:sp>
         </mc:Choice>
-        <mc:Fallback xmlns="">
+        <mc:Fallback>
           <p:sp>
             <p:nvSpPr>
               <p:cNvPr id="3" name="Espaço Reservado para Conteúdo 2">
                 <a:extLst>
                   <a:ext uri="{FF2B5EF4-FFF2-40B4-BE49-F238E27FC236}">
-                    <a16:creationId xmlns="" xmlns:a16="http://schemas.microsoft.com/office/drawing/2014/main" xmlns:a14="http://schemas.microsoft.com/office/drawing/2010/main" id="{B3535727-BB24-BB15-5C03-3DA9A3F9A09A}"/>
+                    <a16:creationId xmlns:a16="http://schemas.microsoft.com/office/drawing/2014/main" id="{B3535727-BB24-BB15-5C03-3DA9A3F9A09A}"/>
                   </a:ext>
                 </a:extLst>
               </p:cNvPr>
@@ -8368,13 +8419,13 @@
             </p:nvSpPr>
             <p:spPr>
               <a:xfrm>
-                <a:off x="6096001" y="1825624"/>
-                <a:ext cx="5998028" cy="5032375"/>
+                <a:off x="5286376" y="1825624"/>
+                <a:ext cx="6905624" cy="5032375"/>
               </a:xfrm>
-              <a:blipFill rotWithShape="0">
+              <a:blipFill>
                 <a:blip r:embed="rId3"/>
                 <a:stretch>
-                  <a:fillRect l="-1829" t="-1937" r="-1728"/>
+                  <a:fillRect l="-1589" t="-1937" r="-1677"/>
                 </a:stretch>
               </a:blipFill>
             </p:spPr>
@@ -8383,7 +8434,7 @@
               <a:lstStyle/>
               <a:p>
                 <a:r>
-                  <a:rPr lang="pt-BR">
+                  <a:rPr lang="en-US">
                     <a:noFill/>
                   </a:rPr>
                   <a:t> </a:t>
@@ -8395,10 +8446,10 @@
       </mc:AlternateContent>
       <p:pic>
         <p:nvPicPr>
-          <p:cNvPr id="4" name="Imagem 5">
+          <p:cNvPr id="7" name="Picture 6">
             <a:extLst>
               <a:ext uri="{FF2B5EF4-FFF2-40B4-BE49-F238E27FC236}">
-                <a16:creationId xmlns:a16="http://schemas.microsoft.com/office/drawing/2014/main" id="{42A1713D-06B5-FB35-8488-833F7CAB7166}"/>
+                <a16:creationId xmlns:a16="http://schemas.microsoft.com/office/drawing/2014/main" id="{B29D6ED4-6B75-62EC-8922-9CCA4F704E2B}"/>
               </a:ext>
             </a:extLst>
           </p:cNvPr>
@@ -8408,7 +8459,7 @@
           <p:nvPr/>
         </p:nvPicPr>
         <p:blipFill>
-          <a:blip r:embed="rId4" cstate="print">
+          <a:blip r:embed="rId4">
             <a:extLst>
               <a:ext uri="{28A0092B-C50C-407E-A947-70E740481C1C}">
                 <a14:useLocalDpi xmlns:a14="http://schemas.microsoft.com/office/drawing/2010/main" val="0"/>
@@ -8421,8 +8472,8 @@
         </p:blipFill>
         <p:spPr>
           <a:xfrm>
-            <a:off x="134041" y="2536723"/>
-            <a:ext cx="6066351" cy="2487561"/>
+            <a:off x="459422" y="2649266"/>
+            <a:ext cx="4292180" cy="2770936"/>
           </a:xfrm>
           <a:prstGeom prst="rect">
             <a:avLst/>
@@ -8488,8 +8539,8 @@
           </a:p>
         </p:txBody>
       </p:sp>
-      <mc:AlternateContent xmlns:mc="http://schemas.openxmlformats.org/markup-compatibility/2006" xmlns:a14="http://schemas.microsoft.com/office/drawing/2010/main">
-        <mc:Choice Requires="a14">
+      <mc:AlternateContent xmlns:mc="http://schemas.openxmlformats.org/markup-compatibility/2006">
+        <mc:Choice xmlns:a14="http://schemas.microsoft.com/office/drawing/2010/main" Requires="a14">
           <p:sp>
             <p:nvSpPr>
               <p:cNvPr id="3" name="Content Placeholder 2">
@@ -8514,7 +8565,7 @@
             </p:spPr>
             <p:txBody>
               <a:bodyPr>
-                <a:normAutofit/>
+                <a:normAutofit lnSpcReduction="10000"/>
               </a:bodyPr>
               <a:lstStyle/>
               <a:p>
@@ -8814,60 +8865,152 @@
                                       </m:ctrlPr>
                                     </m:dPr>
                                     <m:e>
-                                      <m:sSub>
-                                        <m:sSubPr>
+                                      <m:limLow>
+                                        <m:limLowPr>
                                           <m:ctrlPr>
                                             <a:rPr lang="pt-BR" i="1" smtClean="0">
                                               <a:latin typeface="Cambria Math" panose="02040503050406030204" pitchFamily="18" charset="0"/>
                                             </a:rPr>
                                           </m:ctrlPr>
-                                        </m:sSubPr>
+                                        </m:limLowPr>
                                         <m:e>
-                                          <m:acc>
-                                            <m:accPr>
-                                              <m:chr m:val="̂"/>
+                                          <m:groupChr>
+                                            <m:groupChrPr>
+                                              <m:chr m:val="⏟"/>
+                                              <m:ctrlPr>
+                                                <a:rPr lang="pt-BR" i="1" smtClean="0">
+                                                  <a:latin typeface="Cambria Math" panose="02040503050406030204" pitchFamily="18" charset="0"/>
+                                                </a:rPr>
+                                              </m:ctrlPr>
+                                            </m:groupChrPr>
+                                            <m:e>
+                                              <m:sSubSup>
+                                                <m:sSubSupPr>
+                                                  <m:ctrlPr>
+                                                    <a:rPr lang="pt-BR" b="1" i="1">
+                                                      <a:latin typeface="Cambria Math" panose="02040503050406030204" pitchFamily="18" charset="0"/>
+                                                    </a:rPr>
+                                                  </m:ctrlPr>
+                                                </m:sSubSupPr>
+                                                <m:e>
+                                                  <m:r>
+                                                    <a:rPr lang="pt-BR" i="1">
+                                                      <a:latin typeface="Cambria Math" panose="02040503050406030204" pitchFamily="18" charset="0"/>
+                                                    </a:rPr>
+                                                    <m:t>h</m:t>
+                                                  </m:r>
+                                                </m:e>
+                                                <m:sub>
+                                                  <m:r>
+                                                    <a:rPr lang="pt-BR" b="1" i="1">
+                                                      <a:latin typeface="Cambria Math" panose="02040503050406030204" pitchFamily="18" charset="0"/>
+                                                    </a:rPr>
+                                                    <m:t>𝒂</m:t>
+                                                  </m:r>
+                                                </m:sub>
+                                                <m:sup>
+                                                  <m:r>
+                                                    <a:rPr lang="pt-BR" i="1">
+                                                      <a:latin typeface="Cambria Math" panose="02040503050406030204" pitchFamily="18" charset="0"/>
+                                                    </a:rPr>
+                                                    <m:t>𝑞</m:t>
+                                                  </m:r>
+                                                </m:sup>
+                                              </m:sSubSup>
+                                              <m:d>
+                                                <m:dPr>
+                                                  <m:ctrlPr>
+                                                    <a:rPr lang="pt-BR" i="1">
+                                                      <a:latin typeface="Cambria Math" panose="02040503050406030204" pitchFamily="18" charset="0"/>
+                                                    </a:rPr>
+                                                  </m:ctrlPr>
+                                                </m:dPr>
+                                                <m:e>
+                                                  <m:r>
+                                                    <a:rPr lang="pt-BR" b="1" i="1">
+                                                      <a:latin typeface="Cambria Math" panose="02040503050406030204" pitchFamily="18" charset="0"/>
+                                                    </a:rPr>
+                                                    <m:t>𝒙</m:t>
+                                                  </m:r>
+                                                  <m:d>
+                                                    <m:dPr>
+                                                      <m:ctrlPr>
+                                                        <a:rPr lang="pt-BR" b="1" i="1">
+                                                          <a:latin typeface="Cambria Math" panose="02040503050406030204" pitchFamily="18" charset="0"/>
+                                                        </a:rPr>
+                                                      </m:ctrlPr>
+                                                    </m:dPr>
+                                                    <m:e>
+                                                      <m:r>
+                                                        <a:rPr lang="pt-BR" i="1">
+                                                          <a:latin typeface="Cambria Math" panose="02040503050406030204" pitchFamily="18" charset="0"/>
+                                                        </a:rPr>
+                                                        <m:t>𝑛</m:t>
+                                                      </m:r>
+                                                    </m:e>
+                                                  </m:d>
+                                                </m:e>
+                                              </m:d>
+                                            </m:e>
+                                          </m:groupChr>
+                                        </m:e>
+                                        <m:lim>
+                                          <m:sSub>
+                                            <m:sSubPr>
                                               <m:ctrlPr>
                                                 <a:rPr lang="pt-BR" i="1">
                                                   <a:latin typeface="Cambria Math" panose="02040503050406030204" pitchFamily="18" charset="0"/>
                                                 </a:rPr>
                                               </m:ctrlPr>
-                                            </m:accPr>
+                                            </m:sSubPr>
+                                            <m:e>
+                                              <m:acc>
+                                                <m:accPr>
+                                                  <m:chr m:val="̂"/>
+                                                  <m:ctrlPr>
+                                                    <a:rPr lang="pt-BR" i="1">
+                                                      <a:latin typeface="Cambria Math" panose="02040503050406030204" pitchFamily="18" charset="0"/>
+                                                    </a:rPr>
+                                                  </m:ctrlPr>
+                                                </m:accPr>
+                                                <m:e>
+                                                  <m:r>
+                                                    <a:rPr lang="pt-BR" i="1">
+                                                      <a:latin typeface="Cambria Math" panose="02040503050406030204" pitchFamily="18" charset="0"/>
+                                                    </a:rPr>
+                                                    <m:t>𝑦</m:t>
+                                                  </m:r>
+                                                </m:e>
+                                              </m:acc>
+                                            </m:e>
+                                            <m:sub>
+                                              <m:r>
+                                                <a:rPr lang="pt-BR" i="1">
+                                                  <a:latin typeface="Cambria Math" panose="02040503050406030204" pitchFamily="18" charset="0"/>
+                                                </a:rPr>
+                                                <m:t>𝑞</m:t>
+                                              </m:r>
+                                            </m:sub>
+                                          </m:sSub>
+                                          <m:d>
+                                            <m:dPr>
+                                              <m:ctrlPr>
+                                                <a:rPr lang="pt-BR" i="1">
+                                                  <a:latin typeface="Cambria Math" panose="02040503050406030204" pitchFamily="18" charset="0"/>
+                                                </a:rPr>
+                                              </m:ctrlPr>
+                                            </m:dPr>
                                             <m:e>
                                               <m:r>
                                                 <a:rPr lang="pt-BR" i="1">
                                                   <a:latin typeface="Cambria Math" panose="02040503050406030204" pitchFamily="18" charset="0"/>
                                                 </a:rPr>
-                                                <m:t>𝑦</m:t>
+                                                <m:t>𝑛</m:t>
                                               </m:r>
                                             </m:e>
-                                          </m:acc>
-                                        </m:e>
-                                        <m:sub>
-                                          <m:r>
-                                            <a:rPr lang="pt-BR" b="0" i="1" smtClean="0">
-                                              <a:latin typeface="Cambria Math" panose="02040503050406030204" pitchFamily="18" charset="0"/>
-                                            </a:rPr>
-                                            <m:t>𝑞</m:t>
-                                          </m:r>
-                                        </m:sub>
-                                      </m:sSub>
-                                      <m:d>
-                                        <m:dPr>
-                                          <m:ctrlPr>
-                                            <a:rPr lang="pt-BR" i="1">
-                                              <a:latin typeface="Cambria Math" panose="02040503050406030204" pitchFamily="18" charset="0"/>
-                                            </a:rPr>
-                                          </m:ctrlPr>
-                                        </m:dPr>
-                                        <m:e>
-                                          <m:r>
-                                            <a:rPr lang="pt-BR" i="1">
-                                              <a:latin typeface="Cambria Math" panose="02040503050406030204" pitchFamily="18" charset="0"/>
-                                            </a:rPr>
-                                            <m:t>𝑛</m:t>
-                                          </m:r>
-                                        </m:e>
-                                      </m:d>
+                                          </m:d>
+                                        </m:lim>
+                                      </m:limLow>
                                     </m:e>
                                   </m:d>
                                 </m:e>
@@ -9025,7 +9168,19 @@
                 </a14:m>
                 <a:r>
                   <a:rPr lang="pt-BR" dirty="0"/>
-                  <a:t> é rótulo do </a:t>
+                  <a:t> é </a:t>
+                </a:r>
+                <a:r>
+                  <a:rPr lang="pt-BR" b="1" dirty="0">
+                    <a:solidFill>
+                      <a:srgbClr val="7030A0"/>
+                    </a:solidFill>
+                  </a:rPr>
+                  <a:t>rótulo numérico</a:t>
+                </a:r>
+                <a:r>
+                  <a:rPr lang="pt-BR" dirty="0"/>
+                  <a:t> da </a:t>
                 </a:r>
                 <a14:m>
                   <m:oMath xmlns:m="http://schemas.openxmlformats.org/officeDocument/2006/math">
@@ -9039,7 +9194,15 @@
                 </a14:m>
                 <a:r>
                   <a:rPr lang="pt-BR" dirty="0"/>
-                  <a:t>-ésimo exemplo e </a:t>
+                  <a:t>-</a:t>
+                </a:r>
+                <a:r>
+                  <a:rPr lang="pt-BR" dirty="0" err="1"/>
+                  <a:t>ésima</a:t>
+                </a:r>
+                <a:r>
+                  <a:rPr lang="pt-BR" dirty="0"/>
+                  <a:t> amostra e </a:t>
                 </a:r>
                 <a14:m>
                   <m:oMath xmlns:m="http://schemas.openxmlformats.org/officeDocument/2006/math">
@@ -9052,66 +9215,6 @@
                         </m:ctrlPr>
                       </m:sSubSupPr>
                       <m:e>
-                        <m:sSub>
-                          <m:sSubPr>
-                            <m:ctrlPr>
-                              <a:rPr lang="pt-BR" i="1">
-                                <a:latin typeface="Cambria Math" panose="02040503050406030204" pitchFamily="18" charset="0"/>
-                              </a:rPr>
-                            </m:ctrlPr>
-                          </m:sSubPr>
-                          <m:e>
-                            <m:acc>
-                              <m:accPr>
-                                <m:chr m:val="̂"/>
-                                <m:ctrlPr>
-                                  <a:rPr lang="pt-BR" i="1">
-                                    <a:latin typeface="Cambria Math" panose="02040503050406030204" pitchFamily="18" charset="0"/>
-                                  </a:rPr>
-                                </m:ctrlPr>
-                              </m:accPr>
-                              <m:e>
-                                <m:r>
-                                  <a:rPr lang="pt-BR" i="1">
-                                    <a:latin typeface="Cambria Math" panose="02040503050406030204" pitchFamily="18" charset="0"/>
-                                  </a:rPr>
-                                  <m:t>𝑦</m:t>
-                                </m:r>
-                              </m:e>
-                            </m:acc>
-                          </m:e>
-                          <m:sub>
-                            <m:r>
-                              <a:rPr lang="pt-BR" i="1">
-                                <a:latin typeface="Cambria Math" panose="02040503050406030204" pitchFamily="18" charset="0"/>
-                              </a:rPr>
-                              <m:t>𝑞</m:t>
-                            </m:r>
-                          </m:sub>
-                        </m:sSub>
-                        <m:d>
-                          <m:dPr>
-                            <m:ctrlPr>
-                              <a:rPr lang="pt-BR" i="1">
-                                <a:latin typeface="Cambria Math" panose="02040503050406030204" pitchFamily="18" charset="0"/>
-                              </a:rPr>
-                            </m:ctrlPr>
-                          </m:dPr>
-                          <m:e>
-                            <m:r>
-                              <a:rPr lang="pt-BR" i="1">
-                                <a:latin typeface="Cambria Math" panose="02040503050406030204" pitchFamily="18" charset="0"/>
-                              </a:rPr>
-                              <m:t>𝑛</m:t>
-                            </m:r>
-                          </m:e>
-                        </m:d>
-                        <m:r>
-                          <a:rPr lang="pt-BR" b="0" i="1" smtClean="0">
-                            <a:latin typeface="Cambria Math" panose="02040503050406030204" pitchFamily="18" charset="0"/>
-                          </a:rPr>
-                          <m:t>=</m:t>
-                        </m:r>
                         <m:r>
                           <a:rPr lang="pt-BR" i="1">
                             <a:latin typeface="Cambria Math" panose="02040503050406030204" pitchFamily="18" charset="0"/>
@@ -9196,7 +9299,7 @@
                 </a:r>
                 <a:r>
                   <a:rPr lang="pt-BR" dirty="0"/>
-                  <a:t> saída do modelo para o </a:t>
+                  <a:t> saída do modelo para a </a:t>
                 </a:r>
                 <a14:m>
                   <m:oMath xmlns:m="http://schemas.openxmlformats.org/officeDocument/2006/math">
@@ -9210,7 +9313,15 @@
                 </a14:m>
                 <a:r>
                   <a:rPr lang="pt-BR" dirty="0"/>
-                  <a:t>-ésimo exemplo.</a:t>
+                  <a:t>-</a:t>
+                </a:r>
+                <a:r>
+                  <a:rPr lang="pt-BR" dirty="0" err="1"/>
+                  <a:t>ésima</a:t>
+                </a:r>
+                <a:r>
+                  <a:rPr lang="pt-BR" dirty="0"/>
+                  <a:t> amostra.</a:t>
                 </a:r>
               </a:p>
               <a:p>
@@ -9306,13 +9417,13 @@
             </p:txBody>
           </p:sp>
         </mc:Choice>
-        <mc:Fallback xmlns="">
+        <mc:Fallback>
           <p:sp>
             <p:nvSpPr>
               <p:cNvPr id="3" name="Content Placeholder 2">
                 <a:extLst>
                   <a:ext uri="{FF2B5EF4-FFF2-40B4-BE49-F238E27FC236}">
-                    <a16:creationId xmlns="" xmlns:a16="http://schemas.microsoft.com/office/drawing/2014/main" xmlns:a14="http://schemas.microsoft.com/office/drawing/2010/main" id="{34B1DEA3-BAAD-D90C-CD9D-99A5A24F4544}"/>
+                    <a16:creationId xmlns:a16="http://schemas.microsoft.com/office/drawing/2014/main" id="{34B1DEA3-BAAD-D90C-CD9D-99A5A24F4544}"/>
                   </a:ext>
                 </a:extLst>
               </p:cNvPr>
@@ -9328,10 +9439,10 @@
                 <a:off x="838199" y="1825624"/>
                 <a:ext cx="11353801" cy="5032375"/>
               </a:xfrm>
-              <a:blipFill rotWithShape="0">
+              <a:blipFill>
                 <a:blip r:embed="rId2"/>
                 <a:stretch>
-                  <a:fillRect l="-1074" t="-1937" r="-913" b="-2300"/>
+                  <a:fillRect l="-1074" t="-2663"/>
                 </a:stretch>
               </a:blipFill>
             </p:spPr>
@@ -9340,7 +9451,7 @@
               <a:lstStyle/>
               <a:p>
                 <a:r>
-                  <a:rPr lang="pt-BR">
+                  <a:rPr lang="en-US">
                     <a:noFill/>
                   </a:rPr>
                   <a:t> </a:t>
@@ -9409,8 +9520,8 @@
           </a:p>
         </p:txBody>
       </p:sp>
-      <mc:AlternateContent xmlns:mc="http://schemas.openxmlformats.org/markup-compatibility/2006" xmlns:a14="http://schemas.microsoft.com/office/drawing/2010/main">
-        <mc:Choice Requires="a14">
+      <mc:AlternateContent xmlns:mc="http://schemas.openxmlformats.org/markup-compatibility/2006">
+        <mc:Choice xmlns:a14="http://schemas.microsoft.com/office/drawing/2010/main" Requires="a14">
           <p:sp>
             <p:nvSpPr>
               <p:cNvPr id="3" name="Content Placeholder 2">
@@ -9429,8 +9540,8 @@
             </p:nvSpPr>
             <p:spPr>
               <a:xfrm>
-                <a:off x="838199" y="1840373"/>
-                <a:ext cx="11152239" cy="4351338"/>
+                <a:off x="4952246" y="1840372"/>
+                <a:ext cx="7239754" cy="5017627"/>
               </a:xfrm>
             </p:spPr>
             <p:txBody>
@@ -9852,13 +9963,13 @@
             </p:txBody>
           </p:sp>
         </mc:Choice>
-        <mc:Fallback xmlns="">
+        <mc:Fallback>
           <p:sp>
             <p:nvSpPr>
               <p:cNvPr id="3" name="Content Placeholder 2">
                 <a:extLst>
                   <a:ext uri="{FF2B5EF4-FFF2-40B4-BE49-F238E27FC236}">
-                    <a16:creationId xmlns="" xmlns:a16="http://schemas.microsoft.com/office/drawing/2014/main" xmlns:a14="http://schemas.microsoft.com/office/drawing/2010/main" id="{17D7928D-3A32-7330-5FDC-756155EF2F3D}"/>
+                    <a16:creationId xmlns:a16="http://schemas.microsoft.com/office/drawing/2014/main" id="{17D7928D-3A32-7330-5FDC-756155EF2F3D}"/>
                   </a:ext>
                 </a:extLst>
               </p:cNvPr>
@@ -9871,13 +9982,13 @@
             </p:nvSpPr>
             <p:spPr>
               <a:xfrm>
-                <a:off x="838199" y="1840373"/>
-                <a:ext cx="11152239" cy="4351338"/>
+                <a:off x="4952246" y="1840372"/>
+                <a:ext cx="7239754" cy="5017627"/>
               </a:xfrm>
-              <a:blipFill rotWithShape="0">
+              <a:blipFill>
                 <a:blip r:embed="rId2"/>
                 <a:stretch>
-                  <a:fillRect l="-929" r="-874"/>
+                  <a:fillRect l="-1515" t="-122" r="-1010"/>
                 </a:stretch>
               </a:blipFill>
             </p:spPr>
@@ -9886,7 +9997,7 @@
               <a:lstStyle/>
               <a:p>
                 <a:r>
-                  <a:rPr lang="pt-BR">
+                  <a:rPr lang="en-US">
                     <a:noFill/>
                   </a:rPr>
                   <a:t> </a:t>
@@ -9896,6 +10007,42 @@
           </p:sp>
         </mc:Fallback>
       </mc:AlternateContent>
+      <p:pic>
+        <p:nvPicPr>
+          <p:cNvPr id="5" name="Picture 4">
+            <a:extLst>
+              <a:ext uri="{FF2B5EF4-FFF2-40B4-BE49-F238E27FC236}">
+                <a16:creationId xmlns:a16="http://schemas.microsoft.com/office/drawing/2014/main" id="{4AA09737-BB93-F7AB-8A47-090B362628C6}"/>
+              </a:ext>
+            </a:extLst>
+          </p:cNvPr>
+          <p:cNvPicPr>
+            <a:picLocks noChangeAspect="1"/>
+          </p:cNvPicPr>
+          <p:nvPr/>
+        </p:nvPicPr>
+        <p:blipFill>
+          <a:blip r:embed="rId3">
+            <a:extLst>
+              <a:ext uri="{28A0092B-C50C-407E-A947-70E740481C1C}">
+                <a14:useLocalDpi xmlns:a14="http://schemas.microsoft.com/office/drawing/2010/main" val="0"/>
+              </a:ext>
+            </a:extLst>
+          </a:blip>
+          <a:stretch>
+            <a:fillRect/>
+          </a:stretch>
+        </p:blipFill>
+        <p:spPr>
+          <a:xfrm>
+            <a:off x="169712" y="2450090"/>
+            <a:ext cx="4292180" cy="2770936"/>
+          </a:xfrm>
+          <a:prstGeom prst="rect">
+            <a:avLst/>
+          </a:prstGeom>
+        </p:spPr>
+      </p:pic>
     </p:spTree>
     <p:extLst>
       <p:ext uri="{BB962C8B-B14F-4D97-AF65-F5344CB8AC3E}">
@@ -9954,8 +10101,8 @@
           </a:p>
         </p:txBody>
       </p:sp>
-      <mc:AlternateContent xmlns:mc="http://schemas.openxmlformats.org/markup-compatibility/2006" xmlns:a14="http://schemas.microsoft.com/office/drawing/2010/main">
-        <mc:Choice Requires="a14">
+      <mc:AlternateContent xmlns:mc="http://schemas.openxmlformats.org/markup-compatibility/2006">
+        <mc:Choice xmlns:a14="http://schemas.microsoft.com/office/drawing/2010/main" Requires="a14">
           <p:sp>
             <p:nvSpPr>
               <p:cNvPr id="3" name="Espaço Reservado para Conteúdo 2">
@@ -9975,7 +10122,7 @@
             <p:spPr>
               <a:xfrm>
                 <a:off x="838200" y="1825624"/>
-                <a:ext cx="11240730" cy="5032375"/>
+                <a:ext cx="11353800" cy="5032375"/>
               </a:xfrm>
             </p:spPr>
             <p:txBody>
@@ -10803,7 +10950,7 @@
                 </a14:m>
                 <a:r>
                   <a:rPr lang="pt-BR" dirty="0"/>
-                  <a:t> saídas do modelo para o </a:t>
+                  <a:t> saídas do modelo para a </a:t>
                 </a:r>
                 <a14:m>
                   <m:oMath xmlns:m="http://schemas.openxmlformats.org/officeDocument/2006/math">
@@ -10817,7 +10964,15 @@
                 </a14:m>
                 <a:r>
                   <a:rPr lang="pt-BR" dirty="0"/>
-                  <a:t>-ésimo exemplo de entrada.</a:t>
+                  <a:t>-</a:t>
+                </a:r>
+                <a:r>
+                  <a:rPr lang="pt-BR" dirty="0" err="1"/>
+                  <a:t>ésima</a:t>
+                </a:r>
+                <a:r>
+                  <a:rPr lang="pt-BR" dirty="0"/>
+                  <a:t> amostra de entrada.</a:t>
                 </a:r>
                 <a:endParaRPr lang="pt-BR" b="1" i="1" dirty="0"/>
               </a:p>
@@ -10877,13 +11032,13 @@
             </p:txBody>
           </p:sp>
         </mc:Choice>
-        <mc:Fallback xmlns="">
+        <mc:Fallback>
           <p:sp>
             <p:nvSpPr>
               <p:cNvPr id="3" name="Espaço Reservado para Conteúdo 2">
                 <a:extLst>
                   <a:ext uri="{FF2B5EF4-FFF2-40B4-BE49-F238E27FC236}">
-                    <a16:creationId xmlns="" xmlns:a16="http://schemas.microsoft.com/office/drawing/2014/main" xmlns:a14="http://schemas.microsoft.com/office/drawing/2010/main" id="{21A86630-5D79-AD4B-79FC-6C8373E8DB39}"/>
+                    <a16:creationId xmlns:a16="http://schemas.microsoft.com/office/drawing/2014/main" id="{21A86630-5D79-AD4B-79FC-6C8373E8DB39}"/>
                   </a:ext>
                 </a:extLst>
               </p:cNvPr>
@@ -10897,12 +11052,12 @@
             <p:spPr>
               <a:xfrm>
                 <a:off x="838200" y="1825624"/>
-                <a:ext cx="11240730" cy="5032375"/>
+                <a:ext cx="11353800" cy="5032375"/>
               </a:xfrm>
-              <a:blipFill rotWithShape="0">
+              <a:blipFill>
                 <a:blip r:embed="rId2"/>
                 <a:stretch>
-                  <a:fillRect l="-1139" t="-1937" r="-1248"/>
+                  <a:fillRect l="-1128" t="-1937" r="-967"/>
                 </a:stretch>
               </a:blipFill>
             </p:spPr>
@@ -10911,7 +11066,7 @@
               <a:lstStyle/>
               <a:p>
                 <a:r>
-                  <a:rPr lang="pt-BR">
+                  <a:rPr lang="en-US">
                     <a:noFill/>
                   </a:rPr>
                   <a:t> </a:t>
@@ -11762,8 +11917,8 @@
           </a:p>
         </p:txBody>
       </p:sp>
-      <mc:AlternateContent xmlns:mc="http://schemas.openxmlformats.org/markup-compatibility/2006" xmlns:a14="http://schemas.microsoft.com/office/drawing/2010/main">
-        <mc:Choice Requires="a14">
+      <mc:AlternateContent xmlns:mc="http://schemas.openxmlformats.org/markup-compatibility/2006">
+        <mc:Choice xmlns:a14="http://schemas.microsoft.com/office/drawing/2010/main" Requires="a14">
           <p:sp>
             <p:nvSpPr>
               <p:cNvPr id="3" name="Espaço Reservado para Conteúdo 2">
@@ -11802,23 +11957,51 @@
                 </a:r>
                 <a:r>
                   <a:rPr lang="pt-BR" dirty="0"/>
-                  <a:t> da </a:t>
-                </a:r>
-                <a:r>
-                  <a:rPr lang="pt-BR" i="1" dirty="0"/>
+                  <a:t> da</a:t>
+                </a:r>
+                <a:r>
+                  <a:rPr lang="pt-BR" b="1" dirty="0">
+                    <a:solidFill>
+                      <a:schemeClr val="accent2"/>
+                    </a:solidFill>
+                  </a:rPr>
+                  <a:t> </a:t>
+                </a:r>
+                <a:r>
+                  <a:rPr lang="pt-BR" b="1" i="1" dirty="0">
+                    <a:solidFill>
+                      <a:schemeClr val="accent2"/>
+                    </a:solidFill>
+                  </a:rPr>
                   <a:t>q</a:t>
                 </a:r>
                 <a:r>
-                  <a:rPr lang="pt-BR" dirty="0"/>
+                  <a:rPr lang="pt-BR" b="1" dirty="0">
+                    <a:solidFill>
+                      <a:schemeClr val="accent2"/>
+                    </a:solidFill>
+                  </a:rPr>
                   <a:t>-</a:t>
                 </a:r>
                 <a:r>
-                  <a:rPr lang="pt-BR" dirty="0" err="1"/>
+                  <a:rPr lang="pt-BR" b="1" dirty="0" err="1">
+                    <a:solidFill>
+                      <a:schemeClr val="accent2"/>
+                    </a:solidFill>
+                  </a:rPr>
                   <a:t>ésima</a:t>
                 </a:r>
                 <a:r>
-                  <a:rPr lang="pt-BR" dirty="0"/>
-                  <a:t> função discriminante, </a:t>
+                  <a:rPr lang="pt-BR" b="1" dirty="0">
+                    <a:solidFill>
+                      <a:schemeClr val="accent2"/>
+                    </a:solidFill>
+                  </a:rPr>
+                  <a:t> função discriminante</a:t>
+                </a:r>
+                <a:r>
+                  <a:rPr lang="pt-BR" dirty="0"/>
+                  <a:t>, </a:t>
                 </a:r>
                 <a14:m>
                   <m:oMath xmlns:m="http://schemas.openxmlformats.org/officeDocument/2006/math">
@@ -12944,7 +13127,7 @@
                 </a:r>
                 <a:r>
                   <a:rPr lang="pt-BR" dirty="0"/>
-                  <a:t> para cada um dos </a:t>
+                  <a:t> para todos os </a:t>
                 </a:r>
                 <a14:m>
                   <m:oMath xmlns:m="http://schemas.openxmlformats.org/officeDocument/2006/math">
@@ -12958,19 +13141,19 @@
                 </a14:m>
                 <a:r>
                   <a:rPr lang="pt-BR" dirty="0"/>
-                  <a:t> vetores de atributo, respectivamente.</a:t>
+                  <a:t> vetores de atributos, respectivamente.</a:t>
                 </a:r>
               </a:p>
             </p:txBody>
           </p:sp>
         </mc:Choice>
-        <mc:Fallback xmlns="">
+        <mc:Fallback>
           <p:sp>
             <p:nvSpPr>
               <p:cNvPr id="3" name="Espaço Reservado para Conteúdo 2">
                 <a:extLst>
                   <a:ext uri="{FF2B5EF4-FFF2-40B4-BE49-F238E27FC236}">
-                    <a16:creationId xmlns:a16="http://schemas.microsoft.com/office/drawing/2014/main" xmlns="" xmlns:a14="http://schemas.microsoft.com/office/drawing/2010/main" id="{1D38055D-E355-F780-9CA0-0337EA0BE4FD}"/>
+                    <a16:creationId xmlns:a16="http://schemas.microsoft.com/office/drawing/2014/main" id="{1D38055D-E355-F780-9CA0-0337EA0BE4FD}"/>
                   </a:ext>
                 </a:extLst>
               </p:cNvPr>
@@ -12986,10 +13169,10 @@
                 <a:off x="838199" y="1825625"/>
                 <a:ext cx="11353801" cy="5032375"/>
               </a:xfrm>
-              <a:blipFill rotWithShape="0">
+              <a:blipFill>
                 <a:blip r:embed="rId3"/>
                 <a:stretch>
-                  <a:fillRect l="-1074" t="-1695" r="-1396"/>
+                  <a:fillRect l="-1074" t="-1695"/>
                 </a:stretch>
               </a:blipFill>
             </p:spPr>
@@ -12998,7 +13181,7 @@
               <a:lstStyle/>
               <a:p>
                 <a:r>
-                  <a:rPr lang="pt-BR">
+                  <a:rPr lang="en-US">
                     <a:noFill/>
                   </a:rPr>
                   <a:t> </a:t>
@@ -13070,8 +13253,8 @@
           </a:p>
         </p:txBody>
       </p:sp>
-      <mc:AlternateContent xmlns:mc="http://schemas.openxmlformats.org/markup-compatibility/2006" xmlns:a14="http://schemas.microsoft.com/office/drawing/2010/main">
-        <mc:Choice Requires="a14">
+      <mc:AlternateContent xmlns:mc="http://schemas.openxmlformats.org/markup-compatibility/2006">
+        <mc:Choice xmlns:a14="http://schemas.microsoft.com/office/drawing/2010/main" Requires="a14">
           <p:sp>
             <p:nvSpPr>
               <p:cNvPr id="3" name="Espaço Reservado para Conteúdo 2">
@@ -13091,7 +13274,7 @@
             <p:spPr>
               <a:xfrm>
                 <a:off x="838200" y="1840864"/>
-                <a:ext cx="11240729" cy="5032375"/>
+                <a:ext cx="11257230" cy="5032375"/>
               </a:xfrm>
             </p:spPr>
             <p:txBody>
@@ -13385,16 +13568,12 @@
               </a:p>
               <a:p>
                 <a:r>
-                  <a:rPr lang="pt-BR" dirty="0"/>
-                  <a:t>O vetor gradiente pode ser reescrito </a:t>
-                </a:r>
-                <a:r>
                   <a:rPr lang="pt-BR" b="1" dirty="0">
                     <a:solidFill>
                       <a:schemeClr val="accent2"/>
                     </a:solidFill>
                   </a:rPr>
-                  <a:t>levando-se em consideração todos os </a:t>
+                  <a:t>Levando-se em consideração todos os </a:t>
                 </a:r>
                 <a14:m>
                   <m:oMath xmlns:m="http://schemas.openxmlformats.org/officeDocument/2006/math">
@@ -13424,8 +13603,25 @@
                       <a:schemeClr val="accent2"/>
                     </a:solidFill>
                   </a:rPr>
-                  <a:t>vetores de peso</a:t>
-                </a:r>
+                  <a:t>vetores de peso, </a:t>
+                </a:r>
+                <a:r>
+                  <a:rPr lang="pt-BR" dirty="0"/>
+                  <a:t>passamos a ter uma </a:t>
+                </a:r>
+                <a:r>
+                  <a:rPr lang="pt-BR" b="1" dirty="0">
+                    <a:solidFill>
+                      <a:srgbClr val="7030A0"/>
+                    </a:solidFill>
+                  </a:rPr>
+                  <a:t>matriz de vetores gradiente</a:t>
+                </a:r>
+                <a:endParaRPr lang="pt-BR" b="1" dirty="0">
+                  <a:solidFill>
+                    <a:schemeClr val="accent2"/>
+                  </a:solidFill>
+                </a:endParaRPr>
               </a:p>
               <a:p>
                 <a:pPr marL="0" indent="0">
@@ -13909,13 +14105,13 @@
             </p:txBody>
           </p:sp>
         </mc:Choice>
-        <mc:Fallback xmlns="">
+        <mc:Fallback>
           <p:sp>
             <p:nvSpPr>
               <p:cNvPr id="3" name="Espaço Reservado para Conteúdo 2">
                 <a:extLst>
                   <a:ext uri="{FF2B5EF4-FFF2-40B4-BE49-F238E27FC236}">
-                    <a16:creationId xmlns:a16="http://schemas.microsoft.com/office/drawing/2014/main" xmlns="" xmlns:a14="http://schemas.microsoft.com/office/drawing/2010/main" id="{DDBA288E-BBB8-E157-840C-AA685AD7D65C}"/>
+                    <a16:creationId xmlns:a16="http://schemas.microsoft.com/office/drawing/2014/main" id="{DDBA288E-BBB8-E157-840C-AA685AD7D65C}"/>
                   </a:ext>
                 </a:extLst>
               </p:cNvPr>
@@ -13929,12 +14125,12 @@
             <p:spPr>
               <a:xfrm>
                 <a:off x="838200" y="1840864"/>
-                <a:ext cx="11240729" cy="5032375"/>
+                <a:ext cx="11257230" cy="5032375"/>
               </a:xfrm>
-              <a:blipFill rotWithShape="0">
+              <a:blipFill>
                 <a:blip r:embed="rId3"/>
                 <a:stretch>
-                  <a:fillRect l="-1139" r="-1628" b="-848"/>
+                  <a:fillRect l="-1138" r="-1354" b="-848"/>
                 </a:stretch>
               </a:blipFill>
             </p:spPr>
@@ -13943,7 +14139,7 @@
               <a:lstStyle/>
               <a:p>
                 <a:r>
-                  <a:rPr lang="pt-BR">
+                  <a:rPr lang="en-US">
                     <a:noFill/>
                   </a:rPr>
                   <a:t> </a:t>
@@ -15805,21 +16001,30 @@
               <a:buNone/>
             </a:pPr>
             <a:r>
-              <a:rPr lang="en-US" dirty="0"/>
+              <a:rPr lang="en-US" dirty="0">
+                <a:hlinkClick r:id="rId2"/>
+              </a:rPr>
               <a:t>Lista #7 – </a:t>
             </a:r>
             <a:r>
-              <a:rPr lang="en-US" dirty="0" err="1"/>
+              <a:rPr lang="en-US" dirty="0" err="1">
+                <a:hlinkClick r:id="rId2"/>
+              </a:rPr>
               <a:t>Regressão</a:t>
             </a:r>
             <a:r>
-              <a:rPr lang="en-US" dirty="0"/>
+              <a:rPr lang="en-US" dirty="0">
+                <a:hlinkClick r:id="rId2"/>
+              </a:rPr>
               <a:t> </a:t>
             </a:r>
             <a:r>
-              <a:rPr lang="en-US" i="1" dirty="0"/>
+              <a:rPr lang="en-US" i="1" dirty="0">
+                <a:hlinkClick r:id="rId2"/>
+              </a:rPr>
               <a:t>softmax</a:t>
             </a:r>
+            <a:endParaRPr lang="en-US" i="1" dirty="0"/>
           </a:p>
         </p:txBody>
       </p:sp>
@@ -16008,6 +16213,2581 @@
 </p:sld>
 </file>
 
+<file path=ppt/slides/slide24.xml><?xml version="1.0" encoding="utf-8"?>
+<p:sld xmlns:a="http://schemas.openxmlformats.org/drawingml/2006/main" xmlns:r="http://schemas.openxmlformats.org/officeDocument/2006/relationships" xmlns:p="http://schemas.openxmlformats.org/presentationml/2006/main">
+  <p:cSld>
+    <p:spTree>
+      <p:nvGrpSpPr>
+        <p:cNvPr id="1" name="">
+          <a:extLst>
+            <a:ext uri="{FF2B5EF4-FFF2-40B4-BE49-F238E27FC236}">
+              <a16:creationId xmlns:a16="http://schemas.microsoft.com/office/drawing/2014/main" id="{66DA37F4-4ED4-806C-CFDE-46C776755B3A}"/>
+            </a:ext>
+          </a:extLst>
+        </p:cNvPr>
+        <p:cNvGrpSpPr/>
+        <p:nvPr/>
+      </p:nvGrpSpPr>
+      <p:grpSpPr>
+        <a:xfrm>
+          <a:off x="0" y="0"/>
+          <a:ext cx="0" cy="0"/>
+          <a:chOff x="0" y="0"/>
+          <a:chExt cx="0" cy="0"/>
+        </a:xfrm>
+      </p:grpSpPr>
+      <p:sp>
+        <p:nvSpPr>
+          <p:cNvPr id="4" name="Título 1">
+            <a:extLst>
+              <a:ext uri="{FF2B5EF4-FFF2-40B4-BE49-F238E27FC236}">
+                <a16:creationId xmlns:a16="http://schemas.microsoft.com/office/drawing/2014/main" id="{616605E6-566B-D397-B0D6-339FE7F8CB5E}"/>
+              </a:ext>
+            </a:extLst>
+          </p:cNvPr>
+          <p:cNvSpPr txBox="1">
+            <a:spLocks/>
+          </p:cNvSpPr>
+          <p:nvPr/>
+        </p:nvSpPr>
+        <p:spPr>
+          <a:xfrm>
+            <a:off x="1431533" y="2720526"/>
+            <a:ext cx="9144000" cy="1029541"/>
+          </a:xfrm>
+          <a:prstGeom prst="rect">
+            <a:avLst/>
+          </a:prstGeom>
+        </p:spPr>
+        <p:txBody>
+          <a:bodyPr vert="horz" lIns="91440" tIns="45720" rIns="91440" bIns="45720" rtlCol="0" anchor="ctr">
+            <a:normAutofit/>
+          </a:bodyPr>
+          <a:lstStyle>
+            <a:lvl1pPr algn="l" defTabSz="914400" rtl="0" eaLnBrk="1" latinLnBrk="0" hangingPunct="1">
+              <a:lnSpc>
+                <a:spcPct val="90000"/>
+              </a:lnSpc>
+              <a:spcBef>
+                <a:spcPct val="0"/>
+              </a:spcBef>
+              <a:buNone/>
+              <a:defRPr sz="4400" kern="1200">
+                <a:solidFill>
+                  <a:schemeClr val="tx1"/>
+                </a:solidFill>
+                <a:latin typeface="+mj-lt"/>
+                <a:ea typeface="+mj-ea"/>
+                <a:cs typeface="+mj-cs"/>
+              </a:defRPr>
+            </a:lvl1pPr>
+          </a:lstStyle>
+          <a:p>
+            <a:pPr algn="ctr"/>
+            <a:r>
+              <a:rPr lang="pt-BR" sz="6600" dirty="0"/>
+              <a:t>Figuras</a:t>
+            </a:r>
+            <a:endParaRPr lang="pt-BR" sz="6600" b="1" i="1" dirty="0"/>
+          </a:p>
+        </p:txBody>
+      </p:sp>
+    </p:spTree>
+    <p:extLst>
+      <p:ext uri="{BB962C8B-B14F-4D97-AF65-F5344CB8AC3E}">
+        <p14:creationId xmlns:p14="http://schemas.microsoft.com/office/powerpoint/2010/main" val="3079351433"/>
+      </p:ext>
+    </p:extLst>
+  </p:cSld>
+  <p:clrMapOvr>
+    <a:masterClrMapping/>
+  </p:clrMapOvr>
+</p:sld>
+</file>
+
+<file path=ppt/slides/slide25.xml><?xml version="1.0" encoding="utf-8"?>
+<p:sld xmlns:a="http://schemas.openxmlformats.org/drawingml/2006/main" xmlns:r="http://schemas.openxmlformats.org/officeDocument/2006/relationships" xmlns:p="http://schemas.openxmlformats.org/presentationml/2006/main">
+  <p:cSld>
+    <p:spTree>
+      <p:nvGrpSpPr>
+        <p:cNvPr id="1" name=""/>
+        <p:cNvGrpSpPr/>
+        <p:nvPr/>
+      </p:nvGrpSpPr>
+      <p:grpSpPr>
+        <a:xfrm>
+          <a:off x="0" y="0"/>
+          <a:ext cx="0" cy="0"/>
+          <a:chOff x="0" y="0"/>
+          <a:chExt cx="0" cy="0"/>
+        </a:xfrm>
+      </p:grpSpPr>
+      <p:grpSp>
+        <p:nvGrpSpPr>
+          <p:cNvPr id="4" name="Agrupar 22">
+            <a:extLst>
+              <a:ext uri="{FF2B5EF4-FFF2-40B4-BE49-F238E27FC236}">
+                <a16:creationId xmlns:a16="http://schemas.microsoft.com/office/drawing/2014/main" id="{BDB2E9D3-18AD-6A55-F414-20E01AF3185A}"/>
+              </a:ext>
+            </a:extLst>
+          </p:cNvPr>
+          <p:cNvGrpSpPr/>
+          <p:nvPr/>
+        </p:nvGrpSpPr>
+        <p:grpSpPr>
+          <a:xfrm>
+            <a:off x="1027469" y="1870682"/>
+            <a:ext cx="6115665" cy="2461594"/>
+            <a:chOff x="1027469" y="1870682"/>
+            <a:chExt cx="6115665" cy="2461594"/>
+          </a:xfrm>
+        </p:grpSpPr>
+        <mc:AlternateContent xmlns:mc="http://schemas.openxmlformats.org/markup-compatibility/2006" xmlns:a14="http://schemas.microsoft.com/office/drawing/2010/main">
+          <mc:Choice Requires="a14">
+            <p:sp>
+              <p:nvSpPr>
+                <p:cNvPr id="5" name="CaixaDeTexto 5">
+                  <a:extLst>
+                    <a:ext uri="{FF2B5EF4-FFF2-40B4-BE49-F238E27FC236}">
+                      <a16:creationId xmlns:a16="http://schemas.microsoft.com/office/drawing/2014/main" id="{AF11FFDB-E923-3C94-D47A-83418BDAD06C}"/>
+                    </a:ext>
+                  </a:extLst>
+                </p:cNvPr>
+                <p:cNvSpPr txBox="1"/>
+                <p:nvPr/>
+              </p:nvSpPr>
+              <p:spPr>
+                <a:xfrm>
+                  <a:off x="5619134" y="2306131"/>
+                  <a:ext cx="1243781" cy="2020874"/>
+                </a:xfrm>
+                <a:prstGeom prst="rect">
+                  <a:avLst/>
+                </a:prstGeom>
+                <a:noFill/>
+              </p:spPr>
+              <p:txBody>
+                <a:bodyPr wrap="square" rtlCol="0">
+                  <a:spAutoFit/>
+                </a:bodyPr>
+                <a:lstStyle/>
+                <a:p>
+                  <a:pPr/>
+                  <a14:m>
+                    <m:oMathPara xmlns:m="http://schemas.openxmlformats.org/officeDocument/2006/math">
+                      <m:oMathParaPr>
+                        <m:jc m:val="centerGroup"/>
+                      </m:oMathParaPr>
+                      <m:oMath xmlns:m="http://schemas.openxmlformats.org/officeDocument/2006/math">
+                        <m:d>
+                          <m:dPr>
+                            <m:begChr m:val="["/>
+                            <m:endChr m:val="]"/>
+                            <m:ctrlPr>
+                              <a:rPr lang="pt-BR" sz="2800" i="1" smtClean="0">
+                                <a:latin typeface="Cambria Math" panose="02040503050406030204" pitchFamily="18" charset="0"/>
+                              </a:rPr>
+                            </m:ctrlPr>
+                          </m:dPr>
+                          <m:e>
+                            <m:m>
+                              <m:mPr>
+                                <m:mcs>
+                                  <m:mc>
+                                    <m:mcPr>
+                                      <m:count m:val="1"/>
+                                      <m:mcJc m:val="center"/>
+                                    </m:mcPr>
+                                  </m:mc>
+                                </m:mcs>
+                                <m:ctrlPr>
+                                  <a:rPr lang="pt-BR" sz="2800" i="1" smtClean="0">
+                                    <a:latin typeface="Cambria Math" panose="02040503050406030204" pitchFamily="18" charset="0"/>
+                                  </a:rPr>
+                                </m:ctrlPr>
+                              </m:mPr>
+                              <m:mr>
+                                <m:e>
+                                  <m:r>
+                                    <m:rPr>
+                                      <m:brk m:alnAt="7"/>
+                                    </m:rPr>
+                                    <a:rPr lang="pt-BR" sz="2800" b="0" i="1" smtClean="0">
+                                      <a:latin typeface="Cambria Math" panose="02040503050406030204" pitchFamily="18" charset="0"/>
+                                    </a:rPr>
+                                    <m:t>0</m:t>
+                                  </m:r>
+                                  <m:r>
+                                    <a:rPr lang="pt-BR" sz="2800" b="0" i="1" smtClean="0">
+                                      <a:latin typeface="Cambria Math" panose="02040503050406030204" pitchFamily="18" charset="0"/>
+                                    </a:rPr>
+                                    <m:t>.01</m:t>
+                                  </m:r>
+                                </m:e>
+                              </m:mr>
+                              <m:mr>
+                                <m:e>
+                                  <m:r>
+                                    <a:rPr lang="pt-BR" sz="2800" b="0" i="1" smtClean="0">
+                                      <a:latin typeface="Cambria Math" panose="02040503050406030204" pitchFamily="18" charset="0"/>
+                                    </a:rPr>
+                                    <m:t>0.9</m:t>
+                                  </m:r>
+                                </m:e>
+                              </m:mr>
+                              <m:mr>
+                                <m:e>
+                                  <m:m>
+                                    <m:mPr>
+                                      <m:mcs>
+                                        <m:mc>
+                                          <m:mcPr>
+                                            <m:count m:val="1"/>
+                                            <m:mcJc m:val="center"/>
+                                          </m:mcPr>
+                                        </m:mc>
+                                      </m:mcs>
+                                      <m:ctrlPr>
+                                        <a:rPr lang="pt-BR" sz="2800" i="1" smtClean="0">
+                                          <a:latin typeface="Cambria Math" panose="02040503050406030204" pitchFamily="18" charset="0"/>
+                                        </a:rPr>
+                                      </m:ctrlPr>
+                                    </m:mPr>
+                                    <m:mr>
+                                      <m:e>
+                                        <m:r>
+                                          <m:rPr>
+                                            <m:brk m:alnAt="7"/>
+                                          </m:rPr>
+                                          <a:rPr lang="pt-BR" sz="2800" b="0" i="1" smtClean="0">
+                                            <a:latin typeface="Cambria Math" panose="02040503050406030204" pitchFamily="18" charset="0"/>
+                                          </a:rPr>
+                                          <m:t>0</m:t>
+                                        </m:r>
+                                        <m:r>
+                                          <a:rPr lang="pt-BR" sz="2800" b="0" i="1" smtClean="0">
+                                            <a:latin typeface="Cambria Math" panose="02040503050406030204" pitchFamily="18" charset="0"/>
+                                          </a:rPr>
+                                          <m:t>.05</m:t>
+                                        </m:r>
+                                      </m:e>
+                                    </m:mr>
+                                    <m:mr>
+                                      <m:e>
+                                        <m:r>
+                                          <a:rPr lang="pt-BR" sz="2800" b="0" i="1" smtClean="0">
+                                            <a:latin typeface="Cambria Math" panose="02040503050406030204" pitchFamily="18" charset="0"/>
+                                          </a:rPr>
+                                          <m:t>0.01</m:t>
+                                        </m:r>
+                                      </m:e>
+                                    </m:mr>
+                                    <m:mr>
+                                      <m:e>
+                                        <m:r>
+                                          <a:rPr lang="pt-BR" sz="2800" b="0" i="1" smtClean="0">
+                                            <a:latin typeface="Cambria Math" panose="02040503050406030204" pitchFamily="18" charset="0"/>
+                                          </a:rPr>
+                                          <m:t>0.02</m:t>
+                                        </m:r>
+                                      </m:e>
+                                    </m:mr>
+                                  </m:m>
+                                </m:e>
+                              </m:mr>
+                            </m:m>
+                          </m:e>
+                        </m:d>
+                      </m:oMath>
+                    </m:oMathPara>
+                  </a14:m>
+                  <a:endParaRPr lang="pt-BR" sz="2800" dirty="0"/>
+                </a:p>
+              </p:txBody>
+            </p:sp>
+          </mc:Choice>
+          <mc:Fallback xmlns="">
+            <p:sp>
+              <p:nvSpPr>
+                <p:cNvPr id="6" name="CaixaDeTexto 5">
+                  <a:extLst>
+                    <a:ext uri="{FF2B5EF4-FFF2-40B4-BE49-F238E27FC236}">
+                      <a16:creationId xmlns:a16="http://schemas.microsoft.com/office/drawing/2014/main" id="{1847DD7C-477D-13BD-7857-72F635E6564F}"/>
+                    </a:ext>
+                  </a:extLst>
+                </p:cNvPr>
+                <p:cNvSpPr txBox="1">
+                  <a:spLocks noRot="1" noChangeAspect="1" noMove="1" noResize="1" noEditPoints="1" noAdjustHandles="1" noChangeArrowheads="1" noChangeShapeType="1" noTextEdit="1"/>
+                </p:cNvSpPr>
+                <p:nvPr/>
+              </p:nvSpPr>
+              <p:spPr>
+                <a:xfrm>
+                  <a:off x="5619134" y="2306131"/>
+                  <a:ext cx="1243781" cy="2020874"/>
+                </a:xfrm>
+                <a:prstGeom prst="rect">
+                  <a:avLst/>
+                </a:prstGeom>
+                <a:blipFill>
+                  <a:blip r:embed="rId2"/>
+                  <a:stretch>
+                    <a:fillRect/>
+                  </a:stretch>
+                </a:blipFill>
+              </p:spPr>
+              <p:txBody>
+                <a:bodyPr/>
+                <a:lstStyle/>
+                <a:p>
+                  <a:r>
+                    <a:rPr lang="pt-BR">
+                      <a:noFill/>
+                    </a:rPr>
+                    <a:t> </a:t>
+                  </a:r>
+                </a:p>
+              </p:txBody>
+            </p:sp>
+          </mc:Fallback>
+        </mc:AlternateContent>
+        <p:grpSp>
+          <p:nvGrpSpPr>
+            <p:cNvPr id="6" name="Agrupar 21">
+              <a:extLst>
+                <a:ext uri="{FF2B5EF4-FFF2-40B4-BE49-F238E27FC236}">
+                  <a16:creationId xmlns:a16="http://schemas.microsoft.com/office/drawing/2014/main" id="{0216B346-D594-78F5-A2A5-C50F3A50B5DC}"/>
+                </a:ext>
+              </a:extLst>
+            </p:cNvPr>
+            <p:cNvGrpSpPr/>
+            <p:nvPr/>
+          </p:nvGrpSpPr>
+          <p:grpSpPr>
+            <a:xfrm>
+              <a:off x="3229897" y="2546550"/>
+              <a:ext cx="1820194" cy="1583011"/>
+              <a:chOff x="3624417" y="4409768"/>
+              <a:chExt cx="1820194" cy="1583011"/>
+            </a:xfrm>
+          </p:grpSpPr>
+          <p:sp>
+            <p:nvSpPr>
+              <p:cNvPr id="19" name="Retângulo 6">
+                <a:extLst>
+                  <a:ext uri="{FF2B5EF4-FFF2-40B4-BE49-F238E27FC236}">
+                    <a16:creationId xmlns:a16="http://schemas.microsoft.com/office/drawing/2014/main" id="{C45F9961-D53D-BEB9-F54B-3CC4703FA1F8}"/>
+                  </a:ext>
+                </a:extLst>
+              </p:cNvPr>
+              <p:cNvSpPr/>
+              <p:nvPr/>
+            </p:nvSpPr>
+            <p:spPr>
+              <a:xfrm>
+                <a:off x="3628103" y="4409768"/>
+                <a:ext cx="1816508" cy="1583011"/>
+              </a:xfrm>
+              <a:prstGeom prst="rect">
+                <a:avLst/>
+              </a:prstGeom>
+              <a:noFill/>
+              <a:ln w="28575">
+                <a:solidFill>
+                  <a:schemeClr val="tx1"/>
+                </a:solidFill>
+              </a:ln>
+            </p:spPr>
+            <p:style>
+              <a:lnRef idx="2">
+                <a:schemeClr val="accent1">
+                  <a:shade val="15000"/>
+                </a:schemeClr>
+              </a:lnRef>
+              <a:fillRef idx="1">
+                <a:schemeClr val="accent1"/>
+              </a:fillRef>
+              <a:effectRef idx="0">
+                <a:schemeClr val="accent1"/>
+              </a:effectRef>
+              <a:fontRef idx="minor">
+                <a:schemeClr val="lt1"/>
+              </a:fontRef>
+            </p:style>
+            <p:txBody>
+              <a:bodyPr rtlCol="0" anchor="ctr"/>
+              <a:lstStyle/>
+              <a:p>
+                <a:pPr algn="ctr"/>
+                <a:endParaRPr lang="pt-BR" dirty="0"/>
+              </a:p>
+            </p:txBody>
+          </p:sp>
+          <mc:AlternateContent xmlns:mc="http://schemas.openxmlformats.org/markup-compatibility/2006" xmlns:a14="http://schemas.microsoft.com/office/drawing/2010/main">
+            <mc:Choice Requires="a14">
+              <p:sp>
+                <p:nvSpPr>
+                  <p:cNvPr id="20" name="CaixaDeTexto 7">
+                    <a:extLst>
+                      <a:ext uri="{FF2B5EF4-FFF2-40B4-BE49-F238E27FC236}">
+                        <a16:creationId xmlns:a16="http://schemas.microsoft.com/office/drawing/2014/main" id="{DD14F424-8D9A-FCFC-0455-7D5B5C6C43F0}"/>
+                      </a:ext>
+                    </a:extLst>
+                  </p:cNvPr>
+                  <p:cNvSpPr txBox="1"/>
+                  <p:nvPr/>
+                </p:nvSpPr>
+                <p:spPr>
+                  <a:xfrm>
+                    <a:off x="3624417" y="4579045"/>
+                    <a:ext cx="1816508" cy="1211165"/>
+                  </a:xfrm>
+                  <a:prstGeom prst="rect">
+                    <a:avLst/>
+                  </a:prstGeom>
+                  <a:noFill/>
+                </p:spPr>
+                <p:txBody>
+                  <a:bodyPr wrap="square" rtlCol="0">
+                    <a:spAutoFit/>
+                  </a:bodyPr>
+                  <a:lstStyle/>
+                  <a:p>
+                    <a:pPr/>
+                    <a14:m>
+                      <m:oMathPara xmlns:m="http://schemas.openxmlformats.org/officeDocument/2006/math">
+                        <m:oMathParaPr>
+                          <m:jc m:val="centerGroup"/>
+                        </m:oMathParaPr>
+                        <m:oMath xmlns:m="http://schemas.openxmlformats.org/officeDocument/2006/math">
+                          <m:f>
+                            <m:fPr>
+                              <m:ctrlPr>
+                                <a:rPr lang="pt-BR" sz="2800" b="0" i="1" smtClean="0">
+                                  <a:latin typeface="Cambria Math" panose="02040503050406030204" pitchFamily="18" charset="0"/>
+                                </a:rPr>
+                              </m:ctrlPr>
+                            </m:fPr>
+                            <m:num>
+                              <m:sSup>
+                                <m:sSupPr>
+                                  <m:ctrlPr>
+                                    <a:rPr lang="pt-BR" sz="2800" i="1">
+                                      <a:latin typeface="Cambria Math" panose="02040503050406030204" pitchFamily="18" charset="0"/>
+                                    </a:rPr>
+                                  </m:ctrlPr>
+                                </m:sSupPr>
+                                <m:e>
+                                  <m:r>
+                                    <a:rPr lang="pt-BR" sz="2800" i="1">
+                                      <a:latin typeface="Cambria Math" panose="02040503050406030204" pitchFamily="18" charset="0"/>
+                                    </a:rPr>
+                                    <m:t>𝑒</m:t>
+                                  </m:r>
+                                </m:e>
+                                <m:sup>
+                                  <m:sSub>
+                                    <m:sSubPr>
+                                      <m:ctrlPr>
+                                        <a:rPr lang="pt-BR" sz="2800" i="1">
+                                          <a:latin typeface="Cambria Math" panose="02040503050406030204" pitchFamily="18" charset="0"/>
+                                        </a:rPr>
+                                      </m:ctrlPr>
+                                    </m:sSubPr>
+                                    <m:e>
+                                      <m:r>
+                                        <a:rPr lang="pt-BR" sz="2800" i="1">
+                                          <a:latin typeface="Cambria Math" panose="02040503050406030204" pitchFamily="18" charset="0"/>
+                                        </a:rPr>
+                                        <m:t>𝑔</m:t>
+                                      </m:r>
+                                    </m:e>
+                                    <m:sub>
+                                      <m:r>
+                                        <a:rPr lang="pt-BR" sz="2800" i="1">
+                                          <a:latin typeface="Cambria Math" panose="02040503050406030204" pitchFamily="18" charset="0"/>
+                                        </a:rPr>
+                                        <m:t>𝑖</m:t>
+                                      </m:r>
+                                    </m:sub>
+                                  </m:sSub>
+                                  <m:r>
+                                    <a:rPr lang="pt-BR" sz="2800" i="1">
+                                      <a:latin typeface="Cambria Math" panose="02040503050406030204" pitchFamily="18" charset="0"/>
+                                    </a:rPr>
+                                    <m:t>(</m:t>
+                                  </m:r>
+                                  <m:r>
+                                    <a:rPr lang="pt-BR" sz="2800" b="1" i="1">
+                                      <a:latin typeface="Cambria Math" panose="02040503050406030204" pitchFamily="18" charset="0"/>
+                                    </a:rPr>
+                                    <m:t>𝒙</m:t>
+                                  </m:r>
+                                  <m:r>
+                                    <a:rPr lang="pt-BR" sz="2800" i="1">
+                                      <a:latin typeface="Cambria Math" panose="02040503050406030204" pitchFamily="18" charset="0"/>
+                                    </a:rPr>
+                                    <m:t>)</m:t>
+                                  </m:r>
+                                </m:sup>
+                              </m:sSup>
+                            </m:num>
+                            <m:den>
+                              <m:nary>
+                                <m:naryPr>
+                                  <m:chr m:val="∑"/>
+                                  <m:limLoc m:val="subSup"/>
+                                  <m:ctrlPr>
+                                    <a:rPr lang="pt-BR" sz="2800" b="0" i="1" smtClean="0">
+                                      <a:latin typeface="Cambria Math" panose="02040503050406030204" pitchFamily="18" charset="0"/>
+                                    </a:rPr>
+                                  </m:ctrlPr>
+                                </m:naryPr>
+                                <m:sub>
+                                  <m:r>
+                                    <m:rPr>
+                                      <m:brk m:alnAt="25"/>
+                                    </m:rPr>
+                                    <a:rPr lang="pt-BR" sz="2800" b="0" i="1" smtClean="0">
+                                      <a:latin typeface="Cambria Math" panose="02040503050406030204" pitchFamily="18" charset="0"/>
+                                    </a:rPr>
+                                    <m:t>𝑗</m:t>
+                                  </m:r>
+                                  <m:r>
+                                    <a:rPr lang="pt-BR" sz="2800" b="0" i="1" smtClean="0">
+                                      <a:latin typeface="Cambria Math" panose="02040503050406030204" pitchFamily="18" charset="0"/>
+                                    </a:rPr>
+                                    <m:t>=1</m:t>
+                                  </m:r>
+                                </m:sub>
+                                <m:sup>
+                                  <m:r>
+                                    <a:rPr lang="pt-BR" sz="2800" b="0" i="1" smtClean="0">
+                                      <a:latin typeface="Cambria Math" panose="02040503050406030204" pitchFamily="18" charset="0"/>
+                                    </a:rPr>
+                                    <m:t>𝑄</m:t>
+                                  </m:r>
+                                </m:sup>
+                                <m:e>
+                                  <m:sSup>
+                                    <m:sSupPr>
+                                      <m:ctrlPr>
+                                        <a:rPr lang="pt-BR" sz="2800" i="1">
+                                          <a:latin typeface="Cambria Math" panose="02040503050406030204" pitchFamily="18" charset="0"/>
+                                        </a:rPr>
+                                      </m:ctrlPr>
+                                    </m:sSupPr>
+                                    <m:e>
+                                      <m:r>
+                                        <a:rPr lang="pt-BR" sz="2800" i="1">
+                                          <a:latin typeface="Cambria Math" panose="02040503050406030204" pitchFamily="18" charset="0"/>
+                                        </a:rPr>
+                                        <m:t>𝑒</m:t>
+                                      </m:r>
+                                    </m:e>
+                                    <m:sup>
+                                      <m:sSub>
+                                        <m:sSubPr>
+                                          <m:ctrlPr>
+                                            <a:rPr lang="pt-BR" sz="2800" i="1">
+                                              <a:latin typeface="Cambria Math" panose="02040503050406030204" pitchFamily="18" charset="0"/>
+                                            </a:rPr>
+                                          </m:ctrlPr>
+                                        </m:sSubPr>
+                                        <m:e>
+                                          <m:r>
+                                            <a:rPr lang="pt-BR" sz="2800" i="1">
+                                              <a:latin typeface="Cambria Math" panose="02040503050406030204" pitchFamily="18" charset="0"/>
+                                            </a:rPr>
+                                            <m:t>𝑔</m:t>
+                                          </m:r>
+                                        </m:e>
+                                        <m:sub>
+                                          <m:r>
+                                            <a:rPr lang="pt-BR" sz="2800" b="0" i="1" smtClean="0">
+                                              <a:latin typeface="Cambria Math" panose="02040503050406030204" pitchFamily="18" charset="0"/>
+                                            </a:rPr>
+                                            <m:t>𝑗</m:t>
+                                          </m:r>
+                                        </m:sub>
+                                      </m:sSub>
+                                      <m:r>
+                                        <a:rPr lang="pt-BR" sz="2800" i="1">
+                                          <a:latin typeface="Cambria Math" panose="02040503050406030204" pitchFamily="18" charset="0"/>
+                                        </a:rPr>
+                                        <m:t>(</m:t>
+                                      </m:r>
+                                      <m:r>
+                                        <a:rPr lang="pt-BR" sz="2800" b="1" i="1">
+                                          <a:latin typeface="Cambria Math" panose="02040503050406030204" pitchFamily="18" charset="0"/>
+                                        </a:rPr>
+                                        <m:t>𝒙</m:t>
+                                      </m:r>
+                                      <m:r>
+                                        <a:rPr lang="pt-BR" sz="2800" i="1">
+                                          <a:latin typeface="Cambria Math" panose="02040503050406030204" pitchFamily="18" charset="0"/>
+                                        </a:rPr>
+                                        <m:t>)</m:t>
+                                      </m:r>
+                                    </m:sup>
+                                  </m:sSup>
+                                </m:e>
+                              </m:nary>
+                            </m:den>
+                          </m:f>
+                        </m:oMath>
+                      </m:oMathPara>
+                    </a14:m>
+                    <a:endParaRPr lang="pt-BR" sz="2800" dirty="0"/>
+                  </a:p>
+                </p:txBody>
+              </p:sp>
+            </mc:Choice>
+            <mc:Fallback xmlns="">
+              <p:sp>
+                <p:nvSpPr>
+                  <p:cNvPr id="8" name="CaixaDeTexto 7">
+                    <a:extLst>
+                      <a:ext uri="{FF2B5EF4-FFF2-40B4-BE49-F238E27FC236}">
+                        <a16:creationId xmlns:a16="http://schemas.microsoft.com/office/drawing/2014/main" id="{4607DCF3-656F-5B3E-9FD4-3A9E08FFF13B}"/>
+                      </a:ext>
+                    </a:extLst>
+                  </p:cNvPr>
+                  <p:cNvSpPr txBox="1">
+                    <a:spLocks noRot="1" noChangeAspect="1" noMove="1" noResize="1" noEditPoints="1" noAdjustHandles="1" noChangeArrowheads="1" noChangeShapeType="1" noTextEdit="1"/>
+                  </p:cNvSpPr>
+                  <p:nvPr/>
+                </p:nvSpPr>
+                <p:spPr>
+                  <a:xfrm>
+                    <a:off x="3624417" y="4579045"/>
+                    <a:ext cx="1816508" cy="1211165"/>
+                  </a:xfrm>
+                  <a:prstGeom prst="rect">
+                    <a:avLst/>
+                  </a:prstGeom>
+                  <a:blipFill>
+                    <a:blip r:embed="rId3"/>
+                    <a:stretch>
+                      <a:fillRect/>
+                    </a:stretch>
+                  </a:blipFill>
+                </p:spPr>
+                <p:txBody>
+                  <a:bodyPr/>
+                  <a:lstStyle/>
+                  <a:p>
+                    <a:r>
+                      <a:rPr lang="pt-BR">
+                        <a:noFill/>
+                      </a:rPr>
+                      <a:t> </a:t>
+                    </a:r>
+                  </a:p>
+                </p:txBody>
+              </p:sp>
+            </mc:Fallback>
+          </mc:AlternateContent>
+        </p:grpSp>
+        <p:sp>
+          <p:nvSpPr>
+            <p:cNvPr id="7" name="Seta: para a Direita 8">
+              <a:extLst>
+                <a:ext uri="{FF2B5EF4-FFF2-40B4-BE49-F238E27FC236}">
+                  <a16:creationId xmlns:a16="http://schemas.microsoft.com/office/drawing/2014/main" id="{D3504EFE-235C-4EED-BD67-1F0134363B33}"/>
+                </a:ext>
+              </a:extLst>
+            </p:cNvPr>
+            <p:cNvSpPr/>
+            <p:nvPr/>
+          </p:nvSpPr>
+          <p:spPr>
+            <a:xfrm>
+              <a:off x="2539180" y="3254486"/>
+              <a:ext cx="570271" cy="167140"/>
+            </a:xfrm>
+            <a:prstGeom prst="rightArrow">
+              <a:avLst/>
+            </a:prstGeom>
+            <a:solidFill>
+              <a:schemeClr val="tx1"/>
+            </a:solidFill>
+            <a:ln>
+              <a:solidFill>
+                <a:schemeClr val="tx1"/>
+              </a:solidFill>
+            </a:ln>
+          </p:spPr>
+          <p:style>
+            <a:lnRef idx="2">
+              <a:schemeClr val="accent1">
+                <a:shade val="15000"/>
+              </a:schemeClr>
+            </a:lnRef>
+            <a:fillRef idx="1">
+              <a:schemeClr val="accent1"/>
+            </a:fillRef>
+            <a:effectRef idx="0">
+              <a:schemeClr val="accent1"/>
+            </a:effectRef>
+            <a:fontRef idx="minor">
+              <a:schemeClr val="lt1"/>
+            </a:fontRef>
+          </p:style>
+          <p:txBody>
+            <a:bodyPr rtlCol="0" anchor="ctr"/>
+            <a:lstStyle/>
+            <a:p>
+              <a:pPr algn="ctr"/>
+              <a:endParaRPr lang="pt-BR"/>
+            </a:p>
+          </p:txBody>
+        </p:sp>
+        <p:sp>
+          <p:nvSpPr>
+            <p:cNvPr id="8" name="Seta: para a Direita 9">
+              <a:extLst>
+                <a:ext uri="{FF2B5EF4-FFF2-40B4-BE49-F238E27FC236}">
+                  <a16:creationId xmlns:a16="http://schemas.microsoft.com/office/drawing/2014/main" id="{E56F7404-32FC-ED2A-B5D6-AA6AAC63911A}"/>
+                </a:ext>
+              </a:extLst>
+            </p:cNvPr>
+            <p:cNvSpPr/>
+            <p:nvPr/>
+          </p:nvSpPr>
+          <p:spPr>
+            <a:xfrm>
+              <a:off x="5166851" y="3254486"/>
+              <a:ext cx="570271" cy="167140"/>
+            </a:xfrm>
+            <a:prstGeom prst="rightArrow">
+              <a:avLst/>
+            </a:prstGeom>
+            <a:solidFill>
+              <a:schemeClr val="tx1"/>
+            </a:solidFill>
+            <a:ln>
+              <a:solidFill>
+                <a:schemeClr val="tx1"/>
+              </a:solidFill>
+            </a:ln>
+          </p:spPr>
+          <p:style>
+            <a:lnRef idx="2">
+              <a:schemeClr val="accent1">
+                <a:shade val="15000"/>
+              </a:schemeClr>
+            </a:lnRef>
+            <a:fillRef idx="1">
+              <a:schemeClr val="accent1"/>
+            </a:fillRef>
+            <a:effectRef idx="0">
+              <a:schemeClr val="accent1"/>
+            </a:effectRef>
+            <a:fontRef idx="minor">
+              <a:schemeClr val="lt1"/>
+            </a:fontRef>
+          </p:style>
+          <p:txBody>
+            <a:bodyPr rtlCol="0" anchor="ctr"/>
+            <a:lstStyle/>
+            <a:p>
+              <a:pPr algn="ctr"/>
+              <a:endParaRPr lang="pt-BR"/>
+            </a:p>
+          </p:txBody>
+        </p:sp>
+        <p:sp>
+          <p:nvSpPr>
+            <p:cNvPr id="9" name="CaixaDeTexto 10">
+              <a:extLst>
+                <a:ext uri="{FF2B5EF4-FFF2-40B4-BE49-F238E27FC236}">
+                  <a16:creationId xmlns:a16="http://schemas.microsoft.com/office/drawing/2014/main" id="{4F9BC649-95D4-52BD-BA63-08F8688BBFD3}"/>
+                </a:ext>
+              </a:extLst>
+            </p:cNvPr>
+            <p:cNvSpPr txBox="1"/>
+            <p:nvPr/>
+          </p:nvSpPr>
+          <p:spPr>
+            <a:xfrm>
+              <a:off x="5338913" y="1939991"/>
+              <a:ext cx="1804221" cy="307777"/>
+            </a:xfrm>
+            <a:prstGeom prst="rect">
+              <a:avLst/>
+            </a:prstGeom>
+            <a:noFill/>
+          </p:spPr>
+          <p:txBody>
+            <a:bodyPr wrap="square" rtlCol="0">
+              <a:spAutoFit/>
+            </a:bodyPr>
+            <a:lstStyle/>
+            <a:p>
+              <a:pPr algn="ctr"/>
+              <a:r>
+                <a:rPr lang="pt-BR" sz="1400" dirty="0"/>
+                <a:t>Probabilidades</a:t>
+              </a:r>
+            </a:p>
+          </p:txBody>
+        </p:sp>
+        <p:sp>
+          <p:nvSpPr>
+            <p:cNvPr id="10" name="CaixaDeTexto 12">
+              <a:extLst>
+                <a:ext uri="{FF2B5EF4-FFF2-40B4-BE49-F238E27FC236}">
+                  <a16:creationId xmlns:a16="http://schemas.microsoft.com/office/drawing/2014/main" id="{9C4DD653-BC48-DCA1-5663-281ACCF13641}"/>
+                </a:ext>
+              </a:extLst>
+            </p:cNvPr>
+            <p:cNvSpPr txBox="1"/>
+            <p:nvPr/>
+          </p:nvSpPr>
+          <p:spPr>
+            <a:xfrm>
+              <a:off x="3170903" y="1871346"/>
+              <a:ext cx="1995948" cy="523220"/>
+            </a:xfrm>
+            <a:prstGeom prst="rect">
+              <a:avLst/>
+            </a:prstGeom>
+            <a:noFill/>
+          </p:spPr>
+          <p:txBody>
+            <a:bodyPr wrap="square" rtlCol="0">
+              <a:spAutoFit/>
+            </a:bodyPr>
+            <a:lstStyle/>
+            <a:p>
+              <a:pPr algn="ctr"/>
+              <a:r>
+                <a:rPr lang="pt-BR" sz="1400" dirty="0"/>
+                <a:t>Função de ativação </a:t>
+              </a:r>
+              <a:r>
+                <a:rPr lang="pt-BR" sz="1400" i="1" dirty="0"/>
+                <a:t>softmax</a:t>
+              </a:r>
+            </a:p>
+          </p:txBody>
+        </p:sp>
+        <p:grpSp>
+          <p:nvGrpSpPr>
+            <p:cNvPr id="11" name="Agrupar 20">
+              <a:extLst>
+                <a:ext uri="{FF2B5EF4-FFF2-40B4-BE49-F238E27FC236}">
+                  <a16:creationId xmlns:a16="http://schemas.microsoft.com/office/drawing/2014/main" id="{1FBA146D-CAB5-65CA-C09C-DFAE2CF0121E}"/>
+                </a:ext>
+              </a:extLst>
+            </p:cNvPr>
+            <p:cNvGrpSpPr/>
+            <p:nvPr/>
+          </p:nvGrpSpPr>
+          <p:grpSpPr>
+            <a:xfrm>
+              <a:off x="1027469" y="1870682"/>
+              <a:ext cx="1986994" cy="2461594"/>
+              <a:chOff x="1558411" y="3805042"/>
+              <a:chExt cx="1986994" cy="2461594"/>
+            </a:xfrm>
+          </p:grpSpPr>
+          <mc:AlternateContent xmlns:mc="http://schemas.openxmlformats.org/markup-compatibility/2006" xmlns:a14="http://schemas.microsoft.com/office/drawing/2010/main">
+            <mc:Choice Requires="a14">
+              <p:sp>
+                <p:nvSpPr>
+                  <p:cNvPr id="12" name="CaixaDeTexto 4">
+                    <a:extLst>
+                      <a:ext uri="{FF2B5EF4-FFF2-40B4-BE49-F238E27FC236}">
+                        <a16:creationId xmlns:a16="http://schemas.microsoft.com/office/drawing/2014/main" id="{43C8BB8A-C849-2483-4102-05D4F8A25AE9}"/>
+                      </a:ext>
+                    </a:extLst>
+                  </p:cNvPr>
+                  <p:cNvSpPr txBox="1"/>
+                  <p:nvPr/>
+                </p:nvSpPr>
+                <p:spPr>
+                  <a:xfrm>
+                    <a:off x="2172929" y="4257368"/>
+                    <a:ext cx="471948" cy="2009268"/>
+                  </a:xfrm>
+                  <a:prstGeom prst="rect">
+                    <a:avLst/>
+                  </a:prstGeom>
+                  <a:noFill/>
+                </p:spPr>
+                <p:txBody>
+                  <a:bodyPr wrap="square" rtlCol="0">
+                    <a:spAutoFit/>
+                  </a:bodyPr>
+                  <a:lstStyle/>
+                  <a:p>
+                    <a:pPr/>
+                    <a14:m>
+                      <m:oMathPara xmlns:m="http://schemas.openxmlformats.org/officeDocument/2006/math">
+                        <m:oMathParaPr>
+                          <m:jc m:val="centerGroup"/>
+                        </m:oMathParaPr>
+                        <m:oMath xmlns:m="http://schemas.openxmlformats.org/officeDocument/2006/math">
+                          <m:d>
+                            <m:dPr>
+                              <m:begChr m:val="["/>
+                              <m:endChr m:val="]"/>
+                              <m:ctrlPr>
+                                <a:rPr lang="pt-BR" sz="2800" i="1" smtClean="0">
+                                  <a:latin typeface="Cambria Math" panose="02040503050406030204" pitchFamily="18" charset="0"/>
+                                </a:rPr>
+                              </m:ctrlPr>
+                            </m:dPr>
+                            <m:e>
+                              <m:m>
+                                <m:mPr>
+                                  <m:mcs>
+                                    <m:mc>
+                                      <m:mcPr>
+                                        <m:count m:val="1"/>
+                                        <m:mcJc m:val="center"/>
+                                      </m:mcPr>
+                                    </m:mc>
+                                  </m:mcs>
+                                  <m:ctrlPr>
+                                    <a:rPr lang="pt-BR" sz="2800" i="1" smtClean="0">
+                                      <a:latin typeface="Cambria Math" panose="02040503050406030204" pitchFamily="18" charset="0"/>
+                                    </a:rPr>
+                                  </m:ctrlPr>
+                                </m:mPr>
+                                <m:mr>
+                                  <m:e>
+                                    <m:r>
+                                      <m:rPr>
+                                        <m:brk m:alnAt="7"/>
+                                      </m:rPr>
+                                      <a:rPr lang="pt-BR" sz="2800" b="0" i="1" smtClean="0">
+                                        <a:latin typeface="Cambria Math" panose="02040503050406030204" pitchFamily="18" charset="0"/>
+                                      </a:rPr>
+                                      <m:t>1</m:t>
+                                    </m:r>
+                                    <m:r>
+                                      <a:rPr lang="pt-BR" sz="2800" b="0" i="1" smtClean="0">
+                                        <a:latin typeface="Cambria Math" panose="02040503050406030204" pitchFamily="18" charset="0"/>
+                                      </a:rPr>
+                                      <m:t>.3</m:t>
+                                    </m:r>
+                                  </m:e>
+                                </m:mr>
+                                <m:mr>
+                                  <m:e>
+                                    <m:r>
+                                      <a:rPr lang="pt-BR" sz="2800" b="0" i="1" smtClean="0">
+                                        <a:latin typeface="Cambria Math" panose="02040503050406030204" pitchFamily="18" charset="0"/>
+                                      </a:rPr>
+                                      <m:t>5.1</m:t>
+                                    </m:r>
+                                  </m:e>
+                                </m:mr>
+                                <m:mr>
+                                  <m:e>
+                                    <m:m>
+                                      <m:mPr>
+                                        <m:mcs>
+                                          <m:mc>
+                                            <m:mcPr>
+                                              <m:count m:val="1"/>
+                                              <m:mcJc m:val="center"/>
+                                            </m:mcPr>
+                                          </m:mc>
+                                        </m:mcs>
+                                        <m:ctrlPr>
+                                          <a:rPr lang="pt-BR" sz="2800" i="1" smtClean="0">
+                                            <a:latin typeface="Cambria Math" panose="02040503050406030204" pitchFamily="18" charset="0"/>
+                                          </a:rPr>
+                                        </m:ctrlPr>
+                                      </m:mPr>
+                                      <m:mr>
+                                        <m:e>
+                                          <m:r>
+                                            <m:rPr>
+                                              <m:brk m:alnAt="7"/>
+                                            </m:rPr>
+                                            <a:rPr lang="pt-BR" sz="2800" b="0" i="1" smtClean="0">
+                                              <a:latin typeface="Cambria Math" panose="02040503050406030204" pitchFamily="18" charset="0"/>
+                                            </a:rPr>
+                                            <m:t>2</m:t>
+                                          </m:r>
+                                          <m:r>
+                                            <a:rPr lang="pt-BR" sz="2800" b="0" i="1" smtClean="0">
+                                              <a:latin typeface="Cambria Math" panose="02040503050406030204" pitchFamily="18" charset="0"/>
+                                            </a:rPr>
+                                            <m:t>.2</m:t>
+                                          </m:r>
+                                        </m:e>
+                                      </m:mr>
+                                      <m:mr>
+                                        <m:e>
+                                          <m:r>
+                                            <a:rPr lang="pt-BR" sz="2800" b="0" i="1" smtClean="0">
+                                              <a:latin typeface="Cambria Math" panose="02040503050406030204" pitchFamily="18" charset="0"/>
+                                            </a:rPr>
+                                            <m:t>0.7</m:t>
+                                          </m:r>
+                                        </m:e>
+                                      </m:mr>
+                                      <m:mr>
+                                        <m:e>
+                                          <m:r>
+                                            <a:rPr lang="pt-BR" sz="2800" b="0" i="1" smtClean="0">
+                                              <a:latin typeface="Cambria Math" panose="02040503050406030204" pitchFamily="18" charset="0"/>
+                                            </a:rPr>
+                                            <m:t>1.1</m:t>
+                                          </m:r>
+                                        </m:e>
+                                      </m:mr>
+                                    </m:m>
+                                  </m:e>
+                                </m:mr>
+                              </m:m>
+                            </m:e>
+                          </m:d>
+                        </m:oMath>
+                      </m:oMathPara>
+                    </a14:m>
+                    <a:endParaRPr lang="pt-BR" sz="2800" dirty="0"/>
+                  </a:p>
+                </p:txBody>
+              </p:sp>
+            </mc:Choice>
+            <mc:Fallback xmlns="">
+              <p:sp>
+                <p:nvSpPr>
+                  <p:cNvPr id="5" name="CaixaDeTexto 4">
+                    <a:extLst>
+                      <a:ext uri="{FF2B5EF4-FFF2-40B4-BE49-F238E27FC236}">
+                        <a16:creationId xmlns:a16="http://schemas.microsoft.com/office/drawing/2014/main" id="{ECC8FEDC-452E-069A-74A0-6FE908CEF53B}"/>
+                      </a:ext>
+                    </a:extLst>
+                  </p:cNvPr>
+                  <p:cNvSpPr txBox="1">
+                    <a:spLocks noRot="1" noChangeAspect="1" noMove="1" noResize="1" noEditPoints="1" noAdjustHandles="1" noChangeArrowheads="1" noChangeShapeType="1" noTextEdit="1"/>
+                  </p:cNvSpPr>
+                  <p:nvPr/>
+                </p:nvSpPr>
+                <p:spPr>
+                  <a:xfrm>
+                    <a:off x="2172929" y="4257368"/>
+                    <a:ext cx="471948" cy="2009268"/>
+                  </a:xfrm>
+                  <a:prstGeom prst="rect">
+                    <a:avLst/>
+                  </a:prstGeom>
+                  <a:blipFill>
+                    <a:blip r:embed="rId4"/>
+                    <a:stretch>
+                      <a:fillRect r="-67949"/>
+                    </a:stretch>
+                  </a:blipFill>
+                </p:spPr>
+                <p:txBody>
+                  <a:bodyPr/>
+                  <a:lstStyle/>
+                  <a:p>
+                    <a:r>
+                      <a:rPr lang="pt-BR">
+                        <a:noFill/>
+                      </a:rPr>
+                      <a:t> </a:t>
+                    </a:r>
+                  </a:p>
+                </p:txBody>
+              </p:sp>
+            </mc:Fallback>
+          </mc:AlternateContent>
+          <mc:AlternateContent xmlns:mc="http://schemas.openxmlformats.org/markup-compatibility/2006">
+            <mc:Choice xmlns:a14="http://schemas.microsoft.com/office/drawing/2010/main" Requires="a14">
+              <p:sp>
+                <p:nvSpPr>
+                  <p:cNvPr id="13" name="CaixaDeTexto 11">
+                    <a:extLst>
+                      <a:ext uri="{FF2B5EF4-FFF2-40B4-BE49-F238E27FC236}">
+                        <a16:creationId xmlns:a16="http://schemas.microsoft.com/office/drawing/2014/main" id="{AF290EB5-D075-77C8-B194-538454B60861}"/>
+                      </a:ext>
+                    </a:extLst>
+                  </p:cNvPr>
+                  <p:cNvSpPr txBox="1"/>
+                  <p:nvPr/>
+                </p:nvSpPr>
+                <p:spPr>
+                  <a:xfrm>
+                    <a:off x="1744348" y="3805042"/>
+                    <a:ext cx="1801057" cy="523220"/>
+                  </a:xfrm>
+                  <a:prstGeom prst="rect">
+                    <a:avLst/>
+                  </a:prstGeom>
+                  <a:noFill/>
+                </p:spPr>
+                <p:txBody>
+                  <a:bodyPr wrap="square" rtlCol="0">
+                    <a:spAutoFit/>
+                  </a:bodyPr>
+                  <a:lstStyle/>
+                  <a:p>
+                    <a:pPr algn="ctr"/>
+                    <a:r>
+                      <a:rPr lang="pt-BR" sz="1400" dirty="0"/>
+                      <a:t>Saídas das </a:t>
+                    </a:r>
+                    <a14:m>
+                      <m:oMath xmlns:m="http://schemas.openxmlformats.org/officeDocument/2006/math">
+                        <m:r>
+                          <a:rPr lang="pt-BR" sz="1400" b="0" i="1" smtClean="0">
+                            <a:latin typeface="Cambria Math" panose="02040503050406030204" pitchFamily="18" charset="0"/>
+                          </a:rPr>
+                          <m:t>𝑄</m:t>
+                        </m:r>
+                      </m:oMath>
+                    </a14:m>
+                    <a:r>
+                      <a:rPr lang="pt-BR" sz="1400" dirty="0"/>
+                      <a:t> funções discriminantes</a:t>
+                    </a:r>
+                  </a:p>
+                </p:txBody>
+              </p:sp>
+            </mc:Choice>
+            <mc:Fallback>
+              <p:sp>
+                <p:nvSpPr>
+                  <p:cNvPr id="13" name="CaixaDeTexto 11">
+                    <a:extLst>
+                      <a:ext uri="{FF2B5EF4-FFF2-40B4-BE49-F238E27FC236}">
+                        <a16:creationId xmlns:a16="http://schemas.microsoft.com/office/drawing/2014/main" id="{AF290EB5-D075-77C8-B194-538454B60861}"/>
+                      </a:ext>
+                    </a:extLst>
+                  </p:cNvPr>
+                  <p:cNvSpPr txBox="1">
+                    <a:spLocks noRot="1" noChangeAspect="1" noMove="1" noResize="1" noEditPoints="1" noAdjustHandles="1" noChangeArrowheads="1" noChangeShapeType="1" noTextEdit="1"/>
+                  </p:cNvSpPr>
+                  <p:nvPr/>
+                </p:nvSpPr>
+                <p:spPr>
+                  <a:xfrm>
+                    <a:off x="1744348" y="3805042"/>
+                    <a:ext cx="1801057" cy="523220"/>
+                  </a:xfrm>
+                  <a:prstGeom prst="rect">
+                    <a:avLst/>
+                  </a:prstGeom>
+                  <a:blipFill>
+                    <a:blip r:embed="rId5"/>
+                    <a:stretch>
+                      <a:fillRect t="-2326" r="-1017" b="-10465"/>
+                    </a:stretch>
+                  </a:blipFill>
+                </p:spPr>
+                <p:txBody>
+                  <a:bodyPr/>
+                  <a:lstStyle/>
+                  <a:p>
+                    <a:r>
+                      <a:rPr lang="en-US">
+                        <a:noFill/>
+                      </a:rPr>
+                      <a:t> </a:t>
+                    </a:r>
+                  </a:p>
+                </p:txBody>
+              </p:sp>
+            </mc:Fallback>
+          </mc:AlternateContent>
+          <mc:AlternateContent xmlns:mc="http://schemas.openxmlformats.org/markup-compatibility/2006" xmlns:a14="http://schemas.microsoft.com/office/drawing/2010/main">
+            <mc:Choice Requires="a14">
+              <p:sp>
+                <p:nvSpPr>
+                  <p:cNvPr id="14" name="CaixaDeTexto 14">
+                    <a:extLst>
+                      <a:ext uri="{FF2B5EF4-FFF2-40B4-BE49-F238E27FC236}">
+                        <a16:creationId xmlns:a16="http://schemas.microsoft.com/office/drawing/2014/main" id="{34981BFA-7FF1-3BFF-417B-6F22F9C69AF2}"/>
+                      </a:ext>
+                    </a:extLst>
+                  </p:cNvPr>
+                  <p:cNvSpPr txBox="1"/>
+                  <p:nvPr/>
+                </p:nvSpPr>
+                <p:spPr>
+                  <a:xfrm>
+                    <a:off x="1558411" y="4328926"/>
+                    <a:ext cx="786581" cy="338554"/>
+                  </a:xfrm>
+                  <a:prstGeom prst="rect">
+                    <a:avLst/>
+                  </a:prstGeom>
+                  <a:noFill/>
+                </p:spPr>
+                <p:txBody>
+                  <a:bodyPr wrap="square">
+                    <a:spAutoFit/>
+                  </a:bodyPr>
+                  <a:lstStyle/>
+                  <a:p>
+                    <a:pPr/>
+                    <a14:m>
+                      <m:oMathPara xmlns:m="http://schemas.openxmlformats.org/officeDocument/2006/math">
+                        <m:oMathParaPr>
+                          <m:jc m:val="centerGroup"/>
+                        </m:oMathParaPr>
+                        <m:oMath xmlns:m="http://schemas.openxmlformats.org/officeDocument/2006/math">
+                          <m:sSub>
+                            <m:sSubPr>
+                              <m:ctrlPr>
+                                <a:rPr lang="pt-BR" sz="1600" i="1" smtClean="0">
+                                  <a:latin typeface="Cambria Math" panose="02040503050406030204" pitchFamily="18" charset="0"/>
+                                </a:rPr>
+                              </m:ctrlPr>
+                            </m:sSubPr>
+                            <m:e>
+                              <m:r>
+                                <a:rPr lang="pt-BR" sz="1600" i="1">
+                                  <a:latin typeface="Cambria Math" panose="02040503050406030204" pitchFamily="18" charset="0"/>
+                                </a:rPr>
+                                <m:t>𝑔</m:t>
+                              </m:r>
+                            </m:e>
+                            <m:sub>
+                              <m:r>
+                                <a:rPr lang="pt-BR" sz="1600" b="0" i="1" smtClean="0">
+                                  <a:latin typeface="Cambria Math" panose="02040503050406030204" pitchFamily="18" charset="0"/>
+                                </a:rPr>
+                                <m:t>1</m:t>
+                              </m:r>
+                            </m:sub>
+                          </m:sSub>
+                          <m:r>
+                            <a:rPr lang="pt-BR" sz="1600" i="1">
+                              <a:latin typeface="Cambria Math" panose="02040503050406030204" pitchFamily="18" charset="0"/>
+                            </a:rPr>
+                            <m:t>(</m:t>
+                          </m:r>
+                          <m:r>
+                            <a:rPr lang="pt-BR" sz="1600" b="1" i="1">
+                              <a:latin typeface="Cambria Math" panose="02040503050406030204" pitchFamily="18" charset="0"/>
+                            </a:rPr>
+                            <m:t>𝒙</m:t>
+                          </m:r>
+                          <m:r>
+                            <a:rPr lang="pt-BR" sz="1600" i="1">
+                              <a:latin typeface="Cambria Math" panose="02040503050406030204" pitchFamily="18" charset="0"/>
+                            </a:rPr>
+                            <m:t>)</m:t>
+                          </m:r>
+                        </m:oMath>
+                      </m:oMathPara>
+                    </a14:m>
+                    <a:endParaRPr lang="pt-BR" sz="1600" dirty="0"/>
+                  </a:p>
+                </p:txBody>
+              </p:sp>
+            </mc:Choice>
+            <mc:Fallback xmlns="">
+              <p:sp>
+                <p:nvSpPr>
+                  <p:cNvPr id="15" name="CaixaDeTexto 14">
+                    <a:extLst>
+                      <a:ext uri="{FF2B5EF4-FFF2-40B4-BE49-F238E27FC236}">
+                        <a16:creationId xmlns:a16="http://schemas.microsoft.com/office/drawing/2014/main" id="{21996556-5E1C-0532-ED2B-D417F96263BF}"/>
+                      </a:ext>
+                    </a:extLst>
+                  </p:cNvPr>
+                  <p:cNvSpPr txBox="1">
+                    <a:spLocks noRot="1" noChangeAspect="1" noMove="1" noResize="1" noEditPoints="1" noAdjustHandles="1" noChangeArrowheads="1" noChangeShapeType="1" noTextEdit="1"/>
+                  </p:cNvSpPr>
+                  <p:nvPr/>
+                </p:nvSpPr>
+                <p:spPr>
+                  <a:xfrm>
+                    <a:off x="1558411" y="4328926"/>
+                    <a:ext cx="786581" cy="338554"/>
+                  </a:xfrm>
+                  <a:prstGeom prst="rect">
+                    <a:avLst/>
+                  </a:prstGeom>
+                  <a:blipFill>
+                    <a:blip r:embed="rId6"/>
+                    <a:stretch>
+                      <a:fillRect b="-10909"/>
+                    </a:stretch>
+                  </a:blipFill>
+                </p:spPr>
+                <p:txBody>
+                  <a:bodyPr/>
+                  <a:lstStyle/>
+                  <a:p>
+                    <a:r>
+                      <a:rPr lang="pt-BR">
+                        <a:noFill/>
+                      </a:rPr>
+                      <a:t> </a:t>
+                    </a:r>
+                  </a:p>
+                </p:txBody>
+              </p:sp>
+            </mc:Fallback>
+          </mc:AlternateContent>
+          <mc:AlternateContent xmlns:mc="http://schemas.openxmlformats.org/markup-compatibility/2006" xmlns:a14="http://schemas.microsoft.com/office/drawing/2010/main">
+            <mc:Choice Requires="a14">
+              <p:sp>
+                <p:nvSpPr>
+                  <p:cNvPr id="15" name="CaixaDeTexto 15">
+                    <a:extLst>
+                      <a:ext uri="{FF2B5EF4-FFF2-40B4-BE49-F238E27FC236}">
+                        <a16:creationId xmlns:a16="http://schemas.microsoft.com/office/drawing/2014/main" id="{DB8F6DFA-2208-43E8-18F4-BC5ACFDCAE49}"/>
+                      </a:ext>
+                    </a:extLst>
+                  </p:cNvPr>
+                  <p:cNvSpPr txBox="1"/>
+                  <p:nvPr/>
+                </p:nvSpPr>
+                <p:spPr>
+                  <a:xfrm>
+                    <a:off x="1558411" y="4711915"/>
+                    <a:ext cx="786581" cy="338554"/>
+                  </a:xfrm>
+                  <a:prstGeom prst="rect">
+                    <a:avLst/>
+                  </a:prstGeom>
+                  <a:noFill/>
+                </p:spPr>
+                <p:txBody>
+                  <a:bodyPr wrap="square">
+                    <a:spAutoFit/>
+                  </a:bodyPr>
+                  <a:lstStyle/>
+                  <a:p>
+                    <a:pPr/>
+                    <a14:m>
+                      <m:oMathPara xmlns:m="http://schemas.openxmlformats.org/officeDocument/2006/math">
+                        <m:oMathParaPr>
+                          <m:jc m:val="centerGroup"/>
+                        </m:oMathParaPr>
+                        <m:oMath xmlns:m="http://schemas.openxmlformats.org/officeDocument/2006/math">
+                          <m:sSub>
+                            <m:sSubPr>
+                              <m:ctrlPr>
+                                <a:rPr lang="pt-BR" sz="1600" i="1" smtClean="0">
+                                  <a:latin typeface="Cambria Math" panose="02040503050406030204" pitchFamily="18" charset="0"/>
+                                </a:rPr>
+                              </m:ctrlPr>
+                            </m:sSubPr>
+                            <m:e>
+                              <m:r>
+                                <a:rPr lang="pt-BR" sz="1600" i="1">
+                                  <a:latin typeface="Cambria Math" panose="02040503050406030204" pitchFamily="18" charset="0"/>
+                                </a:rPr>
+                                <m:t>𝑔</m:t>
+                              </m:r>
+                            </m:e>
+                            <m:sub>
+                              <m:r>
+                                <a:rPr lang="pt-BR" sz="1600" b="0" i="1" smtClean="0">
+                                  <a:latin typeface="Cambria Math" panose="02040503050406030204" pitchFamily="18" charset="0"/>
+                                </a:rPr>
+                                <m:t>2</m:t>
+                              </m:r>
+                            </m:sub>
+                          </m:sSub>
+                          <m:r>
+                            <a:rPr lang="pt-BR" sz="1600" i="1">
+                              <a:latin typeface="Cambria Math" panose="02040503050406030204" pitchFamily="18" charset="0"/>
+                            </a:rPr>
+                            <m:t>(</m:t>
+                          </m:r>
+                          <m:r>
+                            <a:rPr lang="pt-BR" sz="1600" b="1" i="1">
+                              <a:latin typeface="Cambria Math" panose="02040503050406030204" pitchFamily="18" charset="0"/>
+                            </a:rPr>
+                            <m:t>𝒙</m:t>
+                          </m:r>
+                          <m:r>
+                            <a:rPr lang="pt-BR" sz="1600" i="1">
+                              <a:latin typeface="Cambria Math" panose="02040503050406030204" pitchFamily="18" charset="0"/>
+                            </a:rPr>
+                            <m:t>)</m:t>
+                          </m:r>
+                        </m:oMath>
+                      </m:oMathPara>
+                    </a14:m>
+                    <a:endParaRPr lang="pt-BR" sz="1600" dirty="0"/>
+                  </a:p>
+                </p:txBody>
+              </p:sp>
+            </mc:Choice>
+            <mc:Fallback xmlns="">
+              <p:sp>
+                <p:nvSpPr>
+                  <p:cNvPr id="16" name="CaixaDeTexto 15">
+                    <a:extLst>
+                      <a:ext uri="{FF2B5EF4-FFF2-40B4-BE49-F238E27FC236}">
+                        <a16:creationId xmlns:a16="http://schemas.microsoft.com/office/drawing/2014/main" id="{56799DC0-EC54-BFAE-A5C1-F9419AAD72E7}"/>
+                      </a:ext>
+                    </a:extLst>
+                  </p:cNvPr>
+                  <p:cNvSpPr txBox="1">
+                    <a:spLocks noRot="1" noChangeAspect="1" noMove="1" noResize="1" noEditPoints="1" noAdjustHandles="1" noChangeArrowheads="1" noChangeShapeType="1" noTextEdit="1"/>
+                  </p:cNvSpPr>
+                  <p:nvPr/>
+                </p:nvSpPr>
+                <p:spPr>
+                  <a:xfrm>
+                    <a:off x="1558411" y="4711915"/>
+                    <a:ext cx="786581" cy="338554"/>
+                  </a:xfrm>
+                  <a:prstGeom prst="rect">
+                    <a:avLst/>
+                  </a:prstGeom>
+                  <a:blipFill>
+                    <a:blip r:embed="rId7"/>
+                    <a:stretch>
+                      <a:fillRect b="-10909"/>
+                    </a:stretch>
+                  </a:blipFill>
+                </p:spPr>
+                <p:txBody>
+                  <a:bodyPr/>
+                  <a:lstStyle/>
+                  <a:p>
+                    <a:r>
+                      <a:rPr lang="pt-BR">
+                        <a:noFill/>
+                      </a:rPr>
+                      <a:t> </a:t>
+                    </a:r>
+                  </a:p>
+                </p:txBody>
+              </p:sp>
+            </mc:Fallback>
+          </mc:AlternateContent>
+          <mc:AlternateContent xmlns:mc="http://schemas.openxmlformats.org/markup-compatibility/2006" xmlns:a14="http://schemas.microsoft.com/office/drawing/2010/main">
+            <mc:Choice Requires="a14">
+              <p:sp>
+                <p:nvSpPr>
+                  <p:cNvPr id="16" name="CaixaDeTexto 16">
+                    <a:extLst>
+                      <a:ext uri="{FF2B5EF4-FFF2-40B4-BE49-F238E27FC236}">
+                        <a16:creationId xmlns:a16="http://schemas.microsoft.com/office/drawing/2014/main" id="{A5EC037D-8EF0-3DEF-2F8B-84248AE8B86A}"/>
+                      </a:ext>
+                    </a:extLst>
+                  </p:cNvPr>
+                  <p:cNvSpPr txBox="1"/>
+                  <p:nvPr/>
+                </p:nvSpPr>
+                <p:spPr>
+                  <a:xfrm>
+                    <a:off x="1558411" y="5081651"/>
+                    <a:ext cx="786581" cy="338554"/>
+                  </a:xfrm>
+                  <a:prstGeom prst="rect">
+                    <a:avLst/>
+                  </a:prstGeom>
+                  <a:noFill/>
+                </p:spPr>
+                <p:txBody>
+                  <a:bodyPr wrap="square">
+                    <a:spAutoFit/>
+                  </a:bodyPr>
+                  <a:lstStyle/>
+                  <a:p>
+                    <a:pPr/>
+                    <a14:m>
+                      <m:oMathPara xmlns:m="http://schemas.openxmlformats.org/officeDocument/2006/math">
+                        <m:oMathParaPr>
+                          <m:jc m:val="centerGroup"/>
+                        </m:oMathParaPr>
+                        <m:oMath xmlns:m="http://schemas.openxmlformats.org/officeDocument/2006/math">
+                          <m:sSub>
+                            <m:sSubPr>
+                              <m:ctrlPr>
+                                <a:rPr lang="pt-BR" sz="1600" i="1" smtClean="0">
+                                  <a:latin typeface="Cambria Math" panose="02040503050406030204" pitchFamily="18" charset="0"/>
+                                </a:rPr>
+                              </m:ctrlPr>
+                            </m:sSubPr>
+                            <m:e>
+                              <m:r>
+                                <a:rPr lang="pt-BR" sz="1600" i="1">
+                                  <a:latin typeface="Cambria Math" panose="02040503050406030204" pitchFamily="18" charset="0"/>
+                                </a:rPr>
+                                <m:t>𝑔</m:t>
+                              </m:r>
+                            </m:e>
+                            <m:sub>
+                              <m:r>
+                                <a:rPr lang="pt-BR" sz="1600" b="0" i="1" smtClean="0">
+                                  <a:latin typeface="Cambria Math" panose="02040503050406030204" pitchFamily="18" charset="0"/>
+                                </a:rPr>
+                                <m:t>3</m:t>
+                              </m:r>
+                            </m:sub>
+                          </m:sSub>
+                          <m:r>
+                            <a:rPr lang="pt-BR" sz="1600" i="1">
+                              <a:latin typeface="Cambria Math" panose="02040503050406030204" pitchFamily="18" charset="0"/>
+                            </a:rPr>
+                            <m:t>(</m:t>
+                          </m:r>
+                          <m:r>
+                            <a:rPr lang="pt-BR" sz="1600" b="1" i="1">
+                              <a:latin typeface="Cambria Math" panose="02040503050406030204" pitchFamily="18" charset="0"/>
+                            </a:rPr>
+                            <m:t>𝒙</m:t>
+                          </m:r>
+                          <m:r>
+                            <a:rPr lang="pt-BR" sz="1600" i="1">
+                              <a:latin typeface="Cambria Math" panose="02040503050406030204" pitchFamily="18" charset="0"/>
+                            </a:rPr>
+                            <m:t>)</m:t>
+                          </m:r>
+                        </m:oMath>
+                      </m:oMathPara>
+                    </a14:m>
+                    <a:endParaRPr lang="pt-BR" sz="1600" dirty="0"/>
+                  </a:p>
+                </p:txBody>
+              </p:sp>
+            </mc:Choice>
+            <mc:Fallback xmlns="">
+              <p:sp>
+                <p:nvSpPr>
+                  <p:cNvPr id="17" name="CaixaDeTexto 16">
+                    <a:extLst>
+                      <a:ext uri="{FF2B5EF4-FFF2-40B4-BE49-F238E27FC236}">
+                        <a16:creationId xmlns:a16="http://schemas.microsoft.com/office/drawing/2014/main" id="{D260C477-09FF-3E43-480D-BA56F3E968FB}"/>
+                      </a:ext>
+                    </a:extLst>
+                  </p:cNvPr>
+                  <p:cNvSpPr txBox="1">
+                    <a:spLocks noRot="1" noChangeAspect="1" noMove="1" noResize="1" noEditPoints="1" noAdjustHandles="1" noChangeArrowheads="1" noChangeShapeType="1" noTextEdit="1"/>
+                  </p:cNvSpPr>
+                  <p:nvPr/>
+                </p:nvSpPr>
+                <p:spPr>
+                  <a:xfrm>
+                    <a:off x="1558411" y="5081651"/>
+                    <a:ext cx="786581" cy="338554"/>
+                  </a:xfrm>
+                  <a:prstGeom prst="rect">
+                    <a:avLst/>
+                  </a:prstGeom>
+                  <a:blipFill>
+                    <a:blip r:embed="rId8"/>
+                    <a:stretch>
+                      <a:fillRect b="-8929"/>
+                    </a:stretch>
+                  </a:blipFill>
+                </p:spPr>
+                <p:txBody>
+                  <a:bodyPr/>
+                  <a:lstStyle/>
+                  <a:p>
+                    <a:r>
+                      <a:rPr lang="pt-BR">
+                        <a:noFill/>
+                      </a:rPr>
+                      <a:t> </a:t>
+                    </a:r>
+                  </a:p>
+                </p:txBody>
+              </p:sp>
+            </mc:Fallback>
+          </mc:AlternateContent>
+          <mc:AlternateContent xmlns:mc="http://schemas.openxmlformats.org/markup-compatibility/2006" xmlns:a14="http://schemas.microsoft.com/office/drawing/2010/main">
+            <mc:Choice Requires="a14">
+              <p:sp>
+                <p:nvSpPr>
+                  <p:cNvPr id="17" name="CaixaDeTexto 17">
+                    <a:extLst>
+                      <a:ext uri="{FF2B5EF4-FFF2-40B4-BE49-F238E27FC236}">
+                        <a16:creationId xmlns:a16="http://schemas.microsoft.com/office/drawing/2014/main" id="{E842A6BA-1A35-A84A-B1B8-54B2C0A49661}"/>
+                      </a:ext>
+                    </a:extLst>
+                  </p:cNvPr>
+                  <p:cNvSpPr txBox="1"/>
+                  <p:nvPr/>
+                </p:nvSpPr>
+                <p:spPr>
+                  <a:xfrm>
+                    <a:off x="1558412" y="5483258"/>
+                    <a:ext cx="786581" cy="338554"/>
+                  </a:xfrm>
+                  <a:prstGeom prst="rect">
+                    <a:avLst/>
+                  </a:prstGeom>
+                  <a:noFill/>
+                </p:spPr>
+                <p:txBody>
+                  <a:bodyPr wrap="square">
+                    <a:spAutoFit/>
+                  </a:bodyPr>
+                  <a:lstStyle/>
+                  <a:p>
+                    <a:pPr/>
+                    <a14:m>
+                      <m:oMathPara xmlns:m="http://schemas.openxmlformats.org/officeDocument/2006/math">
+                        <m:oMathParaPr>
+                          <m:jc m:val="centerGroup"/>
+                        </m:oMathParaPr>
+                        <m:oMath xmlns:m="http://schemas.openxmlformats.org/officeDocument/2006/math">
+                          <m:sSub>
+                            <m:sSubPr>
+                              <m:ctrlPr>
+                                <a:rPr lang="pt-BR" sz="1600" i="1" smtClean="0">
+                                  <a:latin typeface="Cambria Math" panose="02040503050406030204" pitchFamily="18" charset="0"/>
+                                </a:rPr>
+                              </m:ctrlPr>
+                            </m:sSubPr>
+                            <m:e>
+                              <m:r>
+                                <a:rPr lang="pt-BR" sz="1600" i="1">
+                                  <a:latin typeface="Cambria Math" panose="02040503050406030204" pitchFamily="18" charset="0"/>
+                                </a:rPr>
+                                <m:t>𝑔</m:t>
+                              </m:r>
+                            </m:e>
+                            <m:sub>
+                              <m:r>
+                                <a:rPr lang="pt-BR" sz="1600" b="0" i="1" smtClean="0">
+                                  <a:latin typeface="Cambria Math" panose="02040503050406030204" pitchFamily="18" charset="0"/>
+                                </a:rPr>
+                                <m:t>4</m:t>
+                              </m:r>
+                            </m:sub>
+                          </m:sSub>
+                          <m:r>
+                            <a:rPr lang="pt-BR" sz="1600" i="1">
+                              <a:latin typeface="Cambria Math" panose="02040503050406030204" pitchFamily="18" charset="0"/>
+                            </a:rPr>
+                            <m:t>(</m:t>
+                          </m:r>
+                          <m:r>
+                            <a:rPr lang="pt-BR" sz="1600" b="1" i="1">
+                              <a:latin typeface="Cambria Math" panose="02040503050406030204" pitchFamily="18" charset="0"/>
+                            </a:rPr>
+                            <m:t>𝒙</m:t>
+                          </m:r>
+                          <m:r>
+                            <a:rPr lang="pt-BR" sz="1600" i="1">
+                              <a:latin typeface="Cambria Math" panose="02040503050406030204" pitchFamily="18" charset="0"/>
+                            </a:rPr>
+                            <m:t>)</m:t>
+                          </m:r>
+                        </m:oMath>
+                      </m:oMathPara>
+                    </a14:m>
+                    <a:endParaRPr lang="pt-BR" sz="1600" dirty="0"/>
+                  </a:p>
+                </p:txBody>
+              </p:sp>
+            </mc:Choice>
+            <mc:Fallback xmlns="">
+              <p:sp>
+                <p:nvSpPr>
+                  <p:cNvPr id="18" name="CaixaDeTexto 17">
+                    <a:extLst>
+                      <a:ext uri="{FF2B5EF4-FFF2-40B4-BE49-F238E27FC236}">
+                        <a16:creationId xmlns:a16="http://schemas.microsoft.com/office/drawing/2014/main" id="{D39B43A7-A1EB-24AB-D6A2-C63A54430649}"/>
+                      </a:ext>
+                    </a:extLst>
+                  </p:cNvPr>
+                  <p:cNvSpPr txBox="1">
+                    <a:spLocks noRot="1" noChangeAspect="1" noMove="1" noResize="1" noEditPoints="1" noAdjustHandles="1" noChangeArrowheads="1" noChangeShapeType="1" noTextEdit="1"/>
+                  </p:cNvSpPr>
+                  <p:nvPr/>
+                </p:nvSpPr>
+                <p:spPr>
+                  <a:xfrm>
+                    <a:off x="1558412" y="5483258"/>
+                    <a:ext cx="786581" cy="338554"/>
+                  </a:xfrm>
+                  <a:prstGeom prst="rect">
+                    <a:avLst/>
+                  </a:prstGeom>
+                  <a:blipFill>
+                    <a:blip r:embed="rId9"/>
+                    <a:stretch>
+                      <a:fillRect b="-8929"/>
+                    </a:stretch>
+                  </a:blipFill>
+                </p:spPr>
+                <p:txBody>
+                  <a:bodyPr/>
+                  <a:lstStyle/>
+                  <a:p>
+                    <a:r>
+                      <a:rPr lang="pt-BR">
+                        <a:noFill/>
+                      </a:rPr>
+                      <a:t> </a:t>
+                    </a:r>
+                  </a:p>
+                </p:txBody>
+              </p:sp>
+            </mc:Fallback>
+          </mc:AlternateContent>
+          <mc:AlternateContent xmlns:mc="http://schemas.openxmlformats.org/markup-compatibility/2006" xmlns:a14="http://schemas.microsoft.com/office/drawing/2010/main">
+            <mc:Choice Requires="a14">
+              <p:sp>
+                <p:nvSpPr>
+                  <p:cNvPr id="18" name="CaixaDeTexto 18">
+                    <a:extLst>
+                      <a:ext uri="{FF2B5EF4-FFF2-40B4-BE49-F238E27FC236}">
+                        <a16:creationId xmlns:a16="http://schemas.microsoft.com/office/drawing/2014/main" id="{AE06ADE1-A3FE-3684-A19B-1A4A69C1E4AB}"/>
+                      </a:ext>
+                    </a:extLst>
+                  </p:cNvPr>
+                  <p:cNvSpPr txBox="1"/>
+                  <p:nvPr/>
+                </p:nvSpPr>
+                <p:spPr>
+                  <a:xfrm>
+                    <a:off x="1558411" y="5874947"/>
+                    <a:ext cx="786581" cy="338554"/>
+                  </a:xfrm>
+                  <a:prstGeom prst="rect">
+                    <a:avLst/>
+                  </a:prstGeom>
+                  <a:noFill/>
+                </p:spPr>
+                <p:txBody>
+                  <a:bodyPr wrap="square">
+                    <a:spAutoFit/>
+                  </a:bodyPr>
+                  <a:lstStyle/>
+                  <a:p>
+                    <a:pPr/>
+                    <a14:m>
+                      <m:oMathPara xmlns:m="http://schemas.openxmlformats.org/officeDocument/2006/math">
+                        <m:oMathParaPr>
+                          <m:jc m:val="centerGroup"/>
+                        </m:oMathParaPr>
+                        <m:oMath xmlns:m="http://schemas.openxmlformats.org/officeDocument/2006/math">
+                          <m:sSub>
+                            <m:sSubPr>
+                              <m:ctrlPr>
+                                <a:rPr lang="pt-BR" sz="1600" i="1" smtClean="0">
+                                  <a:latin typeface="Cambria Math" panose="02040503050406030204" pitchFamily="18" charset="0"/>
+                                </a:rPr>
+                              </m:ctrlPr>
+                            </m:sSubPr>
+                            <m:e>
+                              <m:r>
+                                <a:rPr lang="pt-BR" sz="1600" i="1">
+                                  <a:latin typeface="Cambria Math" panose="02040503050406030204" pitchFamily="18" charset="0"/>
+                                </a:rPr>
+                                <m:t>𝑔</m:t>
+                              </m:r>
+                            </m:e>
+                            <m:sub>
+                              <m:r>
+                                <a:rPr lang="pt-BR" sz="1600" b="0" i="1" smtClean="0">
+                                  <a:latin typeface="Cambria Math" panose="02040503050406030204" pitchFamily="18" charset="0"/>
+                                </a:rPr>
+                                <m:t>5</m:t>
+                              </m:r>
+                            </m:sub>
+                          </m:sSub>
+                          <m:r>
+                            <a:rPr lang="pt-BR" sz="1600" i="1">
+                              <a:latin typeface="Cambria Math" panose="02040503050406030204" pitchFamily="18" charset="0"/>
+                            </a:rPr>
+                            <m:t>(</m:t>
+                          </m:r>
+                          <m:r>
+                            <a:rPr lang="pt-BR" sz="1600" b="1" i="1">
+                              <a:latin typeface="Cambria Math" panose="02040503050406030204" pitchFamily="18" charset="0"/>
+                            </a:rPr>
+                            <m:t>𝒙</m:t>
+                          </m:r>
+                          <m:r>
+                            <a:rPr lang="pt-BR" sz="1600" i="1">
+                              <a:latin typeface="Cambria Math" panose="02040503050406030204" pitchFamily="18" charset="0"/>
+                            </a:rPr>
+                            <m:t>)</m:t>
+                          </m:r>
+                        </m:oMath>
+                      </m:oMathPara>
+                    </a14:m>
+                    <a:endParaRPr lang="pt-BR" sz="1600" dirty="0"/>
+                  </a:p>
+                </p:txBody>
+              </p:sp>
+            </mc:Choice>
+            <mc:Fallback xmlns="">
+              <p:sp>
+                <p:nvSpPr>
+                  <p:cNvPr id="19" name="CaixaDeTexto 18">
+                    <a:extLst>
+                      <a:ext uri="{FF2B5EF4-FFF2-40B4-BE49-F238E27FC236}">
+                        <a16:creationId xmlns:a16="http://schemas.microsoft.com/office/drawing/2014/main" id="{F4C19D8A-53B6-E387-20AE-D331C04A4541}"/>
+                      </a:ext>
+                    </a:extLst>
+                  </p:cNvPr>
+                  <p:cNvSpPr txBox="1">
+                    <a:spLocks noRot="1" noChangeAspect="1" noMove="1" noResize="1" noEditPoints="1" noAdjustHandles="1" noChangeArrowheads="1" noChangeShapeType="1" noTextEdit="1"/>
+                  </p:cNvSpPr>
+                  <p:nvPr/>
+                </p:nvSpPr>
+                <p:spPr>
+                  <a:xfrm>
+                    <a:off x="1558411" y="5874947"/>
+                    <a:ext cx="786581" cy="338554"/>
+                  </a:xfrm>
+                  <a:prstGeom prst="rect">
+                    <a:avLst/>
+                  </a:prstGeom>
+                  <a:blipFill>
+                    <a:blip r:embed="rId10"/>
+                    <a:stretch>
+                      <a:fillRect b="-8929"/>
+                    </a:stretch>
+                  </a:blipFill>
+                </p:spPr>
+                <p:txBody>
+                  <a:bodyPr/>
+                  <a:lstStyle/>
+                  <a:p>
+                    <a:r>
+                      <a:rPr lang="pt-BR">
+                        <a:noFill/>
+                      </a:rPr>
+                      <a:t> </a:t>
+                    </a:r>
+                  </a:p>
+                </p:txBody>
+              </p:sp>
+            </mc:Fallback>
+          </mc:AlternateContent>
+        </p:grpSp>
+      </p:grpSp>
+    </p:spTree>
+    <p:extLst>
+      <p:ext uri="{BB962C8B-B14F-4D97-AF65-F5344CB8AC3E}">
+        <p14:creationId xmlns:p14="http://schemas.microsoft.com/office/powerpoint/2010/main" val="3699059078"/>
+      </p:ext>
+    </p:extLst>
+  </p:cSld>
+  <p:clrMapOvr>
+    <a:masterClrMapping/>
+  </p:clrMapOvr>
+</p:sld>
+</file>
+
+<file path=ppt/slides/slide26.xml><?xml version="1.0" encoding="utf-8"?>
+<p:sld xmlns:a="http://schemas.openxmlformats.org/drawingml/2006/main" xmlns:r="http://schemas.openxmlformats.org/officeDocument/2006/relationships" xmlns:p="http://schemas.openxmlformats.org/presentationml/2006/main">
+  <p:cSld>
+    <p:spTree>
+      <p:nvGrpSpPr>
+        <p:cNvPr id="1" name="">
+          <a:extLst>
+            <a:ext uri="{FF2B5EF4-FFF2-40B4-BE49-F238E27FC236}">
+              <a16:creationId xmlns:a16="http://schemas.microsoft.com/office/drawing/2014/main" id="{5C4572DC-35C8-C64C-E103-3D4F9246EA98}"/>
+            </a:ext>
+          </a:extLst>
+        </p:cNvPr>
+        <p:cNvGrpSpPr/>
+        <p:nvPr/>
+      </p:nvGrpSpPr>
+      <p:grpSpPr>
+        <a:xfrm>
+          <a:off x="0" y="0"/>
+          <a:ext cx="0" cy="0"/>
+          <a:chOff x="0" y="0"/>
+          <a:chExt cx="0" cy="0"/>
+        </a:xfrm>
+      </p:grpSpPr>
+      <p:grpSp>
+        <p:nvGrpSpPr>
+          <p:cNvPr id="36" name="Group 35">
+            <a:extLst>
+              <a:ext uri="{FF2B5EF4-FFF2-40B4-BE49-F238E27FC236}">
+                <a16:creationId xmlns:a16="http://schemas.microsoft.com/office/drawing/2014/main" id="{48F378AC-D060-0026-4561-6496453280FF}"/>
+              </a:ext>
+            </a:extLst>
+          </p:cNvPr>
+          <p:cNvGrpSpPr/>
+          <p:nvPr/>
+        </p:nvGrpSpPr>
+        <p:grpSpPr>
+          <a:xfrm>
+            <a:off x="5040796" y="1567467"/>
+            <a:ext cx="4280221" cy="2759538"/>
+            <a:chOff x="5040796" y="1567467"/>
+            <a:chExt cx="4280221" cy="2759538"/>
+          </a:xfrm>
+        </p:grpSpPr>
+        <mc:AlternateContent xmlns:mc="http://schemas.openxmlformats.org/markup-compatibility/2006">
+          <mc:Choice xmlns:a14="http://schemas.microsoft.com/office/drawing/2010/main" Requires="a14">
+            <p:sp>
+              <p:nvSpPr>
+                <p:cNvPr id="5" name="CaixaDeTexto 5">
+                  <a:extLst>
+                    <a:ext uri="{FF2B5EF4-FFF2-40B4-BE49-F238E27FC236}">
+                      <a16:creationId xmlns:a16="http://schemas.microsoft.com/office/drawing/2014/main" id="{E8D0D67D-860E-2510-92FC-57A520894F28}"/>
+                    </a:ext>
+                  </a:extLst>
+                </p:cNvPr>
+                <p:cNvSpPr txBox="1"/>
+                <p:nvPr/>
+              </p:nvSpPr>
+              <p:spPr>
+                <a:xfrm>
+                  <a:off x="5400674" y="2306131"/>
+                  <a:ext cx="978695" cy="2020874"/>
+                </a:xfrm>
+                <a:prstGeom prst="rect">
+                  <a:avLst/>
+                </a:prstGeom>
+                <a:noFill/>
+              </p:spPr>
+              <p:txBody>
+                <a:bodyPr wrap="square" rtlCol="0">
+                  <a:spAutoFit/>
+                </a:bodyPr>
+                <a:lstStyle/>
+                <a:p>
+                  <a:pPr/>
+                  <a14:m>
+                    <m:oMathPara xmlns:m="http://schemas.openxmlformats.org/officeDocument/2006/math">
+                      <m:oMathParaPr>
+                        <m:jc m:val="centerGroup"/>
+                      </m:oMathParaPr>
+                      <m:oMath xmlns:m="http://schemas.openxmlformats.org/officeDocument/2006/math">
+                        <m:d>
+                          <m:dPr>
+                            <m:begChr m:val="["/>
+                            <m:endChr m:val="]"/>
+                            <m:ctrlPr>
+                              <a:rPr lang="pt-BR" sz="2800" i="1" smtClean="0">
+                                <a:latin typeface="Cambria Math" panose="02040503050406030204" pitchFamily="18" charset="0"/>
+                              </a:rPr>
+                            </m:ctrlPr>
+                          </m:dPr>
+                          <m:e>
+                            <m:m>
+                              <m:mPr>
+                                <m:mcs>
+                                  <m:mc>
+                                    <m:mcPr>
+                                      <m:count m:val="1"/>
+                                      <m:mcJc m:val="center"/>
+                                    </m:mcPr>
+                                  </m:mc>
+                                </m:mcs>
+                                <m:ctrlPr>
+                                  <a:rPr lang="pt-BR" sz="2800" i="1" smtClean="0">
+                                    <a:latin typeface="Cambria Math" panose="02040503050406030204" pitchFamily="18" charset="0"/>
+                                  </a:rPr>
+                                </m:ctrlPr>
+                              </m:mPr>
+                              <m:mr>
+                                <m:e>
+                                  <m:r>
+                                    <m:rPr>
+                                      <m:brk m:alnAt="7"/>
+                                    </m:rPr>
+                                    <a:rPr lang="pt-BR" sz="2800" b="0" i="1" smtClean="0">
+                                      <a:latin typeface="Cambria Math" panose="02040503050406030204" pitchFamily="18" charset="0"/>
+                                    </a:rPr>
+                                    <m:t>0</m:t>
+                                  </m:r>
+                                  <m:r>
+                                    <a:rPr lang="pt-BR" sz="2800" b="0" i="1" smtClean="0">
+                                      <a:latin typeface="Cambria Math" panose="02040503050406030204" pitchFamily="18" charset="0"/>
+                                    </a:rPr>
+                                    <m:t>.01</m:t>
+                                  </m:r>
+                                </m:e>
+                              </m:mr>
+                              <m:mr>
+                                <m:e>
+                                  <m:r>
+                                    <a:rPr lang="pt-BR" sz="2800" b="0" i="1" smtClean="0">
+                                      <a:latin typeface="Cambria Math" panose="02040503050406030204" pitchFamily="18" charset="0"/>
+                                    </a:rPr>
+                                    <m:t>0.9</m:t>
+                                  </m:r>
+                                </m:e>
+                              </m:mr>
+                              <m:mr>
+                                <m:e>
+                                  <m:m>
+                                    <m:mPr>
+                                      <m:mcs>
+                                        <m:mc>
+                                          <m:mcPr>
+                                            <m:count m:val="1"/>
+                                            <m:mcJc m:val="center"/>
+                                          </m:mcPr>
+                                        </m:mc>
+                                      </m:mcs>
+                                      <m:ctrlPr>
+                                        <a:rPr lang="pt-BR" sz="2800" i="1" smtClean="0">
+                                          <a:latin typeface="Cambria Math" panose="02040503050406030204" pitchFamily="18" charset="0"/>
+                                        </a:rPr>
+                                      </m:ctrlPr>
+                                    </m:mPr>
+                                    <m:mr>
+                                      <m:e>
+                                        <m:r>
+                                          <m:rPr>
+                                            <m:brk m:alnAt="7"/>
+                                          </m:rPr>
+                                          <a:rPr lang="pt-BR" sz="2800" b="0" i="1" smtClean="0">
+                                            <a:latin typeface="Cambria Math" panose="02040503050406030204" pitchFamily="18" charset="0"/>
+                                          </a:rPr>
+                                          <m:t>0</m:t>
+                                        </m:r>
+                                        <m:r>
+                                          <a:rPr lang="pt-BR" sz="2800" b="0" i="1" smtClean="0">
+                                            <a:latin typeface="Cambria Math" panose="02040503050406030204" pitchFamily="18" charset="0"/>
+                                          </a:rPr>
+                                          <m:t>.05</m:t>
+                                        </m:r>
+                                      </m:e>
+                                    </m:mr>
+                                    <m:mr>
+                                      <m:e>
+                                        <m:r>
+                                          <a:rPr lang="pt-BR" sz="2800" b="0" i="1" smtClean="0">
+                                            <a:latin typeface="Cambria Math" panose="02040503050406030204" pitchFamily="18" charset="0"/>
+                                          </a:rPr>
+                                          <m:t>0.01</m:t>
+                                        </m:r>
+                                      </m:e>
+                                    </m:mr>
+                                    <m:mr>
+                                      <m:e>
+                                        <m:r>
+                                          <a:rPr lang="pt-BR" sz="2800" b="0" i="1" smtClean="0">
+                                            <a:latin typeface="Cambria Math" panose="02040503050406030204" pitchFamily="18" charset="0"/>
+                                          </a:rPr>
+                                          <m:t>0.02</m:t>
+                                        </m:r>
+                                      </m:e>
+                                    </m:mr>
+                                  </m:m>
+                                </m:e>
+                              </m:mr>
+                            </m:m>
+                          </m:e>
+                        </m:d>
+                      </m:oMath>
+                    </m:oMathPara>
+                  </a14:m>
+                  <a:endParaRPr lang="pt-BR" sz="2800" dirty="0"/>
+                </a:p>
+              </p:txBody>
+            </p:sp>
+          </mc:Choice>
+          <mc:Fallback>
+            <p:sp>
+              <p:nvSpPr>
+                <p:cNvPr id="5" name="CaixaDeTexto 5">
+                  <a:extLst>
+                    <a:ext uri="{FF2B5EF4-FFF2-40B4-BE49-F238E27FC236}">
+                      <a16:creationId xmlns:a16="http://schemas.microsoft.com/office/drawing/2014/main" id="{E8D0D67D-860E-2510-92FC-57A520894F28}"/>
+                    </a:ext>
+                  </a:extLst>
+                </p:cNvPr>
+                <p:cNvSpPr txBox="1">
+                  <a:spLocks noRot="1" noChangeAspect="1" noMove="1" noResize="1" noEditPoints="1" noAdjustHandles="1" noChangeArrowheads="1" noChangeShapeType="1" noTextEdit="1"/>
+                </p:cNvSpPr>
+                <p:nvPr/>
+              </p:nvSpPr>
+              <p:spPr>
+                <a:xfrm>
+                  <a:off x="5400674" y="2306131"/>
+                  <a:ext cx="978695" cy="2020874"/>
+                </a:xfrm>
+                <a:prstGeom prst="rect">
+                  <a:avLst/>
+                </a:prstGeom>
+                <a:blipFill>
+                  <a:blip r:embed="rId2"/>
+                  <a:stretch>
+                    <a:fillRect r="-1875"/>
+                  </a:stretch>
+                </a:blipFill>
+              </p:spPr>
+              <p:txBody>
+                <a:bodyPr/>
+                <a:lstStyle/>
+                <a:p>
+                  <a:r>
+                    <a:rPr lang="en-US">
+                      <a:noFill/>
+                    </a:rPr>
+                    <a:t> </a:t>
+                  </a:r>
+                </a:p>
+              </p:txBody>
+            </p:sp>
+          </mc:Fallback>
+        </mc:AlternateContent>
+        <p:sp>
+          <p:nvSpPr>
+            <p:cNvPr id="9" name="CaixaDeTexto 10">
+              <a:extLst>
+                <a:ext uri="{FF2B5EF4-FFF2-40B4-BE49-F238E27FC236}">
+                  <a16:creationId xmlns:a16="http://schemas.microsoft.com/office/drawing/2014/main" id="{E297B5F7-3383-6E2F-1D8A-03955FAC43D2}"/>
+                </a:ext>
+              </a:extLst>
+            </p:cNvPr>
+            <p:cNvSpPr txBox="1"/>
+            <p:nvPr/>
+          </p:nvSpPr>
+          <p:spPr>
+            <a:xfrm>
+              <a:off x="5040796" y="1567467"/>
+              <a:ext cx="1943256" cy="738664"/>
+            </a:xfrm>
+            <a:prstGeom prst="rect">
+              <a:avLst/>
+            </a:prstGeom>
+            <a:noFill/>
+          </p:spPr>
+          <p:txBody>
+            <a:bodyPr wrap="square" rtlCol="0">
+              <a:spAutoFit/>
+            </a:bodyPr>
+            <a:lstStyle/>
+            <a:p>
+              <a:pPr algn="ctr"/>
+              <a:r>
+                <a:rPr lang="pt-BR" sz="1400" dirty="0"/>
+                <a:t>Saída da função de ativação </a:t>
+              </a:r>
+              <a:r>
+                <a:rPr lang="pt-BR" sz="1400" i="1" dirty="0"/>
+                <a:t>softmax</a:t>
+              </a:r>
+              <a:endParaRPr lang="pt-BR" sz="1400" dirty="0"/>
+            </a:p>
+            <a:p>
+              <a:pPr algn="ctr"/>
+              <a:r>
+                <a:rPr lang="pt-BR" sz="1400" dirty="0"/>
+                <a:t>(probabilidades)</a:t>
+              </a:r>
+            </a:p>
+          </p:txBody>
+        </p:sp>
+        <mc:AlternateContent xmlns:mc="http://schemas.openxmlformats.org/markup-compatibility/2006">
+          <mc:Choice xmlns:a14="http://schemas.microsoft.com/office/drawing/2010/main" Requires="a14">
+            <p:sp>
+              <p:nvSpPr>
+                <p:cNvPr id="12" name="CaixaDeTexto 4">
+                  <a:extLst>
+                    <a:ext uri="{FF2B5EF4-FFF2-40B4-BE49-F238E27FC236}">
+                      <a16:creationId xmlns:a16="http://schemas.microsoft.com/office/drawing/2014/main" id="{2C8DDC51-3A16-5E93-8268-EE62BDE151E0}"/>
+                    </a:ext>
+                  </a:extLst>
+                </p:cNvPr>
+                <p:cNvSpPr txBox="1"/>
+                <p:nvPr/>
+              </p:nvSpPr>
+              <p:spPr>
+                <a:xfrm>
+                  <a:off x="8099425" y="2311739"/>
+                  <a:ext cx="508000" cy="2009268"/>
+                </a:xfrm>
+                <a:prstGeom prst="rect">
+                  <a:avLst/>
+                </a:prstGeom>
+                <a:noFill/>
+              </p:spPr>
+              <p:txBody>
+                <a:bodyPr wrap="square" rtlCol="0">
+                  <a:spAutoFit/>
+                </a:bodyPr>
+                <a:lstStyle/>
+                <a:p>
+                  <a:pPr/>
+                  <a14:m>
+                    <m:oMathPara xmlns:m="http://schemas.openxmlformats.org/officeDocument/2006/math">
+                      <m:oMathParaPr>
+                        <m:jc m:val="centerGroup"/>
+                      </m:oMathParaPr>
+                      <m:oMath xmlns:m="http://schemas.openxmlformats.org/officeDocument/2006/math">
+                        <m:d>
+                          <m:dPr>
+                            <m:begChr m:val="["/>
+                            <m:endChr m:val="]"/>
+                            <m:ctrlPr>
+                              <a:rPr lang="pt-BR" sz="2800" i="1" smtClean="0">
+                                <a:latin typeface="Cambria Math" panose="02040503050406030204" pitchFamily="18" charset="0"/>
+                              </a:rPr>
+                            </m:ctrlPr>
+                          </m:dPr>
+                          <m:e>
+                            <m:m>
+                              <m:mPr>
+                                <m:mcs>
+                                  <m:mc>
+                                    <m:mcPr>
+                                      <m:count m:val="1"/>
+                                      <m:mcJc m:val="center"/>
+                                    </m:mcPr>
+                                  </m:mc>
+                                </m:mcs>
+                                <m:ctrlPr>
+                                  <a:rPr lang="pt-BR" sz="2800" i="1" smtClean="0">
+                                    <a:latin typeface="Cambria Math" panose="02040503050406030204" pitchFamily="18" charset="0"/>
+                                  </a:rPr>
+                                </m:ctrlPr>
+                              </m:mPr>
+                              <m:mr>
+                                <m:e>
+                                  <m:r>
+                                    <a:rPr lang="pt-BR" sz="2800" b="0" i="1" smtClean="0">
+                                      <a:latin typeface="Cambria Math" panose="02040503050406030204" pitchFamily="18" charset="0"/>
+                                    </a:rPr>
+                                    <m:t>0</m:t>
+                                  </m:r>
+                                </m:e>
+                              </m:mr>
+                              <m:mr>
+                                <m:e>
+                                  <m:r>
+                                    <a:rPr lang="pt-BR" sz="2800" b="0" i="1" smtClean="0">
+                                      <a:latin typeface="Cambria Math" panose="02040503050406030204" pitchFamily="18" charset="0"/>
+                                    </a:rPr>
+                                    <m:t>1</m:t>
+                                  </m:r>
+                                </m:e>
+                              </m:mr>
+                              <m:mr>
+                                <m:e>
+                                  <m:m>
+                                    <m:mPr>
+                                      <m:mcs>
+                                        <m:mc>
+                                          <m:mcPr>
+                                            <m:count m:val="1"/>
+                                            <m:mcJc m:val="center"/>
+                                          </m:mcPr>
+                                        </m:mc>
+                                      </m:mcs>
+                                      <m:ctrlPr>
+                                        <a:rPr lang="pt-BR" sz="2800" i="1" smtClean="0">
+                                          <a:latin typeface="Cambria Math" panose="02040503050406030204" pitchFamily="18" charset="0"/>
+                                        </a:rPr>
+                                      </m:ctrlPr>
+                                    </m:mPr>
+                                    <m:mr>
+                                      <m:e>
+                                        <m:r>
+                                          <a:rPr lang="pt-BR" sz="2800" b="0" i="1" smtClean="0">
+                                            <a:latin typeface="Cambria Math" panose="02040503050406030204" pitchFamily="18" charset="0"/>
+                                          </a:rPr>
+                                          <m:t>0</m:t>
+                                        </m:r>
+                                      </m:e>
+                                    </m:mr>
+                                    <m:mr>
+                                      <m:e>
+                                        <m:r>
+                                          <a:rPr lang="pt-BR" sz="2800" b="0" i="1" smtClean="0">
+                                            <a:latin typeface="Cambria Math" panose="02040503050406030204" pitchFamily="18" charset="0"/>
+                                          </a:rPr>
+                                          <m:t>0</m:t>
+                                        </m:r>
+                                      </m:e>
+                                    </m:mr>
+                                    <m:mr>
+                                      <m:e>
+                                        <m:r>
+                                          <a:rPr lang="pt-BR" sz="2800" b="0" i="1" smtClean="0">
+                                            <a:latin typeface="Cambria Math" panose="02040503050406030204" pitchFamily="18" charset="0"/>
+                                          </a:rPr>
+                                          <m:t>0</m:t>
+                                        </m:r>
+                                      </m:e>
+                                    </m:mr>
+                                  </m:m>
+                                </m:e>
+                              </m:mr>
+                            </m:m>
+                          </m:e>
+                        </m:d>
+                      </m:oMath>
+                    </m:oMathPara>
+                  </a14:m>
+                  <a:endParaRPr lang="pt-BR" sz="2800" dirty="0"/>
+                </a:p>
+              </p:txBody>
+            </p:sp>
+          </mc:Choice>
+          <mc:Fallback>
+            <p:sp>
+              <p:nvSpPr>
+                <p:cNvPr id="12" name="CaixaDeTexto 4">
+                  <a:extLst>
+                    <a:ext uri="{FF2B5EF4-FFF2-40B4-BE49-F238E27FC236}">
+                      <a16:creationId xmlns:a16="http://schemas.microsoft.com/office/drawing/2014/main" id="{2C8DDC51-3A16-5E93-8268-EE62BDE151E0}"/>
+                    </a:ext>
+                  </a:extLst>
+                </p:cNvPr>
+                <p:cNvSpPr txBox="1">
+                  <a:spLocks noRot="1" noChangeAspect="1" noMove="1" noResize="1" noEditPoints="1" noAdjustHandles="1" noChangeArrowheads="1" noChangeShapeType="1" noTextEdit="1"/>
+                </p:cNvSpPr>
+                <p:nvPr/>
+              </p:nvSpPr>
+              <p:spPr>
+                <a:xfrm>
+                  <a:off x="8099425" y="2311739"/>
+                  <a:ext cx="508000" cy="2009268"/>
+                </a:xfrm>
+                <a:prstGeom prst="rect">
+                  <a:avLst/>
+                </a:prstGeom>
+                <a:blipFill>
+                  <a:blip r:embed="rId3"/>
+                  <a:stretch>
+                    <a:fillRect r="-3614"/>
+                  </a:stretch>
+                </a:blipFill>
+              </p:spPr>
+              <p:txBody>
+                <a:bodyPr/>
+                <a:lstStyle/>
+                <a:p>
+                  <a:r>
+                    <a:rPr lang="en-US">
+                      <a:noFill/>
+                    </a:rPr>
+                    <a:t> </a:t>
+                  </a:r>
+                </a:p>
+              </p:txBody>
+            </p:sp>
+          </mc:Fallback>
+        </mc:AlternateContent>
+        <p:sp>
+          <p:nvSpPr>
+            <p:cNvPr id="2" name="Rectangle 1">
+              <a:extLst>
+                <a:ext uri="{FF2B5EF4-FFF2-40B4-BE49-F238E27FC236}">
+                  <a16:creationId xmlns:a16="http://schemas.microsoft.com/office/drawing/2014/main" id="{EB611083-738F-80C1-2BA7-92EDB40EFB94}"/>
+                </a:ext>
+              </a:extLst>
+            </p:cNvPr>
+            <p:cNvSpPr/>
+            <p:nvPr/>
+          </p:nvSpPr>
+          <p:spPr>
+            <a:xfrm>
+              <a:off x="6848474" y="2994737"/>
+              <a:ext cx="956185" cy="643659"/>
+            </a:xfrm>
+            <a:prstGeom prst="rect">
+              <a:avLst/>
+            </a:prstGeom>
+            <a:noFill/>
+            <a:ln w="25400">
+              <a:solidFill>
+                <a:schemeClr val="tx1"/>
+              </a:solidFill>
+            </a:ln>
+          </p:spPr>
+          <p:style>
+            <a:lnRef idx="2">
+              <a:schemeClr val="accent1">
+                <a:shade val="15000"/>
+              </a:schemeClr>
+            </a:lnRef>
+            <a:fillRef idx="1">
+              <a:schemeClr val="accent1"/>
+            </a:fillRef>
+            <a:effectRef idx="0">
+              <a:schemeClr val="accent1"/>
+            </a:effectRef>
+            <a:fontRef idx="minor">
+              <a:schemeClr val="lt1"/>
+            </a:fontRef>
+          </p:style>
+          <p:txBody>
+            <a:bodyPr rtlCol="0" anchor="ctr"/>
+            <a:lstStyle/>
+            <a:p>
+              <a:pPr algn="ctr"/>
+              <a:r>
+                <a:rPr lang="pt-BR" dirty="0">
+                  <a:solidFill>
+                    <a:schemeClr val="tx1"/>
+                  </a:solidFill>
+                </a:rPr>
+                <a:t>Função de erro</a:t>
+              </a:r>
+              <a:endParaRPr lang="en-US" dirty="0">
+                <a:solidFill>
+                  <a:schemeClr val="tx1"/>
+                </a:solidFill>
+              </a:endParaRPr>
+            </a:p>
+          </p:txBody>
+        </p:sp>
+        <p:sp>
+          <p:nvSpPr>
+            <p:cNvPr id="3" name="CaixaDeTexto 10">
+              <a:extLst>
+                <a:ext uri="{FF2B5EF4-FFF2-40B4-BE49-F238E27FC236}">
+                  <a16:creationId xmlns:a16="http://schemas.microsoft.com/office/drawing/2014/main" id="{F0E4EAFE-2F57-D46C-B71A-FC2B97DD9DC3}"/>
+                </a:ext>
+              </a:extLst>
+            </p:cNvPr>
+            <p:cNvSpPr txBox="1"/>
+            <p:nvPr/>
+          </p:nvSpPr>
+          <p:spPr>
+            <a:xfrm>
+              <a:off x="7703840" y="1567467"/>
+              <a:ext cx="1617177" cy="738664"/>
+            </a:xfrm>
+            <a:prstGeom prst="rect">
+              <a:avLst/>
+            </a:prstGeom>
+            <a:noFill/>
+          </p:spPr>
+          <p:txBody>
+            <a:bodyPr wrap="square" rtlCol="0">
+              <a:spAutoFit/>
+            </a:bodyPr>
+            <a:lstStyle/>
+            <a:p>
+              <a:pPr algn="ctr"/>
+              <a:r>
+                <a:rPr lang="pt-BR" sz="1400" dirty="0"/>
+                <a:t>Vetor </a:t>
+              </a:r>
+              <a:r>
+                <a:rPr lang="pt-BR" sz="1400" i="1" dirty="0" err="1"/>
+                <a:t>one</a:t>
+              </a:r>
+              <a:r>
+                <a:rPr lang="pt-BR" sz="1400" i="1" dirty="0"/>
+                <a:t>-hot</a:t>
+              </a:r>
+              <a:r>
+                <a:rPr lang="pt-BR" sz="1400" dirty="0"/>
+                <a:t> com a probabilidade real de cada classe.</a:t>
+              </a:r>
+            </a:p>
+          </p:txBody>
+        </p:sp>
+        <p:cxnSp>
+          <p:nvCxnSpPr>
+            <p:cNvPr id="22" name="Straight Arrow Connector 21">
+              <a:extLst>
+                <a:ext uri="{FF2B5EF4-FFF2-40B4-BE49-F238E27FC236}">
+                  <a16:creationId xmlns:a16="http://schemas.microsoft.com/office/drawing/2014/main" id="{8F2714CA-3421-42C2-2575-C2D5DB1B504D}"/>
+                </a:ext>
+              </a:extLst>
+            </p:cNvPr>
+            <p:cNvCxnSpPr>
+              <a:cxnSpLocks/>
+              <a:stCxn id="5" idx="3"/>
+              <a:endCxn id="2" idx="1"/>
+            </p:cNvCxnSpPr>
+            <p:nvPr/>
+          </p:nvCxnSpPr>
+          <p:spPr>
+            <a:xfrm flipV="1">
+              <a:off x="6379369" y="3316567"/>
+              <a:ext cx="469105" cy="1"/>
+            </a:xfrm>
+            <a:prstGeom prst="straightConnector1">
+              <a:avLst/>
+            </a:prstGeom>
+            <a:ln w="15875">
+              <a:solidFill>
+                <a:schemeClr val="tx1"/>
+              </a:solidFill>
+              <a:tailEnd type="triangle"/>
+            </a:ln>
+          </p:spPr>
+          <p:style>
+            <a:lnRef idx="1">
+              <a:schemeClr val="accent1"/>
+            </a:lnRef>
+            <a:fillRef idx="0">
+              <a:schemeClr val="accent1"/>
+            </a:fillRef>
+            <a:effectRef idx="0">
+              <a:schemeClr val="accent1"/>
+            </a:effectRef>
+            <a:fontRef idx="minor">
+              <a:schemeClr val="tx1"/>
+            </a:fontRef>
+          </p:style>
+        </p:cxnSp>
+        <p:cxnSp>
+          <p:nvCxnSpPr>
+            <p:cNvPr id="29" name="Straight Arrow Connector 28">
+              <a:extLst>
+                <a:ext uri="{FF2B5EF4-FFF2-40B4-BE49-F238E27FC236}">
+                  <a16:creationId xmlns:a16="http://schemas.microsoft.com/office/drawing/2014/main" id="{4613A6D9-EABC-0CE5-50B4-C1C9AA047D5D}"/>
+                </a:ext>
+              </a:extLst>
+            </p:cNvPr>
+            <p:cNvCxnSpPr>
+              <a:cxnSpLocks/>
+              <a:endCxn id="2" idx="3"/>
+            </p:cNvCxnSpPr>
+            <p:nvPr/>
+          </p:nvCxnSpPr>
+          <p:spPr>
+            <a:xfrm flipH="1">
+              <a:off x="7804659" y="3316567"/>
+              <a:ext cx="396000" cy="0"/>
+            </a:xfrm>
+            <a:prstGeom prst="straightConnector1">
+              <a:avLst/>
+            </a:prstGeom>
+            <a:ln w="15875">
+              <a:solidFill>
+                <a:schemeClr val="tx1"/>
+              </a:solidFill>
+              <a:tailEnd type="triangle"/>
+            </a:ln>
+          </p:spPr>
+          <p:style>
+            <a:lnRef idx="1">
+              <a:schemeClr val="accent1"/>
+            </a:lnRef>
+            <a:fillRef idx="0">
+              <a:schemeClr val="accent1"/>
+            </a:fillRef>
+            <a:effectRef idx="0">
+              <a:schemeClr val="accent1"/>
+            </a:effectRef>
+            <a:fontRef idx="minor">
+              <a:schemeClr val="tx1"/>
+            </a:fontRef>
+          </p:style>
+        </p:cxnSp>
+      </p:grpSp>
+    </p:spTree>
+    <p:extLst>
+      <p:ext uri="{BB962C8B-B14F-4D97-AF65-F5344CB8AC3E}">
+        <p14:creationId xmlns:p14="http://schemas.microsoft.com/office/powerpoint/2010/main" val="872011154"/>
+      </p:ext>
+    </p:extLst>
+  </p:cSld>
+  <p:clrMapOvr>
+    <a:masterClrMapping/>
+  </p:clrMapOvr>
+</p:sld>
+</file>
+
 <file path=ppt/slides/slide3.xml><?xml version="1.0" encoding="utf-8"?>
 <p:sld xmlns:a="http://schemas.openxmlformats.org/drawingml/2006/main" xmlns:r="http://schemas.openxmlformats.org/officeDocument/2006/relationships" xmlns:p="http://schemas.openxmlformats.org/presentationml/2006/main">
   <p:cSld>
@@ -16047,8 +18827,8 @@
           </a:p>
         </p:txBody>
       </p:sp>
-      <mc:AlternateContent xmlns:mc="http://schemas.openxmlformats.org/markup-compatibility/2006" xmlns:a14="http://schemas.microsoft.com/office/drawing/2010/main">
-        <mc:Choice Requires="a14">
+      <mc:AlternateContent xmlns:mc="http://schemas.openxmlformats.org/markup-compatibility/2006">
+        <mc:Choice xmlns:a14="http://schemas.microsoft.com/office/drawing/2010/main" Requires="a14">
           <p:sp>
             <p:nvSpPr>
               <p:cNvPr id="3" name="Content Placeholder 2"/>
@@ -16129,13 +18909,25 @@
                 </a:r>
                 <a:r>
                   <a:rPr lang="pt-BR" dirty="0"/>
-                  <a:t>, que é uma generalização do regressor logístico.</a:t>
+                  <a:t>, que é uma </a:t>
+                </a:r>
+                <a:r>
+                  <a:rPr lang="pt-BR" b="1" dirty="0">
+                    <a:solidFill>
+                      <a:schemeClr val="accent2"/>
+                    </a:solidFill>
+                  </a:rPr>
+                  <a:t>generalização do regressor logístico</a:t>
+                </a:r>
+                <a:r>
+                  <a:rPr lang="pt-BR" dirty="0"/>
+                  <a:t>.</a:t>
                 </a:r>
               </a:p>
             </p:txBody>
           </p:sp>
         </mc:Choice>
-        <mc:Fallback xmlns="">
+        <mc:Fallback>
           <p:sp>
             <p:nvSpPr>
               <p:cNvPr id="3" name="Content Placeholder 2"/>
@@ -16374,8 +19166,8 @@
           </a:p>
         </p:txBody>
       </p:sp>
-      <mc:AlternateContent xmlns:mc="http://schemas.openxmlformats.org/markup-compatibility/2006" xmlns:a14="http://schemas.microsoft.com/office/drawing/2010/main">
-        <mc:Choice Requires="a14">
+      <mc:AlternateContent xmlns:mc="http://schemas.openxmlformats.org/markup-compatibility/2006">
+        <mc:Choice xmlns:a14="http://schemas.microsoft.com/office/drawing/2010/main" Requires="a14">
           <p:sp>
             <p:nvSpPr>
               <p:cNvPr id="3" name="Espaço Reservado para Conteúdo 2">
@@ -16470,7 +19262,55 @@
                       <a:srgbClr val="00B050"/>
                     </a:solidFill>
                   </a:rPr>
-                  <a:t> estima a probabilidade de um exemplo de entrada pertencer a cada uma das </a:t>
+                  <a:t> estima a </a:t>
+                </a:r>
+                <a:r>
+                  <a:rPr lang="pt-BR" b="1" dirty="0">
+                    <a:solidFill>
+                      <a:schemeClr val="accent2"/>
+                    </a:solidFill>
+                  </a:rPr>
+                  <a:t>probabilidade</a:t>
+                </a:r>
+                <a:r>
+                  <a:rPr lang="pt-BR" b="1" dirty="0">
+                    <a:solidFill>
+                      <a:srgbClr val="00B050"/>
+                    </a:solidFill>
+                  </a:rPr>
+                  <a:t> de um </a:t>
+                </a:r>
+                <a:r>
+                  <a:rPr lang="pt-BR" b="1" dirty="0">
+                    <a:solidFill>
+                      <a:schemeClr val="accent2"/>
+                    </a:solidFill>
+                  </a:rPr>
+                  <a:t>exemplo</a:t>
+                </a:r>
+                <a:r>
+                  <a:rPr lang="pt-BR" b="1" dirty="0">
+                    <a:solidFill>
+                      <a:srgbClr val="00B050"/>
+                    </a:solidFill>
+                  </a:rPr>
+                  <a:t> de entrada </a:t>
+                </a:r>
+                <a:r>
+                  <a:rPr lang="pt-BR" b="1" dirty="0">
+                    <a:solidFill>
+                      <a:schemeClr val="accent2"/>
+                    </a:solidFill>
+                  </a:rPr>
+                  <a:t>pertencer a cada</a:t>
+                </a:r>
+                <a:r>
+                  <a:rPr lang="pt-BR" b="1" dirty="0">
+                    <a:solidFill>
+                      <a:srgbClr val="00B050"/>
+                    </a:solidFill>
+                  </a:rPr>
+                  <a:t> uma das </a:t>
                 </a:r>
                 <a14:m>
                   <m:oMath xmlns:m="http://schemas.openxmlformats.org/officeDocument/2006/math">
@@ -16491,7 +19331,15 @@
                       <a:srgbClr val="00B050"/>
                     </a:solidFill>
                   </a:rPr>
-                  <a:t> possíveis classes</a:t>
+                  <a:t> possíveis </a:t>
+                </a:r>
+                <a:r>
+                  <a:rPr lang="pt-BR" b="1" dirty="0">
+                    <a:solidFill>
+                      <a:schemeClr val="accent2"/>
+                    </a:solidFill>
+                  </a:rPr>
+                  <a:t>classes</a:t>
                 </a:r>
                 <a:r>
                   <a:rPr lang="pt-BR" dirty="0"/>
@@ -16573,13 +19421,13 @@
             </p:txBody>
           </p:sp>
         </mc:Choice>
-        <mc:Fallback xmlns="">
+        <mc:Fallback>
           <p:sp>
             <p:nvSpPr>
               <p:cNvPr id="3" name="Espaço Reservado para Conteúdo 2">
                 <a:extLst>
                   <a:ext uri="{FF2B5EF4-FFF2-40B4-BE49-F238E27FC236}">
-                    <a16:creationId xmlns:a16="http://schemas.microsoft.com/office/drawing/2014/main" xmlns:a14="http://schemas.microsoft.com/office/drawing/2010/main" xmlns="" id="{B68F0D74-8673-A432-A1D7-BDEF7725851A}"/>
+                    <a16:creationId xmlns:a16="http://schemas.microsoft.com/office/drawing/2014/main" id="{B68F0D74-8673-A432-A1D7-BDEF7725851A}"/>
                   </a:ext>
                 </a:extLst>
               </p:cNvPr>
@@ -16595,7 +19443,7 @@
                 <a:off x="838199" y="1825624"/>
                 <a:ext cx="11353801" cy="5032375"/>
               </a:xfrm>
-              <a:blipFill rotWithShape="0">
+              <a:blipFill>
                 <a:blip r:embed="rId3"/>
                 <a:stretch>
                   <a:fillRect l="-913" t="-1937"/>
@@ -16607,7 +19455,7 @@
               <a:lstStyle/>
               <a:p>
                 <a:r>
-                  <a:rPr lang="pt-BR">
+                  <a:rPr lang="en-US">
                     <a:noFill/>
                   </a:rPr>
                   <a:t> </a:t>
@@ -16679,8 +19527,8 @@
           </a:p>
         </p:txBody>
       </p:sp>
-      <mc:AlternateContent xmlns:mc="http://schemas.openxmlformats.org/markup-compatibility/2006" xmlns:a14="http://schemas.microsoft.com/office/drawing/2010/main">
-        <mc:Choice Requires="a14">
+      <mc:AlternateContent xmlns:mc="http://schemas.openxmlformats.org/markup-compatibility/2006">
+        <mc:Choice xmlns:a14="http://schemas.microsoft.com/office/drawing/2010/main" Requires="a14">
           <p:sp>
             <p:nvSpPr>
               <p:cNvPr id="3" name="Espaço Reservado para Conteúdo 2">
@@ -16709,7 +19557,19 @@
               <a:p>
                 <a:r>
                   <a:rPr lang="pt-BR" dirty="0"/>
-                  <a:t>Ele prediz </a:t>
+                  <a:t>Ele </a:t>
+                </a:r>
+                <a:r>
+                  <a:rPr lang="pt-BR" b="1" dirty="0">
+                    <a:solidFill>
+                      <a:schemeClr val="accent2"/>
+                    </a:solidFill>
+                  </a:rPr>
+                  <a:t>prediz</a:t>
+                </a:r>
+                <a:r>
+                  <a:rPr lang="pt-BR" dirty="0"/>
+                  <a:t> </a:t>
                 </a:r>
                 <a:r>
                   <a:rPr lang="pt-BR" b="1" dirty="0"/>
@@ -16733,7 +19593,15 @@
                 </a:r>
                 <a:r>
                   <a:rPr lang="pt-BR" b="1" dirty="0"/>
-                  <a:t>classes mutuamente exclusivas </a:t>
+                  <a:t>classes </a:t>
+                </a:r>
+                <a:r>
+                  <a:rPr lang="pt-BR" b="1" dirty="0">
+                    <a:solidFill>
+                      <a:schemeClr val="accent2"/>
+                    </a:solidFill>
+                  </a:rPr>
+                  <a:t>mutuamente exclusivas </a:t>
                 </a:r>
                 <a:r>
                   <a:rPr lang="pt-BR" dirty="0"/>
@@ -16993,7 +19861,7 @@
                 </a:pPr>
                 <a:r>
                   <a:rPr lang="pt-BR" dirty="0"/>
-                  <a:t>Por exemplo, se temos 3 classes, teremos 3 funções discriminantes, </a:t>
+                  <a:t>Por exemplo, se temos 4 classes, teremos 4 funções discriminantes, </a:t>
                 </a:r>
                 <a14:m>
                   <m:oMath xmlns:m="http://schemas.openxmlformats.org/officeDocument/2006/math">
@@ -17068,13 +19936,13 @@
             </p:txBody>
           </p:sp>
         </mc:Choice>
-        <mc:Fallback xmlns="">
+        <mc:Fallback>
           <p:sp>
             <p:nvSpPr>
               <p:cNvPr id="3" name="Espaço Reservado para Conteúdo 2">
                 <a:extLst>
                   <a:ext uri="{FF2B5EF4-FFF2-40B4-BE49-F238E27FC236}">
-                    <a16:creationId xmlns="" xmlns:a16="http://schemas.microsoft.com/office/drawing/2014/main" xmlns:a14="http://schemas.microsoft.com/office/drawing/2010/main" id="{21416F72-28FB-E27C-D129-16A944A87C67}"/>
+                    <a16:creationId xmlns:a16="http://schemas.microsoft.com/office/drawing/2014/main" id="{21416F72-28FB-E27C-D129-16A944A87C67}"/>
                   </a:ext>
                 </a:extLst>
               </p:cNvPr>
@@ -17090,7 +19958,7 @@
                 <a:off x="838199" y="1825624"/>
                 <a:ext cx="11353801" cy="5032375"/>
               </a:xfrm>
-              <a:blipFill rotWithShape="0">
+              <a:blipFill>
                 <a:blip r:embed="rId3"/>
                 <a:stretch>
                   <a:fillRect l="-913" t="-1937"/>
@@ -17102,7 +19970,7 @@
               <a:lstStyle/>
               <a:p>
                 <a:r>
-                  <a:rPr lang="pt-BR">
+                  <a:rPr lang="en-US">
                     <a:noFill/>
                   </a:rPr>
                   <a:t> </a:t>
@@ -17174,8 +20042,8 @@
           </a:p>
         </p:txBody>
       </p:sp>
-      <mc:AlternateContent xmlns:mc="http://schemas.openxmlformats.org/markup-compatibility/2006" xmlns:a14="http://schemas.microsoft.com/office/drawing/2010/main">
-        <mc:Choice Requires="a14">
+      <mc:AlternateContent xmlns:mc="http://schemas.openxmlformats.org/markup-compatibility/2006">
+        <mc:Choice xmlns:a14="http://schemas.microsoft.com/office/drawing/2010/main" Requires="a14">
           <p:sp>
             <p:nvSpPr>
               <p:cNvPr id="3" name="Espaço Reservado para Conteúdo 2">
@@ -17195,7 +20063,7 @@
             <p:spPr>
               <a:xfrm>
                 <a:off x="838200" y="1825624"/>
-                <a:ext cx="11080174" cy="5032375"/>
+                <a:ext cx="11239500" cy="5032375"/>
               </a:xfrm>
             </p:spPr>
             <p:txBody>
@@ -18349,7 +21217,7 @@
                 </a:r>
                 <a:r>
                   <a:rPr lang="pt-BR" dirty="0"/>
-                  <a:t>, ela é usada na </a:t>
+                  <a:t>, essa função de ativação é usada na </a:t>
                 </a:r>
                 <a:r>
                   <a:rPr lang="pt-BR" b="1" dirty="0">
@@ -18402,13 +21270,13 @@
             </p:txBody>
           </p:sp>
         </mc:Choice>
-        <mc:Fallback xmlns="">
+        <mc:Fallback>
           <p:sp>
             <p:nvSpPr>
               <p:cNvPr id="3" name="Espaço Reservado para Conteúdo 2">
                 <a:extLst>
                   <a:ext uri="{FF2B5EF4-FFF2-40B4-BE49-F238E27FC236}">
-                    <a16:creationId xmlns="" xmlns:a16="http://schemas.microsoft.com/office/drawing/2014/main" xmlns:a14="http://schemas.microsoft.com/office/drawing/2010/main" id="{D79BB7DC-99E7-8958-EC77-566B7E3C2BBB}"/>
+                    <a16:creationId xmlns:a16="http://schemas.microsoft.com/office/drawing/2014/main" id="{D79BB7DC-99E7-8958-EC77-566B7E3C2BBB}"/>
                   </a:ext>
                 </a:extLst>
               </p:cNvPr>
@@ -18422,12 +21290,12 @@
             <p:spPr>
               <a:xfrm>
                 <a:off x="838200" y="1825624"/>
-                <a:ext cx="11080174" cy="5032375"/>
+                <a:ext cx="11239500" cy="5032375"/>
               </a:xfrm>
-              <a:blipFill rotWithShape="0">
+              <a:blipFill>
                 <a:blip r:embed="rId3"/>
                 <a:stretch>
-                  <a:fillRect l="-1156" t="-1332"/>
+                  <a:fillRect l="-1139" t="-1332" r="-1465"/>
                 </a:stretch>
               </a:blipFill>
             </p:spPr>
@@ -18436,7 +21304,7 @@
               <a:lstStyle/>
               <a:p>
                 <a:r>
-                  <a:rPr lang="pt-BR">
+                  <a:rPr lang="en-US">
                     <a:noFill/>
                   </a:rPr>
                   <a:t> </a:t>
@@ -18508,8 +21376,8 @@
           </a:p>
         </p:txBody>
       </p:sp>
-      <mc:AlternateContent xmlns:mc="http://schemas.openxmlformats.org/markup-compatibility/2006" xmlns:a14="http://schemas.microsoft.com/office/drawing/2010/main">
-        <mc:Choice Requires="a14">
+      <mc:AlternateContent xmlns:mc="http://schemas.openxmlformats.org/markup-compatibility/2006">
+        <mc:Choice xmlns:a14="http://schemas.microsoft.com/office/drawing/2010/main" Requires="a14">
           <p:sp>
             <p:nvSpPr>
               <p:cNvPr id="3" name="Espaço Reservado para Conteúdo 2">
@@ -18540,7 +21408,19 @@
               <a:p>
                 <a:r>
                   <a:rPr lang="pt-BR" dirty="0"/>
-                  <a:t>É uma generalização da função sigmoide.</a:t>
+                  <a:t>É uma </a:t>
+                </a:r>
+                <a:r>
+                  <a:rPr lang="pt-BR" b="1" dirty="0">
+                    <a:solidFill>
+                      <a:schemeClr val="accent2"/>
+                    </a:solidFill>
+                  </a:rPr>
+                  <a:t>generalização</a:t>
+                </a:r>
+                <a:r>
+                  <a:rPr lang="pt-BR" dirty="0"/>
+                  <a:t> da função sigmoide.</a:t>
                 </a:r>
               </a:p>
               <a:p>
@@ -19086,7 +21966,15 @@
                       <a:srgbClr val="00B050"/>
                     </a:solidFill>
                   </a:rPr>
-                  <a:t> funções discriminantes em uma distribuição de probabilidades</a:t>
+                  <a:t> funções discriminantes em uma </a:t>
+                </a:r>
+                <a:r>
+                  <a:rPr lang="pt-BR" b="1" dirty="0">
+                    <a:solidFill>
+                      <a:schemeClr val="accent2"/>
+                    </a:solidFill>
+                  </a:rPr>
+                  <a:t>distribuição de probabilidades</a:t>
                 </a:r>
                 <a:r>
                   <a:rPr lang="pt-BR" dirty="0"/>
@@ -19327,13 +22215,13 @@
             </p:txBody>
           </p:sp>
         </mc:Choice>
-        <mc:Fallback xmlns="">
+        <mc:Fallback>
           <p:sp>
             <p:nvSpPr>
               <p:cNvPr id="3" name="Espaço Reservado para Conteúdo 2">
                 <a:extLst>
                   <a:ext uri="{FF2B5EF4-FFF2-40B4-BE49-F238E27FC236}">
-                    <a16:creationId xmlns="" xmlns:a16="http://schemas.microsoft.com/office/drawing/2014/main" xmlns:a14="http://schemas.microsoft.com/office/drawing/2010/main" id="{BCAAD57B-65A0-9DAD-79FC-2AE2692EB84B}"/>
+                    <a16:creationId xmlns:a16="http://schemas.microsoft.com/office/drawing/2014/main" id="{BCAAD57B-65A0-9DAD-79FC-2AE2692EB84B}"/>
                   </a:ext>
                 </a:extLst>
               </p:cNvPr>
@@ -19349,7 +22237,7 @@
                 <a:off x="838200" y="1825624"/>
                 <a:ext cx="11353800" cy="5032375"/>
               </a:xfrm>
-              <a:blipFill rotWithShape="0">
+              <a:blipFill>
                 <a:blip r:embed="rId3"/>
                 <a:stretch>
                   <a:fillRect l="-967" t="-1937" r="-967"/>
@@ -19361,7 +22249,7 @@
               <a:lstStyle/>
               <a:p>
                 <a:r>
-                  <a:rPr lang="pt-BR">
+                  <a:rPr lang="en-US">
                     <a:noFill/>
                   </a:rPr>
                   <a:t> </a:t>
@@ -19486,8 +22374,8 @@
           </a:p>
         </p:txBody>
       </p:sp>
-      <mc:AlternateContent xmlns:mc="http://schemas.openxmlformats.org/markup-compatibility/2006" xmlns:a14="http://schemas.microsoft.com/office/drawing/2010/main">
-        <mc:Choice Requires="a14">
+      <mc:AlternateContent xmlns:mc="http://schemas.openxmlformats.org/markup-compatibility/2006">
+        <mc:Choice xmlns:a14="http://schemas.microsoft.com/office/drawing/2010/main" Requires="a14">
           <p:sp>
             <p:nvSpPr>
               <p:cNvPr id="3" name="Espaço Reservado para Conteúdo 2">
@@ -19506,8 +22394,8 @@
             </p:nvSpPr>
             <p:spPr>
               <a:xfrm>
-                <a:off x="6646606" y="1825624"/>
-                <a:ext cx="5545394" cy="5032375"/>
+                <a:off x="6448628" y="1825624"/>
+                <a:ext cx="5743372" cy="5032375"/>
               </a:xfrm>
             </p:spPr>
             <p:txBody>
@@ -19654,19 +22542,37 @@
                     </a:solidFill>
                     <a:effectLst/>
                   </a:rPr>
-                  <a:t>normaliza essas exponenciais dividindo-as pela soma de todas as exponenciais, gerando uma distribuição de probabilidades das classes.</a:t>
+                  <a:t>normaliza essas exponenciais dividindo-as pela soma de todas as exponenciais, gerando uma </a:t>
+                </a:r>
+                <a:r>
+                  <a:rPr lang="pt-BR" b="1" i="0" dirty="0">
+                    <a:solidFill>
+                      <a:schemeClr val="tx1"/>
+                    </a:solidFill>
+                    <a:effectLst/>
+                  </a:rPr>
+                  <a:t>distribuição de probabilidades das classes</a:t>
+                </a:r>
+                <a:r>
+                  <a:rPr lang="pt-BR" b="0" i="0" dirty="0">
+                    <a:solidFill>
+                      <a:schemeClr val="tx1"/>
+                    </a:solidFill>
+                    <a:effectLst/>
+                  </a:rPr>
+                  <a:t>.</a:t>
                 </a:r>
               </a:p>
             </p:txBody>
           </p:sp>
         </mc:Choice>
-        <mc:Fallback xmlns="">
+        <mc:Fallback>
           <p:sp>
             <p:nvSpPr>
               <p:cNvPr id="3" name="Espaço Reservado para Conteúdo 2">
                 <a:extLst>
                   <a:ext uri="{FF2B5EF4-FFF2-40B4-BE49-F238E27FC236}">
-                    <a16:creationId xmlns="" xmlns:a16="http://schemas.microsoft.com/office/drawing/2014/main" xmlns:a14="http://schemas.microsoft.com/office/drawing/2010/main" id="{32DF54A1-52F5-C48C-7CD4-D6E451DF19D8}"/>
+                    <a16:creationId xmlns:a16="http://schemas.microsoft.com/office/drawing/2014/main" id="{32DF54A1-52F5-C48C-7CD4-D6E451DF19D8}"/>
                   </a:ext>
                 </a:extLst>
               </p:cNvPr>
@@ -19679,13 +22585,13 @@
             </p:nvSpPr>
             <p:spPr>
               <a:xfrm>
-                <a:off x="6646606" y="1825624"/>
-                <a:ext cx="5545394" cy="5032375"/>
+                <a:off x="6448628" y="1825624"/>
+                <a:ext cx="5743372" cy="5032375"/>
               </a:xfrm>
-              <a:blipFill rotWithShape="0">
+              <a:blipFill>
                 <a:blip r:embed="rId2"/>
                 <a:stretch>
-                  <a:fillRect l="-1978" t="-1937" r="-1868"/>
+                  <a:fillRect l="-1911" t="-1937" r="-1062"/>
                 </a:stretch>
               </a:blipFill>
             </p:spPr>
@@ -19694,7 +22600,7 @@
               <a:lstStyle/>
               <a:p>
                 <a:r>
-                  <a:rPr lang="pt-BR">
+                  <a:rPr lang="en-US">
                     <a:noFill/>
                   </a:rPr>
                   <a:t> </a:t>
@@ -19704,42 +22610,6 @@
           </p:sp>
         </mc:Fallback>
       </mc:AlternateContent>
-      <p:pic>
-        <p:nvPicPr>
-          <p:cNvPr id="6" name="Imagem 5">
-            <a:extLst>
-              <a:ext uri="{FF2B5EF4-FFF2-40B4-BE49-F238E27FC236}">
-                <a16:creationId xmlns:a16="http://schemas.microsoft.com/office/drawing/2014/main" id="{ED5D1F5D-F195-0452-50D4-07E9F2B1C49D}"/>
-              </a:ext>
-            </a:extLst>
-          </p:cNvPr>
-          <p:cNvPicPr>
-            <a:picLocks noChangeAspect="1"/>
-          </p:cNvPicPr>
-          <p:nvPr/>
-        </p:nvPicPr>
-        <p:blipFill>
-          <a:blip r:embed="rId3" cstate="print">
-            <a:extLst>
-              <a:ext uri="{28A0092B-C50C-407E-A947-70E740481C1C}">
-                <a14:useLocalDpi xmlns:a14="http://schemas.microsoft.com/office/drawing/2010/main" val="0"/>
-              </a:ext>
-            </a:extLst>
-          </a:blip>
-          <a:stretch>
-            <a:fillRect/>
-          </a:stretch>
-        </p:blipFill>
-        <p:spPr>
-          <a:xfrm>
-            <a:off x="275559" y="2536723"/>
-            <a:ext cx="6066351" cy="2487561"/>
-          </a:xfrm>
-          <a:prstGeom prst="rect">
-            <a:avLst/>
-          </a:prstGeom>
-        </p:spPr>
-      </p:pic>
       <p:sp>
         <p:nvSpPr>
           <p:cNvPr id="8" name="CaixaDeTexto 7">
@@ -19889,6 +22759,42 @@
           </p:sp>
         </mc:Fallback>
       </mc:AlternateContent>
+      <p:pic>
+        <p:nvPicPr>
+          <p:cNvPr id="10" name="Picture 9">
+            <a:extLst>
+              <a:ext uri="{FF2B5EF4-FFF2-40B4-BE49-F238E27FC236}">
+                <a16:creationId xmlns:a16="http://schemas.microsoft.com/office/drawing/2014/main" id="{CBF719E4-6CBA-943F-B474-06306C5F6781}"/>
+              </a:ext>
+            </a:extLst>
+          </p:cNvPr>
+          <p:cNvPicPr>
+            <a:picLocks noChangeAspect="1"/>
+          </p:cNvPicPr>
+          <p:nvPr/>
+        </p:nvPicPr>
+        <p:blipFill>
+          <a:blip r:embed="rId5">
+            <a:extLst>
+              <a:ext uri="{28A0092B-C50C-407E-A947-70E740481C1C}">
+                <a14:useLocalDpi xmlns:a14="http://schemas.microsoft.com/office/drawing/2010/main" val="0"/>
+              </a:ext>
+            </a:extLst>
+          </a:blip>
+          <a:stretch>
+            <a:fillRect/>
+          </a:stretch>
+        </p:blipFill>
+        <p:spPr>
+          <a:xfrm>
+            <a:off x="333172" y="2593657"/>
+            <a:ext cx="6115456" cy="2468904"/>
+          </a:xfrm>
+          <a:prstGeom prst="rect">
+            <a:avLst/>
+          </a:prstGeom>
+        </p:spPr>
+      </p:pic>
     </p:spTree>
     <p:extLst>
       <p:ext uri="{BB962C8B-B14F-4D97-AF65-F5344CB8AC3E}">
@@ -20474,42 +23380,6 @@
           </p:sp>
         </mc:Fallback>
       </mc:AlternateContent>
-      <p:pic>
-        <p:nvPicPr>
-          <p:cNvPr id="6" name="Imagem 5">
-            <a:extLst>
-              <a:ext uri="{FF2B5EF4-FFF2-40B4-BE49-F238E27FC236}">
-                <a16:creationId xmlns:a16="http://schemas.microsoft.com/office/drawing/2014/main" id="{ED5D1F5D-F195-0452-50D4-07E9F2B1C49D}"/>
-              </a:ext>
-            </a:extLst>
-          </p:cNvPr>
-          <p:cNvPicPr>
-            <a:picLocks noChangeAspect="1"/>
-          </p:cNvPicPr>
-          <p:nvPr/>
-        </p:nvPicPr>
-        <p:blipFill>
-          <a:blip r:embed="rId4" cstate="print">
-            <a:extLst>
-              <a:ext uri="{28A0092B-C50C-407E-A947-70E740481C1C}">
-                <a14:useLocalDpi xmlns:a14="http://schemas.microsoft.com/office/drawing/2010/main" val="0"/>
-              </a:ext>
-            </a:extLst>
-          </a:blip>
-          <a:stretch>
-            <a:fillRect/>
-          </a:stretch>
-        </p:blipFill>
-        <p:spPr>
-          <a:xfrm>
-            <a:off x="2778470" y="3952568"/>
-            <a:ext cx="6635059" cy="2720765"/>
-          </a:xfrm>
-          <a:prstGeom prst="rect">
-            <a:avLst/>
-          </a:prstGeom>
-        </p:spPr>
-      </p:pic>
       <mc:AlternateContent xmlns:mc="http://schemas.openxmlformats.org/markup-compatibility/2006" xmlns:a14="http://schemas.microsoft.com/office/drawing/2010/main">
         <mc:Choice Requires="a14">
           <p:sp>
@@ -20609,6 +23479,42 @@
           </p:sp>
         </mc:Fallback>
       </mc:AlternateContent>
+      <p:pic>
+        <p:nvPicPr>
+          <p:cNvPr id="5" name="Picture 4">
+            <a:extLst>
+              <a:ext uri="{FF2B5EF4-FFF2-40B4-BE49-F238E27FC236}">
+                <a16:creationId xmlns:a16="http://schemas.microsoft.com/office/drawing/2014/main" id="{5488725B-FC33-B5BC-707D-29521FAA0FD4}"/>
+              </a:ext>
+            </a:extLst>
+          </p:cNvPr>
+          <p:cNvPicPr>
+            <a:picLocks noChangeAspect="1"/>
+          </p:cNvPicPr>
+          <p:nvPr/>
+        </p:nvPicPr>
+        <p:blipFill>
+          <a:blip r:embed="rId6">
+            <a:extLst>
+              <a:ext uri="{28A0092B-C50C-407E-A947-70E740481C1C}">
+                <a14:useLocalDpi xmlns:a14="http://schemas.microsoft.com/office/drawing/2010/main" val="0"/>
+              </a:ext>
+            </a:extLst>
+          </a:blip>
+          <a:stretch>
+            <a:fillRect/>
+          </a:stretch>
+        </p:blipFill>
+        <p:spPr>
+          <a:xfrm>
+            <a:off x="3038272" y="3889057"/>
+            <a:ext cx="6115456" cy="2468904"/>
+          </a:xfrm>
+          <a:prstGeom prst="rect">
+            <a:avLst/>
+          </a:prstGeom>
+        </p:spPr>
+      </p:pic>
     </p:spTree>
     <p:extLst>
       <p:ext uri="{BB962C8B-B14F-4D97-AF65-F5344CB8AC3E}">
